--- a/OS_Lab_Project_Slides.pptx
+++ b/OS_Lab_Project_Slides.pptx
@@ -5,7 +5,7 @@
     <p:sldMasterId id="2147483648" r:id="rId1"/>
   </p:sldMasterIdLst>
   <p:notesMasterIdLst>
-    <p:notesMasterId r:id="rId11"/>
+    <p:notesMasterId r:id="rId17"/>
   </p:notesMasterIdLst>
   <p:sldIdLst>
     <p:sldId id="256" r:id="rId2"/>
@@ -17,6 +17,12 @@
     <p:sldId id="264" r:id="rId8"/>
     <p:sldId id="261" r:id="rId9"/>
     <p:sldId id="262" r:id="rId10"/>
+    <p:sldId id="270" r:id="rId11"/>
+    <p:sldId id="271" r:id="rId12"/>
+    <p:sldId id="267" r:id="rId13"/>
+    <p:sldId id="268" r:id="rId14"/>
+    <p:sldId id="269" r:id="rId15"/>
+    <p:sldId id="272" r:id="rId16"/>
   </p:sldIdLst>
   <p:sldSz cx="9144000" cy="5143500" type="screen16x9"/>
   <p:notesSz cx="5143500" cy="9144000"/>
@@ -118,6 +124,3356 @@
     </p:ext>
   </p:extLst>
 </p:presentation>
+</file>
+
+<file path=ppt/charts/chart1.xml><?xml version="1.0" encoding="utf-8"?>
+<c:chartSpace xmlns:c="http://schemas.openxmlformats.org/drawingml/2006/chart" xmlns:a="http://schemas.openxmlformats.org/drawingml/2006/main" xmlns:r="http://schemas.openxmlformats.org/officeDocument/2006/relationships" xmlns:c16r2="http://schemas.microsoft.com/office/drawing/2015/06/chart">
+  <c:date1904 val="0"/>
+  <c:lang val="en-US"/>
+  <c:roundedCorners val="0"/>
+  <mc:AlternateContent xmlns:mc="http://schemas.openxmlformats.org/markup-compatibility/2006">
+    <mc:Choice xmlns:c14="http://schemas.microsoft.com/office/drawing/2007/8/2/chart" Requires="c14">
+      <c14:style val="102"/>
+    </mc:Choice>
+    <mc:Fallback>
+      <c:style val="2"/>
+    </mc:Fallback>
+  </mc:AlternateContent>
+  <c:chart>
+    <c:title>
+      <c:tx>
+        <c:rich>
+          <a:bodyPr rot="0" spcFirstLastPara="1" vertOverflow="ellipsis" vert="horz" wrap="square" anchor="ctr" anchorCtr="1"/>
+          <a:lstStyle/>
+          <a:p>
+            <a:pPr>
+              <a:defRPr sz="1400" b="0" i="0" u="none" strike="noStrike" kern="1200" spc="0" baseline="0">
+                <a:solidFill>
+                  <a:schemeClr val="dk1"/>
+                </a:solidFill>
+                <a:latin typeface="+mn-lt"/>
+                <a:ea typeface="+mn-ea"/>
+                <a:cs typeface="+mn-cs"/>
+              </a:defRPr>
+            </a:pPr>
+            <a:r>
+              <a:rPr lang="en-US"/>
+              <a:t>Fixed n_proc</a:t>
+            </a:r>
+          </a:p>
+        </c:rich>
+      </c:tx>
+      <c:overlay val="0"/>
+      <c:spPr>
+        <a:noFill/>
+        <a:ln>
+          <a:noFill/>
+        </a:ln>
+        <a:effectLst/>
+      </c:spPr>
+      <c:txPr>
+        <a:bodyPr rot="0" spcFirstLastPara="1" vertOverflow="ellipsis" vert="horz" wrap="square" anchor="ctr" anchorCtr="1"/>
+        <a:lstStyle/>
+        <a:p>
+          <a:pPr>
+            <a:defRPr sz="1400" b="0" i="0" u="none" strike="noStrike" kern="1200" spc="0" baseline="0">
+              <a:solidFill>
+                <a:schemeClr val="dk1"/>
+              </a:solidFill>
+              <a:latin typeface="+mn-lt"/>
+              <a:ea typeface="+mn-ea"/>
+              <a:cs typeface="+mn-cs"/>
+            </a:defRPr>
+          </a:pPr>
+          <a:endParaRPr lang="en-US"/>
+        </a:p>
+      </c:txPr>
+    </c:title>
+    <c:autoTitleDeleted val="0"/>
+    <c:plotArea>
+      <c:layout/>
+      <c:lineChart>
+        <c:grouping val="standard"/>
+        <c:varyColors val="0"/>
+        <c:ser>
+          <c:idx val="0"/>
+          <c:order val="0"/>
+          <c:tx>
+            <c:strRef>
+              <c:f>'Exp 1'!$B$1</c:f>
+              <c:strCache>
+                <c:ptCount val="1"/>
+                <c:pt idx="0">
+                  <c:v>Sequential</c:v>
+                </c:pt>
+              </c:strCache>
+            </c:strRef>
+          </c:tx>
+          <c:spPr>
+            <a:ln w="28575" cap="rnd">
+              <a:solidFill>
+                <a:schemeClr val="accent1"/>
+              </a:solidFill>
+              <a:round/>
+            </a:ln>
+            <a:effectLst/>
+          </c:spPr>
+          <c:marker>
+            <c:symbol val="none"/>
+          </c:marker>
+          <c:cat>
+            <c:strRef>
+              <c:f>'Exp 1'!$A$1:$A$101</c:f>
+              <c:strCache>
+                <c:ptCount val="101"/>
+                <c:pt idx="0">
+                  <c:v>N</c:v>
+                </c:pt>
+                <c:pt idx="1">
+                  <c:v>20000</c:v>
+                </c:pt>
+                <c:pt idx="2">
+                  <c:v>40000</c:v>
+                </c:pt>
+                <c:pt idx="3">
+                  <c:v>60000</c:v>
+                </c:pt>
+                <c:pt idx="4">
+                  <c:v>80000</c:v>
+                </c:pt>
+                <c:pt idx="5">
+                  <c:v>100000</c:v>
+                </c:pt>
+                <c:pt idx="6">
+                  <c:v>120000</c:v>
+                </c:pt>
+                <c:pt idx="7">
+                  <c:v>140000</c:v>
+                </c:pt>
+                <c:pt idx="8">
+                  <c:v>160000</c:v>
+                </c:pt>
+                <c:pt idx="9">
+                  <c:v>180000</c:v>
+                </c:pt>
+                <c:pt idx="10">
+                  <c:v>200000</c:v>
+                </c:pt>
+                <c:pt idx="11">
+                  <c:v>220000</c:v>
+                </c:pt>
+                <c:pt idx="12">
+                  <c:v>240000</c:v>
+                </c:pt>
+                <c:pt idx="13">
+                  <c:v>260000</c:v>
+                </c:pt>
+                <c:pt idx="14">
+                  <c:v>280000</c:v>
+                </c:pt>
+                <c:pt idx="15">
+                  <c:v>300000</c:v>
+                </c:pt>
+                <c:pt idx="16">
+                  <c:v>320000</c:v>
+                </c:pt>
+                <c:pt idx="17">
+                  <c:v>340000</c:v>
+                </c:pt>
+                <c:pt idx="18">
+                  <c:v>360000</c:v>
+                </c:pt>
+                <c:pt idx="19">
+                  <c:v>380000</c:v>
+                </c:pt>
+                <c:pt idx="20">
+                  <c:v>400000</c:v>
+                </c:pt>
+                <c:pt idx="21">
+                  <c:v>420000</c:v>
+                </c:pt>
+                <c:pt idx="22">
+                  <c:v>440000</c:v>
+                </c:pt>
+                <c:pt idx="23">
+                  <c:v>460000</c:v>
+                </c:pt>
+                <c:pt idx="24">
+                  <c:v>480000</c:v>
+                </c:pt>
+                <c:pt idx="25">
+                  <c:v>500000</c:v>
+                </c:pt>
+                <c:pt idx="26">
+                  <c:v>520000</c:v>
+                </c:pt>
+                <c:pt idx="27">
+                  <c:v>540000</c:v>
+                </c:pt>
+                <c:pt idx="28">
+                  <c:v>560000</c:v>
+                </c:pt>
+                <c:pt idx="29">
+                  <c:v>580000</c:v>
+                </c:pt>
+                <c:pt idx="30">
+                  <c:v>600000</c:v>
+                </c:pt>
+                <c:pt idx="31">
+                  <c:v>620000</c:v>
+                </c:pt>
+                <c:pt idx="32">
+                  <c:v>640000</c:v>
+                </c:pt>
+                <c:pt idx="33">
+                  <c:v>660000</c:v>
+                </c:pt>
+                <c:pt idx="34">
+                  <c:v>680000</c:v>
+                </c:pt>
+                <c:pt idx="35">
+                  <c:v>700000</c:v>
+                </c:pt>
+                <c:pt idx="36">
+                  <c:v>720000</c:v>
+                </c:pt>
+                <c:pt idx="37">
+                  <c:v>740000</c:v>
+                </c:pt>
+                <c:pt idx="38">
+                  <c:v>760000</c:v>
+                </c:pt>
+                <c:pt idx="39">
+                  <c:v>780000</c:v>
+                </c:pt>
+                <c:pt idx="40">
+                  <c:v>800000</c:v>
+                </c:pt>
+                <c:pt idx="41">
+                  <c:v>820000</c:v>
+                </c:pt>
+                <c:pt idx="42">
+                  <c:v>840000</c:v>
+                </c:pt>
+                <c:pt idx="43">
+                  <c:v>860000</c:v>
+                </c:pt>
+                <c:pt idx="44">
+                  <c:v>880000</c:v>
+                </c:pt>
+                <c:pt idx="45">
+                  <c:v>900000</c:v>
+                </c:pt>
+                <c:pt idx="46">
+                  <c:v>920000</c:v>
+                </c:pt>
+                <c:pt idx="47">
+                  <c:v>940000</c:v>
+                </c:pt>
+                <c:pt idx="48">
+                  <c:v>960000</c:v>
+                </c:pt>
+                <c:pt idx="49">
+                  <c:v>980000</c:v>
+                </c:pt>
+                <c:pt idx="50">
+                  <c:v>1000000</c:v>
+                </c:pt>
+                <c:pt idx="51">
+                  <c:v>1020000</c:v>
+                </c:pt>
+                <c:pt idx="52">
+                  <c:v>1040000</c:v>
+                </c:pt>
+                <c:pt idx="53">
+                  <c:v>1060000</c:v>
+                </c:pt>
+                <c:pt idx="54">
+                  <c:v>1080000</c:v>
+                </c:pt>
+                <c:pt idx="55">
+                  <c:v>1100000</c:v>
+                </c:pt>
+                <c:pt idx="56">
+                  <c:v>1120000</c:v>
+                </c:pt>
+                <c:pt idx="57">
+                  <c:v>1140000</c:v>
+                </c:pt>
+                <c:pt idx="58">
+                  <c:v>1160000</c:v>
+                </c:pt>
+                <c:pt idx="59">
+                  <c:v>1180000</c:v>
+                </c:pt>
+                <c:pt idx="60">
+                  <c:v>1200000</c:v>
+                </c:pt>
+                <c:pt idx="61">
+                  <c:v>1220000</c:v>
+                </c:pt>
+                <c:pt idx="62">
+                  <c:v>1240000</c:v>
+                </c:pt>
+                <c:pt idx="63">
+                  <c:v>1260000</c:v>
+                </c:pt>
+                <c:pt idx="64">
+                  <c:v>1280000</c:v>
+                </c:pt>
+                <c:pt idx="65">
+                  <c:v>1300000</c:v>
+                </c:pt>
+                <c:pt idx="66">
+                  <c:v>1320000</c:v>
+                </c:pt>
+                <c:pt idx="67">
+                  <c:v>1340000</c:v>
+                </c:pt>
+                <c:pt idx="68">
+                  <c:v>1360000</c:v>
+                </c:pt>
+                <c:pt idx="69">
+                  <c:v>1380000</c:v>
+                </c:pt>
+                <c:pt idx="70">
+                  <c:v>1400000</c:v>
+                </c:pt>
+                <c:pt idx="71">
+                  <c:v>1420000</c:v>
+                </c:pt>
+                <c:pt idx="72">
+                  <c:v>1440000</c:v>
+                </c:pt>
+                <c:pt idx="73">
+                  <c:v>1460000</c:v>
+                </c:pt>
+                <c:pt idx="74">
+                  <c:v>1480000</c:v>
+                </c:pt>
+                <c:pt idx="75">
+                  <c:v>1500000</c:v>
+                </c:pt>
+                <c:pt idx="76">
+                  <c:v>1520000</c:v>
+                </c:pt>
+                <c:pt idx="77">
+                  <c:v>1540000</c:v>
+                </c:pt>
+                <c:pt idx="78">
+                  <c:v>1560000</c:v>
+                </c:pt>
+                <c:pt idx="79">
+                  <c:v>1580000</c:v>
+                </c:pt>
+                <c:pt idx="80">
+                  <c:v>1600000</c:v>
+                </c:pt>
+                <c:pt idx="81">
+                  <c:v>1620000</c:v>
+                </c:pt>
+                <c:pt idx="82">
+                  <c:v>1640000</c:v>
+                </c:pt>
+                <c:pt idx="83">
+                  <c:v>1660000</c:v>
+                </c:pt>
+                <c:pt idx="84">
+                  <c:v>1680000</c:v>
+                </c:pt>
+                <c:pt idx="85">
+                  <c:v>1700000</c:v>
+                </c:pt>
+                <c:pt idx="86">
+                  <c:v>1720000</c:v>
+                </c:pt>
+                <c:pt idx="87">
+                  <c:v>1740000</c:v>
+                </c:pt>
+                <c:pt idx="88">
+                  <c:v>1760000</c:v>
+                </c:pt>
+                <c:pt idx="89">
+                  <c:v>1780000</c:v>
+                </c:pt>
+                <c:pt idx="90">
+                  <c:v>1800000</c:v>
+                </c:pt>
+                <c:pt idx="91">
+                  <c:v>1820000</c:v>
+                </c:pt>
+                <c:pt idx="92">
+                  <c:v>1840000</c:v>
+                </c:pt>
+                <c:pt idx="93">
+                  <c:v>1860000</c:v>
+                </c:pt>
+                <c:pt idx="94">
+                  <c:v>1880000</c:v>
+                </c:pt>
+                <c:pt idx="95">
+                  <c:v>1900000</c:v>
+                </c:pt>
+                <c:pt idx="96">
+                  <c:v>1920000</c:v>
+                </c:pt>
+                <c:pt idx="97">
+                  <c:v>1940000</c:v>
+                </c:pt>
+                <c:pt idx="98">
+                  <c:v>1960000</c:v>
+                </c:pt>
+                <c:pt idx="99">
+                  <c:v>1980000</c:v>
+                </c:pt>
+                <c:pt idx="100">
+                  <c:v>2000000</c:v>
+                </c:pt>
+              </c:strCache>
+            </c:strRef>
+          </c:cat>
+          <c:val>
+            <c:numRef>
+              <c:f>'Exp 1'!$B$2:$B$101</c:f>
+              <c:numCache>
+                <c:formatCode>General</c:formatCode>
+                <c:ptCount val="100"/>
+                <c:pt idx="0">
+                  <c:v>1.5380000000000001E-3</c:v>
+                </c:pt>
+                <c:pt idx="1">
+                  <c:v>4.1349999999999998E-3</c:v>
+                </c:pt>
+                <c:pt idx="2">
+                  <c:v>5.2570000000000004E-3</c:v>
+                </c:pt>
+                <c:pt idx="3">
+                  <c:v>8.4950000000000008E-3</c:v>
+                </c:pt>
+                <c:pt idx="4">
+                  <c:v>8.1919999999999996E-3</c:v>
+                </c:pt>
+                <c:pt idx="5">
+                  <c:v>1.0515E-2</c:v>
+                </c:pt>
+                <c:pt idx="6">
+                  <c:v>1.1103E-2</c:v>
+                </c:pt>
+                <c:pt idx="7">
+                  <c:v>1.2952999999999999E-2</c:v>
+                </c:pt>
+                <c:pt idx="8">
+                  <c:v>1.4134000000000001E-2</c:v>
+                </c:pt>
+                <c:pt idx="9">
+                  <c:v>9.6259999999999991E-3</c:v>
+                </c:pt>
+                <c:pt idx="10">
+                  <c:v>1.6192000000000002E-2</c:v>
+                </c:pt>
+                <c:pt idx="11">
+                  <c:v>1.1297E-2</c:v>
+                </c:pt>
+                <c:pt idx="12">
+                  <c:v>1.3946999999999999E-2</c:v>
+                </c:pt>
+                <c:pt idx="13">
+                  <c:v>1.3745E-2</c:v>
+                </c:pt>
+                <c:pt idx="14">
+                  <c:v>2.1132000000000001E-2</c:v>
+                </c:pt>
+                <c:pt idx="15">
+                  <c:v>1.8235000000000001E-2</c:v>
+                </c:pt>
+                <c:pt idx="16">
+                  <c:v>2.0421000000000002E-2</c:v>
+                </c:pt>
+                <c:pt idx="17">
+                  <c:v>2.0794E-2</c:v>
+                </c:pt>
+                <c:pt idx="18">
+                  <c:v>2.4121E-2</c:v>
+                </c:pt>
+                <c:pt idx="19">
+                  <c:v>2.2719E-2</c:v>
+                </c:pt>
+                <c:pt idx="20">
+                  <c:v>2.104E-2</c:v>
+                </c:pt>
+                <c:pt idx="21">
+                  <c:v>2.4899999999999999E-2</c:v>
+                </c:pt>
+                <c:pt idx="22">
+                  <c:v>2.1887E-2</c:v>
+                </c:pt>
+                <c:pt idx="23">
+                  <c:v>2.7830000000000001E-2</c:v>
+                </c:pt>
+                <c:pt idx="24">
+                  <c:v>2.5758E-2</c:v>
+                </c:pt>
+                <c:pt idx="25">
+                  <c:v>3.5181999999999998E-2</c:v>
+                </c:pt>
+                <c:pt idx="26">
+                  <c:v>2.9513999999999999E-2</c:v>
+                </c:pt>
+                <c:pt idx="27">
+                  <c:v>2.6960999999999999E-2</c:v>
+                </c:pt>
+                <c:pt idx="28">
+                  <c:v>3.7498999999999998E-2</c:v>
+                </c:pt>
+                <c:pt idx="29">
+                  <c:v>3.2828000000000003E-2</c:v>
+                </c:pt>
+                <c:pt idx="30">
+                  <c:v>3.5221000000000002E-2</c:v>
+                </c:pt>
+                <c:pt idx="31">
+                  <c:v>3.0862000000000001E-2</c:v>
+                </c:pt>
+                <c:pt idx="32">
+                  <c:v>3.3406999999999999E-2</c:v>
+                </c:pt>
+                <c:pt idx="33">
+                  <c:v>3.6339000000000003E-2</c:v>
+                </c:pt>
+                <c:pt idx="34">
+                  <c:v>4.2728000000000002E-2</c:v>
+                </c:pt>
+                <c:pt idx="35">
+                  <c:v>3.4916000000000003E-2</c:v>
+                </c:pt>
+                <c:pt idx="36">
+                  <c:v>3.8434999999999997E-2</c:v>
+                </c:pt>
+                <c:pt idx="37">
+                  <c:v>3.9315999999999997E-2</c:v>
+                </c:pt>
+                <c:pt idx="38">
+                  <c:v>3.8379000000000003E-2</c:v>
+                </c:pt>
+                <c:pt idx="39">
+                  <c:v>4.206E-2</c:v>
+                </c:pt>
+                <c:pt idx="40">
+                  <c:v>4.0549000000000002E-2</c:v>
+                </c:pt>
+                <c:pt idx="41">
+                  <c:v>4.6191000000000003E-2</c:v>
+                </c:pt>
+                <c:pt idx="42">
+                  <c:v>4.1592999999999998E-2</c:v>
+                </c:pt>
+                <c:pt idx="43">
+                  <c:v>4.9722000000000002E-2</c:v>
+                </c:pt>
+                <c:pt idx="44">
+                  <c:v>4.6211000000000002E-2</c:v>
+                </c:pt>
+                <c:pt idx="45">
+                  <c:v>4.4854999999999999E-2</c:v>
+                </c:pt>
+                <c:pt idx="46">
+                  <c:v>5.6226999999999999E-2</c:v>
+                </c:pt>
+                <c:pt idx="47">
+                  <c:v>4.9669999999999999E-2</c:v>
+                </c:pt>
+                <c:pt idx="48">
+                  <c:v>5.1756000000000003E-2</c:v>
+                </c:pt>
+                <c:pt idx="49">
+                  <c:v>4.8396000000000002E-2</c:v>
+                </c:pt>
+                <c:pt idx="50">
+                  <c:v>6.0504000000000002E-2</c:v>
+                </c:pt>
+                <c:pt idx="51">
+                  <c:v>5.6531999999999999E-2</c:v>
+                </c:pt>
+                <c:pt idx="52">
+                  <c:v>5.7717999999999998E-2</c:v>
+                </c:pt>
+                <c:pt idx="53">
+                  <c:v>5.4916E-2</c:v>
+                </c:pt>
+                <c:pt idx="54">
+                  <c:v>5.3738000000000001E-2</c:v>
+                </c:pt>
+                <c:pt idx="55">
+                  <c:v>5.4886999999999998E-2</c:v>
+                </c:pt>
+                <c:pt idx="56">
+                  <c:v>5.5115999999999998E-2</c:v>
+                </c:pt>
+                <c:pt idx="57">
+                  <c:v>5.6216000000000002E-2</c:v>
+                </c:pt>
+                <c:pt idx="58">
+                  <c:v>6.4293000000000003E-2</c:v>
+                </c:pt>
+                <c:pt idx="59">
+                  <c:v>5.8955E-2</c:v>
+                </c:pt>
+                <c:pt idx="60">
+                  <c:v>6.5165000000000001E-2</c:v>
+                </c:pt>
+                <c:pt idx="61">
+                  <c:v>6.1484999999999998E-2</c:v>
+                </c:pt>
+                <c:pt idx="62">
+                  <c:v>6.0900000000000003E-2</c:v>
+                </c:pt>
+                <c:pt idx="63">
+                  <c:v>6.6004999999999994E-2</c:v>
+                </c:pt>
+                <c:pt idx="64">
+                  <c:v>6.6769999999999996E-2</c:v>
+                </c:pt>
+                <c:pt idx="65">
+                  <c:v>6.8302000000000002E-2</c:v>
+                </c:pt>
+                <c:pt idx="66">
+                  <c:v>7.1714E-2</c:v>
+                </c:pt>
+                <c:pt idx="67">
+                  <c:v>6.6391000000000006E-2</c:v>
+                </c:pt>
+                <c:pt idx="68">
+                  <c:v>6.9667999999999994E-2</c:v>
+                </c:pt>
+                <c:pt idx="69">
+                  <c:v>6.8262000000000003E-2</c:v>
+                </c:pt>
+                <c:pt idx="70">
+                  <c:v>7.2749999999999995E-2</c:v>
+                </c:pt>
+                <c:pt idx="71">
+                  <c:v>7.0939000000000002E-2</c:v>
+                </c:pt>
+                <c:pt idx="72">
+                  <c:v>7.2687000000000002E-2</c:v>
+                </c:pt>
+                <c:pt idx="73">
+                  <c:v>7.6962000000000003E-2</c:v>
+                </c:pt>
+                <c:pt idx="74">
+                  <c:v>7.8144000000000005E-2</c:v>
+                </c:pt>
+                <c:pt idx="75">
+                  <c:v>7.4897000000000005E-2</c:v>
+                </c:pt>
+                <c:pt idx="76">
+                  <c:v>7.8410999999999995E-2</c:v>
+                </c:pt>
+                <c:pt idx="77">
+                  <c:v>7.7325000000000005E-2</c:v>
+                </c:pt>
+                <c:pt idx="78">
+                  <c:v>7.9283999999999993E-2</c:v>
+                </c:pt>
+                <c:pt idx="79">
+                  <c:v>7.7947000000000002E-2</c:v>
+                </c:pt>
+                <c:pt idx="80">
+                  <c:v>8.2548999999999997E-2</c:v>
+                </c:pt>
+                <c:pt idx="81">
+                  <c:v>8.7591000000000002E-2</c:v>
+                </c:pt>
+                <c:pt idx="82">
+                  <c:v>0.09</c:v>
+                </c:pt>
+                <c:pt idx="83">
+                  <c:v>8.3126000000000005E-2</c:v>
+                </c:pt>
+                <c:pt idx="84">
+                  <c:v>8.7447999999999998E-2</c:v>
+                </c:pt>
+                <c:pt idx="85">
+                  <c:v>8.2996E-2</c:v>
+                </c:pt>
+                <c:pt idx="86">
+                  <c:v>8.5616999999999999E-2</c:v>
+                </c:pt>
+                <c:pt idx="87">
+                  <c:v>0.100872</c:v>
+                </c:pt>
+                <c:pt idx="88">
+                  <c:v>8.7937000000000001E-2</c:v>
+                </c:pt>
+                <c:pt idx="89">
+                  <c:v>9.4080999999999998E-2</c:v>
+                </c:pt>
+                <c:pt idx="90">
+                  <c:v>9.7897999999999999E-2</c:v>
+                </c:pt>
+                <c:pt idx="91">
+                  <c:v>9.0301999999999993E-2</c:v>
+                </c:pt>
+                <c:pt idx="92">
+                  <c:v>9.6656000000000006E-2</c:v>
+                </c:pt>
+                <c:pt idx="93">
+                  <c:v>9.9566000000000002E-2</c:v>
+                </c:pt>
+                <c:pt idx="94">
+                  <c:v>0.101484</c:v>
+                </c:pt>
+                <c:pt idx="95">
+                  <c:v>9.4228000000000006E-2</c:v>
+                </c:pt>
+                <c:pt idx="96">
+                  <c:v>9.4684000000000004E-2</c:v>
+                </c:pt>
+                <c:pt idx="97">
+                  <c:v>0.10220600000000001</c:v>
+                </c:pt>
+                <c:pt idx="98">
+                  <c:v>9.7470000000000001E-2</c:v>
+                </c:pt>
+                <c:pt idx="99">
+                  <c:v>0.11444600000000001</c:v>
+                </c:pt>
+              </c:numCache>
+            </c:numRef>
+          </c:val>
+          <c:smooth val="0"/>
+          <c:extLst>
+            <c:ext xmlns:c16="http://schemas.microsoft.com/office/drawing/2014/chart" uri="{C3380CC4-5D6E-409C-BE32-E72D297353CC}">
+              <c16:uniqueId val="{00000000-8C07-42DD-ABE1-7D04D39D3F8B}"/>
+            </c:ext>
+          </c:extLst>
+        </c:ser>
+        <c:ser>
+          <c:idx val="1"/>
+          <c:order val="1"/>
+          <c:tx>
+            <c:strRef>
+              <c:f>'Exp 1'!$C$1</c:f>
+              <c:strCache>
+                <c:ptCount val="1"/>
+                <c:pt idx="0">
+                  <c:v>Parallel</c:v>
+                </c:pt>
+              </c:strCache>
+            </c:strRef>
+          </c:tx>
+          <c:spPr>
+            <a:ln w="28575" cap="rnd">
+              <a:solidFill>
+                <a:schemeClr val="accent2"/>
+              </a:solidFill>
+              <a:round/>
+            </a:ln>
+            <a:effectLst/>
+          </c:spPr>
+          <c:marker>
+            <c:symbol val="none"/>
+          </c:marker>
+          <c:cat>
+            <c:strRef>
+              <c:f>'Exp 1'!$A$1:$A$101</c:f>
+              <c:strCache>
+                <c:ptCount val="101"/>
+                <c:pt idx="0">
+                  <c:v>N</c:v>
+                </c:pt>
+                <c:pt idx="1">
+                  <c:v>20000</c:v>
+                </c:pt>
+                <c:pt idx="2">
+                  <c:v>40000</c:v>
+                </c:pt>
+                <c:pt idx="3">
+                  <c:v>60000</c:v>
+                </c:pt>
+                <c:pt idx="4">
+                  <c:v>80000</c:v>
+                </c:pt>
+                <c:pt idx="5">
+                  <c:v>100000</c:v>
+                </c:pt>
+                <c:pt idx="6">
+                  <c:v>120000</c:v>
+                </c:pt>
+                <c:pt idx="7">
+                  <c:v>140000</c:v>
+                </c:pt>
+                <c:pt idx="8">
+                  <c:v>160000</c:v>
+                </c:pt>
+                <c:pt idx="9">
+                  <c:v>180000</c:v>
+                </c:pt>
+                <c:pt idx="10">
+                  <c:v>200000</c:v>
+                </c:pt>
+                <c:pt idx="11">
+                  <c:v>220000</c:v>
+                </c:pt>
+                <c:pt idx="12">
+                  <c:v>240000</c:v>
+                </c:pt>
+                <c:pt idx="13">
+                  <c:v>260000</c:v>
+                </c:pt>
+                <c:pt idx="14">
+                  <c:v>280000</c:v>
+                </c:pt>
+                <c:pt idx="15">
+                  <c:v>300000</c:v>
+                </c:pt>
+                <c:pt idx="16">
+                  <c:v>320000</c:v>
+                </c:pt>
+                <c:pt idx="17">
+                  <c:v>340000</c:v>
+                </c:pt>
+                <c:pt idx="18">
+                  <c:v>360000</c:v>
+                </c:pt>
+                <c:pt idx="19">
+                  <c:v>380000</c:v>
+                </c:pt>
+                <c:pt idx="20">
+                  <c:v>400000</c:v>
+                </c:pt>
+                <c:pt idx="21">
+                  <c:v>420000</c:v>
+                </c:pt>
+                <c:pt idx="22">
+                  <c:v>440000</c:v>
+                </c:pt>
+                <c:pt idx="23">
+                  <c:v>460000</c:v>
+                </c:pt>
+                <c:pt idx="24">
+                  <c:v>480000</c:v>
+                </c:pt>
+                <c:pt idx="25">
+                  <c:v>500000</c:v>
+                </c:pt>
+                <c:pt idx="26">
+                  <c:v>520000</c:v>
+                </c:pt>
+                <c:pt idx="27">
+                  <c:v>540000</c:v>
+                </c:pt>
+                <c:pt idx="28">
+                  <c:v>560000</c:v>
+                </c:pt>
+                <c:pt idx="29">
+                  <c:v>580000</c:v>
+                </c:pt>
+                <c:pt idx="30">
+                  <c:v>600000</c:v>
+                </c:pt>
+                <c:pt idx="31">
+                  <c:v>620000</c:v>
+                </c:pt>
+                <c:pt idx="32">
+                  <c:v>640000</c:v>
+                </c:pt>
+                <c:pt idx="33">
+                  <c:v>660000</c:v>
+                </c:pt>
+                <c:pt idx="34">
+                  <c:v>680000</c:v>
+                </c:pt>
+                <c:pt idx="35">
+                  <c:v>700000</c:v>
+                </c:pt>
+                <c:pt idx="36">
+                  <c:v>720000</c:v>
+                </c:pt>
+                <c:pt idx="37">
+                  <c:v>740000</c:v>
+                </c:pt>
+                <c:pt idx="38">
+                  <c:v>760000</c:v>
+                </c:pt>
+                <c:pt idx="39">
+                  <c:v>780000</c:v>
+                </c:pt>
+                <c:pt idx="40">
+                  <c:v>800000</c:v>
+                </c:pt>
+                <c:pt idx="41">
+                  <c:v>820000</c:v>
+                </c:pt>
+                <c:pt idx="42">
+                  <c:v>840000</c:v>
+                </c:pt>
+                <c:pt idx="43">
+                  <c:v>860000</c:v>
+                </c:pt>
+                <c:pt idx="44">
+                  <c:v>880000</c:v>
+                </c:pt>
+                <c:pt idx="45">
+                  <c:v>900000</c:v>
+                </c:pt>
+                <c:pt idx="46">
+                  <c:v>920000</c:v>
+                </c:pt>
+                <c:pt idx="47">
+                  <c:v>940000</c:v>
+                </c:pt>
+                <c:pt idx="48">
+                  <c:v>960000</c:v>
+                </c:pt>
+                <c:pt idx="49">
+                  <c:v>980000</c:v>
+                </c:pt>
+                <c:pt idx="50">
+                  <c:v>1000000</c:v>
+                </c:pt>
+                <c:pt idx="51">
+                  <c:v>1020000</c:v>
+                </c:pt>
+                <c:pt idx="52">
+                  <c:v>1040000</c:v>
+                </c:pt>
+                <c:pt idx="53">
+                  <c:v>1060000</c:v>
+                </c:pt>
+                <c:pt idx="54">
+                  <c:v>1080000</c:v>
+                </c:pt>
+                <c:pt idx="55">
+                  <c:v>1100000</c:v>
+                </c:pt>
+                <c:pt idx="56">
+                  <c:v>1120000</c:v>
+                </c:pt>
+                <c:pt idx="57">
+                  <c:v>1140000</c:v>
+                </c:pt>
+                <c:pt idx="58">
+                  <c:v>1160000</c:v>
+                </c:pt>
+                <c:pt idx="59">
+                  <c:v>1180000</c:v>
+                </c:pt>
+                <c:pt idx="60">
+                  <c:v>1200000</c:v>
+                </c:pt>
+                <c:pt idx="61">
+                  <c:v>1220000</c:v>
+                </c:pt>
+                <c:pt idx="62">
+                  <c:v>1240000</c:v>
+                </c:pt>
+                <c:pt idx="63">
+                  <c:v>1260000</c:v>
+                </c:pt>
+                <c:pt idx="64">
+                  <c:v>1280000</c:v>
+                </c:pt>
+                <c:pt idx="65">
+                  <c:v>1300000</c:v>
+                </c:pt>
+                <c:pt idx="66">
+                  <c:v>1320000</c:v>
+                </c:pt>
+                <c:pt idx="67">
+                  <c:v>1340000</c:v>
+                </c:pt>
+                <c:pt idx="68">
+                  <c:v>1360000</c:v>
+                </c:pt>
+                <c:pt idx="69">
+                  <c:v>1380000</c:v>
+                </c:pt>
+                <c:pt idx="70">
+                  <c:v>1400000</c:v>
+                </c:pt>
+                <c:pt idx="71">
+                  <c:v>1420000</c:v>
+                </c:pt>
+                <c:pt idx="72">
+                  <c:v>1440000</c:v>
+                </c:pt>
+                <c:pt idx="73">
+                  <c:v>1460000</c:v>
+                </c:pt>
+                <c:pt idx="74">
+                  <c:v>1480000</c:v>
+                </c:pt>
+                <c:pt idx="75">
+                  <c:v>1500000</c:v>
+                </c:pt>
+                <c:pt idx="76">
+                  <c:v>1520000</c:v>
+                </c:pt>
+                <c:pt idx="77">
+                  <c:v>1540000</c:v>
+                </c:pt>
+                <c:pt idx="78">
+                  <c:v>1560000</c:v>
+                </c:pt>
+                <c:pt idx="79">
+                  <c:v>1580000</c:v>
+                </c:pt>
+                <c:pt idx="80">
+                  <c:v>1600000</c:v>
+                </c:pt>
+                <c:pt idx="81">
+                  <c:v>1620000</c:v>
+                </c:pt>
+                <c:pt idx="82">
+                  <c:v>1640000</c:v>
+                </c:pt>
+                <c:pt idx="83">
+                  <c:v>1660000</c:v>
+                </c:pt>
+                <c:pt idx="84">
+                  <c:v>1680000</c:v>
+                </c:pt>
+                <c:pt idx="85">
+                  <c:v>1700000</c:v>
+                </c:pt>
+                <c:pt idx="86">
+                  <c:v>1720000</c:v>
+                </c:pt>
+                <c:pt idx="87">
+                  <c:v>1740000</c:v>
+                </c:pt>
+                <c:pt idx="88">
+                  <c:v>1760000</c:v>
+                </c:pt>
+                <c:pt idx="89">
+                  <c:v>1780000</c:v>
+                </c:pt>
+                <c:pt idx="90">
+                  <c:v>1800000</c:v>
+                </c:pt>
+                <c:pt idx="91">
+                  <c:v>1820000</c:v>
+                </c:pt>
+                <c:pt idx="92">
+                  <c:v>1840000</c:v>
+                </c:pt>
+                <c:pt idx="93">
+                  <c:v>1860000</c:v>
+                </c:pt>
+                <c:pt idx="94">
+                  <c:v>1880000</c:v>
+                </c:pt>
+                <c:pt idx="95">
+                  <c:v>1900000</c:v>
+                </c:pt>
+                <c:pt idx="96">
+                  <c:v>1920000</c:v>
+                </c:pt>
+                <c:pt idx="97">
+                  <c:v>1940000</c:v>
+                </c:pt>
+                <c:pt idx="98">
+                  <c:v>1960000</c:v>
+                </c:pt>
+                <c:pt idx="99">
+                  <c:v>1980000</c:v>
+                </c:pt>
+                <c:pt idx="100">
+                  <c:v>2000000</c:v>
+                </c:pt>
+              </c:strCache>
+            </c:strRef>
+          </c:cat>
+          <c:val>
+            <c:numRef>
+              <c:f>'Exp 1'!$C$2:$C$101</c:f>
+              <c:numCache>
+                <c:formatCode>General</c:formatCode>
+                <c:ptCount val="100"/>
+                <c:pt idx="0">
+                  <c:v>3.6410000000000001E-3</c:v>
+                </c:pt>
+                <c:pt idx="1">
+                  <c:v>6.7409999999999996E-3</c:v>
+                </c:pt>
+                <c:pt idx="2">
+                  <c:v>6.8609999999999999E-3</c:v>
+                </c:pt>
+                <c:pt idx="3">
+                  <c:v>1.1642E-2</c:v>
+                </c:pt>
+                <c:pt idx="4">
+                  <c:v>9.4319999999999994E-3</c:v>
+                </c:pt>
+                <c:pt idx="5">
+                  <c:v>1.1722E-2</c:v>
+                </c:pt>
+                <c:pt idx="6">
+                  <c:v>1.2423999999999999E-2</c:v>
+                </c:pt>
+                <c:pt idx="7">
+                  <c:v>1.5342E-2</c:v>
+                </c:pt>
+                <c:pt idx="8">
+                  <c:v>1.5041000000000001E-2</c:v>
+                </c:pt>
+                <c:pt idx="9">
+                  <c:v>1.0521000000000001E-2</c:v>
+                </c:pt>
+                <c:pt idx="10">
+                  <c:v>1.6614E-2</c:v>
+                </c:pt>
+                <c:pt idx="11">
+                  <c:v>1.2434000000000001E-2</c:v>
+                </c:pt>
+                <c:pt idx="12">
+                  <c:v>1.4227999999999999E-2</c:v>
+                </c:pt>
+                <c:pt idx="13">
+                  <c:v>1.5074000000000001E-2</c:v>
+                </c:pt>
+                <c:pt idx="14">
+                  <c:v>2.0104E-2</c:v>
+                </c:pt>
+                <c:pt idx="15">
+                  <c:v>2.0327999999999999E-2</c:v>
+                </c:pt>
+                <c:pt idx="16">
+                  <c:v>2.1513000000000001E-2</c:v>
+                </c:pt>
+                <c:pt idx="17">
+                  <c:v>2.3777E-2</c:v>
+                </c:pt>
+                <c:pt idx="18">
+                  <c:v>2.019E-2</c:v>
+                </c:pt>
+                <c:pt idx="19">
+                  <c:v>2.0877E-2</c:v>
+                </c:pt>
+                <c:pt idx="20">
+                  <c:v>2.1128000000000001E-2</c:v>
+                </c:pt>
+                <c:pt idx="21">
+                  <c:v>2.3449000000000001E-2</c:v>
+                </c:pt>
+                <c:pt idx="22">
+                  <c:v>2.4473999999999999E-2</c:v>
+                </c:pt>
+                <c:pt idx="23">
+                  <c:v>2.6252000000000001E-2</c:v>
+                </c:pt>
+                <c:pt idx="24">
+                  <c:v>2.478E-2</c:v>
+                </c:pt>
+                <c:pt idx="25">
+                  <c:v>3.1129E-2</c:v>
+                </c:pt>
+                <c:pt idx="26">
+                  <c:v>2.6315999999999999E-2</c:v>
+                </c:pt>
+                <c:pt idx="27">
+                  <c:v>2.7913E-2</c:v>
+                </c:pt>
+                <c:pt idx="28">
+                  <c:v>3.2515000000000002E-2</c:v>
+                </c:pt>
+                <c:pt idx="29">
+                  <c:v>3.0491000000000001E-2</c:v>
+                </c:pt>
+                <c:pt idx="30">
+                  <c:v>3.0852000000000001E-2</c:v>
+                </c:pt>
+                <c:pt idx="31">
+                  <c:v>3.2085000000000002E-2</c:v>
+                </c:pt>
+                <c:pt idx="32">
+                  <c:v>3.4958999999999997E-2</c:v>
+                </c:pt>
+                <c:pt idx="33">
+                  <c:v>3.2666000000000001E-2</c:v>
+                </c:pt>
+                <c:pt idx="34">
+                  <c:v>3.4820999999999998E-2</c:v>
+                </c:pt>
+                <c:pt idx="35">
+                  <c:v>3.5383999999999999E-2</c:v>
+                </c:pt>
+                <c:pt idx="36">
+                  <c:v>3.7872000000000003E-2</c:v>
+                </c:pt>
+                <c:pt idx="37">
+                  <c:v>3.8530000000000002E-2</c:v>
+                </c:pt>
+                <c:pt idx="38">
+                  <c:v>3.7525000000000003E-2</c:v>
+                </c:pt>
+                <c:pt idx="39">
+                  <c:v>3.8873999999999999E-2</c:v>
+                </c:pt>
+                <c:pt idx="40">
+                  <c:v>4.0710000000000003E-2</c:v>
+                </c:pt>
+                <c:pt idx="41">
+                  <c:v>4.6185999999999998E-2</c:v>
+                </c:pt>
+                <c:pt idx="42">
+                  <c:v>4.1708000000000002E-2</c:v>
+                </c:pt>
+                <c:pt idx="43">
+                  <c:v>4.1798000000000002E-2</c:v>
+                </c:pt>
+                <c:pt idx="44">
+                  <c:v>4.3572E-2</c:v>
+                </c:pt>
+                <c:pt idx="45">
+                  <c:v>4.5761999999999997E-2</c:v>
+                </c:pt>
+                <c:pt idx="46">
+                  <c:v>4.6274000000000003E-2</c:v>
+                </c:pt>
+                <c:pt idx="47">
+                  <c:v>4.9584000000000003E-2</c:v>
+                </c:pt>
+                <c:pt idx="48">
+                  <c:v>4.9359E-2</c:v>
+                </c:pt>
+                <c:pt idx="49">
+                  <c:v>4.7927999999999998E-2</c:v>
+                </c:pt>
+                <c:pt idx="50">
+                  <c:v>4.9057000000000003E-2</c:v>
+                </c:pt>
+                <c:pt idx="51">
+                  <c:v>5.1071999999999999E-2</c:v>
+                </c:pt>
+                <c:pt idx="52">
+                  <c:v>5.0473999999999998E-2</c:v>
+                </c:pt>
+                <c:pt idx="53">
+                  <c:v>5.6208000000000001E-2</c:v>
+                </c:pt>
+                <c:pt idx="54">
+                  <c:v>5.2944999999999999E-2</c:v>
+                </c:pt>
+                <c:pt idx="55">
+                  <c:v>5.5403000000000001E-2</c:v>
+                </c:pt>
+                <c:pt idx="56">
+                  <c:v>5.4701E-2</c:v>
+                </c:pt>
+                <c:pt idx="57">
+                  <c:v>5.5173E-2</c:v>
+                </c:pt>
+                <c:pt idx="58">
+                  <c:v>5.6784000000000001E-2</c:v>
+                </c:pt>
+                <c:pt idx="59">
+                  <c:v>5.6760999999999999E-2</c:v>
+                </c:pt>
+                <c:pt idx="60">
+                  <c:v>5.8932999999999999E-2</c:v>
+                </c:pt>
+                <c:pt idx="61">
+                  <c:v>5.9055999999999997E-2</c:v>
+                </c:pt>
+                <c:pt idx="62">
+                  <c:v>6.3337000000000004E-2</c:v>
+                </c:pt>
+                <c:pt idx="63">
+                  <c:v>6.1866999999999998E-2</c:v>
+                </c:pt>
+                <c:pt idx="64">
+                  <c:v>6.2105E-2</c:v>
+                </c:pt>
+                <c:pt idx="65">
+                  <c:v>6.3022999999999996E-2</c:v>
+                </c:pt>
+                <c:pt idx="66">
+                  <c:v>6.3828999999999997E-2</c:v>
+                </c:pt>
+                <c:pt idx="67">
+                  <c:v>6.4798999999999995E-2</c:v>
+                </c:pt>
+                <c:pt idx="68">
+                  <c:v>6.5570000000000003E-2</c:v>
+                </c:pt>
+                <c:pt idx="69">
+                  <c:v>6.6750000000000004E-2</c:v>
+                </c:pt>
+                <c:pt idx="70">
+                  <c:v>6.6784999999999997E-2</c:v>
+                </c:pt>
+                <c:pt idx="71">
+                  <c:v>6.9231000000000001E-2</c:v>
+                </c:pt>
+                <c:pt idx="72">
+                  <c:v>7.0719000000000004E-2</c:v>
+                </c:pt>
+                <c:pt idx="73">
+                  <c:v>7.1571999999999997E-2</c:v>
+                </c:pt>
+                <c:pt idx="74">
+                  <c:v>7.1244000000000002E-2</c:v>
+                </c:pt>
+                <c:pt idx="75">
+                  <c:v>7.1566000000000005E-2</c:v>
+                </c:pt>
+                <c:pt idx="76">
+                  <c:v>7.5201000000000004E-2</c:v>
+                </c:pt>
+                <c:pt idx="77">
+                  <c:v>7.4632000000000004E-2</c:v>
+                </c:pt>
+                <c:pt idx="78">
+                  <c:v>7.6837000000000003E-2</c:v>
+                </c:pt>
+                <c:pt idx="79">
+                  <c:v>7.5897000000000006E-2</c:v>
+                </c:pt>
+                <c:pt idx="80">
+                  <c:v>7.9282000000000005E-2</c:v>
+                </c:pt>
+                <c:pt idx="81">
+                  <c:v>8.0113000000000004E-2</c:v>
+                </c:pt>
+                <c:pt idx="82">
+                  <c:v>8.0397999999999997E-2</c:v>
+                </c:pt>
+                <c:pt idx="83">
+                  <c:v>8.5082000000000005E-2</c:v>
+                </c:pt>
+                <c:pt idx="84">
+                  <c:v>8.4374000000000005E-2</c:v>
+                </c:pt>
+                <c:pt idx="85">
+                  <c:v>8.2192000000000001E-2</c:v>
+                </c:pt>
+                <c:pt idx="86">
+                  <c:v>8.5831000000000005E-2</c:v>
+                </c:pt>
+                <c:pt idx="87">
+                  <c:v>8.5775000000000004E-2</c:v>
+                </c:pt>
+                <c:pt idx="88">
+                  <c:v>9.2269000000000004E-2</c:v>
+                </c:pt>
+                <c:pt idx="89">
+                  <c:v>8.7543999999999997E-2</c:v>
+                </c:pt>
+                <c:pt idx="90">
+                  <c:v>9.0755000000000002E-2</c:v>
+                </c:pt>
+                <c:pt idx="91">
+                  <c:v>8.9735999999999996E-2</c:v>
+                </c:pt>
+                <c:pt idx="92">
+                  <c:v>8.8003999999999999E-2</c:v>
+                </c:pt>
+                <c:pt idx="93">
+                  <c:v>9.5563999999999996E-2</c:v>
+                </c:pt>
+                <c:pt idx="94">
+                  <c:v>9.4671000000000005E-2</c:v>
+                </c:pt>
+                <c:pt idx="95">
+                  <c:v>9.0292999999999998E-2</c:v>
+                </c:pt>
+                <c:pt idx="96">
+                  <c:v>9.1419E-2</c:v>
+                </c:pt>
+                <c:pt idx="97">
+                  <c:v>9.6518999999999994E-2</c:v>
+                </c:pt>
+                <c:pt idx="98">
+                  <c:v>9.3304999999999999E-2</c:v>
+                </c:pt>
+                <c:pt idx="99">
+                  <c:v>9.5915E-2</c:v>
+                </c:pt>
+              </c:numCache>
+            </c:numRef>
+          </c:val>
+          <c:smooth val="0"/>
+          <c:extLst>
+            <c:ext xmlns:c16="http://schemas.microsoft.com/office/drawing/2014/chart" uri="{C3380CC4-5D6E-409C-BE32-E72D297353CC}">
+              <c16:uniqueId val="{00000001-8C07-42DD-ABE1-7D04D39D3F8B}"/>
+            </c:ext>
+          </c:extLst>
+        </c:ser>
+        <c:dLbls>
+          <c:showLegendKey val="0"/>
+          <c:showVal val="0"/>
+          <c:showCatName val="0"/>
+          <c:showSerName val="0"/>
+          <c:showPercent val="0"/>
+          <c:showBubbleSize val="0"/>
+        </c:dLbls>
+        <c:smooth val="0"/>
+        <c:axId val="1575162064"/>
+        <c:axId val="1575163504"/>
+      </c:lineChart>
+      <c:catAx>
+        <c:axId val="1575162064"/>
+        <c:scaling>
+          <c:orientation val="minMax"/>
+        </c:scaling>
+        <c:delete val="0"/>
+        <c:axPos val="b"/>
+        <c:numFmt formatCode="General" sourceLinked="1"/>
+        <c:majorTickMark val="none"/>
+        <c:minorTickMark val="none"/>
+        <c:tickLblPos val="nextTo"/>
+        <c:spPr>
+          <a:noFill/>
+          <a:ln w="9525" cap="flat" cmpd="sng" algn="ctr">
+            <a:solidFill>
+              <a:schemeClr val="tx1">
+                <a:lumMod val="15000"/>
+                <a:lumOff val="85000"/>
+              </a:schemeClr>
+            </a:solidFill>
+            <a:round/>
+          </a:ln>
+          <a:effectLst/>
+        </c:spPr>
+        <c:txPr>
+          <a:bodyPr rot="-60000000" spcFirstLastPara="1" vertOverflow="ellipsis" vert="horz" wrap="square" anchor="ctr" anchorCtr="1"/>
+          <a:lstStyle/>
+          <a:p>
+            <a:pPr>
+              <a:defRPr sz="900" b="0" i="0" u="none" strike="noStrike" kern="1200" baseline="0">
+                <a:solidFill>
+                  <a:schemeClr val="dk1"/>
+                </a:solidFill>
+                <a:latin typeface="+mn-lt"/>
+                <a:ea typeface="+mn-ea"/>
+                <a:cs typeface="+mn-cs"/>
+              </a:defRPr>
+            </a:pPr>
+            <a:endParaRPr lang="en-US"/>
+          </a:p>
+        </c:txPr>
+        <c:crossAx val="1575163504"/>
+        <c:crosses val="autoZero"/>
+        <c:auto val="1"/>
+        <c:lblAlgn val="ctr"/>
+        <c:lblOffset val="100"/>
+        <c:noMultiLvlLbl val="0"/>
+      </c:catAx>
+      <c:valAx>
+        <c:axId val="1575163504"/>
+        <c:scaling>
+          <c:orientation val="minMax"/>
+          <c:max val="0.12000000000000001"/>
+        </c:scaling>
+        <c:delete val="0"/>
+        <c:axPos val="l"/>
+        <c:majorGridlines>
+          <c:spPr>
+            <a:ln w="9525" cap="flat" cmpd="sng" algn="ctr">
+              <a:solidFill>
+                <a:schemeClr val="tx1">
+                  <a:lumMod val="15000"/>
+                  <a:lumOff val="85000"/>
+                </a:schemeClr>
+              </a:solidFill>
+              <a:round/>
+            </a:ln>
+            <a:effectLst/>
+          </c:spPr>
+        </c:majorGridlines>
+        <c:numFmt formatCode="General" sourceLinked="1"/>
+        <c:majorTickMark val="none"/>
+        <c:minorTickMark val="none"/>
+        <c:tickLblPos val="nextTo"/>
+        <c:spPr>
+          <a:noFill/>
+          <a:ln>
+            <a:noFill/>
+          </a:ln>
+          <a:effectLst/>
+        </c:spPr>
+        <c:txPr>
+          <a:bodyPr rot="-60000000" spcFirstLastPara="1" vertOverflow="ellipsis" vert="horz" wrap="square" anchor="ctr" anchorCtr="1"/>
+          <a:lstStyle/>
+          <a:p>
+            <a:pPr>
+              <a:defRPr sz="900" b="0" i="0" u="none" strike="noStrike" kern="1200" baseline="0">
+                <a:solidFill>
+                  <a:schemeClr val="dk1"/>
+                </a:solidFill>
+                <a:latin typeface="+mn-lt"/>
+                <a:ea typeface="+mn-ea"/>
+                <a:cs typeface="+mn-cs"/>
+              </a:defRPr>
+            </a:pPr>
+            <a:endParaRPr lang="en-US"/>
+          </a:p>
+        </c:txPr>
+        <c:crossAx val="1575162064"/>
+        <c:crosses val="autoZero"/>
+        <c:crossBetween val="between"/>
+      </c:valAx>
+      <c:spPr>
+        <a:noFill/>
+        <a:ln>
+          <a:noFill/>
+        </a:ln>
+        <a:effectLst/>
+      </c:spPr>
+    </c:plotArea>
+    <c:legend>
+      <c:legendPos val="r"/>
+      <c:overlay val="0"/>
+      <c:spPr>
+        <a:noFill/>
+        <a:ln>
+          <a:noFill/>
+        </a:ln>
+        <a:effectLst/>
+      </c:spPr>
+      <c:txPr>
+        <a:bodyPr rot="0" spcFirstLastPara="1" vertOverflow="ellipsis" vert="horz" wrap="square" anchor="ctr" anchorCtr="1"/>
+        <a:lstStyle/>
+        <a:p>
+          <a:pPr>
+            <a:defRPr sz="900" b="0" i="0" u="none" strike="noStrike" kern="1200" baseline="0">
+              <a:solidFill>
+                <a:schemeClr val="dk1"/>
+              </a:solidFill>
+              <a:latin typeface="+mn-lt"/>
+              <a:ea typeface="+mn-ea"/>
+              <a:cs typeface="+mn-cs"/>
+            </a:defRPr>
+          </a:pPr>
+          <a:endParaRPr lang="en-US"/>
+        </a:p>
+      </c:txPr>
+    </c:legend>
+    <c:plotVisOnly val="1"/>
+    <c:dispBlanksAs val="gap"/>
+    <c:showDLblsOverMax val="0"/>
+    <c:extLst>
+      <c:ext xmlns:c16r3="http://schemas.microsoft.com/office/drawing/2017/03/chart" uri="{56B9EC1D-385E-4148-901F-78D8002777C0}">
+        <c16r3:dataDisplayOptions16>
+          <c16r3:dispNaAsBlank val="1"/>
+        </c16r3:dataDisplayOptions16>
+      </c:ext>
+    </c:extLst>
+  </c:chart>
+  <c:spPr>
+    <a:solidFill>
+      <a:schemeClr val="lt1"/>
+    </a:solidFill>
+    <a:ln w="12700" cap="flat" cmpd="sng" algn="ctr">
+      <a:solidFill>
+        <a:schemeClr val="dk1"/>
+      </a:solidFill>
+      <a:prstDash val="solid"/>
+      <a:miter lim="800000"/>
+    </a:ln>
+    <a:effectLst/>
+  </c:spPr>
+  <c:txPr>
+    <a:bodyPr/>
+    <a:lstStyle/>
+    <a:p>
+      <a:pPr>
+        <a:defRPr>
+          <a:solidFill>
+            <a:schemeClr val="dk1"/>
+          </a:solidFill>
+          <a:latin typeface="+mn-lt"/>
+          <a:ea typeface="+mn-ea"/>
+          <a:cs typeface="+mn-cs"/>
+        </a:defRPr>
+      </a:pPr>
+      <a:endParaRPr lang="en-US"/>
+    </a:p>
+  </c:txPr>
+  <c:externalData r:id="rId3">
+    <c:autoUpdate val="0"/>
+  </c:externalData>
+</c:chartSpace>
+</file>
+
+<file path=ppt/charts/chart2.xml><?xml version="1.0" encoding="utf-8"?>
+<c:chartSpace xmlns:c="http://schemas.openxmlformats.org/drawingml/2006/chart" xmlns:a="http://schemas.openxmlformats.org/drawingml/2006/main" xmlns:r="http://schemas.openxmlformats.org/officeDocument/2006/relationships" xmlns:c16r2="http://schemas.microsoft.com/office/drawing/2015/06/chart">
+  <c:date1904 val="0"/>
+  <c:lang val="en-US"/>
+  <c:roundedCorners val="0"/>
+  <mc:AlternateContent xmlns:mc="http://schemas.openxmlformats.org/markup-compatibility/2006">
+    <mc:Choice xmlns:c14="http://schemas.microsoft.com/office/drawing/2007/8/2/chart" Requires="c14">
+      <c14:style val="102"/>
+    </mc:Choice>
+    <mc:Fallback>
+      <c:style val="2"/>
+    </mc:Fallback>
+  </mc:AlternateContent>
+  <c:chart>
+    <c:title>
+      <c:tx>
+        <c:rich>
+          <a:bodyPr rot="0" spcFirstLastPara="1" vertOverflow="ellipsis" vert="horz" wrap="square" anchor="ctr" anchorCtr="1"/>
+          <a:lstStyle/>
+          <a:p>
+            <a:pPr>
+              <a:defRPr sz="1400" b="0" i="0" u="none" strike="noStrike" kern="1200" spc="0" baseline="0">
+                <a:solidFill>
+                  <a:schemeClr val="dk1"/>
+                </a:solidFill>
+                <a:latin typeface="+mn-lt"/>
+                <a:ea typeface="+mn-ea"/>
+                <a:cs typeface="+mn-cs"/>
+              </a:defRPr>
+            </a:pPr>
+            <a:r>
+              <a:rPr lang="en-US"/>
+              <a:t>Fixed N</a:t>
+            </a:r>
+          </a:p>
+        </c:rich>
+      </c:tx>
+      <c:overlay val="0"/>
+      <c:spPr>
+        <a:noFill/>
+        <a:ln>
+          <a:noFill/>
+        </a:ln>
+        <a:effectLst/>
+      </c:spPr>
+      <c:txPr>
+        <a:bodyPr rot="0" spcFirstLastPara="1" vertOverflow="ellipsis" vert="horz" wrap="square" anchor="ctr" anchorCtr="1"/>
+        <a:lstStyle/>
+        <a:p>
+          <a:pPr>
+            <a:defRPr sz="1400" b="0" i="0" u="none" strike="noStrike" kern="1200" spc="0" baseline="0">
+              <a:solidFill>
+                <a:schemeClr val="dk1"/>
+              </a:solidFill>
+              <a:latin typeface="+mn-lt"/>
+              <a:ea typeface="+mn-ea"/>
+              <a:cs typeface="+mn-cs"/>
+            </a:defRPr>
+          </a:pPr>
+          <a:endParaRPr lang="en-US"/>
+        </a:p>
+      </c:txPr>
+    </c:title>
+    <c:autoTitleDeleted val="0"/>
+    <c:plotArea>
+      <c:layout/>
+      <c:lineChart>
+        <c:grouping val="standard"/>
+        <c:varyColors val="0"/>
+        <c:ser>
+          <c:idx val="0"/>
+          <c:order val="0"/>
+          <c:tx>
+            <c:strRef>
+              <c:f>'Exp 2'!$B$1</c:f>
+              <c:strCache>
+                <c:ptCount val="1"/>
+                <c:pt idx="0">
+                  <c:v>Sequential</c:v>
+                </c:pt>
+              </c:strCache>
+            </c:strRef>
+          </c:tx>
+          <c:spPr>
+            <a:ln w="28575" cap="rnd">
+              <a:solidFill>
+                <a:schemeClr val="accent1"/>
+              </a:solidFill>
+              <a:round/>
+            </a:ln>
+            <a:effectLst/>
+          </c:spPr>
+          <c:marker>
+            <c:symbol val="none"/>
+          </c:marker>
+          <c:cat>
+            <c:strRef>
+              <c:f>'Exp 2'!$A$1:$A$25</c:f>
+              <c:strCache>
+                <c:ptCount val="25"/>
+                <c:pt idx="0">
+                  <c:v>n_proc</c:v>
+                </c:pt>
+                <c:pt idx="1">
+                  <c:v>1</c:v>
+                </c:pt>
+                <c:pt idx="2">
+                  <c:v>2</c:v>
+                </c:pt>
+                <c:pt idx="3">
+                  <c:v>3</c:v>
+                </c:pt>
+                <c:pt idx="4">
+                  <c:v>4</c:v>
+                </c:pt>
+                <c:pt idx="5">
+                  <c:v>5</c:v>
+                </c:pt>
+                <c:pt idx="6">
+                  <c:v>6</c:v>
+                </c:pt>
+                <c:pt idx="7">
+                  <c:v>7</c:v>
+                </c:pt>
+                <c:pt idx="8">
+                  <c:v>8</c:v>
+                </c:pt>
+                <c:pt idx="9">
+                  <c:v>9</c:v>
+                </c:pt>
+                <c:pt idx="10">
+                  <c:v>10</c:v>
+                </c:pt>
+                <c:pt idx="11">
+                  <c:v>11</c:v>
+                </c:pt>
+                <c:pt idx="12">
+                  <c:v>12</c:v>
+                </c:pt>
+                <c:pt idx="13">
+                  <c:v>13</c:v>
+                </c:pt>
+                <c:pt idx="14">
+                  <c:v>14</c:v>
+                </c:pt>
+                <c:pt idx="15">
+                  <c:v>15</c:v>
+                </c:pt>
+                <c:pt idx="16">
+                  <c:v>16</c:v>
+                </c:pt>
+                <c:pt idx="17">
+                  <c:v>17</c:v>
+                </c:pt>
+                <c:pt idx="18">
+                  <c:v>18</c:v>
+                </c:pt>
+                <c:pt idx="19">
+                  <c:v>19</c:v>
+                </c:pt>
+                <c:pt idx="20">
+                  <c:v>20</c:v>
+                </c:pt>
+                <c:pt idx="21">
+                  <c:v>21</c:v>
+                </c:pt>
+                <c:pt idx="22">
+                  <c:v>22</c:v>
+                </c:pt>
+                <c:pt idx="23">
+                  <c:v>23</c:v>
+                </c:pt>
+                <c:pt idx="24">
+                  <c:v>24</c:v>
+                </c:pt>
+              </c:strCache>
+            </c:strRef>
+          </c:cat>
+          <c:val>
+            <c:numRef>
+              <c:f>'Exp 2'!$B$2:$B$25</c:f>
+              <c:numCache>
+                <c:formatCode>General</c:formatCode>
+                <c:ptCount val="24"/>
+                <c:pt idx="0">
+                  <c:v>0.103489</c:v>
+                </c:pt>
+                <c:pt idx="1">
+                  <c:v>9.9867999999999998E-2</c:v>
+                </c:pt>
+                <c:pt idx="2">
+                  <c:v>9.9806000000000006E-2</c:v>
+                </c:pt>
+                <c:pt idx="3">
+                  <c:v>0.1008445</c:v>
+                </c:pt>
+                <c:pt idx="4">
+                  <c:v>0.10022</c:v>
+                </c:pt>
+                <c:pt idx="5">
+                  <c:v>0.10116700000000001</c:v>
+                </c:pt>
+                <c:pt idx="6">
+                  <c:v>0.102245</c:v>
+                </c:pt>
+                <c:pt idx="7">
+                  <c:v>0.100771</c:v>
+                </c:pt>
+                <c:pt idx="8">
+                  <c:v>0.10124850000000001</c:v>
+                </c:pt>
+                <c:pt idx="9">
+                  <c:v>0.100906</c:v>
+                </c:pt>
+                <c:pt idx="10">
+                  <c:v>0.10068099999999999</c:v>
+                </c:pt>
+                <c:pt idx="11">
+                  <c:v>0.10137550000000001</c:v>
+                </c:pt>
+                <c:pt idx="12">
+                  <c:v>0.101769</c:v>
+                </c:pt>
+                <c:pt idx="13">
+                  <c:v>0.102979</c:v>
+                </c:pt>
+                <c:pt idx="14">
+                  <c:v>0.1019185</c:v>
+                </c:pt>
+                <c:pt idx="15">
+                  <c:v>0.10226250000000001</c:v>
+                </c:pt>
+                <c:pt idx="16">
+                  <c:v>0.10117950000000001</c:v>
+                </c:pt>
+                <c:pt idx="17">
+                  <c:v>0.10130700000000001</c:v>
+                </c:pt>
+                <c:pt idx="18">
+                  <c:v>0.10117499999999999</c:v>
+                </c:pt>
+                <c:pt idx="19">
+                  <c:v>9.9660499999999999E-2</c:v>
+                </c:pt>
+                <c:pt idx="20">
+                  <c:v>9.9635000000000001E-2</c:v>
+                </c:pt>
+                <c:pt idx="21">
+                  <c:v>0.1011445</c:v>
+                </c:pt>
+                <c:pt idx="22">
+                  <c:v>0.10079199999999999</c:v>
+                </c:pt>
+                <c:pt idx="23">
+                  <c:v>0.10061049999999999</c:v>
+                </c:pt>
+              </c:numCache>
+            </c:numRef>
+          </c:val>
+          <c:smooth val="0"/>
+          <c:extLst>
+            <c:ext xmlns:c16="http://schemas.microsoft.com/office/drawing/2014/chart" uri="{C3380CC4-5D6E-409C-BE32-E72D297353CC}">
+              <c16:uniqueId val="{00000000-3BE2-401B-BDA2-173245FD51A0}"/>
+            </c:ext>
+          </c:extLst>
+        </c:ser>
+        <c:ser>
+          <c:idx val="1"/>
+          <c:order val="1"/>
+          <c:tx>
+            <c:strRef>
+              <c:f>'Exp 2'!$C$1</c:f>
+              <c:strCache>
+                <c:ptCount val="1"/>
+                <c:pt idx="0">
+                  <c:v>Parallel</c:v>
+                </c:pt>
+              </c:strCache>
+            </c:strRef>
+          </c:tx>
+          <c:spPr>
+            <a:ln w="28575" cap="rnd">
+              <a:solidFill>
+                <a:schemeClr val="accent2"/>
+              </a:solidFill>
+              <a:round/>
+            </a:ln>
+            <a:effectLst/>
+          </c:spPr>
+          <c:marker>
+            <c:symbol val="none"/>
+          </c:marker>
+          <c:cat>
+            <c:strRef>
+              <c:f>'Exp 2'!$A$1:$A$25</c:f>
+              <c:strCache>
+                <c:ptCount val="25"/>
+                <c:pt idx="0">
+                  <c:v>n_proc</c:v>
+                </c:pt>
+                <c:pt idx="1">
+                  <c:v>1</c:v>
+                </c:pt>
+                <c:pt idx="2">
+                  <c:v>2</c:v>
+                </c:pt>
+                <c:pt idx="3">
+                  <c:v>3</c:v>
+                </c:pt>
+                <c:pt idx="4">
+                  <c:v>4</c:v>
+                </c:pt>
+                <c:pt idx="5">
+                  <c:v>5</c:v>
+                </c:pt>
+                <c:pt idx="6">
+                  <c:v>6</c:v>
+                </c:pt>
+                <c:pt idx="7">
+                  <c:v>7</c:v>
+                </c:pt>
+                <c:pt idx="8">
+                  <c:v>8</c:v>
+                </c:pt>
+                <c:pt idx="9">
+                  <c:v>9</c:v>
+                </c:pt>
+                <c:pt idx="10">
+                  <c:v>10</c:v>
+                </c:pt>
+                <c:pt idx="11">
+                  <c:v>11</c:v>
+                </c:pt>
+                <c:pt idx="12">
+                  <c:v>12</c:v>
+                </c:pt>
+                <c:pt idx="13">
+                  <c:v>13</c:v>
+                </c:pt>
+                <c:pt idx="14">
+                  <c:v>14</c:v>
+                </c:pt>
+                <c:pt idx="15">
+                  <c:v>15</c:v>
+                </c:pt>
+                <c:pt idx="16">
+                  <c:v>16</c:v>
+                </c:pt>
+                <c:pt idx="17">
+                  <c:v>17</c:v>
+                </c:pt>
+                <c:pt idx="18">
+                  <c:v>18</c:v>
+                </c:pt>
+                <c:pt idx="19">
+                  <c:v>19</c:v>
+                </c:pt>
+                <c:pt idx="20">
+                  <c:v>20</c:v>
+                </c:pt>
+                <c:pt idx="21">
+                  <c:v>21</c:v>
+                </c:pt>
+                <c:pt idx="22">
+                  <c:v>22</c:v>
+                </c:pt>
+                <c:pt idx="23">
+                  <c:v>23</c:v>
+                </c:pt>
+                <c:pt idx="24">
+                  <c:v>24</c:v>
+                </c:pt>
+              </c:strCache>
+            </c:strRef>
+          </c:cat>
+          <c:val>
+            <c:numRef>
+              <c:f>'Exp 2'!$C$2:$C$25</c:f>
+              <c:numCache>
+                <c:formatCode>General</c:formatCode>
+                <c:ptCount val="24"/>
+                <c:pt idx="0">
+                  <c:v>0.104826</c:v>
+                </c:pt>
+                <c:pt idx="1">
+                  <c:v>0.10305500000000001</c:v>
+                </c:pt>
+                <c:pt idx="2">
+                  <c:v>0.1032545</c:v>
+                </c:pt>
+                <c:pt idx="3">
+                  <c:v>0.103062</c:v>
+                </c:pt>
+                <c:pt idx="4">
+                  <c:v>0.10059899999999999</c:v>
+                </c:pt>
+                <c:pt idx="5">
+                  <c:v>8.7485999999999994E-2</c:v>
+                </c:pt>
+                <c:pt idx="6">
+                  <c:v>8.4331000000000003E-2</c:v>
+                </c:pt>
+                <c:pt idx="7">
+                  <c:v>8.4732000000000002E-2</c:v>
+                </c:pt>
+                <c:pt idx="8">
+                  <c:v>8.5403000000000007E-2</c:v>
+                </c:pt>
+                <c:pt idx="9">
+                  <c:v>8.5176000000000002E-2</c:v>
+                </c:pt>
+                <c:pt idx="10">
+                  <c:v>8.3644999999999997E-2</c:v>
+                </c:pt>
+                <c:pt idx="11">
+                  <c:v>9.0492000000000003E-2</c:v>
+                </c:pt>
+                <c:pt idx="12">
+                  <c:v>0.1012055</c:v>
+                </c:pt>
+                <c:pt idx="13">
+                  <c:v>0.1050065</c:v>
+                </c:pt>
+                <c:pt idx="14">
+                  <c:v>0.10381899999999999</c:v>
+                </c:pt>
+                <c:pt idx="15">
+                  <c:v>0.103759</c:v>
+                </c:pt>
+                <c:pt idx="16">
+                  <c:v>0.10378</c:v>
+                </c:pt>
+                <c:pt idx="17">
+                  <c:v>0.10467799999999999</c:v>
+                </c:pt>
+                <c:pt idx="18">
+                  <c:v>0.10412200000000001</c:v>
+                </c:pt>
+                <c:pt idx="19">
+                  <c:v>0.101411</c:v>
+                </c:pt>
+                <c:pt idx="20">
+                  <c:v>0.10011399999999999</c:v>
+                </c:pt>
+                <c:pt idx="21">
+                  <c:v>0.102254</c:v>
+                </c:pt>
+                <c:pt idx="22">
+                  <c:v>0.104657</c:v>
+                </c:pt>
+                <c:pt idx="23">
+                  <c:v>0.10734299999999999</c:v>
+                </c:pt>
+              </c:numCache>
+            </c:numRef>
+          </c:val>
+          <c:smooth val="0"/>
+          <c:extLst>
+            <c:ext xmlns:c16="http://schemas.microsoft.com/office/drawing/2014/chart" uri="{C3380CC4-5D6E-409C-BE32-E72D297353CC}">
+              <c16:uniqueId val="{00000001-3BE2-401B-BDA2-173245FD51A0}"/>
+            </c:ext>
+          </c:extLst>
+        </c:ser>
+        <c:dLbls>
+          <c:showLegendKey val="0"/>
+          <c:showVal val="0"/>
+          <c:showCatName val="0"/>
+          <c:showSerName val="0"/>
+          <c:showPercent val="0"/>
+          <c:showBubbleSize val="0"/>
+        </c:dLbls>
+        <c:smooth val="0"/>
+        <c:axId val="1422034479"/>
+        <c:axId val="1422033039"/>
+      </c:lineChart>
+      <c:catAx>
+        <c:axId val="1422034479"/>
+        <c:scaling>
+          <c:orientation val="minMax"/>
+        </c:scaling>
+        <c:delete val="0"/>
+        <c:axPos val="b"/>
+        <c:numFmt formatCode="General" sourceLinked="1"/>
+        <c:majorTickMark val="none"/>
+        <c:minorTickMark val="none"/>
+        <c:tickLblPos val="nextTo"/>
+        <c:spPr>
+          <a:noFill/>
+          <a:ln w="9525" cap="flat" cmpd="sng" algn="ctr">
+            <a:solidFill>
+              <a:schemeClr val="tx1">
+                <a:lumMod val="15000"/>
+                <a:lumOff val="85000"/>
+              </a:schemeClr>
+            </a:solidFill>
+            <a:round/>
+          </a:ln>
+          <a:effectLst/>
+        </c:spPr>
+        <c:txPr>
+          <a:bodyPr rot="-60000000" spcFirstLastPara="1" vertOverflow="ellipsis" vert="horz" wrap="square" anchor="ctr" anchorCtr="1"/>
+          <a:lstStyle/>
+          <a:p>
+            <a:pPr>
+              <a:defRPr sz="900" b="0" i="0" u="none" strike="noStrike" kern="1200" baseline="0">
+                <a:solidFill>
+                  <a:schemeClr val="dk1"/>
+                </a:solidFill>
+                <a:latin typeface="+mn-lt"/>
+                <a:ea typeface="+mn-ea"/>
+                <a:cs typeface="+mn-cs"/>
+              </a:defRPr>
+            </a:pPr>
+            <a:endParaRPr lang="en-US"/>
+          </a:p>
+        </c:txPr>
+        <c:crossAx val="1422033039"/>
+        <c:crosses val="autoZero"/>
+        <c:auto val="1"/>
+        <c:lblAlgn val="ctr"/>
+        <c:lblOffset val="100"/>
+        <c:noMultiLvlLbl val="0"/>
+      </c:catAx>
+      <c:valAx>
+        <c:axId val="1422033039"/>
+        <c:scaling>
+          <c:orientation val="minMax"/>
+          <c:min val="5.000000000000001E-2"/>
+        </c:scaling>
+        <c:delete val="0"/>
+        <c:axPos val="l"/>
+        <c:majorGridlines>
+          <c:spPr>
+            <a:ln w="9525" cap="flat" cmpd="sng" algn="ctr">
+              <a:solidFill>
+                <a:schemeClr val="tx1">
+                  <a:lumMod val="15000"/>
+                  <a:lumOff val="85000"/>
+                </a:schemeClr>
+              </a:solidFill>
+              <a:round/>
+            </a:ln>
+            <a:effectLst/>
+          </c:spPr>
+        </c:majorGridlines>
+        <c:numFmt formatCode="General" sourceLinked="1"/>
+        <c:majorTickMark val="none"/>
+        <c:minorTickMark val="none"/>
+        <c:tickLblPos val="nextTo"/>
+        <c:spPr>
+          <a:noFill/>
+          <a:ln>
+            <a:noFill/>
+          </a:ln>
+          <a:effectLst/>
+        </c:spPr>
+        <c:txPr>
+          <a:bodyPr rot="-60000000" spcFirstLastPara="1" vertOverflow="ellipsis" vert="horz" wrap="square" anchor="ctr" anchorCtr="1"/>
+          <a:lstStyle/>
+          <a:p>
+            <a:pPr>
+              <a:defRPr sz="900" b="0" i="0" u="none" strike="noStrike" kern="1200" baseline="0">
+                <a:solidFill>
+                  <a:schemeClr val="dk1"/>
+                </a:solidFill>
+                <a:latin typeface="+mn-lt"/>
+                <a:ea typeface="+mn-ea"/>
+                <a:cs typeface="+mn-cs"/>
+              </a:defRPr>
+            </a:pPr>
+            <a:endParaRPr lang="en-US"/>
+          </a:p>
+        </c:txPr>
+        <c:crossAx val="1422034479"/>
+        <c:crosses val="autoZero"/>
+        <c:crossBetween val="between"/>
+      </c:valAx>
+      <c:spPr>
+        <a:solidFill>
+          <a:schemeClr val="lt1"/>
+        </a:solidFill>
+        <a:ln w="12700" cap="flat" cmpd="sng" algn="ctr">
+          <a:solidFill>
+            <a:schemeClr val="dk1"/>
+          </a:solidFill>
+          <a:prstDash val="solid"/>
+          <a:miter lim="800000"/>
+        </a:ln>
+        <a:effectLst/>
+      </c:spPr>
+    </c:plotArea>
+    <c:legend>
+      <c:legendPos val="r"/>
+      <c:overlay val="0"/>
+      <c:spPr>
+        <a:noFill/>
+        <a:ln>
+          <a:noFill/>
+        </a:ln>
+        <a:effectLst/>
+      </c:spPr>
+      <c:txPr>
+        <a:bodyPr rot="0" spcFirstLastPara="1" vertOverflow="ellipsis" vert="horz" wrap="square" anchor="ctr" anchorCtr="1"/>
+        <a:lstStyle/>
+        <a:p>
+          <a:pPr>
+            <a:defRPr sz="900" b="0" i="0" u="none" strike="noStrike" kern="1200" baseline="0">
+              <a:solidFill>
+                <a:schemeClr val="dk1"/>
+              </a:solidFill>
+              <a:latin typeface="+mn-lt"/>
+              <a:ea typeface="+mn-ea"/>
+              <a:cs typeface="+mn-cs"/>
+            </a:defRPr>
+          </a:pPr>
+          <a:endParaRPr lang="en-US"/>
+        </a:p>
+      </c:txPr>
+    </c:legend>
+    <c:plotVisOnly val="1"/>
+    <c:dispBlanksAs val="gap"/>
+    <c:showDLblsOverMax val="0"/>
+    <c:extLst>
+      <c:ext xmlns:c16r3="http://schemas.microsoft.com/office/drawing/2017/03/chart" uri="{56B9EC1D-385E-4148-901F-78D8002777C0}">
+        <c16r3:dataDisplayOptions16>
+          <c16r3:dispNaAsBlank val="1"/>
+        </c16r3:dataDisplayOptions16>
+      </c:ext>
+    </c:extLst>
+  </c:chart>
+  <c:spPr>
+    <a:solidFill>
+      <a:schemeClr val="lt1"/>
+    </a:solidFill>
+    <a:ln w="12700" cap="flat" cmpd="sng" algn="ctr">
+      <a:solidFill>
+        <a:schemeClr val="dk1"/>
+      </a:solidFill>
+      <a:prstDash val="solid"/>
+      <a:miter lim="800000"/>
+    </a:ln>
+    <a:effectLst/>
+  </c:spPr>
+  <c:txPr>
+    <a:bodyPr/>
+    <a:lstStyle/>
+    <a:p>
+      <a:pPr>
+        <a:defRPr>
+          <a:solidFill>
+            <a:schemeClr val="dk1"/>
+          </a:solidFill>
+          <a:latin typeface="+mn-lt"/>
+          <a:ea typeface="+mn-ea"/>
+          <a:cs typeface="+mn-cs"/>
+        </a:defRPr>
+      </a:pPr>
+      <a:endParaRPr lang="en-US"/>
+    </a:p>
+  </c:txPr>
+  <c:externalData r:id="rId3">
+    <c:autoUpdate val="0"/>
+  </c:externalData>
+</c:chartSpace>
+</file>
+
+<file path=ppt/charts/colors1.xml><?xml version="1.0" encoding="utf-8"?>
+<cs:colorStyle xmlns:cs="http://schemas.microsoft.com/office/drawing/2012/chartStyle" xmlns:a="http://schemas.openxmlformats.org/drawingml/2006/main" meth="cycle" id="10">
+  <a:schemeClr val="accent1"/>
+  <a:schemeClr val="accent2"/>
+  <a:schemeClr val="accent3"/>
+  <a:schemeClr val="accent4"/>
+  <a:schemeClr val="accent5"/>
+  <a:schemeClr val="accent6"/>
+  <cs:variation/>
+  <cs:variation>
+    <a:lumMod val="60000"/>
+  </cs:variation>
+  <cs:variation>
+    <a:lumMod val="80000"/>
+    <a:lumOff val="20000"/>
+  </cs:variation>
+  <cs:variation>
+    <a:lumMod val="80000"/>
+  </cs:variation>
+  <cs:variation>
+    <a:lumMod val="60000"/>
+    <a:lumOff val="40000"/>
+  </cs:variation>
+  <cs:variation>
+    <a:lumMod val="50000"/>
+  </cs:variation>
+  <cs:variation>
+    <a:lumMod val="70000"/>
+    <a:lumOff val="30000"/>
+  </cs:variation>
+  <cs:variation>
+    <a:lumMod val="70000"/>
+  </cs:variation>
+  <cs:variation>
+    <a:lumMod val="50000"/>
+    <a:lumOff val="50000"/>
+  </cs:variation>
+</cs:colorStyle>
+</file>
+
+<file path=ppt/charts/colors2.xml><?xml version="1.0" encoding="utf-8"?>
+<cs:colorStyle xmlns:cs="http://schemas.microsoft.com/office/drawing/2012/chartStyle" xmlns:a="http://schemas.openxmlformats.org/drawingml/2006/main" meth="cycle" id="10">
+  <a:schemeClr val="accent1"/>
+  <a:schemeClr val="accent2"/>
+  <a:schemeClr val="accent3"/>
+  <a:schemeClr val="accent4"/>
+  <a:schemeClr val="accent5"/>
+  <a:schemeClr val="accent6"/>
+  <cs:variation/>
+  <cs:variation>
+    <a:lumMod val="60000"/>
+  </cs:variation>
+  <cs:variation>
+    <a:lumMod val="80000"/>
+    <a:lumOff val="20000"/>
+  </cs:variation>
+  <cs:variation>
+    <a:lumMod val="80000"/>
+  </cs:variation>
+  <cs:variation>
+    <a:lumMod val="60000"/>
+    <a:lumOff val="40000"/>
+  </cs:variation>
+  <cs:variation>
+    <a:lumMod val="50000"/>
+  </cs:variation>
+  <cs:variation>
+    <a:lumMod val="70000"/>
+    <a:lumOff val="30000"/>
+  </cs:variation>
+  <cs:variation>
+    <a:lumMod val="70000"/>
+  </cs:variation>
+  <cs:variation>
+    <a:lumMod val="50000"/>
+    <a:lumOff val="50000"/>
+  </cs:variation>
+</cs:colorStyle>
+</file>
+
+<file path=ppt/charts/style1.xml><?xml version="1.0" encoding="utf-8"?>
+<cs:chartStyle xmlns:cs="http://schemas.microsoft.com/office/drawing/2012/chartStyle" xmlns:a="http://schemas.openxmlformats.org/drawingml/2006/main" id="227">
+  <cs:axisTitle>
+    <cs:lnRef idx="0"/>
+    <cs:fillRef idx="0"/>
+    <cs:effectRef idx="0"/>
+    <cs:fontRef idx="minor">
+      <a:schemeClr val="tx1">
+        <a:lumMod val="65000"/>
+        <a:lumOff val="35000"/>
+      </a:schemeClr>
+    </cs:fontRef>
+    <cs:defRPr sz="1000" kern="1200"/>
+  </cs:axisTitle>
+  <cs:categoryAxis>
+    <cs:lnRef idx="0"/>
+    <cs:fillRef idx="0"/>
+    <cs:effectRef idx="0"/>
+    <cs:fontRef idx="minor">
+      <a:schemeClr val="tx1">
+        <a:lumMod val="65000"/>
+        <a:lumOff val="35000"/>
+      </a:schemeClr>
+    </cs:fontRef>
+    <cs:spPr>
+      <a:ln w="9525" cap="flat" cmpd="sng" algn="ctr">
+        <a:solidFill>
+          <a:schemeClr val="tx1">
+            <a:lumMod val="15000"/>
+            <a:lumOff val="85000"/>
+          </a:schemeClr>
+        </a:solidFill>
+        <a:round/>
+      </a:ln>
+    </cs:spPr>
+    <cs:defRPr sz="900" kern="1200"/>
+  </cs:categoryAxis>
+  <cs:chartArea mods="allowNoFillOverride allowNoLineOverride">
+    <cs:lnRef idx="0"/>
+    <cs:fillRef idx="0"/>
+    <cs:effectRef idx="0"/>
+    <cs:fontRef idx="minor">
+      <a:schemeClr val="tx1"/>
+    </cs:fontRef>
+    <cs:spPr>
+      <a:solidFill>
+        <a:schemeClr val="bg1"/>
+      </a:solidFill>
+      <a:ln w="9525" cap="flat" cmpd="sng" algn="ctr">
+        <a:solidFill>
+          <a:schemeClr val="tx1">
+            <a:lumMod val="15000"/>
+            <a:lumOff val="85000"/>
+          </a:schemeClr>
+        </a:solidFill>
+        <a:round/>
+      </a:ln>
+    </cs:spPr>
+    <cs:defRPr sz="1000" kern="1200"/>
+  </cs:chartArea>
+  <cs:dataLabel>
+    <cs:lnRef idx="0"/>
+    <cs:fillRef idx="0"/>
+    <cs:effectRef idx="0"/>
+    <cs:fontRef idx="minor">
+      <a:schemeClr val="tx1">
+        <a:lumMod val="75000"/>
+        <a:lumOff val="25000"/>
+      </a:schemeClr>
+    </cs:fontRef>
+    <cs:defRPr sz="900" kern="1200"/>
+  </cs:dataLabel>
+  <cs:dataLabelCallout>
+    <cs:lnRef idx="0"/>
+    <cs:fillRef idx="0"/>
+    <cs:effectRef idx="0"/>
+    <cs:fontRef idx="minor">
+      <a:schemeClr val="dk1">
+        <a:lumMod val="65000"/>
+        <a:lumOff val="35000"/>
+      </a:schemeClr>
+    </cs:fontRef>
+    <cs:spPr>
+      <a:solidFill>
+        <a:schemeClr val="lt1"/>
+      </a:solidFill>
+      <a:ln>
+        <a:solidFill>
+          <a:schemeClr val="dk1">
+            <a:lumMod val="25000"/>
+            <a:lumOff val="75000"/>
+          </a:schemeClr>
+        </a:solidFill>
+      </a:ln>
+    </cs:spPr>
+    <cs:defRPr sz="900" kern="1200"/>
+    <cs:bodyPr rot="0" spcFirstLastPara="1" vertOverflow="clip" horzOverflow="clip" vert="horz" wrap="square" lIns="36576" tIns="18288" rIns="36576" bIns="18288" anchor="ctr" anchorCtr="1">
+      <a:spAutoFit/>
+    </cs:bodyPr>
+  </cs:dataLabelCallout>
+  <cs:dataPoint>
+    <cs:lnRef idx="0"/>
+    <cs:fillRef idx="1">
+      <cs:styleClr val="auto"/>
+    </cs:fillRef>
+    <cs:effectRef idx="0"/>
+    <cs:fontRef idx="minor">
+      <a:schemeClr val="tx1"/>
+    </cs:fontRef>
+    <cs:spPr>
+      <a:solidFill>
+        <a:schemeClr val="phClr"/>
+      </a:solidFill>
+    </cs:spPr>
+  </cs:dataPoint>
+  <cs:dataPoint3D>
+    <cs:lnRef idx="0"/>
+    <cs:fillRef idx="1">
+      <cs:styleClr val="auto"/>
+    </cs:fillRef>
+    <cs:effectRef idx="0"/>
+    <cs:fontRef idx="minor">
+      <a:schemeClr val="tx1"/>
+    </cs:fontRef>
+    <cs:spPr>
+      <a:solidFill>
+        <a:schemeClr val="phClr"/>
+      </a:solidFill>
+    </cs:spPr>
+  </cs:dataPoint3D>
+  <cs:dataPointLine>
+    <cs:lnRef idx="0">
+      <cs:styleClr val="auto"/>
+    </cs:lnRef>
+    <cs:fillRef idx="1"/>
+    <cs:effectRef idx="0"/>
+    <cs:fontRef idx="minor">
+      <a:schemeClr val="tx1"/>
+    </cs:fontRef>
+    <cs:spPr>
+      <a:ln w="28575" cap="rnd">
+        <a:solidFill>
+          <a:schemeClr val="phClr"/>
+        </a:solidFill>
+        <a:round/>
+      </a:ln>
+    </cs:spPr>
+  </cs:dataPointLine>
+  <cs:dataPointMarker>
+    <cs:lnRef idx="0">
+      <cs:styleClr val="auto"/>
+    </cs:lnRef>
+    <cs:fillRef idx="1">
+      <cs:styleClr val="auto"/>
+    </cs:fillRef>
+    <cs:effectRef idx="0"/>
+    <cs:fontRef idx="minor">
+      <a:schemeClr val="tx1"/>
+    </cs:fontRef>
+    <cs:spPr>
+      <a:solidFill>
+        <a:schemeClr val="phClr"/>
+      </a:solidFill>
+      <a:ln w="9525">
+        <a:solidFill>
+          <a:schemeClr val="phClr"/>
+        </a:solidFill>
+      </a:ln>
+    </cs:spPr>
+  </cs:dataPointMarker>
+  <cs:dataPointMarkerLayout symbol="circle" size="5"/>
+  <cs:dataPointWireframe>
+    <cs:lnRef idx="0">
+      <cs:styleClr val="auto"/>
+    </cs:lnRef>
+    <cs:fillRef idx="1"/>
+    <cs:effectRef idx="0"/>
+    <cs:fontRef idx="minor">
+      <a:schemeClr val="tx1"/>
+    </cs:fontRef>
+    <cs:spPr>
+      <a:ln w="9525" cap="rnd">
+        <a:solidFill>
+          <a:schemeClr val="phClr"/>
+        </a:solidFill>
+        <a:round/>
+      </a:ln>
+    </cs:spPr>
+  </cs:dataPointWireframe>
+  <cs:dataTable>
+    <cs:lnRef idx="0"/>
+    <cs:fillRef idx="0"/>
+    <cs:effectRef idx="0"/>
+    <cs:fontRef idx="minor">
+      <a:schemeClr val="tx1">
+        <a:lumMod val="65000"/>
+        <a:lumOff val="35000"/>
+      </a:schemeClr>
+    </cs:fontRef>
+    <cs:spPr>
+      <a:noFill/>
+      <a:ln w="9525" cap="flat" cmpd="sng" algn="ctr">
+        <a:solidFill>
+          <a:schemeClr val="tx1">
+            <a:lumMod val="15000"/>
+            <a:lumOff val="85000"/>
+          </a:schemeClr>
+        </a:solidFill>
+        <a:round/>
+      </a:ln>
+    </cs:spPr>
+    <cs:defRPr sz="900" kern="1200"/>
+  </cs:dataTable>
+  <cs:downBar>
+    <cs:lnRef idx="0"/>
+    <cs:fillRef idx="0"/>
+    <cs:effectRef idx="0"/>
+    <cs:fontRef idx="minor">
+      <a:schemeClr val="dk1"/>
+    </cs:fontRef>
+    <cs:spPr>
+      <a:solidFill>
+        <a:schemeClr val="dk1">
+          <a:lumMod val="65000"/>
+          <a:lumOff val="35000"/>
+        </a:schemeClr>
+      </a:solidFill>
+      <a:ln w="9525">
+        <a:solidFill>
+          <a:schemeClr val="tx1">
+            <a:lumMod val="65000"/>
+            <a:lumOff val="35000"/>
+          </a:schemeClr>
+        </a:solidFill>
+      </a:ln>
+    </cs:spPr>
+  </cs:downBar>
+  <cs:dropLine>
+    <cs:lnRef idx="0"/>
+    <cs:fillRef idx="0"/>
+    <cs:effectRef idx="0"/>
+    <cs:fontRef idx="minor">
+      <a:schemeClr val="tx1"/>
+    </cs:fontRef>
+    <cs:spPr>
+      <a:ln w="9525" cap="flat" cmpd="sng" algn="ctr">
+        <a:solidFill>
+          <a:schemeClr val="tx1">
+            <a:lumMod val="35000"/>
+            <a:lumOff val="65000"/>
+          </a:schemeClr>
+        </a:solidFill>
+        <a:round/>
+      </a:ln>
+    </cs:spPr>
+  </cs:dropLine>
+  <cs:errorBar>
+    <cs:lnRef idx="0"/>
+    <cs:fillRef idx="0"/>
+    <cs:effectRef idx="0"/>
+    <cs:fontRef idx="minor">
+      <a:schemeClr val="tx1"/>
+    </cs:fontRef>
+    <cs:spPr>
+      <a:ln w="9525" cap="flat" cmpd="sng" algn="ctr">
+        <a:solidFill>
+          <a:schemeClr val="tx1">
+            <a:lumMod val="65000"/>
+            <a:lumOff val="35000"/>
+          </a:schemeClr>
+        </a:solidFill>
+        <a:round/>
+      </a:ln>
+    </cs:spPr>
+  </cs:errorBar>
+  <cs:floor>
+    <cs:lnRef idx="0"/>
+    <cs:fillRef idx="0"/>
+    <cs:effectRef idx="0"/>
+    <cs:fontRef idx="minor">
+      <a:schemeClr val="tx1"/>
+    </cs:fontRef>
+    <cs:spPr>
+      <a:noFill/>
+      <a:ln>
+        <a:noFill/>
+      </a:ln>
+    </cs:spPr>
+  </cs:floor>
+  <cs:gridlineMajor>
+    <cs:lnRef idx="0"/>
+    <cs:fillRef idx="0"/>
+    <cs:effectRef idx="0"/>
+    <cs:fontRef idx="minor">
+      <a:schemeClr val="tx1"/>
+    </cs:fontRef>
+    <cs:spPr>
+      <a:ln w="9525" cap="flat" cmpd="sng" algn="ctr">
+        <a:solidFill>
+          <a:schemeClr val="tx1">
+            <a:lumMod val="15000"/>
+            <a:lumOff val="85000"/>
+          </a:schemeClr>
+        </a:solidFill>
+        <a:round/>
+      </a:ln>
+    </cs:spPr>
+  </cs:gridlineMajor>
+  <cs:gridlineMinor>
+    <cs:lnRef idx="0"/>
+    <cs:fillRef idx="0"/>
+    <cs:effectRef idx="0"/>
+    <cs:fontRef idx="minor">
+      <a:schemeClr val="tx1"/>
+    </cs:fontRef>
+    <cs:spPr>
+      <a:ln w="9525" cap="flat" cmpd="sng" algn="ctr">
+        <a:solidFill>
+          <a:schemeClr val="tx1">
+            <a:lumMod val="5000"/>
+            <a:lumOff val="95000"/>
+          </a:schemeClr>
+        </a:solidFill>
+        <a:round/>
+      </a:ln>
+    </cs:spPr>
+  </cs:gridlineMinor>
+  <cs:hiLoLine>
+    <cs:lnRef idx="0"/>
+    <cs:fillRef idx="0"/>
+    <cs:effectRef idx="0"/>
+    <cs:fontRef idx="minor">
+      <a:schemeClr val="tx1"/>
+    </cs:fontRef>
+    <cs:spPr>
+      <a:ln w="9525" cap="flat" cmpd="sng" algn="ctr">
+        <a:solidFill>
+          <a:schemeClr val="tx1">
+            <a:lumMod val="75000"/>
+            <a:lumOff val="25000"/>
+          </a:schemeClr>
+        </a:solidFill>
+        <a:round/>
+      </a:ln>
+    </cs:spPr>
+  </cs:hiLoLine>
+  <cs:leaderLine>
+    <cs:lnRef idx="0"/>
+    <cs:fillRef idx="0"/>
+    <cs:effectRef idx="0"/>
+    <cs:fontRef idx="minor">
+      <a:schemeClr val="tx1"/>
+    </cs:fontRef>
+    <cs:spPr>
+      <a:ln w="9525" cap="flat" cmpd="sng" algn="ctr">
+        <a:solidFill>
+          <a:schemeClr val="tx1">
+            <a:lumMod val="35000"/>
+            <a:lumOff val="65000"/>
+          </a:schemeClr>
+        </a:solidFill>
+        <a:round/>
+      </a:ln>
+    </cs:spPr>
+  </cs:leaderLine>
+  <cs:legend>
+    <cs:lnRef idx="0"/>
+    <cs:fillRef idx="0"/>
+    <cs:effectRef idx="0"/>
+    <cs:fontRef idx="minor">
+      <a:schemeClr val="tx1">
+        <a:lumMod val="65000"/>
+        <a:lumOff val="35000"/>
+      </a:schemeClr>
+    </cs:fontRef>
+    <cs:defRPr sz="900" kern="1200"/>
+  </cs:legend>
+  <cs:plotArea mods="allowNoFillOverride allowNoLineOverride">
+    <cs:lnRef idx="0"/>
+    <cs:fillRef idx="0"/>
+    <cs:effectRef idx="0"/>
+    <cs:fontRef idx="minor">
+      <a:schemeClr val="tx1"/>
+    </cs:fontRef>
+  </cs:plotArea>
+  <cs:plotArea3D mods="allowNoFillOverride allowNoLineOverride">
+    <cs:lnRef idx="0"/>
+    <cs:fillRef idx="0"/>
+    <cs:effectRef idx="0"/>
+    <cs:fontRef idx="minor">
+      <a:schemeClr val="tx1"/>
+    </cs:fontRef>
+  </cs:plotArea3D>
+  <cs:seriesAxis>
+    <cs:lnRef idx="0"/>
+    <cs:fillRef idx="0"/>
+    <cs:effectRef idx="0"/>
+    <cs:fontRef idx="minor">
+      <a:schemeClr val="tx1">
+        <a:lumMod val="65000"/>
+        <a:lumOff val="35000"/>
+      </a:schemeClr>
+    </cs:fontRef>
+    <cs:defRPr sz="900" kern="1200"/>
+  </cs:seriesAxis>
+  <cs:seriesLine>
+    <cs:lnRef idx="0"/>
+    <cs:fillRef idx="0"/>
+    <cs:effectRef idx="0"/>
+    <cs:fontRef idx="minor">
+      <a:schemeClr val="tx1"/>
+    </cs:fontRef>
+    <cs:spPr>
+      <a:ln w="9525" cap="flat" cmpd="sng" algn="ctr">
+        <a:solidFill>
+          <a:schemeClr val="tx1">
+            <a:lumMod val="35000"/>
+            <a:lumOff val="65000"/>
+          </a:schemeClr>
+        </a:solidFill>
+        <a:round/>
+      </a:ln>
+    </cs:spPr>
+  </cs:seriesLine>
+  <cs:title>
+    <cs:lnRef idx="0"/>
+    <cs:fillRef idx="0"/>
+    <cs:effectRef idx="0"/>
+    <cs:fontRef idx="minor">
+      <a:schemeClr val="tx1">
+        <a:lumMod val="65000"/>
+        <a:lumOff val="35000"/>
+      </a:schemeClr>
+    </cs:fontRef>
+    <cs:defRPr sz="1400" b="0" kern="1200" spc="0" baseline="0"/>
+  </cs:title>
+  <cs:trendline>
+    <cs:lnRef idx="0">
+      <cs:styleClr val="auto"/>
+    </cs:lnRef>
+    <cs:fillRef idx="0"/>
+    <cs:effectRef idx="0"/>
+    <cs:fontRef idx="minor">
+      <a:schemeClr val="tx1"/>
+    </cs:fontRef>
+    <cs:spPr>
+      <a:ln w="19050" cap="rnd">
+        <a:solidFill>
+          <a:schemeClr val="phClr"/>
+        </a:solidFill>
+        <a:prstDash val="sysDot"/>
+      </a:ln>
+    </cs:spPr>
+  </cs:trendline>
+  <cs:trendlineLabel>
+    <cs:lnRef idx="0"/>
+    <cs:fillRef idx="0"/>
+    <cs:effectRef idx="0"/>
+    <cs:fontRef idx="minor">
+      <a:schemeClr val="tx1">
+        <a:lumMod val="65000"/>
+        <a:lumOff val="35000"/>
+      </a:schemeClr>
+    </cs:fontRef>
+    <cs:defRPr sz="900" kern="1200"/>
+  </cs:trendlineLabel>
+  <cs:upBar>
+    <cs:lnRef idx="0"/>
+    <cs:fillRef idx="0"/>
+    <cs:effectRef idx="0"/>
+    <cs:fontRef idx="minor">
+      <a:schemeClr val="dk1"/>
+    </cs:fontRef>
+    <cs:spPr>
+      <a:solidFill>
+        <a:schemeClr val="lt1"/>
+      </a:solidFill>
+      <a:ln w="9525">
+        <a:solidFill>
+          <a:schemeClr val="tx1">
+            <a:lumMod val="15000"/>
+            <a:lumOff val="85000"/>
+          </a:schemeClr>
+        </a:solidFill>
+      </a:ln>
+    </cs:spPr>
+  </cs:upBar>
+  <cs:valueAxis>
+    <cs:lnRef idx="0"/>
+    <cs:fillRef idx="0"/>
+    <cs:effectRef idx="0"/>
+    <cs:fontRef idx="minor">
+      <a:schemeClr val="tx1">
+        <a:lumMod val="65000"/>
+        <a:lumOff val="35000"/>
+      </a:schemeClr>
+    </cs:fontRef>
+    <cs:defRPr sz="900" kern="1200"/>
+  </cs:valueAxis>
+  <cs:wall>
+    <cs:lnRef idx="0"/>
+    <cs:fillRef idx="0"/>
+    <cs:effectRef idx="0"/>
+    <cs:fontRef idx="minor">
+      <a:schemeClr val="tx1"/>
+    </cs:fontRef>
+    <cs:spPr>
+      <a:noFill/>
+      <a:ln>
+        <a:noFill/>
+      </a:ln>
+    </cs:spPr>
+  </cs:wall>
+</cs:chartStyle>
+</file>
+
+<file path=ppt/charts/style2.xml><?xml version="1.0" encoding="utf-8"?>
+<cs:chartStyle xmlns:cs="http://schemas.microsoft.com/office/drawing/2012/chartStyle" xmlns:a="http://schemas.openxmlformats.org/drawingml/2006/main" id="227">
+  <cs:axisTitle>
+    <cs:lnRef idx="0"/>
+    <cs:fillRef idx="0"/>
+    <cs:effectRef idx="0"/>
+    <cs:fontRef idx="minor">
+      <a:schemeClr val="tx1">
+        <a:lumMod val="65000"/>
+        <a:lumOff val="35000"/>
+      </a:schemeClr>
+    </cs:fontRef>
+    <cs:defRPr sz="1000" kern="1200"/>
+  </cs:axisTitle>
+  <cs:categoryAxis>
+    <cs:lnRef idx="0"/>
+    <cs:fillRef idx="0"/>
+    <cs:effectRef idx="0"/>
+    <cs:fontRef idx="minor">
+      <a:schemeClr val="tx1">
+        <a:lumMod val="65000"/>
+        <a:lumOff val="35000"/>
+      </a:schemeClr>
+    </cs:fontRef>
+    <cs:spPr>
+      <a:ln w="9525" cap="flat" cmpd="sng" algn="ctr">
+        <a:solidFill>
+          <a:schemeClr val="tx1">
+            <a:lumMod val="15000"/>
+            <a:lumOff val="85000"/>
+          </a:schemeClr>
+        </a:solidFill>
+        <a:round/>
+      </a:ln>
+    </cs:spPr>
+    <cs:defRPr sz="900" kern="1200"/>
+  </cs:categoryAxis>
+  <cs:chartArea mods="allowNoFillOverride allowNoLineOverride">
+    <cs:lnRef idx="0"/>
+    <cs:fillRef idx="0"/>
+    <cs:effectRef idx="0"/>
+    <cs:fontRef idx="minor">
+      <a:schemeClr val="tx1"/>
+    </cs:fontRef>
+    <cs:spPr>
+      <a:solidFill>
+        <a:schemeClr val="bg1"/>
+      </a:solidFill>
+      <a:ln w="9525" cap="flat" cmpd="sng" algn="ctr">
+        <a:solidFill>
+          <a:schemeClr val="tx1">
+            <a:lumMod val="15000"/>
+            <a:lumOff val="85000"/>
+          </a:schemeClr>
+        </a:solidFill>
+        <a:round/>
+      </a:ln>
+    </cs:spPr>
+    <cs:defRPr sz="1000" kern="1200"/>
+  </cs:chartArea>
+  <cs:dataLabel>
+    <cs:lnRef idx="0"/>
+    <cs:fillRef idx="0"/>
+    <cs:effectRef idx="0"/>
+    <cs:fontRef idx="minor">
+      <a:schemeClr val="tx1">
+        <a:lumMod val="75000"/>
+        <a:lumOff val="25000"/>
+      </a:schemeClr>
+    </cs:fontRef>
+    <cs:defRPr sz="900" kern="1200"/>
+  </cs:dataLabel>
+  <cs:dataLabelCallout>
+    <cs:lnRef idx="0"/>
+    <cs:fillRef idx="0"/>
+    <cs:effectRef idx="0"/>
+    <cs:fontRef idx="minor">
+      <a:schemeClr val="dk1">
+        <a:lumMod val="65000"/>
+        <a:lumOff val="35000"/>
+      </a:schemeClr>
+    </cs:fontRef>
+    <cs:spPr>
+      <a:solidFill>
+        <a:schemeClr val="lt1"/>
+      </a:solidFill>
+      <a:ln>
+        <a:solidFill>
+          <a:schemeClr val="dk1">
+            <a:lumMod val="25000"/>
+            <a:lumOff val="75000"/>
+          </a:schemeClr>
+        </a:solidFill>
+      </a:ln>
+    </cs:spPr>
+    <cs:defRPr sz="900" kern="1200"/>
+    <cs:bodyPr rot="0" spcFirstLastPara="1" vertOverflow="clip" horzOverflow="clip" vert="horz" wrap="square" lIns="36576" tIns="18288" rIns="36576" bIns="18288" anchor="ctr" anchorCtr="1">
+      <a:spAutoFit/>
+    </cs:bodyPr>
+  </cs:dataLabelCallout>
+  <cs:dataPoint>
+    <cs:lnRef idx="0"/>
+    <cs:fillRef idx="1">
+      <cs:styleClr val="auto"/>
+    </cs:fillRef>
+    <cs:effectRef idx="0"/>
+    <cs:fontRef idx="minor">
+      <a:schemeClr val="tx1"/>
+    </cs:fontRef>
+    <cs:spPr>
+      <a:solidFill>
+        <a:schemeClr val="phClr"/>
+      </a:solidFill>
+    </cs:spPr>
+  </cs:dataPoint>
+  <cs:dataPoint3D>
+    <cs:lnRef idx="0"/>
+    <cs:fillRef idx="1">
+      <cs:styleClr val="auto"/>
+    </cs:fillRef>
+    <cs:effectRef idx="0"/>
+    <cs:fontRef idx="minor">
+      <a:schemeClr val="tx1"/>
+    </cs:fontRef>
+    <cs:spPr>
+      <a:solidFill>
+        <a:schemeClr val="phClr"/>
+      </a:solidFill>
+    </cs:spPr>
+  </cs:dataPoint3D>
+  <cs:dataPointLine>
+    <cs:lnRef idx="0">
+      <cs:styleClr val="auto"/>
+    </cs:lnRef>
+    <cs:fillRef idx="1"/>
+    <cs:effectRef idx="0"/>
+    <cs:fontRef idx="minor">
+      <a:schemeClr val="tx1"/>
+    </cs:fontRef>
+    <cs:spPr>
+      <a:ln w="28575" cap="rnd">
+        <a:solidFill>
+          <a:schemeClr val="phClr"/>
+        </a:solidFill>
+        <a:round/>
+      </a:ln>
+    </cs:spPr>
+  </cs:dataPointLine>
+  <cs:dataPointMarker>
+    <cs:lnRef idx="0">
+      <cs:styleClr val="auto"/>
+    </cs:lnRef>
+    <cs:fillRef idx="1">
+      <cs:styleClr val="auto"/>
+    </cs:fillRef>
+    <cs:effectRef idx="0"/>
+    <cs:fontRef idx="minor">
+      <a:schemeClr val="tx1"/>
+    </cs:fontRef>
+    <cs:spPr>
+      <a:solidFill>
+        <a:schemeClr val="phClr"/>
+      </a:solidFill>
+      <a:ln w="9525">
+        <a:solidFill>
+          <a:schemeClr val="phClr"/>
+        </a:solidFill>
+      </a:ln>
+    </cs:spPr>
+  </cs:dataPointMarker>
+  <cs:dataPointMarkerLayout symbol="circle" size="5"/>
+  <cs:dataPointWireframe>
+    <cs:lnRef idx="0">
+      <cs:styleClr val="auto"/>
+    </cs:lnRef>
+    <cs:fillRef idx="1"/>
+    <cs:effectRef idx="0"/>
+    <cs:fontRef idx="minor">
+      <a:schemeClr val="tx1"/>
+    </cs:fontRef>
+    <cs:spPr>
+      <a:ln w="9525" cap="rnd">
+        <a:solidFill>
+          <a:schemeClr val="phClr"/>
+        </a:solidFill>
+        <a:round/>
+      </a:ln>
+    </cs:spPr>
+  </cs:dataPointWireframe>
+  <cs:dataTable>
+    <cs:lnRef idx="0"/>
+    <cs:fillRef idx="0"/>
+    <cs:effectRef idx="0"/>
+    <cs:fontRef idx="minor">
+      <a:schemeClr val="tx1">
+        <a:lumMod val="65000"/>
+        <a:lumOff val="35000"/>
+      </a:schemeClr>
+    </cs:fontRef>
+    <cs:spPr>
+      <a:noFill/>
+      <a:ln w="9525" cap="flat" cmpd="sng" algn="ctr">
+        <a:solidFill>
+          <a:schemeClr val="tx1">
+            <a:lumMod val="15000"/>
+            <a:lumOff val="85000"/>
+          </a:schemeClr>
+        </a:solidFill>
+        <a:round/>
+      </a:ln>
+    </cs:spPr>
+    <cs:defRPr sz="900" kern="1200"/>
+  </cs:dataTable>
+  <cs:downBar>
+    <cs:lnRef idx="0"/>
+    <cs:fillRef idx="0"/>
+    <cs:effectRef idx="0"/>
+    <cs:fontRef idx="minor">
+      <a:schemeClr val="dk1"/>
+    </cs:fontRef>
+    <cs:spPr>
+      <a:solidFill>
+        <a:schemeClr val="dk1">
+          <a:lumMod val="65000"/>
+          <a:lumOff val="35000"/>
+        </a:schemeClr>
+      </a:solidFill>
+      <a:ln w="9525">
+        <a:solidFill>
+          <a:schemeClr val="tx1">
+            <a:lumMod val="65000"/>
+            <a:lumOff val="35000"/>
+          </a:schemeClr>
+        </a:solidFill>
+      </a:ln>
+    </cs:spPr>
+  </cs:downBar>
+  <cs:dropLine>
+    <cs:lnRef idx="0"/>
+    <cs:fillRef idx="0"/>
+    <cs:effectRef idx="0"/>
+    <cs:fontRef idx="minor">
+      <a:schemeClr val="tx1"/>
+    </cs:fontRef>
+    <cs:spPr>
+      <a:ln w="9525" cap="flat" cmpd="sng" algn="ctr">
+        <a:solidFill>
+          <a:schemeClr val="tx1">
+            <a:lumMod val="35000"/>
+            <a:lumOff val="65000"/>
+          </a:schemeClr>
+        </a:solidFill>
+        <a:round/>
+      </a:ln>
+    </cs:spPr>
+  </cs:dropLine>
+  <cs:errorBar>
+    <cs:lnRef idx="0"/>
+    <cs:fillRef idx="0"/>
+    <cs:effectRef idx="0"/>
+    <cs:fontRef idx="minor">
+      <a:schemeClr val="tx1"/>
+    </cs:fontRef>
+    <cs:spPr>
+      <a:ln w="9525" cap="flat" cmpd="sng" algn="ctr">
+        <a:solidFill>
+          <a:schemeClr val="tx1">
+            <a:lumMod val="65000"/>
+            <a:lumOff val="35000"/>
+          </a:schemeClr>
+        </a:solidFill>
+        <a:round/>
+      </a:ln>
+    </cs:spPr>
+  </cs:errorBar>
+  <cs:floor>
+    <cs:lnRef idx="0"/>
+    <cs:fillRef idx="0"/>
+    <cs:effectRef idx="0"/>
+    <cs:fontRef idx="minor">
+      <a:schemeClr val="tx1"/>
+    </cs:fontRef>
+    <cs:spPr>
+      <a:noFill/>
+      <a:ln>
+        <a:noFill/>
+      </a:ln>
+    </cs:spPr>
+  </cs:floor>
+  <cs:gridlineMajor>
+    <cs:lnRef idx="0"/>
+    <cs:fillRef idx="0"/>
+    <cs:effectRef idx="0"/>
+    <cs:fontRef idx="minor">
+      <a:schemeClr val="tx1"/>
+    </cs:fontRef>
+    <cs:spPr>
+      <a:ln w="9525" cap="flat" cmpd="sng" algn="ctr">
+        <a:solidFill>
+          <a:schemeClr val="tx1">
+            <a:lumMod val="15000"/>
+            <a:lumOff val="85000"/>
+          </a:schemeClr>
+        </a:solidFill>
+        <a:round/>
+      </a:ln>
+    </cs:spPr>
+  </cs:gridlineMajor>
+  <cs:gridlineMinor>
+    <cs:lnRef idx="0"/>
+    <cs:fillRef idx="0"/>
+    <cs:effectRef idx="0"/>
+    <cs:fontRef idx="minor">
+      <a:schemeClr val="tx1"/>
+    </cs:fontRef>
+    <cs:spPr>
+      <a:ln w="9525" cap="flat" cmpd="sng" algn="ctr">
+        <a:solidFill>
+          <a:schemeClr val="tx1">
+            <a:lumMod val="5000"/>
+            <a:lumOff val="95000"/>
+          </a:schemeClr>
+        </a:solidFill>
+        <a:round/>
+      </a:ln>
+    </cs:spPr>
+  </cs:gridlineMinor>
+  <cs:hiLoLine>
+    <cs:lnRef idx="0"/>
+    <cs:fillRef idx="0"/>
+    <cs:effectRef idx="0"/>
+    <cs:fontRef idx="minor">
+      <a:schemeClr val="tx1"/>
+    </cs:fontRef>
+    <cs:spPr>
+      <a:ln w="9525" cap="flat" cmpd="sng" algn="ctr">
+        <a:solidFill>
+          <a:schemeClr val="tx1">
+            <a:lumMod val="75000"/>
+            <a:lumOff val="25000"/>
+          </a:schemeClr>
+        </a:solidFill>
+        <a:round/>
+      </a:ln>
+    </cs:spPr>
+  </cs:hiLoLine>
+  <cs:leaderLine>
+    <cs:lnRef idx="0"/>
+    <cs:fillRef idx="0"/>
+    <cs:effectRef idx="0"/>
+    <cs:fontRef idx="minor">
+      <a:schemeClr val="tx1"/>
+    </cs:fontRef>
+    <cs:spPr>
+      <a:ln w="9525" cap="flat" cmpd="sng" algn="ctr">
+        <a:solidFill>
+          <a:schemeClr val="tx1">
+            <a:lumMod val="35000"/>
+            <a:lumOff val="65000"/>
+          </a:schemeClr>
+        </a:solidFill>
+        <a:round/>
+      </a:ln>
+    </cs:spPr>
+  </cs:leaderLine>
+  <cs:legend>
+    <cs:lnRef idx="0"/>
+    <cs:fillRef idx="0"/>
+    <cs:effectRef idx="0"/>
+    <cs:fontRef idx="minor">
+      <a:schemeClr val="tx1">
+        <a:lumMod val="65000"/>
+        <a:lumOff val="35000"/>
+      </a:schemeClr>
+    </cs:fontRef>
+    <cs:defRPr sz="900" kern="1200"/>
+  </cs:legend>
+  <cs:plotArea mods="allowNoFillOverride allowNoLineOverride">
+    <cs:lnRef idx="0"/>
+    <cs:fillRef idx="0"/>
+    <cs:effectRef idx="0"/>
+    <cs:fontRef idx="minor">
+      <a:schemeClr val="tx1"/>
+    </cs:fontRef>
+  </cs:plotArea>
+  <cs:plotArea3D mods="allowNoFillOverride allowNoLineOverride">
+    <cs:lnRef idx="0"/>
+    <cs:fillRef idx="0"/>
+    <cs:effectRef idx="0"/>
+    <cs:fontRef idx="minor">
+      <a:schemeClr val="tx1"/>
+    </cs:fontRef>
+  </cs:plotArea3D>
+  <cs:seriesAxis>
+    <cs:lnRef idx="0"/>
+    <cs:fillRef idx="0"/>
+    <cs:effectRef idx="0"/>
+    <cs:fontRef idx="minor">
+      <a:schemeClr val="tx1">
+        <a:lumMod val="65000"/>
+        <a:lumOff val="35000"/>
+      </a:schemeClr>
+    </cs:fontRef>
+    <cs:defRPr sz="900" kern="1200"/>
+  </cs:seriesAxis>
+  <cs:seriesLine>
+    <cs:lnRef idx="0"/>
+    <cs:fillRef idx="0"/>
+    <cs:effectRef idx="0"/>
+    <cs:fontRef idx="minor">
+      <a:schemeClr val="tx1"/>
+    </cs:fontRef>
+    <cs:spPr>
+      <a:ln w="9525" cap="flat" cmpd="sng" algn="ctr">
+        <a:solidFill>
+          <a:schemeClr val="tx1">
+            <a:lumMod val="35000"/>
+            <a:lumOff val="65000"/>
+          </a:schemeClr>
+        </a:solidFill>
+        <a:round/>
+      </a:ln>
+    </cs:spPr>
+  </cs:seriesLine>
+  <cs:title>
+    <cs:lnRef idx="0"/>
+    <cs:fillRef idx="0"/>
+    <cs:effectRef idx="0"/>
+    <cs:fontRef idx="minor">
+      <a:schemeClr val="tx1">
+        <a:lumMod val="65000"/>
+        <a:lumOff val="35000"/>
+      </a:schemeClr>
+    </cs:fontRef>
+    <cs:defRPr sz="1400" b="0" kern="1200" spc="0" baseline="0"/>
+  </cs:title>
+  <cs:trendline>
+    <cs:lnRef idx="0">
+      <cs:styleClr val="auto"/>
+    </cs:lnRef>
+    <cs:fillRef idx="0"/>
+    <cs:effectRef idx="0"/>
+    <cs:fontRef idx="minor">
+      <a:schemeClr val="tx1"/>
+    </cs:fontRef>
+    <cs:spPr>
+      <a:ln w="19050" cap="rnd">
+        <a:solidFill>
+          <a:schemeClr val="phClr"/>
+        </a:solidFill>
+        <a:prstDash val="sysDot"/>
+      </a:ln>
+    </cs:spPr>
+  </cs:trendline>
+  <cs:trendlineLabel>
+    <cs:lnRef idx="0"/>
+    <cs:fillRef idx="0"/>
+    <cs:effectRef idx="0"/>
+    <cs:fontRef idx="minor">
+      <a:schemeClr val="tx1">
+        <a:lumMod val="65000"/>
+        <a:lumOff val="35000"/>
+      </a:schemeClr>
+    </cs:fontRef>
+    <cs:defRPr sz="900" kern="1200"/>
+  </cs:trendlineLabel>
+  <cs:upBar>
+    <cs:lnRef idx="0"/>
+    <cs:fillRef idx="0"/>
+    <cs:effectRef idx="0"/>
+    <cs:fontRef idx="minor">
+      <a:schemeClr val="dk1"/>
+    </cs:fontRef>
+    <cs:spPr>
+      <a:solidFill>
+        <a:schemeClr val="lt1"/>
+      </a:solidFill>
+      <a:ln w="9525">
+        <a:solidFill>
+          <a:schemeClr val="tx1">
+            <a:lumMod val="15000"/>
+            <a:lumOff val="85000"/>
+          </a:schemeClr>
+        </a:solidFill>
+      </a:ln>
+    </cs:spPr>
+  </cs:upBar>
+  <cs:valueAxis>
+    <cs:lnRef idx="0"/>
+    <cs:fillRef idx="0"/>
+    <cs:effectRef idx="0"/>
+    <cs:fontRef idx="minor">
+      <a:schemeClr val="tx1">
+        <a:lumMod val="65000"/>
+        <a:lumOff val="35000"/>
+      </a:schemeClr>
+    </cs:fontRef>
+    <cs:defRPr sz="900" kern="1200"/>
+  </cs:valueAxis>
+  <cs:wall>
+    <cs:lnRef idx="0"/>
+    <cs:fillRef idx="0"/>
+    <cs:effectRef idx="0"/>
+    <cs:fontRef idx="minor">
+      <a:schemeClr val="tx1"/>
+    </cs:fontRef>
+    <cs:spPr>
+      <a:noFill/>
+      <a:ln>
+        <a:noFill/>
+      </a:ln>
+    </cs:spPr>
+  </cs:wall>
+</cs:chartStyle>
 </file>
 
 <file path=ppt/notesMasters/notesMaster1.xml><?xml version="1.0" encoding="utf-8"?>
@@ -320,6 +3676,774 @@
     <p:extLst>
       <p:ext uri="{BB962C8B-B14F-4D97-AF65-F5344CB8AC3E}">
         <p14:creationId xmlns:p14="http://schemas.microsoft.com/office/powerpoint/2010/main" val="1024086991"/>
+      </p:ext>
+    </p:extLst>
+  </p:cSld>
+  <p:clrMapOvr>
+    <a:masterClrMapping/>
+  </p:clrMapOvr>
+</p:notes>
+</file>
+
+<file path=ppt/notesSlides/notesSlide10.xml><?xml version="1.0" encoding="utf-8"?>
+<p:notes xmlns:a="http://schemas.openxmlformats.org/drawingml/2006/main" xmlns:r="http://schemas.openxmlformats.org/officeDocument/2006/relationships" xmlns:p="http://schemas.openxmlformats.org/presentationml/2006/main">
+  <p:cSld>
+    <p:spTree>
+      <p:nvGrpSpPr>
+        <p:cNvPr id="1" name="">
+          <a:extLst>
+            <a:ext uri="{FF2B5EF4-FFF2-40B4-BE49-F238E27FC236}">
+              <a16:creationId xmlns:a16="http://schemas.microsoft.com/office/drawing/2014/main" id="{D1A1F5A7-A541-300A-1F24-A26340151008}"/>
+            </a:ext>
+          </a:extLst>
+        </p:cNvPr>
+        <p:cNvGrpSpPr/>
+        <p:nvPr/>
+      </p:nvGrpSpPr>
+      <p:grpSpPr>
+        <a:xfrm>
+          <a:off x="0" y="0"/>
+          <a:ext cx="0" cy="0"/>
+          <a:chOff x="0" y="0"/>
+          <a:chExt cx="0" cy="0"/>
+        </a:xfrm>
+      </p:grpSpPr>
+      <p:sp>
+        <p:nvSpPr>
+          <p:cNvPr id="2" name="Slide Image Placeholder 1">
+            <a:extLst>
+              <a:ext uri="{FF2B5EF4-FFF2-40B4-BE49-F238E27FC236}">
+                <a16:creationId xmlns:a16="http://schemas.microsoft.com/office/drawing/2014/main" id="{27633D75-3FDA-4445-8C5B-77F23074F321}"/>
+              </a:ext>
+            </a:extLst>
+          </p:cNvPr>
+          <p:cNvSpPr>
+            <a:spLocks noGrp="1" noRot="1" noChangeAspect="1"/>
+          </p:cNvSpPr>
+          <p:nvPr>
+            <p:ph type="sldImg"/>
+          </p:nvPr>
+        </p:nvSpPr>
+        <p:spPr/>
+      </p:sp>
+      <p:sp>
+        <p:nvSpPr>
+          <p:cNvPr id="3" name="Notes Placeholder 2">
+            <a:extLst>
+              <a:ext uri="{FF2B5EF4-FFF2-40B4-BE49-F238E27FC236}">
+                <a16:creationId xmlns:a16="http://schemas.microsoft.com/office/drawing/2014/main" id="{7558953A-C582-5D8C-353E-E2F02981829E}"/>
+              </a:ext>
+            </a:extLst>
+          </p:cNvPr>
+          <p:cNvSpPr>
+            <a:spLocks noGrp="1"/>
+          </p:cNvSpPr>
+          <p:nvPr>
+            <p:ph type="body" idx="1"/>
+          </p:nvPr>
+        </p:nvSpPr>
+        <p:spPr/>
+        <p:txBody>
+          <a:bodyPr/>
+          <a:lstStyle/>
+          <a:p>
+            <a:endParaRPr lang="en-US" dirty="0"/>
+          </a:p>
+        </p:txBody>
+      </p:sp>
+      <p:sp>
+        <p:nvSpPr>
+          <p:cNvPr id="4" name="Slide Number Placeholder 3">
+            <a:extLst>
+              <a:ext uri="{FF2B5EF4-FFF2-40B4-BE49-F238E27FC236}">
+                <a16:creationId xmlns:a16="http://schemas.microsoft.com/office/drawing/2014/main" id="{BEBE1D88-728E-A6B2-484C-B3F8EA5732E1}"/>
+              </a:ext>
+            </a:extLst>
+          </p:cNvPr>
+          <p:cNvSpPr>
+            <a:spLocks noGrp="1"/>
+          </p:cNvSpPr>
+          <p:nvPr>
+            <p:ph type="sldNum" sz="quarter" idx="10"/>
+          </p:nvPr>
+        </p:nvSpPr>
+        <p:spPr/>
+        <p:txBody>
+          <a:bodyPr/>
+          <a:lstStyle/>
+          <a:p>
+            <a:pPr marL="0" marR="0" lvl="0" indent="0" algn="l" defTabSz="914400" rtl="0" eaLnBrk="1" fontAlgn="auto" latinLnBrk="0" hangingPunct="1">
+              <a:lnSpc>
+                <a:spcPct val="100000"/>
+              </a:lnSpc>
+              <a:spcBef>
+                <a:spcPts val="0"/>
+              </a:spcBef>
+              <a:spcAft>
+                <a:spcPts val="0"/>
+              </a:spcAft>
+              <a:buClrTx/>
+              <a:buSzTx/>
+              <a:buFontTx/>
+              <a:buNone/>
+              <a:tabLst/>
+              <a:defRPr/>
+            </a:pPr>
+            <a:fld id="{F7021451-1387-4CA6-816F-3879F97B5CBC}" type="slidenum">
+              <a:rPr kumimoji="0" lang="en-US" sz="1800" b="0" i="0" u="none" strike="noStrike" kern="1200" cap="none" spc="0" normalizeH="0" baseline="0" noProof="0">
+                <a:ln>
+                  <a:noFill/>
+                </a:ln>
+                <a:solidFill>
+                  <a:prstClr val="black"/>
+                </a:solidFill>
+                <a:effectLst/>
+                <a:uLnTx/>
+                <a:uFillTx/>
+                <a:latin typeface="Aptos" panose="02110004020202020204"/>
+                <a:ea typeface="+mn-ea"/>
+                <a:cs typeface="+mn-cs"/>
+              </a:rPr>
+              <a:pPr marL="0" marR="0" lvl="0" indent="0" algn="l" defTabSz="914400" rtl="0" eaLnBrk="1" fontAlgn="auto" latinLnBrk="0" hangingPunct="1">
+                <a:lnSpc>
+                  <a:spcPct val="100000"/>
+                </a:lnSpc>
+                <a:spcBef>
+                  <a:spcPts val="0"/>
+                </a:spcBef>
+                <a:spcAft>
+                  <a:spcPts val="0"/>
+                </a:spcAft>
+                <a:buClrTx/>
+                <a:buSzTx/>
+                <a:buFontTx/>
+                <a:buNone/>
+                <a:tabLst/>
+                <a:defRPr/>
+              </a:pPr>
+              <a:t>10</a:t>
+            </a:fld>
+            <a:endParaRPr kumimoji="0" lang="en-US" sz="1800" b="0" i="0" u="none" strike="noStrike" kern="1200" cap="none" spc="0" normalizeH="0" baseline="0" noProof="0">
+              <a:ln>
+                <a:noFill/>
+              </a:ln>
+              <a:solidFill>
+                <a:prstClr val="black"/>
+              </a:solidFill>
+              <a:effectLst/>
+              <a:uLnTx/>
+              <a:uFillTx/>
+              <a:latin typeface="Aptos" panose="02110004020202020204"/>
+              <a:ea typeface="+mn-ea"/>
+              <a:cs typeface="+mn-cs"/>
+            </a:endParaRPr>
+          </a:p>
+        </p:txBody>
+      </p:sp>
+    </p:spTree>
+    <p:extLst>
+      <p:ext uri="{BB962C8B-B14F-4D97-AF65-F5344CB8AC3E}">
+        <p14:creationId xmlns:p14="http://schemas.microsoft.com/office/powerpoint/2010/main" val="3586492357"/>
+      </p:ext>
+    </p:extLst>
+  </p:cSld>
+  <p:clrMapOvr>
+    <a:masterClrMapping/>
+  </p:clrMapOvr>
+</p:notes>
+</file>
+
+<file path=ppt/notesSlides/notesSlide11.xml><?xml version="1.0" encoding="utf-8"?>
+<p:notes xmlns:a="http://schemas.openxmlformats.org/drawingml/2006/main" xmlns:r="http://schemas.openxmlformats.org/officeDocument/2006/relationships" xmlns:p="http://schemas.openxmlformats.org/presentationml/2006/main">
+  <p:cSld>
+    <p:spTree>
+      <p:nvGrpSpPr>
+        <p:cNvPr id="1" name="">
+          <a:extLst>
+            <a:ext uri="{FF2B5EF4-FFF2-40B4-BE49-F238E27FC236}">
+              <a16:creationId xmlns:a16="http://schemas.microsoft.com/office/drawing/2014/main" id="{83296808-B2AF-E4AE-3550-8F695D75A722}"/>
+            </a:ext>
+          </a:extLst>
+        </p:cNvPr>
+        <p:cNvGrpSpPr/>
+        <p:nvPr/>
+      </p:nvGrpSpPr>
+      <p:grpSpPr>
+        <a:xfrm>
+          <a:off x="0" y="0"/>
+          <a:ext cx="0" cy="0"/>
+          <a:chOff x="0" y="0"/>
+          <a:chExt cx="0" cy="0"/>
+        </a:xfrm>
+      </p:grpSpPr>
+      <p:sp>
+        <p:nvSpPr>
+          <p:cNvPr id="2" name="Slide Image Placeholder 1">
+            <a:extLst>
+              <a:ext uri="{FF2B5EF4-FFF2-40B4-BE49-F238E27FC236}">
+                <a16:creationId xmlns:a16="http://schemas.microsoft.com/office/drawing/2014/main" id="{E0F9D691-9EF1-5EC9-5DCA-A18F43077FD5}"/>
+              </a:ext>
+            </a:extLst>
+          </p:cNvPr>
+          <p:cNvSpPr>
+            <a:spLocks noGrp="1" noRot="1" noChangeAspect="1"/>
+          </p:cNvSpPr>
+          <p:nvPr>
+            <p:ph type="sldImg"/>
+          </p:nvPr>
+        </p:nvSpPr>
+        <p:spPr/>
+      </p:sp>
+      <p:sp>
+        <p:nvSpPr>
+          <p:cNvPr id="3" name="Notes Placeholder 2">
+            <a:extLst>
+              <a:ext uri="{FF2B5EF4-FFF2-40B4-BE49-F238E27FC236}">
+                <a16:creationId xmlns:a16="http://schemas.microsoft.com/office/drawing/2014/main" id="{BDDFE3AB-E1B3-9739-EB1F-4CEAACB5EE39}"/>
+              </a:ext>
+            </a:extLst>
+          </p:cNvPr>
+          <p:cNvSpPr>
+            <a:spLocks noGrp="1"/>
+          </p:cNvSpPr>
+          <p:nvPr>
+            <p:ph type="body" idx="1"/>
+          </p:nvPr>
+        </p:nvSpPr>
+        <p:spPr/>
+        <p:txBody>
+          <a:bodyPr/>
+          <a:lstStyle/>
+          <a:p>
+            <a:endParaRPr lang="en-US" dirty="0"/>
+          </a:p>
+        </p:txBody>
+      </p:sp>
+      <p:sp>
+        <p:nvSpPr>
+          <p:cNvPr id="4" name="Slide Number Placeholder 3">
+            <a:extLst>
+              <a:ext uri="{FF2B5EF4-FFF2-40B4-BE49-F238E27FC236}">
+                <a16:creationId xmlns:a16="http://schemas.microsoft.com/office/drawing/2014/main" id="{759FC930-0456-7D5A-5667-F62D0C24B236}"/>
+              </a:ext>
+            </a:extLst>
+          </p:cNvPr>
+          <p:cNvSpPr>
+            <a:spLocks noGrp="1"/>
+          </p:cNvSpPr>
+          <p:nvPr>
+            <p:ph type="sldNum" sz="quarter" idx="10"/>
+          </p:nvPr>
+        </p:nvSpPr>
+        <p:spPr/>
+        <p:txBody>
+          <a:bodyPr/>
+          <a:lstStyle/>
+          <a:p>
+            <a:fld id="{F7021451-1387-4CA6-816F-3879F97B5CBC}" type="slidenum">
+              <a:rPr lang="en-US"/>
+              <a:t>11</a:t>
+            </a:fld>
+            <a:endParaRPr lang="en-US"/>
+          </a:p>
+        </p:txBody>
+      </p:sp>
+    </p:spTree>
+    <p:extLst>
+      <p:ext uri="{BB962C8B-B14F-4D97-AF65-F5344CB8AC3E}">
+        <p14:creationId xmlns:p14="http://schemas.microsoft.com/office/powerpoint/2010/main" val="2386446909"/>
+      </p:ext>
+    </p:extLst>
+  </p:cSld>
+  <p:clrMapOvr>
+    <a:masterClrMapping/>
+  </p:clrMapOvr>
+</p:notes>
+</file>
+
+<file path=ppt/notesSlides/notesSlide12.xml><?xml version="1.0" encoding="utf-8"?>
+<p:notes xmlns:a="http://schemas.openxmlformats.org/drawingml/2006/main" xmlns:r="http://schemas.openxmlformats.org/officeDocument/2006/relationships" xmlns:p="http://schemas.openxmlformats.org/presentationml/2006/main">
+  <p:cSld>
+    <p:spTree>
+      <p:nvGrpSpPr>
+        <p:cNvPr id="1" name="">
+          <a:extLst>
+            <a:ext uri="{FF2B5EF4-FFF2-40B4-BE49-F238E27FC236}">
+              <a16:creationId xmlns:a16="http://schemas.microsoft.com/office/drawing/2014/main" id="{CBF65E28-9120-0541-E408-8A8D04866E4A}"/>
+            </a:ext>
+          </a:extLst>
+        </p:cNvPr>
+        <p:cNvGrpSpPr/>
+        <p:nvPr/>
+      </p:nvGrpSpPr>
+      <p:grpSpPr>
+        <a:xfrm>
+          <a:off x="0" y="0"/>
+          <a:ext cx="0" cy="0"/>
+          <a:chOff x="0" y="0"/>
+          <a:chExt cx="0" cy="0"/>
+        </a:xfrm>
+      </p:grpSpPr>
+      <p:sp>
+        <p:nvSpPr>
+          <p:cNvPr id="2" name="Slide Image Placeholder 1">
+            <a:extLst>
+              <a:ext uri="{FF2B5EF4-FFF2-40B4-BE49-F238E27FC236}">
+                <a16:creationId xmlns:a16="http://schemas.microsoft.com/office/drawing/2014/main" id="{E78504F6-CAE7-D386-EAAB-384FD90F8907}"/>
+              </a:ext>
+            </a:extLst>
+          </p:cNvPr>
+          <p:cNvSpPr>
+            <a:spLocks noGrp="1" noRot="1" noChangeAspect="1"/>
+          </p:cNvSpPr>
+          <p:nvPr>
+            <p:ph type="sldImg"/>
+          </p:nvPr>
+        </p:nvSpPr>
+        <p:spPr/>
+      </p:sp>
+      <p:sp>
+        <p:nvSpPr>
+          <p:cNvPr id="3" name="Notes Placeholder 2">
+            <a:extLst>
+              <a:ext uri="{FF2B5EF4-FFF2-40B4-BE49-F238E27FC236}">
+                <a16:creationId xmlns:a16="http://schemas.microsoft.com/office/drawing/2014/main" id="{E91A4C6F-0729-8B95-E7CA-D90EE5412C68}"/>
+              </a:ext>
+            </a:extLst>
+          </p:cNvPr>
+          <p:cNvSpPr>
+            <a:spLocks noGrp="1"/>
+          </p:cNvSpPr>
+          <p:nvPr>
+            <p:ph type="body" idx="1"/>
+          </p:nvPr>
+        </p:nvSpPr>
+        <p:spPr/>
+        <p:txBody>
+          <a:bodyPr/>
+          <a:lstStyle/>
+          <a:p>
+            <a:endParaRPr lang="en-US" dirty="0"/>
+          </a:p>
+        </p:txBody>
+      </p:sp>
+      <p:sp>
+        <p:nvSpPr>
+          <p:cNvPr id="4" name="Slide Number Placeholder 3">
+            <a:extLst>
+              <a:ext uri="{FF2B5EF4-FFF2-40B4-BE49-F238E27FC236}">
+                <a16:creationId xmlns:a16="http://schemas.microsoft.com/office/drawing/2014/main" id="{415D25AB-CEE7-598C-8002-5974DBF4C81A}"/>
+              </a:ext>
+            </a:extLst>
+          </p:cNvPr>
+          <p:cNvSpPr>
+            <a:spLocks noGrp="1"/>
+          </p:cNvSpPr>
+          <p:nvPr>
+            <p:ph type="sldNum" sz="quarter" idx="10"/>
+          </p:nvPr>
+        </p:nvSpPr>
+        <p:spPr/>
+        <p:txBody>
+          <a:bodyPr/>
+          <a:lstStyle/>
+          <a:p>
+            <a:fld id="{F7021451-1387-4CA6-816F-3879F97B5CBC}" type="slidenum">
+              <a:rPr lang="en-US"/>
+              <a:t>12</a:t>
+            </a:fld>
+            <a:endParaRPr lang="en-US"/>
+          </a:p>
+        </p:txBody>
+      </p:sp>
+    </p:spTree>
+    <p:extLst>
+      <p:ext uri="{BB962C8B-B14F-4D97-AF65-F5344CB8AC3E}">
+        <p14:creationId xmlns:p14="http://schemas.microsoft.com/office/powerpoint/2010/main" val="769910835"/>
+      </p:ext>
+    </p:extLst>
+  </p:cSld>
+  <p:clrMapOvr>
+    <a:masterClrMapping/>
+  </p:clrMapOvr>
+</p:notes>
+</file>
+
+<file path=ppt/notesSlides/notesSlide13.xml><?xml version="1.0" encoding="utf-8"?>
+<p:notes xmlns:a="http://schemas.openxmlformats.org/drawingml/2006/main" xmlns:r="http://schemas.openxmlformats.org/officeDocument/2006/relationships" xmlns:p="http://schemas.openxmlformats.org/presentationml/2006/main">
+  <p:cSld>
+    <p:spTree>
+      <p:nvGrpSpPr>
+        <p:cNvPr id="1" name="">
+          <a:extLst>
+            <a:ext uri="{FF2B5EF4-FFF2-40B4-BE49-F238E27FC236}">
+              <a16:creationId xmlns:a16="http://schemas.microsoft.com/office/drawing/2014/main" id="{A420D90F-A8A8-C6EB-FAA7-9D68F72674EF}"/>
+            </a:ext>
+          </a:extLst>
+        </p:cNvPr>
+        <p:cNvGrpSpPr/>
+        <p:nvPr/>
+      </p:nvGrpSpPr>
+      <p:grpSpPr>
+        <a:xfrm>
+          <a:off x="0" y="0"/>
+          <a:ext cx="0" cy="0"/>
+          <a:chOff x="0" y="0"/>
+          <a:chExt cx="0" cy="0"/>
+        </a:xfrm>
+      </p:grpSpPr>
+      <p:sp>
+        <p:nvSpPr>
+          <p:cNvPr id="2" name="Slide Image Placeholder 1">
+            <a:extLst>
+              <a:ext uri="{FF2B5EF4-FFF2-40B4-BE49-F238E27FC236}">
+                <a16:creationId xmlns:a16="http://schemas.microsoft.com/office/drawing/2014/main" id="{450191E1-98C1-E2ED-26DC-546423C1EAA9}"/>
+              </a:ext>
+            </a:extLst>
+          </p:cNvPr>
+          <p:cNvSpPr>
+            <a:spLocks noGrp="1" noRot="1" noChangeAspect="1"/>
+          </p:cNvSpPr>
+          <p:nvPr>
+            <p:ph type="sldImg"/>
+          </p:nvPr>
+        </p:nvSpPr>
+        <p:spPr/>
+      </p:sp>
+      <p:sp>
+        <p:nvSpPr>
+          <p:cNvPr id="3" name="Notes Placeholder 2">
+            <a:extLst>
+              <a:ext uri="{FF2B5EF4-FFF2-40B4-BE49-F238E27FC236}">
+                <a16:creationId xmlns:a16="http://schemas.microsoft.com/office/drawing/2014/main" id="{0A592794-1B4B-C01E-AA1B-A20223634AA7}"/>
+              </a:ext>
+            </a:extLst>
+          </p:cNvPr>
+          <p:cNvSpPr>
+            <a:spLocks noGrp="1"/>
+          </p:cNvSpPr>
+          <p:nvPr>
+            <p:ph type="body" idx="1"/>
+          </p:nvPr>
+        </p:nvSpPr>
+        <p:spPr/>
+        <p:txBody>
+          <a:bodyPr/>
+          <a:lstStyle/>
+          <a:p>
+            <a:endParaRPr lang="en-US" dirty="0"/>
+          </a:p>
+        </p:txBody>
+      </p:sp>
+      <p:sp>
+        <p:nvSpPr>
+          <p:cNvPr id="4" name="Slide Number Placeholder 3">
+            <a:extLst>
+              <a:ext uri="{FF2B5EF4-FFF2-40B4-BE49-F238E27FC236}">
+                <a16:creationId xmlns:a16="http://schemas.microsoft.com/office/drawing/2014/main" id="{E905B037-D931-003C-6854-DC530A7280A7}"/>
+              </a:ext>
+            </a:extLst>
+          </p:cNvPr>
+          <p:cNvSpPr>
+            <a:spLocks noGrp="1"/>
+          </p:cNvSpPr>
+          <p:nvPr>
+            <p:ph type="sldNum" sz="quarter" idx="10"/>
+          </p:nvPr>
+        </p:nvSpPr>
+        <p:spPr/>
+        <p:txBody>
+          <a:bodyPr/>
+          <a:lstStyle/>
+          <a:p>
+            <a:fld id="{F7021451-1387-4CA6-816F-3879F97B5CBC}" type="slidenum">
+              <a:rPr lang="en-US"/>
+              <a:t>13</a:t>
+            </a:fld>
+            <a:endParaRPr lang="en-US"/>
+          </a:p>
+        </p:txBody>
+      </p:sp>
+    </p:spTree>
+    <p:extLst>
+      <p:ext uri="{BB962C8B-B14F-4D97-AF65-F5344CB8AC3E}">
+        <p14:creationId xmlns:p14="http://schemas.microsoft.com/office/powerpoint/2010/main" val="3524433979"/>
+      </p:ext>
+    </p:extLst>
+  </p:cSld>
+  <p:clrMapOvr>
+    <a:masterClrMapping/>
+  </p:clrMapOvr>
+</p:notes>
+</file>
+
+<file path=ppt/notesSlides/notesSlide14.xml><?xml version="1.0" encoding="utf-8"?>
+<p:notes xmlns:a="http://schemas.openxmlformats.org/drawingml/2006/main" xmlns:r="http://schemas.openxmlformats.org/officeDocument/2006/relationships" xmlns:p="http://schemas.openxmlformats.org/presentationml/2006/main">
+  <p:cSld>
+    <p:spTree>
+      <p:nvGrpSpPr>
+        <p:cNvPr id="1" name="">
+          <a:extLst>
+            <a:ext uri="{FF2B5EF4-FFF2-40B4-BE49-F238E27FC236}">
+              <a16:creationId xmlns:a16="http://schemas.microsoft.com/office/drawing/2014/main" id="{4165EC77-58BF-C13A-19A4-F7BAFE2B63C1}"/>
+            </a:ext>
+          </a:extLst>
+        </p:cNvPr>
+        <p:cNvGrpSpPr/>
+        <p:nvPr/>
+      </p:nvGrpSpPr>
+      <p:grpSpPr>
+        <a:xfrm>
+          <a:off x="0" y="0"/>
+          <a:ext cx="0" cy="0"/>
+          <a:chOff x="0" y="0"/>
+          <a:chExt cx="0" cy="0"/>
+        </a:xfrm>
+      </p:grpSpPr>
+      <p:sp>
+        <p:nvSpPr>
+          <p:cNvPr id="2" name="Slide Image Placeholder 1">
+            <a:extLst>
+              <a:ext uri="{FF2B5EF4-FFF2-40B4-BE49-F238E27FC236}">
+                <a16:creationId xmlns:a16="http://schemas.microsoft.com/office/drawing/2014/main" id="{351112A7-32B2-7703-C582-E2E1B3000AC5}"/>
+              </a:ext>
+            </a:extLst>
+          </p:cNvPr>
+          <p:cNvSpPr>
+            <a:spLocks noGrp="1" noRot="1" noChangeAspect="1"/>
+          </p:cNvSpPr>
+          <p:nvPr>
+            <p:ph type="sldImg"/>
+          </p:nvPr>
+        </p:nvSpPr>
+        <p:spPr/>
+      </p:sp>
+      <p:sp>
+        <p:nvSpPr>
+          <p:cNvPr id="3" name="Notes Placeholder 2">
+            <a:extLst>
+              <a:ext uri="{FF2B5EF4-FFF2-40B4-BE49-F238E27FC236}">
+                <a16:creationId xmlns:a16="http://schemas.microsoft.com/office/drawing/2014/main" id="{07C7289E-051A-625B-57D3-BB7F35651026}"/>
+              </a:ext>
+            </a:extLst>
+          </p:cNvPr>
+          <p:cNvSpPr>
+            <a:spLocks noGrp="1"/>
+          </p:cNvSpPr>
+          <p:nvPr>
+            <p:ph type="body" idx="1"/>
+          </p:nvPr>
+        </p:nvSpPr>
+        <p:spPr/>
+        <p:txBody>
+          <a:bodyPr/>
+          <a:lstStyle/>
+          <a:p>
+            <a:endParaRPr lang="en-US" dirty="0"/>
+          </a:p>
+        </p:txBody>
+      </p:sp>
+      <p:sp>
+        <p:nvSpPr>
+          <p:cNvPr id="4" name="Slide Number Placeholder 3">
+            <a:extLst>
+              <a:ext uri="{FF2B5EF4-FFF2-40B4-BE49-F238E27FC236}">
+                <a16:creationId xmlns:a16="http://schemas.microsoft.com/office/drawing/2014/main" id="{8B68BA92-3CAC-BEE0-FFE2-6260CC6309D1}"/>
+              </a:ext>
+            </a:extLst>
+          </p:cNvPr>
+          <p:cNvSpPr>
+            <a:spLocks noGrp="1"/>
+          </p:cNvSpPr>
+          <p:nvPr>
+            <p:ph type="sldNum" sz="quarter" idx="10"/>
+          </p:nvPr>
+        </p:nvSpPr>
+        <p:spPr/>
+        <p:txBody>
+          <a:bodyPr/>
+          <a:lstStyle/>
+          <a:p>
+            <a:fld id="{F7021451-1387-4CA6-816F-3879F97B5CBC}" type="slidenum">
+              <a:rPr lang="en-US"/>
+              <a:t>14</a:t>
+            </a:fld>
+            <a:endParaRPr lang="en-US"/>
+          </a:p>
+        </p:txBody>
+      </p:sp>
+    </p:spTree>
+    <p:extLst>
+      <p:ext uri="{BB962C8B-B14F-4D97-AF65-F5344CB8AC3E}">
+        <p14:creationId xmlns:p14="http://schemas.microsoft.com/office/powerpoint/2010/main" val="813819368"/>
+      </p:ext>
+    </p:extLst>
+  </p:cSld>
+  <p:clrMapOvr>
+    <a:masterClrMapping/>
+  </p:clrMapOvr>
+</p:notes>
+</file>
+
+<file path=ppt/notesSlides/notesSlide15.xml><?xml version="1.0" encoding="utf-8"?>
+<p:notes xmlns:a="http://schemas.openxmlformats.org/drawingml/2006/main" xmlns:r="http://schemas.openxmlformats.org/officeDocument/2006/relationships" xmlns:p="http://schemas.openxmlformats.org/presentationml/2006/main">
+  <p:cSld>
+    <p:spTree>
+      <p:nvGrpSpPr>
+        <p:cNvPr id="1" name="">
+          <a:extLst>
+            <a:ext uri="{FF2B5EF4-FFF2-40B4-BE49-F238E27FC236}">
+              <a16:creationId xmlns:a16="http://schemas.microsoft.com/office/drawing/2014/main" id="{04E1FA76-752F-4A41-66FD-D25656CA11A0}"/>
+            </a:ext>
+          </a:extLst>
+        </p:cNvPr>
+        <p:cNvGrpSpPr/>
+        <p:nvPr/>
+      </p:nvGrpSpPr>
+      <p:grpSpPr>
+        <a:xfrm>
+          <a:off x="0" y="0"/>
+          <a:ext cx="0" cy="0"/>
+          <a:chOff x="0" y="0"/>
+          <a:chExt cx="0" cy="0"/>
+        </a:xfrm>
+      </p:grpSpPr>
+      <p:sp>
+        <p:nvSpPr>
+          <p:cNvPr id="2" name="Slide Image Placeholder 1">
+            <a:extLst>
+              <a:ext uri="{FF2B5EF4-FFF2-40B4-BE49-F238E27FC236}">
+                <a16:creationId xmlns:a16="http://schemas.microsoft.com/office/drawing/2014/main" id="{907AC53A-15B1-0A99-20CC-4B955B778351}"/>
+              </a:ext>
+            </a:extLst>
+          </p:cNvPr>
+          <p:cNvSpPr>
+            <a:spLocks noGrp="1" noRot="1" noChangeAspect="1"/>
+          </p:cNvSpPr>
+          <p:nvPr>
+            <p:ph type="sldImg"/>
+          </p:nvPr>
+        </p:nvSpPr>
+        <p:spPr/>
+      </p:sp>
+      <p:sp>
+        <p:nvSpPr>
+          <p:cNvPr id="3" name="Notes Placeholder 2">
+            <a:extLst>
+              <a:ext uri="{FF2B5EF4-FFF2-40B4-BE49-F238E27FC236}">
+                <a16:creationId xmlns:a16="http://schemas.microsoft.com/office/drawing/2014/main" id="{30AD4A34-A08A-579A-AF30-D6E449BCD4BA}"/>
+              </a:ext>
+            </a:extLst>
+          </p:cNvPr>
+          <p:cNvSpPr>
+            <a:spLocks noGrp="1"/>
+          </p:cNvSpPr>
+          <p:nvPr>
+            <p:ph type="body" idx="1"/>
+          </p:nvPr>
+        </p:nvSpPr>
+        <p:spPr/>
+        <p:txBody>
+          <a:bodyPr/>
+          <a:lstStyle/>
+          <a:p>
+            <a:endParaRPr lang="en-US" dirty="0"/>
+          </a:p>
+        </p:txBody>
+      </p:sp>
+      <p:sp>
+        <p:nvSpPr>
+          <p:cNvPr id="4" name="Slide Number Placeholder 3">
+            <a:extLst>
+              <a:ext uri="{FF2B5EF4-FFF2-40B4-BE49-F238E27FC236}">
+                <a16:creationId xmlns:a16="http://schemas.microsoft.com/office/drawing/2014/main" id="{357097B2-9D10-57E4-A7F1-86C60A0C3262}"/>
+              </a:ext>
+            </a:extLst>
+          </p:cNvPr>
+          <p:cNvSpPr>
+            <a:spLocks noGrp="1"/>
+          </p:cNvSpPr>
+          <p:nvPr>
+            <p:ph type="sldNum" sz="quarter" idx="10"/>
+          </p:nvPr>
+        </p:nvSpPr>
+        <p:spPr/>
+        <p:txBody>
+          <a:bodyPr/>
+          <a:lstStyle/>
+          <a:p>
+            <a:pPr marL="0" marR="0" lvl="0" indent="0" algn="l" defTabSz="914400" rtl="0" eaLnBrk="1" fontAlgn="auto" latinLnBrk="0" hangingPunct="1">
+              <a:lnSpc>
+                <a:spcPct val="100000"/>
+              </a:lnSpc>
+              <a:spcBef>
+                <a:spcPts val="0"/>
+              </a:spcBef>
+              <a:spcAft>
+                <a:spcPts val="0"/>
+              </a:spcAft>
+              <a:buClrTx/>
+              <a:buSzTx/>
+              <a:buFontTx/>
+              <a:buNone/>
+              <a:tabLst/>
+              <a:defRPr/>
+            </a:pPr>
+            <a:fld id="{F7021451-1387-4CA6-816F-3879F97B5CBC}" type="slidenum">
+              <a:rPr kumimoji="0" lang="en-US" sz="1800" b="0" i="0" u="none" strike="noStrike" kern="1200" cap="none" spc="0" normalizeH="0" baseline="0" noProof="0">
+                <a:ln>
+                  <a:noFill/>
+                </a:ln>
+                <a:solidFill>
+                  <a:prstClr val="black"/>
+                </a:solidFill>
+                <a:effectLst/>
+                <a:uLnTx/>
+                <a:uFillTx/>
+                <a:latin typeface="Aptos" panose="02110004020202020204"/>
+                <a:ea typeface="+mn-ea"/>
+                <a:cs typeface="+mn-cs"/>
+              </a:rPr>
+              <a:pPr marL="0" marR="0" lvl="0" indent="0" algn="l" defTabSz="914400" rtl="0" eaLnBrk="1" fontAlgn="auto" latinLnBrk="0" hangingPunct="1">
+                <a:lnSpc>
+                  <a:spcPct val="100000"/>
+                </a:lnSpc>
+                <a:spcBef>
+                  <a:spcPts val="0"/>
+                </a:spcBef>
+                <a:spcAft>
+                  <a:spcPts val="0"/>
+                </a:spcAft>
+                <a:buClrTx/>
+                <a:buSzTx/>
+                <a:buFontTx/>
+                <a:buNone/>
+                <a:tabLst/>
+                <a:defRPr/>
+              </a:pPr>
+              <a:t>15</a:t>
+            </a:fld>
+            <a:endParaRPr kumimoji="0" lang="en-US" sz="1800" b="0" i="0" u="none" strike="noStrike" kern="1200" cap="none" spc="0" normalizeH="0" baseline="0" noProof="0">
+              <a:ln>
+                <a:noFill/>
+              </a:ln>
+              <a:solidFill>
+                <a:prstClr val="black"/>
+              </a:solidFill>
+              <a:effectLst/>
+              <a:uLnTx/>
+              <a:uFillTx/>
+              <a:latin typeface="Aptos" panose="02110004020202020204"/>
+              <a:ea typeface="+mn-ea"/>
+              <a:cs typeface="+mn-cs"/>
+            </a:endParaRPr>
+          </a:p>
+        </p:txBody>
+      </p:sp>
+    </p:spTree>
+    <p:extLst>
+      <p:ext uri="{BB962C8B-B14F-4D97-AF65-F5344CB8AC3E}">
+        <p14:creationId xmlns:p14="http://schemas.microsoft.com/office/powerpoint/2010/main" val="143042342"/>
       </p:ext>
     </p:extLst>
   </p:cSld>
@@ -1638,6 +5762,2153 @@
         </p:txBody>
       </p:sp>
     </p:spTree>
+  </p:cSld>
+  <p:clrMapOvr>
+    <a:masterClrMapping/>
+  </p:clrMapOvr>
+</p:sld>
+</file>
+
+<file path=ppt/slides/slide10.xml><?xml version="1.0" encoding="utf-8"?>
+<p:sld xmlns:a="http://schemas.openxmlformats.org/drawingml/2006/main" xmlns:r="http://schemas.openxmlformats.org/officeDocument/2006/relationships" xmlns:p="http://schemas.openxmlformats.org/presentationml/2006/main">
+  <p:cSld>
+    <p:bg>
+      <p:bgPr>
+        <a:solidFill>
+          <a:srgbClr val="0F1923"/>
+        </a:solidFill>
+        <a:effectLst/>
+      </p:bgPr>
+    </p:bg>
+    <p:spTree>
+      <p:nvGrpSpPr>
+        <p:cNvPr id="1" name="">
+          <a:extLst>
+            <a:ext uri="{FF2B5EF4-FFF2-40B4-BE49-F238E27FC236}">
+              <a16:creationId xmlns:a16="http://schemas.microsoft.com/office/drawing/2014/main" id="{5A0334C7-78AC-D6A1-6B86-05C3641B460A}"/>
+            </a:ext>
+          </a:extLst>
+        </p:cNvPr>
+        <p:cNvGrpSpPr/>
+        <p:nvPr/>
+      </p:nvGrpSpPr>
+      <p:grpSpPr>
+        <a:xfrm>
+          <a:off x="0" y="0"/>
+          <a:ext cx="0" cy="0"/>
+          <a:chOff x="0" y="0"/>
+          <a:chExt cx="0" cy="0"/>
+        </a:xfrm>
+      </p:grpSpPr>
+      <p:sp>
+        <p:nvSpPr>
+          <p:cNvPr id="2" name="Shape 0">
+            <a:extLst>
+              <a:ext uri="{FF2B5EF4-FFF2-40B4-BE49-F238E27FC236}">
+                <a16:creationId xmlns:a16="http://schemas.microsoft.com/office/drawing/2014/main" id="{ACB115F0-F90C-7DD0-3B03-5AADE8A8BFB5}"/>
+              </a:ext>
+            </a:extLst>
+          </p:cNvPr>
+          <p:cNvSpPr/>
+          <p:nvPr/>
+        </p:nvSpPr>
+        <p:spPr>
+          <a:xfrm>
+            <a:off x="0" y="2163536"/>
+            <a:ext cx="9144000" cy="777240"/>
+          </a:xfrm>
+          <a:prstGeom prst="rect">
+            <a:avLst/>
+          </a:prstGeom>
+          <a:solidFill>
+            <a:srgbClr val="00A896"/>
+          </a:solidFill>
+          <a:ln w="12700">
+            <a:solidFill>
+              <a:srgbClr val="00A896"/>
+            </a:solidFill>
+            <a:prstDash val="solid"/>
+          </a:ln>
+        </p:spPr>
+        <p:txBody>
+          <a:bodyPr/>
+          <a:lstStyle/>
+          <a:p>
+            <a:pPr marL="0" marR="0" lvl="0" indent="0" algn="l" defTabSz="914400" rtl="0" eaLnBrk="1" fontAlgn="auto" latinLnBrk="0" hangingPunct="1">
+              <a:lnSpc>
+                <a:spcPct val="100000"/>
+              </a:lnSpc>
+              <a:spcBef>
+                <a:spcPts val="0"/>
+              </a:spcBef>
+              <a:spcAft>
+                <a:spcPts val="0"/>
+              </a:spcAft>
+              <a:buClrTx/>
+              <a:buSzTx/>
+              <a:buFontTx/>
+              <a:buNone/>
+              <a:tabLst/>
+              <a:defRPr/>
+            </a:pPr>
+            <a:endParaRPr kumimoji="0" lang="en-US" sz="1800" b="0" i="0" u="none" strike="noStrike" kern="1200" cap="none" spc="0" normalizeH="0" baseline="0" noProof="0">
+              <a:ln>
+                <a:noFill/>
+              </a:ln>
+              <a:solidFill>
+                <a:prstClr val="black"/>
+              </a:solidFill>
+              <a:effectLst/>
+              <a:uLnTx/>
+              <a:uFillTx/>
+              <a:latin typeface="Calibri" panose="020F0502020204030204"/>
+              <a:ea typeface="+mn-ea"/>
+              <a:cs typeface="+mn-cs"/>
+            </a:endParaRPr>
+          </a:p>
+        </p:txBody>
+      </p:sp>
+      <p:sp>
+        <p:nvSpPr>
+          <p:cNvPr id="3" name="Text 1">
+            <a:extLst>
+              <a:ext uri="{FF2B5EF4-FFF2-40B4-BE49-F238E27FC236}">
+                <a16:creationId xmlns:a16="http://schemas.microsoft.com/office/drawing/2014/main" id="{33339E7A-F17F-17D8-ABDE-5D9C86FC5E04}"/>
+              </a:ext>
+            </a:extLst>
+          </p:cNvPr>
+          <p:cNvSpPr/>
+          <p:nvPr/>
+        </p:nvSpPr>
+        <p:spPr>
+          <a:xfrm>
+            <a:off x="316775" y="2197009"/>
+            <a:ext cx="8412480" cy="777240"/>
+          </a:xfrm>
+          <a:prstGeom prst="rect">
+            <a:avLst/>
+          </a:prstGeom>
+          <a:noFill/>
+          <a:ln/>
+        </p:spPr>
+        <p:txBody>
+          <a:bodyPr wrap="square" lIns="0" tIns="0" rIns="0" bIns="0" rtlCol="0" anchor="ctr"/>
+          <a:lstStyle/>
+          <a:p>
+            <a:pPr marL="0" marR="0" lvl="0" indent="0" algn="ctr" defTabSz="914400" rtl="0" eaLnBrk="1" fontAlgn="auto" latinLnBrk="0" hangingPunct="1">
+              <a:lnSpc>
+                <a:spcPct val="100000"/>
+              </a:lnSpc>
+              <a:spcBef>
+                <a:spcPts val="0"/>
+              </a:spcBef>
+              <a:spcAft>
+                <a:spcPts val="0"/>
+              </a:spcAft>
+              <a:buClrTx/>
+              <a:buSzTx/>
+              <a:buFontTx/>
+              <a:buNone/>
+              <a:tabLst/>
+              <a:defRPr/>
+            </a:pPr>
+            <a:r>
+              <a:rPr kumimoji="0" lang="en-US" sz="2400" b="1" i="0" u="none" strike="noStrike" kern="1200" cap="none" spc="0" normalizeH="0" baseline="0" noProof="0" dirty="0">
+                <a:ln>
+                  <a:noFill/>
+                </a:ln>
+                <a:solidFill>
+                  <a:srgbClr val="FFFFFF"/>
+                </a:solidFill>
+                <a:effectLst/>
+                <a:uLnTx/>
+                <a:uFillTx/>
+                <a:latin typeface="Calibri" pitchFamily="34" charset="0"/>
+                <a:ea typeface="Calibri" pitchFamily="34" charset="-122"/>
+                <a:cs typeface="Calibri" pitchFamily="34" charset="-120"/>
+              </a:rPr>
+              <a:t>Comparisons Tests</a:t>
+            </a:r>
+            <a:endParaRPr kumimoji="0" lang="en-US" sz="2400" b="0" i="0" u="none" strike="noStrike" kern="1200" cap="none" spc="0" normalizeH="0" baseline="0" noProof="0" dirty="0">
+              <a:ln>
+                <a:noFill/>
+              </a:ln>
+              <a:solidFill>
+                <a:prstClr val="black"/>
+              </a:solidFill>
+              <a:effectLst/>
+              <a:uLnTx/>
+              <a:uFillTx/>
+              <a:latin typeface="Calibri" panose="020F0502020204030204"/>
+              <a:ea typeface="+mn-ea"/>
+              <a:cs typeface="+mn-cs"/>
+            </a:endParaRPr>
+          </a:p>
+        </p:txBody>
+      </p:sp>
+    </p:spTree>
+    <p:extLst>
+      <p:ext uri="{BB962C8B-B14F-4D97-AF65-F5344CB8AC3E}">
+        <p14:creationId xmlns:p14="http://schemas.microsoft.com/office/powerpoint/2010/main" val="198905872"/>
+      </p:ext>
+    </p:extLst>
+  </p:cSld>
+  <p:clrMapOvr>
+    <a:masterClrMapping/>
+  </p:clrMapOvr>
+</p:sld>
+</file>
+
+<file path=ppt/slides/slide11.xml><?xml version="1.0" encoding="utf-8"?>
+<p:sld xmlns:a="http://schemas.openxmlformats.org/drawingml/2006/main" xmlns:r="http://schemas.openxmlformats.org/officeDocument/2006/relationships" xmlns:p="http://schemas.openxmlformats.org/presentationml/2006/main">
+  <p:cSld>
+    <p:spTree>
+      <p:nvGrpSpPr>
+        <p:cNvPr id="1" name="">
+          <a:extLst>
+            <a:ext uri="{FF2B5EF4-FFF2-40B4-BE49-F238E27FC236}">
+              <a16:creationId xmlns:a16="http://schemas.microsoft.com/office/drawing/2014/main" id="{C1859805-ED48-DB27-3F3A-EBDC7779AD96}"/>
+            </a:ext>
+          </a:extLst>
+        </p:cNvPr>
+        <p:cNvGrpSpPr/>
+        <p:nvPr/>
+      </p:nvGrpSpPr>
+      <p:grpSpPr>
+        <a:xfrm>
+          <a:off x="0" y="0"/>
+          <a:ext cx="0" cy="0"/>
+          <a:chOff x="0" y="0"/>
+          <a:chExt cx="0" cy="0"/>
+        </a:xfrm>
+      </p:grpSpPr>
+      <p:sp>
+        <p:nvSpPr>
+          <p:cNvPr id="2" name="Shape 0">
+            <a:extLst>
+              <a:ext uri="{FF2B5EF4-FFF2-40B4-BE49-F238E27FC236}">
+                <a16:creationId xmlns:a16="http://schemas.microsoft.com/office/drawing/2014/main" id="{F727233C-9DA5-E073-41A7-C7DB1A65A735}"/>
+              </a:ext>
+            </a:extLst>
+          </p:cNvPr>
+          <p:cNvSpPr/>
+          <p:nvPr/>
+        </p:nvSpPr>
+        <p:spPr>
+          <a:xfrm>
+            <a:off x="0" y="0"/>
+            <a:ext cx="9144000" cy="777240"/>
+          </a:xfrm>
+          <a:prstGeom prst="rect">
+            <a:avLst/>
+          </a:prstGeom>
+          <a:solidFill>
+            <a:srgbClr val="00A896"/>
+          </a:solidFill>
+          <a:ln w="12700">
+            <a:solidFill>
+              <a:srgbClr val="00A896"/>
+            </a:solidFill>
+            <a:prstDash val="solid"/>
+          </a:ln>
+        </p:spPr>
+        <p:txBody>
+          <a:bodyPr/>
+          <a:lstStyle/>
+          <a:p>
+            <a:endParaRPr lang="en-US"/>
+          </a:p>
+        </p:txBody>
+      </p:sp>
+      <p:sp>
+        <p:nvSpPr>
+          <p:cNvPr id="3" name="Text 1">
+            <a:extLst>
+              <a:ext uri="{FF2B5EF4-FFF2-40B4-BE49-F238E27FC236}">
+                <a16:creationId xmlns:a16="http://schemas.microsoft.com/office/drawing/2014/main" id="{2F269DBF-390E-B4A4-ADE6-C1226B14A2FF}"/>
+              </a:ext>
+            </a:extLst>
+          </p:cNvPr>
+          <p:cNvSpPr/>
+          <p:nvPr/>
+        </p:nvSpPr>
+        <p:spPr>
+          <a:xfrm>
+            <a:off x="365760" y="0"/>
+            <a:ext cx="8412480" cy="777240"/>
+          </a:xfrm>
+          <a:prstGeom prst="rect">
+            <a:avLst/>
+          </a:prstGeom>
+          <a:noFill/>
+          <a:ln/>
+        </p:spPr>
+        <p:txBody>
+          <a:bodyPr wrap="square" lIns="0" tIns="0" rIns="0" bIns="0" rtlCol="0" anchor="ctr"/>
+          <a:lstStyle/>
+          <a:p>
+            <a:pPr marL="0" indent="0">
+              <a:buNone/>
+            </a:pPr>
+            <a:r>
+              <a:rPr lang="en-US" sz="2400" b="1" dirty="0">
+                <a:solidFill>
+                  <a:srgbClr val="FFFFFF"/>
+                </a:solidFill>
+                <a:latin typeface="Calibri" pitchFamily="34" charset="0"/>
+                <a:ea typeface="Calibri" pitchFamily="34" charset="-122"/>
+                <a:cs typeface="Calibri" pitchFamily="34" charset="-120"/>
+              </a:rPr>
+              <a:t>Tests Design and Chosen Ranges</a:t>
+            </a:r>
+            <a:endParaRPr lang="en-US" sz="2400" dirty="0"/>
+          </a:p>
+        </p:txBody>
+      </p:sp>
+      <p:sp>
+        <p:nvSpPr>
+          <p:cNvPr id="4" name="TextBox 3">
+            <a:extLst>
+              <a:ext uri="{FF2B5EF4-FFF2-40B4-BE49-F238E27FC236}">
+                <a16:creationId xmlns:a16="http://schemas.microsoft.com/office/drawing/2014/main" id="{FC803A90-C91D-5CD2-99BA-B1E35AAF18FD}"/>
+              </a:ext>
+            </a:extLst>
+          </p:cNvPr>
+          <p:cNvSpPr txBox="1"/>
+          <p:nvPr/>
+        </p:nvSpPr>
+        <p:spPr>
+          <a:xfrm>
+            <a:off x="419450" y="1027651"/>
+            <a:ext cx="4265801" cy="3693319"/>
+          </a:xfrm>
+          <a:prstGeom prst="rect">
+            <a:avLst/>
+          </a:prstGeom>
+          <a:noFill/>
+        </p:spPr>
+        <p:txBody>
+          <a:bodyPr wrap="square" rtlCol="0">
+            <a:spAutoFit/>
+          </a:bodyPr>
+          <a:lstStyle/>
+          <a:p>
+            <a:r>
+              <a:rPr lang="en-US" b="1" dirty="0"/>
+              <a:t>Test 1:</a:t>
+            </a:r>
+          </a:p>
+          <a:p>
+            <a:r>
+              <a:rPr lang="en-US" dirty="0"/>
+              <a:t>The number of processes fixed for the test was </a:t>
+            </a:r>
+            <a:r>
+              <a:rPr lang="en-US" dirty="0">
+                <a:solidFill>
+                  <a:srgbClr val="00B050"/>
+                </a:solidFill>
+              </a:rPr>
+              <a:t>9</a:t>
+            </a:r>
+            <a:r>
+              <a:rPr lang="en-US" dirty="0"/>
+              <a:t> as this was the number of idle processes at the time of testing.</a:t>
+            </a:r>
+          </a:p>
+          <a:p>
+            <a:r>
+              <a:rPr lang="en-US" dirty="0">
+                <a:solidFill>
+                  <a:srgbClr val="00B050"/>
+                </a:solidFill>
+              </a:rPr>
+              <a:t>100</a:t>
+            </a:r>
+            <a:r>
+              <a:rPr lang="en-US" dirty="0"/>
+              <a:t> Readings were conducted going by increments of </a:t>
+            </a:r>
+            <a:r>
+              <a:rPr lang="en-US" dirty="0">
+                <a:solidFill>
+                  <a:srgbClr val="00B050"/>
+                </a:solidFill>
+              </a:rPr>
+              <a:t>20,000 </a:t>
+            </a:r>
+            <a:r>
+              <a:rPr lang="en-US" dirty="0"/>
+              <a:t>for </a:t>
+            </a:r>
+            <a:r>
+              <a:rPr lang="en-US" dirty="0">
+                <a:solidFill>
+                  <a:srgbClr val="00B050"/>
+                </a:solidFill>
+              </a:rPr>
+              <a:t>N</a:t>
+            </a:r>
+            <a:r>
+              <a:rPr lang="en-US" dirty="0"/>
+              <a:t>. (Range: </a:t>
+            </a:r>
+            <a:r>
+              <a:rPr lang="en-US" dirty="0">
+                <a:solidFill>
+                  <a:srgbClr val="00B050"/>
+                </a:solidFill>
+              </a:rPr>
+              <a:t>20k</a:t>
+            </a:r>
+            <a:r>
+              <a:rPr lang="en-US" dirty="0"/>
+              <a:t> to </a:t>
+            </a:r>
+            <a:r>
+              <a:rPr lang="en-US" dirty="0">
+                <a:solidFill>
+                  <a:srgbClr val="00B050"/>
+                </a:solidFill>
+              </a:rPr>
+              <a:t>2M</a:t>
+            </a:r>
+            <a:r>
+              <a:rPr lang="en-US" dirty="0"/>
+              <a:t>)</a:t>
+            </a:r>
+          </a:p>
+          <a:p>
+            <a:endParaRPr lang="en-US" dirty="0">
+              <a:solidFill>
+                <a:srgbClr val="00B050"/>
+              </a:solidFill>
+            </a:endParaRPr>
+          </a:p>
+          <a:p>
+            <a:r>
+              <a:rPr lang="en-US" b="1" dirty="0"/>
+              <a:t>Test 2:</a:t>
+            </a:r>
+          </a:p>
+          <a:p>
+            <a:r>
+              <a:rPr lang="en-US" dirty="0"/>
+              <a:t>The parameter </a:t>
+            </a:r>
+            <a:r>
+              <a:rPr lang="en-US" dirty="0" err="1">
+                <a:solidFill>
+                  <a:srgbClr val="00B050"/>
+                </a:solidFill>
+              </a:rPr>
+              <a:t>n_proc</a:t>
+            </a:r>
+            <a:r>
+              <a:rPr lang="en-US" dirty="0">
+                <a:solidFill>
+                  <a:srgbClr val="00B050"/>
+                </a:solidFill>
+              </a:rPr>
+              <a:t> </a:t>
+            </a:r>
+            <a:r>
+              <a:rPr lang="en-US" dirty="0"/>
+              <a:t>was iterated from </a:t>
+            </a:r>
+            <a:r>
+              <a:rPr lang="en-US" dirty="0">
+                <a:solidFill>
+                  <a:srgbClr val="00B050"/>
+                </a:solidFill>
+              </a:rPr>
+              <a:t>1</a:t>
+            </a:r>
+            <a:r>
+              <a:rPr lang="en-US" dirty="0"/>
+              <a:t> to </a:t>
+            </a:r>
+            <a:r>
+              <a:rPr lang="en-US" dirty="0">
+                <a:solidFill>
+                  <a:srgbClr val="00B050"/>
+                </a:solidFill>
+              </a:rPr>
+              <a:t>24</a:t>
+            </a:r>
+            <a:r>
+              <a:rPr lang="en-US" dirty="0"/>
+              <a:t> to significantly exceed the number of logical processors of the machine which is </a:t>
+            </a:r>
+            <a:r>
+              <a:rPr lang="en-US" dirty="0">
+                <a:solidFill>
+                  <a:srgbClr val="00B050"/>
+                </a:solidFill>
+              </a:rPr>
+              <a:t>16</a:t>
+            </a:r>
+            <a:r>
+              <a:rPr lang="en-US" dirty="0"/>
+              <a:t>.</a:t>
+            </a:r>
+          </a:p>
+        </p:txBody>
+      </p:sp>
+      <p:pic>
+        <p:nvPicPr>
+          <p:cNvPr id="6" name="Picture 5">
+            <a:extLst>
+              <a:ext uri="{FF2B5EF4-FFF2-40B4-BE49-F238E27FC236}">
+                <a16:creationId xmlns:a16="http://schemas.microsoft.com/office/drawing/2014/main" id="{3C4B09E5-46C6-EF88-FD44-9F9843DE223E}"/>
+              </a:ext>
+            </a:extLst>
+          </p:cNvPr>
+          <p:cNvPicPr>
+            <a:picLocks noChangeAspect="1"/>
+          </p:cNvPicPr>
+          <p:nvPr/>
+        </p:nvPicPr>
+        <p:blipFill>
+          <a:blip r:embed="rId3"/>
+          <a:srcRect l="18881" t="6474" b="8932"/>
+          <a:stretch>
+            <a:fillRect/>
+          </a:stretch>
+        </p:blipFill>
+        <p:spPr>
+          <a:xfrm>
+            <a:off x="5777671" y="885040"/>
+            <a:ext cx="3199411" cy="2252444"/>
+          </a:xfrm>
+          <a:prstGeom prst="rect">
+            <a:avLst/>
+          </a:prstGeom>
+        </p:spPr>
+      </p:pic>
+      <p:sp>
+        <p:nvSpPr>
+          <p:cNvPr id="7" name="TextBox 6">
+            <a:extLst>
+              <a:ext uri="{FF2B5EF4-FFF2-40B4-BE49-F238E27FC236}">
+                <a16:creationId xmlns:a16="http://schemas.microsoft.com/office/drawing/2014/main" id="{2BF8CAA4-0BB7-E523-064F-D59C10526090}"/>
+              </a:ext>
+            </a:extLst>
+          </p:cNvPr>
+          <p:cNvSpPr txBox="1"/>
+          <p:nvPr/>
+        </p:nvSpPr>
+        <p:spPr>
+          <a:xfrm>
+            <a:off x="5777671" y="3245284"/>
+            <a:ext cx="3082954" cy="954107"/>
+          </a:xfrm>
+          <a:prstGeom prst="rect">
+            <a:avLst/>
+          </a:prstGeom>
+          <a:noFill/>
+        </p:spPr>
+        <p:txBody>
+          <a:bodyPr wrap="square" rtlCol="0">
+            <a:spAutoFit/>
+          </a:bodyPr>
+          <a:lstStyle/>
+          <a:p>
+            <a:r>
+              <a:rPr lang="en-US" sz="1400" dirty="0">
+                <a:solidFill>
+                  <a:schemeClr val="tx1">
+                    <a:lumMod val="75000"/>
+                    <a:lumOff val="25000"/>
+                  </a:schemeClr>
+                </a:solidFill>
+              </a:rPr>
+              <a:t>Note: For test 1, the range kept adjusting till reaching this range that showed a clear winner between the 2 functions.</a:t>
+            </a:r>
+          </a:p>
+        </p:txBody>
+      </p:sp>
+      <p:pic>
+        <p:nvPicPr>
+          <p:cNvPr id="9" name="Picture 8">
+            <a:extLst>
+              <a:ext uri="{FF2B5EF4-FFF2-40B4-BE49-F238E27FC236}">
+                <a16:creationId xmlns:a16="http://schemas.microsoft.com/office/drawing/2014/main" id="{53FCA52E-3B11-5AA2-4409-DA1D682502E1}"/>
+              </a:ext>
+            </a:extLst>
+          </p:cNvPr>
+          <p:cNvPicPr>
+            <a:picLocks noChangeAspect="1"/>
+          </p:cNvPicPr>
+          <p:nvPr/>
+        </p:nvPicPr>
+        <p:blipFill>
+          <a:blip r:embed="rId4"/>
+          <a:stretch>
+            <a:fillRect/>
+          </a:stretch>
+        </p:blipFill>
+        <p:spPr>
+          <a:xfrm>
+            <a:off x="5777670" y="4199391"/>
+            <a:ext cx="3082955" cy="515906"/>
+          </a:xfrm>
+          <a:prstGeom prst="rect">
+            <a:avLst/>
+          </a:prstGeom>
+        </p:spPr>
+      </p:pic>
+    </p:spTree>
+    <p:extLst>
+      <p:ext uri="{BB962C8B-B14F-4D97-AF65-F5344CB8AC3E}">
+        <p14:creationId xmlns:p14="http://schemas.microsoft.com/office/powerpoint/2010/main" val="2814906830"/>
+      </p:ext>
+    </p:extLst>
+  </p:cSld>
+  <p:clrMapOvr>
+    <a:masterClrMapping/>
+  </p:clrMapOvr>
+</p:sld>
+</file>
+
+<file path=ppt/slides/slide12.xml><?xml version="1.0" encoding="utf-8"?>
+<p:sld xmlns:a="http://schemas.openxmlformats.org/drawingml/2006/main" xmlns:r="http://schemas.openxmlformats.org/officeDocument/2006/relationships" xmlns:p="http://schemas.openxmlformats.org/presentationml/2006/main">
+  <p:cSld>
+    <p:spTree>
+      <p:nvGrpSpPr>
+        <p:cNvPr id="1" name="">
+          <a:extLst>
+            <a:ext uri="{FF2B5EF4-FFF2-40B4-BE49-F238E27FC236}">
+              <a16:creationId xmlns:a16="http://schemas.microsoft.com/office/drawing/2014/main" id="{E9D294C2-C145-A10C-63B9-C0F5A0C5B8FD}"/>
+            </a:ext>
+          </a:extLst>
+        </p:cNvPr>
+        <p:cNvGrpSpPr/>
+        <p:nvPr/>
+      </p:nvGrpSpPr>
+      <p:grpSpPr>
+        <a:xfrm>
+          <a:off x="0" y="0"/>
+          <a:ext cx="0" cy="0"/>
+          <a:chOff x="0" y="0"/>
+          <a:chExt cx="0" cy="0"/>
+        </a:xfrm>
+      </p:grpSpPr>
+      <p:sp>
+        <p:nvSpPr>
+          <p:cNvPr id="2" name="Shape 0">
+            <a:extLst>
+              <a:ext uri="{FF2B5EF4-FFF2-40B4-BE49-F238E27FC236}">
+                <a16:creationId xmlns:a16="http://schemas.microsoft.com/office/drawing/2014/main" id="{3B8D7D0A-3B9A-501A-CF0E-825216CCCED6}"/>
+              </a:ext>
+            </a:extLst>
+          </p:cNvPr>
+          <p:cNvSpPr/>
+          <p:nvPr/>
+        </p:nvSpPr>
+        <p:spPr>
+          <a:xfrm>
+            <a:off x="0" y="0"/>
+            <a:ext cx="9144000" cy="777240"/>
+          </a:xfrm>
+          <a:prstGeom prst="rect">
+            <a:avLst/>
+          </a:prstGeom>
+          <a:solidFill>
+            <a:srgbClr val="00A896"/>
+          </a:solidFill>
+          <a:ln w="12700">
+            <a:solidFill>
+              <a:srgbClr val="00A896"/>
+            </a:solidFill>
+            <a:prstDash val="solid"/>
+          </a:ln>
+        </p:spPr>
+        <p:txBody>
+          <a:bodyPr/>
+          <a:lstStyle/>
+          <a:p>
+            <a:endParaRPr lang="en-US"/>
+          </a:p>
+        </p:txBody>
+      </p:sp>
+      <p:sp>
+        <p:nvSpPr>
+          <p:cNvPr id="3" name="Text 1">
+            <a:extLst>
+              <a:ext uri="{FF2B5EF4-FFF2-40B4-BE49-F238E27FC236}">
+                <a16:creationId xmlns:a16="http://schemas.microsoft.com/office/drawing/2014/main" id="{C590B563-796D-A3B3-4B51-2BE9262A2194}"/>
+              </a:ext>
+            </a:extLst>
+          </p:cNvPr>
+          <p:cNvSpPr/>
+          <p:nvPr/>
+        </p:nvSpPr>
+        <p:spPr>
+          <a:xfrm>
+            <a:off x="365760" y="0"/>
+            <a:ext cx="8412480" cy="777240"/>
+          </a:xfrm>
+          <a:prstGeom prst="rect">
+            <a:avLst/>
+          </a:prstGeom>
+          <a:noFill/>
+          <a:ln/>
+        </p:spPr>
+        <p:txBody>
+          <a:bodyPr wrap="square" lIns="0" tIns="0" rIns="0" bIns="0" rtlCol="0" anchor="ctr"/>
+          <a:lstStyle/>
+          <a:p>
+            <a:pPr marL="0" indent="0">
+              <a:buNone/>
+            </a:pPr>
+            <a:r>
+              <a:rPr lang="en-US" sz="2400" b="1" dirty="0">
+                <a:solidFill>
+                  <a:srgbClr val="FFFFFF"/>
+                </a:solidFill>
+                <a:latin typeface="Calibri" pitchFamily="34" charset="0"/>
+                <a:ea typeface="Calibri" pitchFamily="34" charset="-122"/>
+                <a:cs typeface="Calibri" pitchFamily="34" charset="-120"/>
+              </a:rPr>
+              <a:t>Smoothing Techniques</a:t>
+            </a:r>
+            <a:endParaRPr lang="en-US" sz="2400" dirty="0"/>
+          </a:p>
+        </p:txBody>
+      </p:sp>
+      <p:pic>
+        <p:nvPicPr>
+          <p:cNvPr id="5" name="Picture 4">
+            <a:extLst>
+              <a:ext uri="{FF2B5EF4-FFF2-40B4-BE49-F238E27FC236}">
+                <a16:creationId xmlns:a16="http://schemas.microsoft.com/office/drawing/2014/main" id="{89F4E455-ADF0-D2A1-27C5-97F201EA1BD1}"/>
+              </a:ext>
+            </a:extLst>
+          </p:cNvPr>
+          <p:cNvPicPr>
+            <a:picLocks noChangeAspect="1"/>
+          </p:cNvPicPr>
+          <p:nvPr/>
+        </p:nvPicPr>
+        <p:blipFill>
+          <a:blip r:embed="rId3"/>
+          <a:stretch>
+            <a:fillRect/>
+          </a:stretch>
+        </p:blipFill>
+        <p:spPr>
+          <a:xfrm>
+            <a:off x="328009" y="3846063"/>
+            <a:ext cx="3619526" cy="304802"/>
+          </a:xfrm>
+          <a:prstGeom prst="rect">
+            <a:avLst/>
+          </a:prstGeom>
+        </p:spPr>
+      </p:pic>
+      <p:pic>
+        <p:nvPicPr>
+          <p:cNvPr id="7" name="Picture 6">
+            <a:extLst>
+              <a:ext uri="{FF2B5EF4-FFF2-40B4-BE49-F238E27FC236}">
+                <a16:creationId xmlns:a16="http://schemas.microsoft.com/office/drawing/2014/main" id="{FD871855-2C7F-4EBE-AB7C-AA13AD6CAB91}"/>
+              </a:ext>
+            </a:extLst>
+          </p:cNvPr>
+          <p:cNvPicPr>
+            <a:picLocks noChangeAspect="1"/>
+          </p:cNvPicPr>
+          <p:nvPr/>
+        </p:nvPicPr>
+        <p:blipFill>
+          <a:blip r:embed="rId4"/>
+          <a:stretch>
+            <a:fillRect/>
+          </a:stretch>
+        </p:blipFill>
+        <p:spPr>
+          <a:xfrm>
+            <a:off x="4992910" y="2008673"/>
+            <a:ext cx="3493379" cy="594967"/>
+          </a:xfrm>
+          <a:prstGeom prst="rect">
+            <a:avLst/>
+          </a:prstGeom>
+        </p:spPr>
+      </p:pic>
+      <p:pic>
+        <p:nvPicPr>
+          <p:cNvPr id="9" name="Picture 8">
+            <a:extLst>
+              <a:ext uri="{FF2B5EF4-FFF2-40B4-BE49-F238E27FC236}">
+                <a16:creationId xmlns:a16="http://schemas.microsoft.com/office/drawing/2014/main" id="{D4124B31-5519-0B8A-6BD3-F8F660B9D17D}"/>
+              </a:ext>
+            </a:extLst>
+          </p:cNvPr>
+          <p:cNvPicPr>
+            <a:picLocks noChangeAspect="1"/>
+          </p:cNvPicPr>
+          <p:nvPr/>
+        </p:nvPicPr>
+        <p:blipFill>
+          <a:blip r:embed="rId5"/>
+          <a:stretch>
+            <a:fillRect/>
+          </a:stretch>
+        </p:blipFill>
+        <p:spPr>
+          <a:xfrm>
+            <a:off x="4479496" y="3112195"/>
+            <a:ext cx="4620199" cy="1098772"/>
+          </a:xfrm>
+          <a:prstGeom prst="rect">
+            <a:avLst/>
+          </a:prstGeom>
+        </p:spPr>
+      </p:pic>
+      <p:pic>
+        <p:nvPicPr>
+          <p:cNvPr id="11" name="Picture 10">
+            <a:extLst>
+              <a:ext uri="{FF2B5EF4-FFF2-40B4-BE49-F238E27FC236}">
+                <a16:creationId xmlns:a16="http://schemas.microsoft.com/office/drawing/2014/main" id="{71153B54-E528-805F-5D07-EAA828F4B244}"/>
+              </a:ext>
+            </a:extLst>
+          </p:cNvPr>
+          <p:cNvPicPr>
+            <a:picLocks noChangeAspect="1"/>
+          </p:cNvPicPr>
+          <p:nvPr/>
+        </p:nvPicPr>
+        <p:blipFill>
+          <a:blip r:embed="rId6"/>
+          <a:stretch>
+            <a:fillRect/>
+          </a:stretch>
+        </p:blipFill>
+        <p:spPr>
+          <a:xfrm>
+            <a:off x="328009" y="4363368"/>
+            <a:ext cx="2321183" cy="304802"/>
+          </a:xfrm>
+          <a:prstGeom prst="rect">
+            <a:avLst/>
+          </a:prstGeom>
+        </p:spPr>
+      </p:pic>
+      <p:sp>
+        <p:nvSpPr>
+          <p:cNvPr id="12" name="TextBox 11">
+            <a:extLst>
+              <a:ext uri="{FF2B5EF4-FFF2-40B4-BE49-F238E27FC236}">
+                <a16:creationId xmlns:a16="http://schemas.microsoft.com/office/drawing/2014/main" id="{A9FDEF69-BA27-C262-86B2-681849B8BE6E}"/>
+              </a:ext>
+            </a:extLst>
+          </p:cNvPr>
+          <p:cNvSpPr txBox="1"/>
+          <p:nvPr/>
+        </p:nvSpPr>
+        <p:spPr>
+          <a:xfrm>
+            <a:off x="245921" y="992635"/>
+            <a:ext cx="4472043" cy="1200329"/>
+          </a:xfrm>
+          <a:prstGeom prst="rect">
+            <a:avLst/>
+          </a:prstGeom>
+          <a:noFill/>
+        </p:spPr>
+        <p:txBody>
+          <a:bodyPr wrap="square" rtlCol="0">
+            <a:spAutoFit/>
+          </a:bodyPr>
+          <a:lstStyle/>
+          <a:p>
+            <a:r>
+              <a:rPr lang="en-US" dirty="0"/>
+              <a:t>Smoothing was done by repeating the experiment an odd number of times for each N/</a:t>
+            </a:r>
+            <a:r>
+              <a:rPr lang="en-US" dirty="0" err="1"/>
+              <a:t>n_proc</a:t>
+            </a:r>
+            <a:r>
+              <a:rPr lang="en-US" dirty="0"/>
+              <a:t>, then taking the </a:t>
+            </a:r>
+            <a:r>
+              <a:rPr lang="en-US" dirty="0">
+                <a:solidFill>
+                  <a:srgbClr val="00B050"/>
+                </a:solidFill>
+              </a:rPr>
+              <a:t>median</a:t>
+            </a:r>
+            <a:r>
+              <a:rPr lang="en-US" dirty="0"/>
+              <a:t> value by sorting.</a:t>
+            </a:r>
+          </a:p>
+        </p:txBody>
+      </p:sp>
+      <p:pic>
+        <p:nvPicPr>
+          <p:cNvPr id="14" name="Picture 13">
+            <a:extLst>
+              <a:ext uri="{FF2B5EF4-FFF2-40B4-BE49-F238E27FC236}">
+                <a16:creationId xmlns:a16="http://schemas.microsoft.com/office/drawing/2014/main" id="{83306F30-D9F7-8FC7-6D11-D8F18B4A1B0B}"/>
+              </a:ext>
+            </a:extLst>
+          </p:cNvPr>
+          <p:cNvPicPr>
+            <a:picLocks noChangeAspect="1"/>
+          </p:cNvPicPr>
+          <p:nvPr/>
+        </p:nvPicPr>
+        <p:blipFill>
+          <a:blip r:embed="rId7"/>
+          <a:stretch>
+            <a:fillRect/>
+          </a:stretch>
+        </p:blipFill>
+        <p:spPr>
+          <a:xfrm>
+            <a:off x="5023515" y="1058693"/>
+            <a:ext cx="3619527" cy="669668"/>
+          </a:xfrm>
+          <a:prstGeom prst="rect">
+            <a:avLst/>
+          </a:prstGeom>
+        </p:spPr>
+      </p:pic>
+      <p:sp>
+        <p:nvSpPr>
+          <p:cNvPr id="15" name="TextBox 14">
+            <a:extLst>
+              <a:ext uri="{FF2B5EF4-FFF2-40B4-BE49-F238E27FC236}">
+                <a16:creationId xmlns:a16="http://schemas.microsoft.com/office/drawing/2014/main" id="{E3EF1FEC-0012-C5DB-BE41-42B36B74F72B}"/>
+              </a:ext>
+            </a:extLst>
+          </p:cNvPr>
+          <p:cNvSpPr txBox="1"/>
+          <p:nvPr/>
+        </p:nvSpPr>
+        <p:spPr>
+          <a:xfrm>
+            <a:off x="260970" y="2265027"/>
+            <a:ext cx="3095538" cy="1477328"/>
+          </a:xfrm>
+          <a:prstGeom prst="rect">
+            <a:avLst/>
+          </a:prstGeom>
+          <a:noFill/>
+        </p:spPr>
+        <p:txBody>
+          <a:bodyPr wrap="square" rtlCol="0">
+            <a:spAutoFit/>
+          </a:bodyPr>
+          <a:lstStyle/>
+          <a:p>
+            <a:r>
+              <a:rPr lang="en-US" dirty="0"/>
+              <a:t>The experiment was repeated </a:t>
+            </a:r>
+            <a:r>
+              <a:rPr lang="en-US" dirty="0">
+                <a:solidFill>
+                  <a:srgbClr val="00B050"/>
+                </a:solidFill>
+              </a:rPr>
+              <a:t>7</a:t>
+            </a:r>
+            <a:r>
+              <a:rPr lang="en-US" dirty="0"/>
+              <a:t> times for each </a:t>
+            </a:r>
+            <a:r>
+              <a:rPr lang="en-US" dirty="0">
+                <a:solidFill>
+                  <a:srgbClr val="00B050"/>
+                </a:solidFill>
+              </a:rPr>
+              <a:t>N</a:t>
+            </a:r>
+            <a:r>
+              <a:rPr lang="en-US" dirty="0"/>
+              <a:t> in </a:t>
+            </a:r>
+            <a:r>
+              <a:rPr lang="en-US" u="sng" dirty="0"/>
+              <a:t>test 1</a:t>
+            </a:r>
+            <a:r>
+              <a:rPr lang="en-US" dirty="0"/>
+              <a:t> and </a:t>
+            </a:r>
+            <a:r>
+              <a:rPr lang="en-US" dirty="0">
+                <a:solidFill>
+                  <a:srgbClr val="00B050"/>
+                </a:solidFill>
+              </a:rPr>
+              <a:t>23</a:t>
+            </a:r>
+            <a:r>
+              <a:rPr lang="en-US" dirty="0"/>
+              <a:t> times for each </a:t>
+            </a:r>
+            <a:r>
+              <a:rPr lang="en-US" dirty="0" err="1">
+                <a:solidFill>
+                  <a:srgbClr val="00B050"/>
+                </a:solidFill>
+              </a:rPr>
+              <a:t>n_proc</a:t>
+            </a:r>
+            <a:r>
+              <a:rPr lang="en-US" dirty="0">
+                <a:solidFill>
+                  <a:srgbClr val="00B050"/>
+                </a:solidFill>
+              </a:rPr>
+              <a:t> </a:t>
+            </a:r>
+            <a:r>
+              <a:rPr lang="en-US" dirty="0"/>
+              <a:t>in </a:t>
+            </a:r>
+            <a:r>
+              <a:rPr lang="en-US" u="sng" dirty="0"/>
+              <a:t>test 2</a:t>
+            </a:r>
+            <a:r>
+              <a:rPr lang="en-US" dirty="0"/>
+              <a:t> as it had a relatively small number of iterations.</a:t>
+            </a:r>
+          </a:p>
+        </p:txBody>
+      </p:sp>
+    </p:spTree>
+    <p:extLst>
+      <p:ext uri="{BB962C8B-B14F-4D97-AF65-F5344CB8AC3E}">
+        <p14:creationId xmlns:p14="http://schemas.microsoft.com/office/powerpoint/2010/main" val="3429589757"/>
+      </p:ext>
+    </p:extLst>
+  </p:cSld>
+  <p:clrMapOvr>
+    <a:masterClrMapping/>
+  </p:clrMapOvr>
+</p:sld>
+</file>
+
+<file path=ppt/slides/slide13.xml><?xml version="1.0" encoding="utf-8"?>
+<p:sld xmlns:a="http://schemas.openxmlformats.org/drawingml/2006/main" xmlns:r="http://schemas.openxmlformats.org/officeDocument/2006/relationships" xmlns:p="http://schemas.openxmlformats.org/presentationml/2006/main">
+  <p:cSld>
+    <p:spTree>
+      <p:nvGrpSpPr>
+        <p:cNvPr id="1" name="">
+          <a:extLst>
+            <a:ext uri="{FF2B5EF4-FFF2-40B4-BE49-F238E27FC236}">
+              <a16:creationId xmlns:a16="http://schemas.microsoft.com/office/drawing/2014/main" id="{9E25CC0B-31F5-A0B9-CCA3-FFAEE2590B57}"/>
+            </a:ext>
+          </a:extLst>
+        </p:cNvPr>
+        <p:cNvGrpSpPr/>
+        <p:nvPr/>
+      </p:nvGrpSpPr>
+      <p:grpSpPr>
+        <a:xfrm>
+          <a:off x="0" y="0"/>
+          <a:ext cx="0" cy="0"/>
+          <a:chOff x="0" y="0"/>
+          <a:chExt cx="0" cy="0"/>
+        </a:xfrm>
+      </p:grpSpPr>
+      <p:sp>
+        <p:nvSpPr>
+          <p:cNvPr id="2" name="Shape 0">
+            <a:extLst>
+              <a:ext uri="{FF2B5EF4-FFF2-40B4-BE49-F238E27FC236}">
+                <a16:creationId xmlns:a16="http://schemas.microsoft.com/office/drawing/2014/main" id="{4C013C8F-728B-C367-E451-D743E8E33854}"/>
+              </a:ext>
+            </a:extLst>
+          </p:cNvPr>
+          <p:cNvSpPr/>
+          <p:nvPr/>
+        </p:nvSpPr>
+        <p:spPr>
+          <a:xfrm>
+            <a:off x="0" y="0"/>
+            <a:ext cx="9144000" cy="777240"/>
+          </a:xfrm>
+          <a:prstGeom prst="rect">
+            <a:avLst/>
+          </a:prstGeom>
+          <a:solidFill>
+            <a:srgbClr val="00A896"/>
+          </a:solidFill>
+          <a:ln w="12700">
+            <a:solidFill>
+              <a:srgbClr val="00A896"/>
+            </a:solidFill>
+            <a:prstDash val="solid"/>
+          </a:ln>
+        </p:spPr>
+        <p:txBody>
+          <a:bodyPr/>
+          <a:lstStyle/>
+          <a:p>
+            <a:endParaRPr lang="en-US" dirty="0"/>
+          </a:p>
+        </p:txBody>
+      </p:sp>
+      <p:sp>
+        <p:nvSpPr>
+          <p:cNvPr id="3" name="Text 1">
+            <a:extLst>
+              <a:ext uri="{FF2B5EF4-FFF2-40B4-BE49-F238E27FC236}">
+                <a16:creationId xmlns:a16="http://schemas.microsoft.com/office/drawing/2014/main" id="{C2F80BE0-3437-EEAA-A5DD-1A994ACF8286}"/>
+              </a:ext>
+            </a:extLst>
+          </p:cNvPr>
+          <p:cNvSpPr/>
+          <p:nvPr/>
+        </p:nvSpPr>
+        <p:spPr>
+          <a:xfrm>
+            <a:off x="365760" y="0"/>
+            <a:ext cx="8412480" cy="777240"/>
+          </a:xfrm>
+          <a:prstGeom prst="rect">
+            <a:avLst/>
+          </a:prstGeom>
+          <a:noFill/>
+          <a:ln/>
+        </p:spPr>
+        <p:txBody>
+          <a:bodyPr wrap="square" lIns="0" tIns="0" rIns="0" bIns="0" rtlCol="0" anchor="ctr"/>
+          <a:lstStyle/>
+          <a:p>
+            <a:pPr marL="0" indent="0">
+              <a:buNone/>
+            </a:pPr>
+            <a:r>
+              <a:rPr lang="en-US" sz="2400" b="1" dirty="0">
+                <a:solidFill>
+                  <a:srgbClr val="FFFFFF"/>
+                </a:solidFill>
+                <a:latin typeface="Calibri" pitchFamily="34" charset="0"/>
+                <a:ea typeface="Calibri" pitchFamily="34" charset="-122"/>
+                <a:cs typeface="Calibri" pitchFamily="34" charset="-120"/>
+              </a:rPr>
+              <a:t>Results and Answers (Test 1)</a:t>
+            </a:r>
+            <a:endParaRPr lang="en-US" sz="2400" dirty="0"/>
+          </a:p>
+        </p:txBody>
+      </p:sp>
+      <p:graphicFrame>
+        <p:nvGraphicFramePr>
+          <p:cNvPr id="4" name="Chart 3">
+            <a:extLst>
+              <a:ext uri="{FF2B5EF4-FFF2-40B4-BE49-F238E27FC236}">
+                <a16:creationId xmlns:a16="http://schemas.microsoft.com/office/drawing/2014/main" id="{81A4C7CA-A120-30D7-79ED-B8879F9E6884}"/>
+              </a:ext>
+            </a:extLst>
+          </p:cNvPr>
+          <p:cNvGraphicFramePr>
+            <a:graphicFrameLocks/>
+          </p:cNvGraphicFramePr>
+          <p:nvPr>
+            <p:extLst>
+              <p:ext uri="{D42A27DB-BD31-4B8C-83A1-F6EECF244321}">
+                <p14:modId xmlns:p14="http://schemas.microsoft.com/office/powerpoint/2010/main" val="3646090802"/>
+              </p:ext>
+            </p:extLst>
+          </p:nvPr>
+        </p:nvGraphicFramePr>
+        <p:xfrm>
+          <a:off x="4756980" y="979328"/>
+          <a:ext cx="4021260" cy="2795718"/>
+        </p:xfrm>
+        <a:graphic>
+          <a:graphicData uri="http://schemas.openxmlformats.org/drawingml/2006/chart">
+            <c:chart xmlns:c="http://schemas.openxmlformats.org/drawingml/2006/chart" xmlns:r="http://schemas.openxmlformats.org/officeDocument/2006/relationships" r:id="rId3"/>
+          </a:graphicData>
+        </a:graphic>
+      </p:graphicFrame>
+      <p:sp>
+        <p:nvSpPr>
+          <p:cNvPr id="6" name="TextBox 5">
+            <a:extLst>
+              <a:ext uri="{FF2B5EF4-FFF2-40B4-BE49-F238E27FC236}">
+                <a16:creationId xmlns:a16="http://schemas.microsoft.com/office/drawing/2014/main" id="{B28F6A4A-6586-484F-3404-82620BA489AE}"/>
+              </a:ext>
+            </a:extLst>
+          </p:cNvPr>
+          <p:cNvSpPr txBox="1"/>
+          <p:nvPr/>
+        </p:nvSpPr>
+        <p:spPr>
+          <a:xfrm>
+            <a:off x="178690" y="1160360"/>
+            <a:ext cx="4578290" cy="2377574"/>
+          </a:xfrm>
+          <a:prstGeom prst="rect">
+            <a:avLst/>
+          </a:prstGeom>
+          <a:noFill/>
+        </p:spPr>
+        <p:txBody>
+          <a:bodyPr wrap="square">
+            <a:spAutoFit/>
+          </a:bodyPr>
+          <a:lstStyle/>
+          <a:p>
+            <a:pPr algn="l">
+              <a:spcBef>
+                <a:spcPts val="900"/>
+              </a:spcBef>
+              <a:spcAft>
+                <a:spcPts val="900"/>
+              </a:spcAft>
+              <a:buNone/>
+            </a:pPr>
+            <a:r>
+              <a:rPr lang="en-US" b="1" i="0" dirty="0">
+                <a:solidFill>
+                  <a:srgbClr val="273540"/>
+                </a:solidFill>
+                <a:effectLst/>
+                <a:latin typeface="Lato Extended"/>
+              </a:rPr>
+              <a:t>Question:</a:t>
+            </a:r>
+            <a:r>
+              <a:rPr lang="en-US" b="0" i="0" dirty="0">
+                <a:solidFill>
+                  <a:srgbClr val="273540"/>
+                </a:solidFill>
+                <a:effectLst/>
+                <a:latin typeface="Lato Extended"/>
+              </a:rPr>
+              <a:t> If we fix </a:t>
+            </a:r>
+            <a:r>
+              <a:rPr lang="en-US" b="0" i="0" dirty="0" err="1">
+                <a:solidFill>
+                  <a:srgbClr val="273540"/>
+                </a:solidFill>
+                <a:effectLst/>
+                <a:latin typeface="Lato Extended"/>
+              </a:rPr>
+              <a:t>n_proc</a:t>
+            </a:r>
+            <a:r>
+              <a:rPr lang="en-US" b="0" i="0" dirty="0">
+                <a:solidFill>
+                  <a:srgbClr val="273540"/>
+                </a:solidFill>
+                <a:effectLst/>
+                <a:latin typeface="Lato Extended"/>
+              </a:rPr>
+              <a:t>, then at which value of N does </a:t>
+            </a:r>
+            <a:r>
+              <a:rPr lang="en-US" b="0" i="0" dirty="0" err="1">
+                <a:solidFill>
+                  <a:srgbClr val="273540"/>
+                </a:solidFill>
+                <a:effectLst/>
+                <a:latin typeface="Lato Extended"/>
+              </a:rPr>
+              <a:t>parallel_compute</a:t>
+            </a:r>
+            <a:r>
+              <a:rPr lang="en-US" b="0" i="0" dirty="0">
+                <a:solidFill>
+                  <a:srgbClr val="273540"/>
+                </a:solidFill>
+                <a:effectLst/>
+                <a:latin typeface="Lato Extended"/>
+              </a:rPr>
+              <a:t> outperform </a:t>
+            </a:r>
+            <a:r>
+              <a:rPr lang="en-US" b="0" i="0" dirty="0" err="1">
+                <a:solidFill>
+                  <a:srgbClr val="273540"/>
+                </a:solidFill>
+                <a:effectLst/>
+                <a:latin typeface="Lato Extended"/>
+              </a:rPr>
+              <a:t>sequential_compute</a:t>
+            </a:r>
+            <a:r>
+              <a:rPr lang="en-US" b="0" i="0" dirty="0">
+                <a:solidFill>
+                  <a:srgbClr val="273540"/>
+                </a:solidFill>
+                <a:effectLst/>
+                <a:latin typeface="Lato Extended"/>
+              </a:rPr>
+              <a:t>?</a:t>
+            </a:r>
+          </a:p>
+          <a:p>
+            <a:pPr algn="l">
+              <a:spcBef>
+                <a:spcPts val="900"/>
+              </a:spcBef>
+              <a:spcAft>
+                <a:spcPts val="900"/>
+              </a:spcAft>
+              <a:buNone/>
+            </a:pPr>
+            <a:r>
+              <a:rPr lang="en-US" b="1" dirty="0">
+                <a:solidFill>
+                  <a:srgbClr val="273540"/>
+                </a:solidFill>
+                <a:latin typeface="Lato Extended"/>
+              </a:rPr>
+              <a:t>Answer:</a:t>
+            </a:r>
+            <a:r>
+              <a:rPr lang="en-US" dirty="0">
+                <a:solidFill>
+                  <a:srgbClr val="273540"/>
+                </a:solidFill>
+                <a:latin typeface="Lato Extended"/>
+              </a:rPr>
+              <a:t> It starts </a:t>
+            </a:r>
+            <a:r>
+              <a:rPr lang="en-US" i="1" dirty="0">
+                <a:solidFill>
+                  <a:srgbClr val="273540"/>
+                </a:solidFill>
+                <a:latin typeface="Lato Extended"/>
+              </a:rPr>
+              <a:t>consistently </a:t>
+            </a:r>
+            <a:r>
+              <a:rPr lang="en-US" dirty="0">
+                <a:solidFill>
+                  <a:srgbClr val="273540"/>
+                </a:solidFill>
+                <a:latin typeface="Lato Extended"/>
+              </a:rPr>
+              <a:t>outperforming at N = </a:t>
+            </a:r>
+            <a:r>
+              <a:rPr lang="en-US" dirty="0">
+                <a:solidFill>
+                  <a:srgbClr val="00B050"/>
+                </a:solidFill>
+                <a:latin typeface="Lato Extended"/>
+              </a:rPr>
+              <a:t>680,000</a:t>
+            </a:r>
+            <a:r>
+              <a:rPr lang="en-US" dirty="0">
+                <a:solidFill>
+                  <a:srgbClr val="273540"/>
+                </a:solidFill>
+                <a:latin typeface="Lato Extended"/>
+              </a:rPr>
+              <a:t>.</a:t>
+            </a:r>
+            <a:endParaRPr lang="en-US" b="0" i="0" dirty="0">
+              <a:solidFill>
+                <a:srgbClr val="273540"/>
+              </a:solidFill>
+              <a:effectLst/>
+              <a:latin typeface="Lato Extended"/>
+            </a:endParaRPr>
+          </a:p>
+          <a:p>
+            <a:pPr>
+              <a:buNone/>
+            </a:pPr>
+            <a:br>
+              <a:rPr lang="en-US" dirty="0"/>
+            </a:br>
+            <a:endParaRPr lang="en-US" dirty="0"/>
+          </a:p>
+        </p:txBody>
+      </p:sp>
+      <p:sp>
+        <p:nvSpPr>
+          <p:cNvPr id="7" name="TextBox 6">
+            <a:extLst>
+              <a:ext uri="{FF2B5EF4-FFF2-40B4-BE49-F238E27FC236}">
+                <a16:creationId xmlns:a16="http://schemas.microsoft.com/office/drawing/2014/main" id="{B6720FC1-56C3-64AE-BB91-9D708BED2264}"/>
+              </a:ext>
+            </a:extLst>
+          </p:cNvPr>
+          <p:cNvSpPr txBox="1"/>
+          <p:nvPr/>
+        </p:nvSpPr>
+        <p:spPr>
+          <a:xfrm>
+            <a:off x="365760" y="3102671"/>
+            <a:ext cx="3082954" cy="523220"/>
+          </a:xfrm>
+          <a:prstGeom prst="rect">
+            <a:avLst/>
+          </a:prstGeom>
+          <a:noFill/>
+        </p:spPr>
+        <p:txBody>
+          <a:bodyPr wrap="square" rtlCol="0">
+            <a:spAutoFit/>
+          </a:bodyPr>
+          <a:lstStyle/>
+          <a:p>
+            <a:r>
+              <a:rPr lang="en-US" sz="1400" dirty="0">
+                <a:solidFill>
+                  <a:schemeClr val="tx1">
+                    <a:lumMod val="75000"/>
+                    <a:lumOff val="25000"/>
+                  </a:schemeClr>
+                </a:solidFill>
+              </a:rPr>
+              <a:t>Note: </a:t>
+            </a:r>
+            <a:r>
+              <a:rPr lang="en-US" sz="1400" dirty="0" err="1">
+                <a:solidFill>
+                  <a:schemeClr val="tx1">
+                    <a:lumMod val="75000"/>
+                    <a:lumOff val="25000"/>
+                  </a:schemeClr>
+                </a:solidFill>
+              </a:rPr>
+              <a:t>parallel_compute</a:t>
+            </a:r>
+            <a:r>
+              <a:rPr lang="en-US" sz="1400" dirty="0">
+                <a:solidFill>
+                  <a:schemeClr val="tx1">
+                    <a:lumMod val="75000"/>
+                    <a:lumOff val="25000"/>
+                  </a:schemeClr>
+                </a:solidFill>
+              </a:rPr>
+              <a:t> starts outperforming at large values of N</a:t>
+            </a:r>
+          </a:p>
+        </p:txBody>
+      </p:sp>
+    </p:spTree>
+    <p:extLst>
+      <p:ext uri="{BB962C8B-B14F-4D97-AF65-F5344CB8AC3E}">
+        <p14:creationId xmlns:p14="http://schemas.microsoft.com/office/powerpoint/2010/main" val="1851093017"/>
+      </p:ext>
+    </p:extLst>
+  </p:cSld>
+  <p:clrMapOvr>
+    <a:masterClrMapping/>
+  </p:clrMapOvr>
+</p:sld>
+</file>
+
+<file path=ppt/slides/slide14.xml><?xml version="1.0" encoding="utf-8"?>
+<p:sld xmlns:a="http://schemas.openxmlformats.org/drawingml/2006/main" xmlns:r="http://schemas.openxmlformats.org/officeDocument/2006/relationships" xmlns:p="http://schemas.openxmlformats.org/presentationml/2006/main">
+  <p:cSld>
+    <p:spTree>
+      <p:nvGrpSpPr>
+        <p:cNvPr id="1" name="">
+          <a:extLst>
+            <a:ext uri="{FF2B5EF4-FFF2-40B4-BE49-F238E27FC236}">
+              <a16:creationId xmlns:a16="http://schemas.microsoft.com/office/drawing/2014/main" id="{AC2AB153-CB4F-2DC1-4C4F-8603CC7E01B8}"/>
+            </a:ext>
+          </a:extLst>
+        </p:cNvPr>
+        <p:cNvGrpSpPr/>
+        <p:nvPr/>
+      </p:nvGrpSpPr>
+      <p:grpSpPr>
+        <a:xfrm>
+          <a:off x="0" y="0"/>
+          <a:ext cx="0" cy="0"/>
+          <a:chOff x="0" y="0"/>
+          <a:chExt cx="0" cy="0"/>
+        </a:xfrm>
+      </p:grpSpPr>
+      <p:sp>
+        <p:nvSpPr>
+          <p:cNvPr id="2" name="Shape 0">
+            <a:extLst>
+              <a:ext uri="{FF2B5EF4-FFF2-40B4-BE49-F238E27FC236}">
+                <a16:creationId xmlns:a16="http://schemas.microsoft.com/office/drawing/2014/main" id="{DE885F72-F7A5-9475-95C5-2D754324601E}"/>
+              </a:ext>
+            </a:extLst>
+          </p:cNvPr>
+          <p:cNvSpPr/>
+          <p:nvPr/>
+        </p:nvSpPr>
+        <p:spPr>
+          <a:xfrm>
+            <a:off x="0" y="0"/>
+            <a:ext cx="9144000" cy="777240"/>
+          </a:xfrm>
+          <a:prstGeom prst="rect">
+            <a:avLst/>
+          </a:prstGeom>
+          <a:solidFill>
+            <a:srgbClr val="00A896"/>
+          </a:solidFill>
+          <a:ln w="12700">
+            <a:solidFill>
+              <a:srgbClr val="00A896"/>
+            </a:solidFill>
+            <a:prstDash val="solid"/>
+          </a:ln>
+        </p:spPr>
+        <p:txBody>
+          <a:bodyPr/>
+          <a:lstStyle/>
+          <a:p>
+            <a:endParaRPr lang="en-US"/>
+          </a:p>
+        </p:txBody>
+      </p:sp>
+      <p:sp>
+        <p:nvSpPr>
+          <p:cNvPr id="3" name="Text 1">
+            <a:extLst>
+              <a:ext uri="{FF2B5EF4-FFF2-40B4-BE49-F238E27FC236}">
+                <a16:creationId xmlns:a16="http://schemas.microsoft.com/office/drawing/2014/main" id="{9BC26B48-2911-5A21-1EDA-A1A90F03456E}"/>
+              </a:ext>
+            </a:extLst>
+          </p:cNvPr>
+          <p:cNvSpPr/>
+          <p:nvPr/>
+        </p:nvSpPr>
+        <p:spPr>
+          <a:xfrm>
+            <a:off x="365760" y="0"/>
+            <a:ext cx="8412480" cy="777240"/>
+          </a:xfrm>
+          <a:prstGeom prst="rect">
+            <a:avLst/>
+          </a:prstGeom>
+          <a:noFill/>
+          <a:ln/>
+        </p:spPr>
+        <p:txBody>
+          <a:bodyPr wrap="square" lIns="0" tIns="0" rIns="0" bIns="0" rtlCol="0" anchor="ctr"/>
+          <a:lstStyle/>
+          <a:p>
+            <a:r>
+              <a:rPr lang="en-US" sz="2400" b="1" dirty="0">
+                <a:solidFill>
+                  <a:srgbClr val="FFFFFF"/>
+                </a:solidFill>
+                <a:latin typeface="Calibri" pitchFamily="34" charset="0"/>
+                <a:ea typeface="Calibri" pitchFamily="34" charset="-122"/>
+                <a:cs typeface="Calibri" pitchFamily="34" charset="-120"/>
+              </a:rPr>
+              <a:t>Results and Answers (Test 2)</a:t>
+            </a:r>
+            <a:endParaRPr lang="en-US" sz="2400" dirty="0"/>
+          </a:p>
+        </p:txBody>
+      </p:sp>
+      <p:sp>
+        <p:nvSpPr>
+          <p:cNvPr id="4" name="Shape 0">
+            <a:extLst>
+              <a:ext uri="{FF2B5EF4-FFF2-40B4-BE49-F238E27FC236}">
+                <a16:creationId xmlns:a16="http://schemas.microsoft.com/office/drawing/2014/main" id="{4A40FE1F-C2E9-2977-9479-7D5172A62DDE}"/>
+              </a:ext>
+            </a:extLst>
+          </p:cNvPr>
+          <p:cNvSpPr/>
+          <p:nvPr/>
+        </p:nvSpPr>
+        <p:spPr>
+          <a:xfrm>
+            <a:off x="0" y="0"/>
+            <a:ext cx="9144000" cy="777240"/>
+          </a:xfrm>
+          <a:prstGeom prst="rect">
+            <a:avLst/>
+          </a:prstGeom>
+          <a:solidFill>
+            <a:srgbClr val="00A896"/>
+          </a:solidFill>
+          <a:ln w="12700">
+            <a:solidFill>
+              <a:srgbClr val="00A896"/>
+            </a:solidFill>
+            <a:prstDash val="solid"/>
+          </a:ln>
+        </p:spPr>
+        <p:txBody>
+          <a:bodyPr/>
+          <a:lstStyle/>
+          <a:p>
+            <a:endParaRPr lang="en-US" dirty="0"/>
+          </a:p>
+        </p:txBody>
+      </p:sp>
+      <p:sp>
+        <p:nvSpPr>
+          <p:cNvPr id="5" name="Text 1">
+            <a:extLst>
+              <a:ext uri="{FF2B5EF4-FFF2-40B4-BE49-F238E27FC236}">
+                <a16:creationId xmlns:a16="http://schemas.microsoft.com/office/drawing/2014/main" id="{FB4FCC26-0227-B1D4-8EBE-D6CF080F430B}"/>
+              </a:ext>
+            </a:extLst>
+          </p:cNvPr>
+          <p:cNvSpPr/>
+          <p:nvPr/>
+        </p:nvSpPr>
+        <p:spPr>
+          <a:xfrm>
+            <a:off x="365760" y="0"/>
+            <a:ext cx="8412480" cy="777240"/>
+          </a:xfrm>
+          <a:prstGeom prst="rect">
+            <a:avLst/>
+          </a:prstGeom>
+          <a:noFill/>
+          <a:ln/>
+        </p:spPr>
+        <p:txBody>
+          <a:bodyPr wrap="square" lIns="0" tIns="0" rIns="0" bIns="0" rtlCol="0" anchor="ctr"/>
+          <a:lstStyle/>
+          <a:p>
+            <a:pPr marL="0" indent="0">
+              <a:buNone/>
+            </a:pPr>
+            <a:r>
+              <a:rPr lang="en-US" sz="2400" b="1" dirty="0">
+                <a:solidFill>
+                  <a:srgbClr val="FFFFFF"/>
+                </a:solidFill>
+                <a:latin typeface="Calibri" pitchFamily="34" charset="0"/>
+                <a:ea typeface="Calibri" pitchFamily="34" charset="-122"/>
+                <a:cs typeface="Calibri" pitchFamily="34" charset="-120"/>
+              </a:rPr>
+              <a:t>Results and Answers (Test 2)</a:t>
+            </a:r>
+            <a:endParaRPr lang="en-US" sz="2400" dirty="0"/>
+          </a:p>
+        </p:txBody>
+      </p:sp>
+      <p:sp>
+        <p:nvSpPr>
+          <p:cNvPr id="7" name="TextBox 6">
+            <a:extLst>
+              <a:ext uri="{FF2B5EF4-FFF2-40B4-BE49-F238E27FC236}">
+                <a16:creationId xmlns:a16="http://schemas.microsoft.com/office/drawing/2014/main" id="{F372E74A-FCF0-6C62-DFDC-B504535CF19A}"/>
+              </a:ext>
+            </a:extLst>
+          </p:cNvPr>
+          <p:cNvSpPr txBox="1"/>
+          <p:nvPr/>
+        </p:nvSpPr>
+        <p:spPr>
+          <a:xfrm>
+            <a:off x="178690" y="1160360"/>
+            <a:ext cx="4363949" cy="2654573"/>
+          </a:xfrm>
+          <a:prstGeom prst="rect">
+            <a:avLst/>
+          </a:prstGeom>
+          <a:noFill/>
+        </p:spPr>
+        <p:txBody>
+          <a:bodyPr wrap="square">
+            <a:spAutoFit/>
+          </a:bodyPr>
+          <a:lstStyle/>
+          <a:p>
+            <a:pPr algn="l">
+              <a:spcBef>
+                <a:spcPts val="900"/>
+              </a:spcBef>
+              <a:spcAft>
+                <a:spcPts val="900"/>
+              </a:spcAft>
+              <a:buNone/>
+            </a:pPr>
+            <a:r>
+              <a:rPr lang="en-US" b="1" i="0" dirty="0">
+                <a:solidFill>
+                  <a:srgbClr val="273540"/>
+                </a:solidFill>
+                <a:effectLst/>
+                <a:latin typeface="Lato Extended"/>
+              </a:rPr>
+              <a:t>Question:</a:t>
+            </a:r>
+            <a:r>
+              <a:rPr lang="en-US" b="0" i="0" dirty="0">
+                <a:solidFill>
+                  <a:srgbClr val="273540"/>
+                </a:solidFill>
+                <a:effectLst/>
+                <a:latin typeface="Lato Extended"/>
+              </a:rPr>
+              <a:t> If we fix N to a large number, then at which value of </a:t>
+            </a:r>
+            <a:r>
+              <a:rPr lang="en-US" b="0" i="0" dirty="0" err="1">
+                <a:solidFill>
+                  <a:srgbClr val="273540"/>
+                </a:solidFill>
+                <a:effectLst/>
+                <a:latin typeface="Lato Extended"/>
+              </a:rPr>
+              <a:t>n_proc</a:t>
+            </a:r>
+            <a:r>
+              <a:rPr lang="en-US" b="0" i="0" dirty="0">
+                <a:solidFill>
+                  <a:srgbClr val="273540"/>
+                </a:solidFill>
+                <a:effectLst/>
+                <a:latin typeface="Lato Extended"/>
+              </a:rPr>
+              <a:t> does </a:t>
+            </a:r>
+            <a:r>
+              <a:rPr lang="en-US" b="0" i="0" dirty="0" err="1">
+                <a:solidFill>
+                  <a:srgbClr val="273540"/>
+                </a:solidFill>
+                <a:effectLst/>
+                <a:latin typeface="Lato Extended"/>
+              </a:rPr>
+              <a:t>parallel_compute</a:t>
+            </a:r>
+            <a:r>
+              <a:rPr lang="en-US" b="0" i="0" dirty="0">
+                <a:solidFill>
+                  <a:srgbClr val="273540"/>
+                </a:solidFill>
+                <a:effectLst/>
+                <a:latin typeface="Lato Extended"/>
+              </a:rPr>
+              <a:t> outperform </a:t>
+            </a:r>
+            <a:r>
+              <a:rPr lang="en-US" b="0" i="0" dirty="0" err="1">
+                <a:solidFill>
+                  <a:srgbClr val="273540"/>
+                </a:solidFill>
+                <a:effectLst/>
+                <a:latin typeface="Lato Extended"/>
+              </a:rPr>
+              <a:t>sequential_compute</a:t>
+            </a:r>
+            <a:r>
+              <a:rPr lang="en-US" b="0" i="0" dirty="0">
+                <a:solidFill>
+                  <a:srgbClr val="273540"/>
+                </a:solidFill>
+                <a:effectLst/>
+                <a:latin typeface="Lato Extended"/>
+              </a:rPr>
+              <a:t>?</a:t>
+            </a:r>
+          </a:p>
+          <a:p>
+            <a:pPr algn="l">
+              <a:spcBef>
+                <a:spcPts val="900"/>
+              </a:spcBef>
+              <a:spcAft>
+                <a:spcPts val="900"/>
+              </a:spcAft>
+              <a:buNone/>
+            </a:pPr>
+            <a:r>
+              <a:rPr lang="en-US" b="1" dirty="0">
+                <a:solidFill>
+                  <a:srgbClr val="273540"/>
+                </a:solidFill>
+                <a:latin typeface="Lato Extended"/>
+              </a:rPr>
+              <a:t>Answer:</a:t>
+            </a:r>
+            <a:r>
+              <a:rPr lang="en-US" dirty="0">
+                <a:solidFill>
+                  <a:srgbClr val="273540"/>
+                </a:solidFill>
+                <a:latin typeface="Lato Extended"/>
+              </a:rPr>
+              <a:t> It starts outperforming at </a:t>
+            </a:r>
+            <a:r>
+              <a:rPr lang="en-US" dirty="0" err="1">
+                <a:solidFill>
+                  <a:srgbClr val="273540"/>
+                </a:solidFill>
+                <a:latin typeface="Lato Extended"/>
+              </a:rPr>
+              <a:t>n_proc</a:t>
+            </a:r>
+            <a:r>
+              <a:rPr lang="en-US" dirty="0">
+                <a:solidFill>
+                  <a:srgbClr val="273540"/>
+                </a:solidFill>
+                <a:latin typeface="Lato Extended"/>
+              </a:rPr>
+              <a:t> = </a:t>
+            </a:r>
+            <a:r>
+              <a:rPr lang="en-US" dirty="0">
+                <a:solidFill>
+                  <a:srgbClr val="00B050"/>
+                </a:solidFill>
+                <a:latin typeface="Lato Extended"/>
+              </a:rPr>
+              <a:t>6</a:t>
+            </a:r>
+            <a:r>
+              <a:rPr lang="en-US" dirty="0">
+                <a:solidFill>
+                  <a:srgbClr val="273540"/>
+                </a:solidFill>
+                <a:latin typeface="Lato Extended"/>
+              </a:rPr>
+              <a:t>.</a:t>
+            </a:r>
+            <a:endParaRPr lang="en-US" b="0" i="0" dirty="0">
+              <a:solidFill>
+                <a:srgbClr val="273540"/>
+              </a:solidFill>
+              <a:effectLst/>
+              <a:latin typeface="Lato Extended"/>
+            </a:endParaRPr>
+          </a:p>
+          <a:p>
+            <a:pPr>
+              <a:buNone/>
+            </a:pPr>
+            <a:br>
+              <a:rPr lang="en-US" dirty="0"/>
+            </a:br>
+            <a:endParaRPr lang="en-US" dirty="0"/>
+          </a:p>
+        </p:txBody>
+      </p:sp>
+      <p:graphicFrame>
+        <p:nvGraphicFramePr>
+          <p:cNvPr id="8" name="Chart 7">
+            <a:extLst>
+              <a:ext uri="{FF2B5EF4-FFF2-40B4-BE49-F238E27FC236}">
+                <a16:creationId xmlns:a16="http://schemas.microsoft.com/office/drawing/2014/main" id="{D1C3888B-5565-FCF8-6E65-EB24D7FEC675}"/>
+              </a:ext>
+            </a:extLst>
+          </p:cNvPr>
+          <p:cNvGraphicFramePr>
+            <a:graphicFrameLocks/>
+          </p:cNvGraphicFramePr>
+          <p:nvPr>
+            <p:extLst>
+              <p:ext uri="{D42A27DB-BD31-4B8C-83A1-F6EECF244321}">
+                <p14:modId xmlns:p14="http://schemas.microsoft.com/office/powerpoint/2010/main" val="2634773173"/>
+              </p:ext>
+            </p:extLst>
+          </p:nvPr>
+        </p:nvGraphicFramePr>
+        <p:xfrm>
+          <a:off x="4756980" y="979742"/>
+          <a:ext cx="4202884" cy="2654573"/>
+        </p:xfrm>
+        <a:graphic>
+          <a:graphicData uri="http://schemas.openxmlformats.org/drawingml/2006/chart">
+            <c:chart xmlns:c="http://schemas.openxmlformats.org/drawingml/2006/chart" xmlns:r="http://schemas.openxmlformats.org/officeDocument/2006/relationships" r:id="rId3"/>
+          </a:graphicData>
+        </a:graphic>
+      </p:graphicFrame>
+      <p:sp>
+        <p:nvSpPr>
+          <p:cNvPr id="9" name="TextBox 8">
+            <a:extLst>
+              <a:ext uri="{FF2B5EF4-FFF2-40B4-BE49-F238E27FC236}">
+                <a16:creationId xmlns:a16="http://schemas.microsoft.com/office/drawing/2014/main" id="{3CCCD450-6E67-E17A-35C2-1ABEC6C4026A}"/>
+              </a:ext>
+            </a:extLst>
+          </p:cNvPr>
+          <p:cNvSpPr txBox="1"/>
+          <p:nvPr/>
+        </p:nvSpPr>
+        <p:spPr>
+          <a:xfrm>
+            <a:off x="404523" y="3337879"/>
+            <a:ext cx="3082954" cy="1169551"/>
+          </a:xfrm>
+          <a:prstGeom prst="rect">
+            <a:avLst/>
+          </a:prstGeom>
+          <a:noFill/>
+        </p:spPr>
+        <p:txBody>
+          <a:bodyPr wrap="square" rtlCol="0">
+            <a:spAutoFit/>
+          </a:bodyPr>
+          <a:lstStyle/>
+          <a:p>
+            <a:r>
+              <a:rPr lang="en-US" sz="1400" dirty="0">
+                <a:solidFill>
+                  <a:schemeClr val="tx1">
+                    <a:lumMod val="75000"/>
+                    <a:lumOff val="25000"/>
+                  </a:schemeClr>
+                </a:solidFill>
+              </a:rPr>
+              <a:t>Note: </a:t>
+            </a:r>
+            <a:r>
+              <a:rPr lang="en-US" sz="1400" dirty="0" err="1">
+                <a:solidFill>
+                  <a:schemeClr val="tx1">
+                    <a:lumMod val="75000"/>
+                    <a:lumOff val="25000"/>
+                  </a:schemeClr>
+                </a:solidFill>
+              </a:rPr>
+              <a:t>parallel_compute</a:t>
+            </a:r>
+            <a:r>
+              <a:rPr lang="en-US" sz="1400" dirty="0">
+                <a:solidFill>
+                  <a:schemeClr val="tx1">
+                    <a:lumMod val="75000"/>
+                    <a:lumOff val="25000"/>
+                  </a:schemeClr>
+                </a:solidFill>
+              </a:rPr>
+              <a:t> outperforms as long using extra processors compensate the fork and pipe operations overhead, but starts underperforming when </a:t>
+            </a:r>
+            <a:r>
+              <a:rPr lang="en-US" sz="1400" dirty="0" err="1">
+                <a:solidFill>
+                  <a:schemeClr val="tx1">
+                    <a:lumMod val="75000"/>
+                    <a:lumOff val="25000"/>
+                  </a:schemeClr>
+                </a:solidFill>
+              </a:rPr>
+              <a:t>n_proc</a:t>
+            </a:r>
+            <a:r>
+              <a:rPr lang="en-US" sz="1400" dirty="0">
+                <a:solidFill>
+                  <a:schemeClr val="tx1">
+                    <a:lumMod val="75000"/>
+                    <a:lumOff val="25000"/>
+                  </a:schemeClr>
+                </a:solidFill>
+              </a:rPr>
+              <a:t> exceeds idle processors</a:t>
+            </a:r>
+          </a:p>
+        </p:txBody>
+      </p:sp>
+    </p:spTree>
+    <p:extLst>
+      <p:ext uri="{BB962C8B-B14F-4D97-AF65-F5344CB8AC3E}">
+        <p14:creationId xmlns:p14="http://schemas.microsoft.com/office/powerpoint/2010/main" val="33646106"/>
+      </p:ext>
+    </p:extLst>
+  </p:cSld>
+  <p:clrMapOvr>
+    <a:masterClrMapping/>
+  </p:clrMapOvr>
+</p:sld>
+</file>
+
+<file path=ppt/slides/slide15.xml><?xml version="1.0" encoding="utf-8"?>
+<p:sld xmlns:a="http://schemas.openxmlformats.org/drawingml/2006/main" xmlns:r="http://schemas.openxmlformats.org/officeDocument/2006/relationships" xmlns:p="http://schemas.openxmlformats.org/presentationml/2006/main">
+  <p:cSld>
+    <p:bg>
+      <p:bgPr>
+        <a:solidFill>
+          <a:srgbClr val="0F1923"/>
+        </a:solidFill>
+        <a:effectLst/>
+      </p:bgPr>
+    </p:bg>
+    <p:spTree>
+      <p:nvGrpSpPr>
+        <p:cNvPr id="1" name="">
+          <a:extLst>
+            <a:ext uri="{FF2B5EF4-FFF2-40B4-BE49-F238E27FC236}">
+              <a16:creationId xmlns:a16="http://schemas.microsoft.com/office/drawing/2014/main" id="{56B5E801-8FC1-B9B0-4BFD-703B4B0BAD9D}"/>
+            </a:ext>
+          </a:extLst>
+        </p:cNvPr>
+        <p:cNvGrpSpPr/>
+        <p:nvPr/>
+      </p:nvGrpSpPr>
+      <p:grpSpPr>
+        <a:xfrm>
+          <a:off x="0" y="0"/>
+          <a:ext cx="0" cy="0"/>
+          <a:chOff x="0" y="0"/>
+          <a:chExt cx="0" cy="0"/>
+        </a:xfrm>
+      </p:grpSpPr>
+      <p:sp>
+        <p:nvSpPr>
+          <p:cNvPr id="2" name="Shape 0">
+            <a:extLst>
+              <a:ext uri="{FF2B5EF4-FFF2-40B4-BE49-F238E27FC236}">
+                <a16:creationId xmlns:a16="http://schemas.microsoft.com/office/drawing/2014/main" id="{10103D2B-2620-6CF7-5D47-413B0E41B312}"/>
+              </a:ext>
+            </a:extLst>
+          </p:cNvPr>
+          <p:cNvSpPr/>
+          <p:nvPr/>
+        </p:nvSpPr>
+        <p:spPr>
+          <a:xfrm>
+            <a:off x="0" y="2163536"/>
+            <a:ext cx="9144000" cy="777240"/>
+          </a:xfrm>
+          <a:prstGeom prst="rect">
+            <a:avLst/>
+          </a:prstGeom>
+          <a:solidFill>
+            <a:srgbClr val="00A896"/>
+          </a:solidFill>
+          <a:ln w="12700">
+            <a:solidFill>
+              <a:srgbClr val="00A896"/>
+            </a:solidFill>
+            <a:prstDash val="solid"/>
+          </a:ln>
+        </p:spPr>
+        <p:txBody>
+          <a:bodyPr/>
+          <a:lstStyle/>
+          <a:p>
+            <a:pPr marL="0" marR="0" lvl="0" indent="0" algn="l" defTabSz="914400" rtl="0" eaLnBrk="1" fontAlgn="auto" latinLnBrk="0" hangingPunct="1">
+              <a:lnSpc>
+                <a:spcPct val="100000"/>
+              </a:lnSpc>
+              <a:spcBef>
+                <a:spcPts val="0"/>
+              </a:spcBef>
+              <a:spcAft>
+                <a:spcPts val="0"/>
+              </a:spcAft>
+              <a:buClrTx/>
+              <a:buSzTx/>
+              <a:buFontTx/>
+              <a:buNone/>
+              <a:tabLst/>
+              <a:defRPr/>
+            </a:pPr>
+            <a:endParaRPr kumimoji="0" lang="en-US" sz="1800" b="0" i="0" u="none" strike="noStrike" kern="1200" cap="none" spc="0" normalizeH="0" baseline="0" noProof="0">
+              <a:ln>
+                <a:noFill/>
+              </a:ln>
+              <a:solidFill>
+                <a:prstClr val="black"/>
+              </a:solidFill>
+              <a:effectLst/>
+              <a:uLnTx/>
+              <a:uFillTx/>
+              <a:latin typeface="Calibri" panose="020F0502020204030204"/>
+              <a:ea typeface="+mn-ea"/>
+              <a:cs typeface="+mn-cs"/>
+            </a:endParaRPr>
+          </a:p>
+        </p:txBody>
+      </p:sp>
+      <p:sp>
+        <p:nvSpPr>
+          <p:cNvPr id="3" name="Text 1">
+            <a:extLst>
+              <a:ext uri="{FF2B5EF4-FFF2-40B4-BE49-F238E27FC236}">
+                <a16:creationId xmlns:a16="http://schemas.microsoft.com/office/drawing/2014/main" id="{C16A0F1E-24E5-ACDB-A429-10155964A61B}"/>
+              </a:ext>
+            </a:extLst>
+          </p:cNvPr>
+          <p:cNvSpPr/>
+          <p:nvPr/>
+        </p:nvSpPr>
+        <p:spPr>
+          <a:xfrm>
+            <a:off x="316775" y="2197009"/>
+            <a:ext cx="8412480" cy="777240"/>
+          </a:xfrm>
+          <a:prstGeom prst="rect">
+            <a:avLst/>
+          </a:prstGeom>
+          <a:noFill/>
+          <a:ln/>
+        </p:spPr>
+        <p:txBody>
+          <a:bodyPr wrap="square" lIns="0" tIns="0" rIns="0" bIns="0" rtlCol="0" anchor="ctr"/>
+          <a:lstStyle/>
+          <a:p>
+            <a:pPr marL="0" marR="0" lvl="0" indent="0" algn="ctr" defTabSz="914400" rtl="0" eaLnBrk="1" fontAlgn="auto" latinLnBrk="0" hangingPunct="1">
+              <a:lnSpc>
+                <a:spcPct val="100000"/>
+              </a:lnSpc>
+              <a:spcBef>
+                <a:spcPts val="0"/>
+              </a:spcBef>
+              <a:spcAft>
+                <a:spcPts val="0"/>
+              </a:spcAft>
+              <a:buClrTx/>
+              <a:buSzTx/>
+              <a:buFontTx/>
+              <a:buNone/>
+              <a:tabLst/>
+              <a:defRPr/>
+            </a:pPr>
+            <a:r>
+              <a:rPr lang="en-US" sz="2400" b="1" dirty="0">
+                <a:solidFill>
+                  <a:srgbClr val="FFFFFF"/>
+                </a:solidFill>
+                <a:latin typeface="Calibri" pitchFamily="34" charset="0"/>
+                <a:ea typeface="Calibri" pitchFamily="34" charset="-122"/>
+                <a:cs typeface="Calibri" pitchFamily="34" charset="-120"/>
+              </a:rPr>
+              <a:t>THANK YOU</a:t>
+            </a:r>
+            <a:endParaRPr kumimoji="0" lang="en-US" sz="2400" b="0" i="0" u="none" strike="noStrike" kern="1200" cap="none" spc="0" normalizeH="0" baseline="0" noProof="0" dirty="0">
+              <a:ln>
+                <a:noFill/>
+              </a:ln>
+              <a:solidFill>
+                <a:prstClr val="black"/>
+              </a:solidFill>
+              <a:effectLst/>
+              <a:uLnTx/>
+              <a:uFillTx/>
+              <a:latin typeface="Calibri" panose="020F0502020204030204"/>
+              <a:ea typeface="+mn-ea"/>
+              <a:cs typeface="+mn-cs"/>
+            </a:endParaRPr>
+          </a:p>
+        </p:txBody>
+      </p:sp>
+    </p:spTree>
+    <p:extLst>
+      <p:ext uri="{BB962C8B-B14F-4D97-AF65-F5344CB8AC3E}">
+        <p14:creationId xmlns:p14="http://schemas.microsoft.com/office/powerpoint/2010/main" val="660919028"/>
+      </p:ext>
+    </p:extLst>
   </p:cSld>
   <p:clrMapOvr>
     <a:masterClrMapping/>

--- a/OS_Lab_Project_Slides.pptx
+++ b/OS_Lab_Project_Slides.pptx
@@ -5,24 +5,28 @@
     <p:sldMasterId id="2147483648" r:id="rId1"/>
   </p:sldMasterIdLst>
   <p:notesMasterIdLst>
-    <p:notesMasterId r:id="rId17"/>
+    <p:notesMasterId r:id="rId21"/>
   </p:notesMasterIdLst>
   <p:sldIdLst>
     <p:sldId id="256" r:id="rId2"/>
     <p:sldId id="257" r:id="rId3"/>
     <p:sldId id="258" r:id="rId4"/>
-    <p:sldId id="259" r:id="rId5"/>
-    <p:sldId id="260" r:id="rId6"/>
-    <p:sldId id="263" r:id="rId7"/>
-    <p:sldId id="264" r:id="rId8"/>
-    <p:sldId id="261" r:id="rId9"/>
-    <p:sldId id="262" r:id="rId10"/>
-    <p:sldId id="270" r:id="rId11"/>
-    <p:sldId id="271" r:id="rId12"/>
-    <p:sldId id="267" r:id="rId13"/>
-    <p:sldId id="268" r:id="rId14"/>
-    <p:sldId id="269" r:id="rId15"/>
-    <p:sldId id="272" r:id="rId16"/>
+    <p:sldId id="273" r:id="rId5"/>
+    <p:sldId id="259" r:id="rId6"/>
+    <p:sldId id="260" r:id="rId7"/>
+    <p:sldId id="263" r:id="rId8"/>
+    <p:sldId id="264" r:id="rId9"/>
+    <p:sldId id="261" r:id="rId10"/>
+    <p:sldId id="274" r:id="rId11"/>
+    <p:sldId id="262" r:id="rId12"/>
+    <p:sldId id="275" r:id="rId13"/>
+    <p:sldId id="276" r:id="rId14"/>
+    <p:sldId id="270" r:id="rId15"/>
+    <p:sldId id="271" r:id="rId16"/>
+    <p:sldId id="267" r:id="rId17"/>
+    <p:sldId id="268" r:id="rId18"/>
+    <p:sldId id="269" r:id="rId19"/>
+    <p:sldId id="272" r:id="rId20"/>
   </p:sldIdLst>
   <p:sldSz cx="9144000" cy="5143500" type="screen16x9"/>
   <p:notesSz cx="5143500" cy="9144000"/>
@@ -3693,6 +3697,414 @@
         <p:cNvPr id="1" name="">
           <a:extLst>
             <a:ext uri="{FF2B5EF4-FFF2-40B4-BE49-F238E27FC236}">
+              <a16:creationId xmlns:a16="http://schemas.microsoft.com/office/drawing/2014/main" id="{3838BE31-733E-273D-9430-6B376829F9F3}"/>
+            </a:ext>
+          </a:extLst>
+        </p:cNvPr>
+        <p:cNvGrpSpPr/>
+        <p:nvPr/>
+      </p:nvGrpSpPr>
+      <p:grpSpPr>
+        <a:xfrm>
+          <a:off x="0" y="0"/>
+          <a:ext cx="0" cy="0"/>
+          <a:chOff x="0" y="0"/>
+          <a:chExt cx="0" cy="0"/>
+        </a:xfrm>
+      </p:grpSpPr>
+      <p:sp>
+        <p:nvSpPr>
+          <p:cNvPr id="2" name="Slide Image Placeholder 1">
+            <a:extLst>
+              <a:ext uri="{FF2B5EF4-FFF2-40B4-BE49-F238E27FC236}">
+                <a16:creationId xmlns:a16="http://schemas.microsoft.com/office/drawing/2014/main" id="{A2F0EC76-1276-0401-E817-9732074C809F}"/>
+              </a:ext>
+            </a:extLst>
+          </p:cNvPr>
+          <p:cNvSpPr>
+            <a:spLocks noGrp="1" noRot="1" noChangeAspect="1"/>
+          </p:cNvSpPr>
+          <p:nvPr>
+            <p:ph type="sldImg"/>
+          </p:nvPr>
+        </p:nvSpPr>
+        <p:spPr/>
+      </p:sp>
+      <p:sp>
+        <p:nvSpPr>
+          <p:cNvPr id="3" name="Notes Placeholder 2">
+            <a:extLst>
+              <a:ext uri="{FF2B5EF4-FFF2-40B4-BE49-F238E27FC236}">
+                <a16:creationId xmlns:a16="http://schemas.microsoft.com/office/drawing/2014/main" id="{94EB3FA4-68C1-60EE-313B-E5D398FF0CAF}"/>
+              </a:ext>
+            </a:extLst>
+          </p:cNvPr>
+          <p:cNvSpPr>
+            <a:spLocks noGrp="1"/>
+          </p:cNvSpPr>
+          <p:nvPr>
+            <p:ph type="body" idx="1"/>
+          </p:nvPr>
+        </p:nvSpPr>
+        <p:spPr/>
+        <p:txBody>
+          <a:bodyPr/>
+          <a:lstStyle/>
+          <a:p>
+            <a:endParaRPr lang="en-US" dirty="0"/>
+          </a:p>
+        </p:txBody>
+      </p:sp>
+      <p:sp>
+        <p:nvSpPr>
+          <p:cNvPr id="4" name="Slide Number Placeholder 3">
+            <a:extLst>
+              <a:ext uri="{FF2B5EF4-FFF2-40B4-BE49-F238E27FC236}">
+                <a16:creationId xmlns:a16="http://schemas.microsoft.com/office/drawing/2014/main" id="{6721D406-3FAF-3F30-F5FC-7C82F0DC7782}"/>
+              </a:ext>
+            </a:extLst>
+          </p:cNvPr>
+          <p:cNvSpPr>
+            <a:spLocks noGrp="1"/>
+          </p:cNvSpPr>
+          <p:nvPr>
+            <p:ph type="sldNum" sz="quarter" idx="10"/>
+          </p:nvPr>
+        </p:nvSpPr>
+        <p:spPr/>
+        <p:txBody>
+          <a:bodyPr/>
+          <a:lstStyle/>
+          <a:p>
+            <a:fld id="{F7021451-1387-4CA6-816F-3879F97B5CBC}" type="slidenum">
+              <a:rPr lang="en-US"/>
+              <a:t>10</a:t>
+            </a:fld>
+            <a:endParaRPr lang="en-US"/>
+          </a:p>
+        </p:txBody>
+      </p:sp>
+    </p:spTree>
+    <p:extLst>
+      <p:ext uri="{BB962C8B-B14F-4D97-AF65-F5344CB8AC3E}">
+        <p14:creationId xmlns:p14="http://schemas.microsoft.com/office/powerpoint/2010/main" val="4239502843"/>
+      </p:ext>
+    </p:extLst>
+  </p:cSld>
+  <p:clrMapOvr>
+    <a:masterClrMapping/>
+  </p:clrMapOvr>
+</p:notes>
+</file>
+
+<file path=ppt/notesSlides/notesSlide11.xml><?xml version="1.0" encoding="utf-8"?>
+<p:notes xmlns:a="http://schemas.openxmlformats.org/drawingml/2006/main" xmlns:r="http://schemas.openxmlformats.org/officeDocument/2006/relationships" xmlns:p="http://schemas.openxmlformats.org/presentationml/2006/main">
+  <p:cSld>
+    <p:spTree>
+      <p:nvGrpSpPr>
+        <p:cNvPr id="1" name=""/>
+        <p:cNvGrpSpPr/>
+        <p:nvPr/>
+      </p:nvGrpSpPr>
+      <p:grpSpPr>
+        <a:xfrm>
+          <a:off x="0" y="0"/>
+          <a:ext cx="0" cy="0"/>
+          <a:chOff x="0" y="0"/>
+          <a:chExt cx="0" cy="0"/>
+        </a:xfrm>
+      </p:grpSpPr>
+      <p:sp>
+        <p:nvSpPr>
+          <p:cNvPr id="2" name="Slide Image Placeholder 1"/>
+          <p:cNvSpPr>
+            <a:spLocks noGrp="1" noRot="1" noChangeAspect="1"/>
+          </p:cNvSpPr>
+          <p:nvPr>
+            <p:ph type="sldImg"/>
+          </p:nvPr>
+        </p:nvSpPr>
+        <p:spPr/>
+      </p:sp>
+      <p:sp>
+        <p:nvSpPr>
+          <p:cNvPr id="3" name="Notes Placeholder 2"/>
+          <p:cNvSpPr>
+            <a:spLocks noGrp="1"/>
+          </p:cNvSpPr>
+          <p:nvPr>
+            <p:ph type="body" idx="1"/>
+          </p:nvPr>
+        </p:nvSpPr>
+        <p:spPr/>
+        <p:txBody>
+          <a:bodyPr/>
+          <a:lstStyle/>
+          <a:p>
+            <a:endParaRPr lang="en-US" dirty="0"/>
+          </a:p>
+        </p:txBody>
+      </p:sp>
+      <p:sp>
+        <p:nvSpPr>
+          <p:cNvPr id="4" name="Slide Number Placeholder 3"/>
+          <p:cNvSpPr>
+            <a:spLocks noGrp="1"/>
+          </p:cNvSpPr>
+          <p:nvPr>
+            <p:ph type="sldNum" sz="quarter" idx="10"/>
+          </p:nvPr>
+        </p:nvSpPr>
+        <p:spPr/>
+        <p:txBody>
+          <a:bodyPr/>
+          <a:lstStyle/>
+          <a:p>
+            <a:fld id="{F7021451-1387-4CA6-816F-3879F97B5CBC}" type="slidenum">
+              <a:rPr lang="en-US"/>
+              <a:t>11</a:t>
+            </a:fld>
+            <a:endParaRPr lang="en-US"/>
+          </a:p>
+        </p:txBody>
+      </p:sp>
+    </p:spTree>
+    <p:extLst>
+      <p:ext uri="{BB962C8B-B14F-4D97-AF65-F5344CB8AC3E}">
+        <p14:creationId xmlns:p14="http://schemas.microsoft.com/office/powerpoint/2010/main" val="1024086991"/>
+      </p:ext>
+    </p:extLst>
+  </p:cSld>
+  <p:clrMapOvr>
+    <a:masterClrMapping/>
+  </p:clrMapOvr>
+</p:notes>
+</file>
+
+<file path=ppt/notesSlides/notesSlide12.xml><?xml version="1.0" encoding="utf-8"?>
+<p:notes xmlns:a="http://schemas.openxmlformats.org/drawingml/2006/main" xmlns:r="http://schemas.openxmlformats.org/officeDocument/2006/relationships" xmlns:p="http://schemas.openxmlformats.org/presentationml/2006/main">
+  <p:cSld>
+    <p:spTree>
+      <p:nvGrpSpPr>
+        <p:cNvPr id="1" name="">
+          <a:extLst>
+            <a:ext uri="{FF2B5EF4-FFF2-40B4-BE49-F238E27FC236}">
+              <a16:creationId xmlns:a16="http://schemas.microsoft.com/office/drawing/2014/main" id="{CCBD90AE-E438-C30A-B553-1C6334880D16}"/>
+            </a:ext>
+          </a:extLst>
+        </p:cNvPr>
+        <p:cNvGrpSpPr/>
+        <p:nvPr/>
+      </p:nvGrpSpPr>
+      <p:grpSpPr>
+        <a:xfrm>
+          <a:off x="0" y="0"/>
+          <a:ext cx="0" cy="0"/>
+          <a:chOff x="0" y="0"/>
+          <a:chExt cx="0" cy="0"/>
+        </a:xfrm>
+      </p:grpSpPr>
+      <p:sp>
+        <p:nvSpPr>
+          <p:cNvPr id="2" name="Slide Image Placeholder 1">
+            <a:extLst>
+              <a:ext uri="{FF2B5EF4-FFF2-40B4-BE49-F238E27FC236}">
+                <a16:creationId xmlns:a16="http://schemas.microsoft.com/office/drawing/2014/main" id="{311F6CA4-A566-7479-1370-F755BDEB9B4B}"/>
+              </a:ext>
+            </a:extLst>
+          </p:cNvPr>
+          <p:cNvSpPr>
+            <a:spLocks noGrp="1" noRot="1" noChangeAspect="1"/>
+          </p:cNvSpPr>
+          <p:nvPr>
+            <p:ph type="sldImg"/>
+          </p:nvPr>
+        </p:nvSpPr>
+        <p:spPr/>
+      </p:sp>
+      <p:sp>
+        <p:nvSpPr>
+          <p:cNvPr id="3" name="Notes Placeholder 2">
+            <a:extLst>
+              <a:ext uri="{FF2B5EF4-FFF2-40B4-BE49-F238E27FC236}">
+                <a16:creationId xmlns:a16="http://schemas.microsoft.com/office/drawing/2014/main" id="{36B3278C-2134-5F7B-39F1-CBD1956DB2D5}"/>
+              </a:ext>
+            </a:extLst>
+          </p:cNvPr>
+          <p:cNvSpPr>
+            <a:spLocks noGrp="1"/>
+          </p:cNvSpPr>
+          <p:nvPr>
+            <p:ph type="body" idx="1"/>
+          </p:nvPr>
+        </p:nvSpPr>
+        <p:spPr/>
+        <p:txBody>
+          <a:bodyPr/>
+          <a:lstStyle/>
+          <a:p>
+            <a:endParaRPr lang="en-US" dirty="0"/>
+          </a:p>
+        </p:txBody>
+      </p:sp>
+      <p:sp>
+        <p:nvSpPr>
+          <p:cNvPr id="4" name="Slide Number Placeholder 3">
+            <a:extLst>
+              <a:ext uri="{FF2B5EF4-FFF2-40B4-BE49-F238E27FC236}">
+                <a16:creationId xmlns:a16="http://schemas.microsoft.com/office/drawing/2014/main" id="{A6E66799-9BAE-EB80-9437-71801D1DA2BD}"/>
+              </a:ext>
+            </a:extLst>
+          </p:cNvPr>
+          <p:cNvSpPr>
+            <a:spLocks noGrp="1"/>
+          </p:cNvSpPr>
+          <p:nvPr>
+            <p:ph type="sldNum" sz="quarter" idx="10"/>
+          </p:nvPr>
+        </p:nvSpPr>
+        <p:spPr/>
+        <p:txBody>
+          <a:bodyPr/>
+          <a:lstStyle/>
+          <a:p>
+            <a:fld id="{F7021451-1387-4CA6-816F-3879F97B5CBC}" type="slidenum">
+              <a:rPr lang="en-US"/>
+              <a:t>12</a:t>
+            </a:fld>
+            <a:endParaRPr lang="en-US"/>
+          </a:p>
+        </p:txBody>
+      </p:sp>
+    </p:spTree>
+    <p:extLst>
+      <p:ext uri="{BB962C8B-B14F-4D97-AF65-F5344CB8AC3E}">
+        <p14:creationId xmlns:p14="http://schemas.microsoft.com/office/powerpoint/2010/main" val="854751505"/>
+      </p:ext>
+    </p:extLst>
+  </p:cSld>
+  <p:clrMapOvr>
+    <a:masterClrMapping/>
+  </p:clrMapOvr>
+</p:notes>
+</file>
+
+<file path=ppt/notesSlides/notesSlide13.xml><?xml version="1.0" encoding="utf-8"?>
+<p:notes xmlns:a="http://schemas.openxmlformats.org/drawingml/2006/main" xmlns:r="http://schemas.openxmlformats.org/officeDocument/2006/relationships" xmlns:p="http://schemas.openxmlformats.org/presentationml/2006/main">
+  <p:cSld>
+    <p:spTree>
+      <p:nvGrpSpPr>
+        <p:cNvPr id="1" name="">
+          <a:extLst>
+            <a:ext uri="{FF2B5EF4-FFF2-40B4-BE49-F238E27FC236}">
+              <a16:creationId xmlns:a16="http://schemas.microsoft.com/office/drawing/2014/main" id="{0FA45FF4-4C01-C5EC-8DAD-F4F1BF0CD4C8}"/>
+            </a:ext>
+          </a:extLst>
+        </p:cNvPr>
+        <p:cNvGrpSpPr/>
+        <p:nvPr/>
+      </p:nvGrpSpPr>
+      <p:grpSpPr>
+        <a:xfrm>
+          <a:off x="0" y="0"/>
+          <a:ext cx="0" cy="0"/>
+          <a:chOff x="0" y="0"/>
+          <a:chExt cx="0" cy="0"/>
+        </a:xfrm>
+      </p:grpSpPr>
+      <p:sp>
+        <p:nvSpPr>
+          <p:cNvPr id="2" name="Slide Image Placeholder 1">
+            <a:extLst>
+              <a:ext uri="{FF2B5EF4-FFF2-40B4-BE49-F238E27FC236}">
+                <a16:creationId xmlns:a16="http://schemas.microsoft.com/office/drawing/2014/main" id="{0C4B818C-B406-CF1D-51DC-B2E04D5557F1}"/>
+              </a:ext>
+            </a:extLst>
+          </p:cNvPr>
+          <p:cNvSpPr>
+            <a:spLocks noGrp="1" noRot="1" noChangeAspect="1"/>
+          </p:cNvSpPr>
+          <p:nvPr>
+            <p:ph type="sldImg"/>
+          </p:nvPr>
+        </p:nvSpPr>
+        <p:spPr/>
+      </p:sp>
+      <p:sp>
+        <p:nvSpPr>
+          <p:cNvPr id="3" name="Notes Placeholder 2">
+            <a:extLst>
+              <a:ext uri="{FF2B5EF4-FFF2-40B4-BE49-F238E27FC236}">
+                <a16:creationId xmlns:a16="http://schemas.microsoft.com/office/drawing/2014/main" id="{606AF60D-50E9-0993-03C1-C4EE1060BA7F}"/>
+              </a:ext>
+            </a:extLst>
+          </p:cNvPr>
+          <p:cNvSpPr>
+            <a:spLocks noGrp="1"/>
+          </p:cNvSpPr>
+          <p:nvPr>
+            <p:ph type="body" idx="1"/>
+          </p:nvPr>
+        </p:nvSpPr>
+        <p:spPr/>
+        <p:txBody>
+          <a:bodyPr/>
+          <a:lstStyle/>
+          <a:p>
+            <a:endParaRPr lang="en-US" dirty="0"/>
+          </a:p>
+        </p:txBody>
+      </p:sp>
+      <p:sp>
+        <p:nvSpPr>
+          <p:cNvPr id="4" name="Slide Number Placeholder 3">
+            <a:extLst>
+              <a:ext uri="{FF2B5EF4-FFF2-40B4-BE49-F238E27FC236}">
+                <a16:creationId xmlns:a16="http://schemas.microsoft.com/office/drawing/2014/main" id="{7BEA9A26-8F90-A9B7-58D3-C3A9CA1EAC08}"/>
+              </a:ext>
+            </a:extLst>
+          </p:cNvPr>
+          <p:cNvSpPr>
+            <a:spLocks noGrp="1"/>
+          </p:cNvSpPr>
+          <p:nvPr>
+            <p:ph type="sldNum" sz="quarter" idx="10"/>
+          </p:nvPr>
+        </p:nvSpPr>
+        <p:spPr/>
+        <p:txBody>
+          <a:bodyPr/>
+          <a:lstStyle/>
+          <a:p>
+            <a:fld id="{F7021451-1387-4CA6-816F-3879F97B5CBC}" type="slidenum">
+              <a:rPr lang="en-US"/>
+              <a:t>13</a:t>
+            </a:fld>
+            <a:endParaRPr lang="en-US"/>
+          </a:p>
+        </p:txBody>
+      </p:sp>
+    </p:spTree>
+    <p:extLst>
+      <p:ext uri="{BB962C8B-B14F-4D97-AF65-F5344CB8AC3E}">
+        <p14:creationId xmlns:p14="http://schemas.microsoft.com/office/powerpoint/2010/main" val="2586703518"/>
+      </p:ext>
+    </p:extLst>
+  </p:cSld>
+  <p:clrMapOvr>
+    <a:masterClrMapping/>
+  </p:clrMapOvr>
+</p:notes>
+</file>
+
+<file path=ppt/notesSlides/notesSlide14.xml><?xml version="1.0" encoding="utf-8"?>
+<p:notes xmlns:a="http://schemas.openxmlformats.org/drawingml/2006/main" xmlns:r="http://schemas.openxmlformats.org/officeDocument/2006/relationships" xmlns:p="http://schemas.openxmlformats.org/presentationml/2006/main">
+  <p:cSld>
+    <p:spTree>
+      <p:nvGrpSpPr>
+        <p:cNvPr id="1" name="">
+          <a:extLst>
+            <a:ext uri="{FF2B5EF4-FFF2-40B4-BE49-F238E27FC236}">
               <a16:creationId xmlns:a16="http://schemas.microsoft.com/office/drawing/2014/main" id="{D1A1F5A7-A541-300A-1F24-A26340151008}"/>
             </a:ext>
           </a:extLst>
@@ -3821,7 +4233,7 @@
                 <a:tabLst/>
                 <a:defRPr/>
               </a:pPr>
-              <a:t>10</a:t>
+              <a:t>14</a:t>
             </a:fld>
             <a:endParaRPr kumimoji="0" lang="en-US" sz="1800" b="0" i="0" u="none" strike="noStrike" kern="1200" cap="none" spc="0" normalizeH="0" baseline="0" noProof="0">
               <a:ln>
@@ -3853,7 +4265,7 @@
 </p:notes>
 </file>
 
-<file path=ppt/notesSlides/notesSlide11.xml><?xml version="1.0" encoding="utf-8"?>
+<file path=ppt/notesSlides/notesSlide15.xml><?xml version="1.0" encoding="utf-8"?>
 <p:notes xmlns:a="http://schemas.openxmlformats.org/drawingml/2006/main" xmlns:r="http://schemas.openxmlformats.org/officeDocument/2006/relationships" xmlns:p="http://schemas.openxmlformats.org/presentationml/2006/main">
   <p:cSld>
     <p:spTree>
@@ -3942,7 +4354,7 @@
           <a:p>
             <a:fld id="{F7021451-1387-4CA6-816F-3879F97B5CBC}" type="slidenum">
               <a:rPr lang="en-US"/>
-              <a:t>11</a:t>
+              <a:t>15</a:t>
             </a:fld>
             <a:endParaRPr lang="en-US"/>
           </a:p>
@@ -3961,7 +4373,7 @@
 </p:notes>
 </file>
 
-<file path=ppt/notesSlides/notesSlide12.xml><?xml version="1.0" encoding="utf-8"?>
+<file path=ppt/notesSlides/notesSlide16.xml><?xml version="1.0" encoding="utf-8"?>
 <p:notes xmlns:a="http://schemas.openxmlformats.org/drawingml/2006/main" xmlns:r="http://schemas.openxmlformats.org/officeDocument/2006/relationships" xmlns:p="http://schemas.openxmlformats.org/presentationml/2006/main">
   <p:cSld>
     <p:spTree>
@@ -4050,7 +4462,7 @@
           <a:p>
             <a:fld id="{F7021451-1387-4CA6-816F-3879F97B5CBC}" type="slidenum">
               <a:rPr lang="en-US"/>
-              <a:t>12</a:t>
+              <a:t>16</a:t>
             </a:fld>
             <a:endParaRPr lang="en-US"/>
           </a:p>
@@ -4069,7 +4481,7 @@
 </p:notes>
 </file>
 
-<file path=ppt/notesSlides/notesSlide13.xml><?xml version="1.0" encoding="utf-8"?>
+<file path=ppt/notesSlides/notesSlide17.xml><?xml version="1.0" encoding="utf-8"?>
 <p:notes xmlns:a="http://schemas.openxmlformats.org/drawingml/2006/main" xmlns:r="http://schemas.openxmlformats.org/officeDocument/2006/relationships" xmlns:p="http://schemas.openxmlformats.org/presentationml/2006/main">
   <p:cSld>
     <p:spTree>
@@ -4158,7 +4570,7 @@
           <a:p>
             <a:fld id="{F7021451-1387-4CA6-816F-3879F97B5CBC}" type="slidenum">
               <a:rPr lang="en-US"/>
-              <a:t>13</a:t>
+              <a:t>17</a:t>
             </a:fld>
             <a:endParaRPr lang="en-US"/>
           </a:p>
@@ -4177,7 +4589,7 @@
 </p:notes>
 </file>
 
-<file path=ppt/notesSlides/notesSlide14.xml><?xml version="1.0" encoding="utf-8"?>
+<file path=ppt/notesSlides/notesSlide18.xml><?xml version="1.0" encoding="utf-8"?>
 <p:notes xmlns:a="http://schemas.openxmlformats.org/drawingml/2006/main" xmlns:r="http://schemas.openxmlformats.org/officeDocument/2006/relationships" xmlns:p="http://schemas.openxmlformats.org/presentationml/2006/main">
   <p:cSld>
     <p:spTree>
@@ -4266,7 +4678,7 @@
           <a:p>
             <a:fld id="{F7021451-1387-4CA6-816F-3879F97B5CBC}" type="slidenum">
               <a:rPr lang="en-US"/>
-              <a:t>14</a:t>
+              <a:t>18</a:t>
             </a:fld>
             <a:endParaRPr lang="en-US"/>
           </a:p>
@@ -4285,7 +4697,7 @@
 </p:notes>
 </file>
 
-<file path=ppt/notesSlides/notesSlide15.xml><?xml version="1.0" encoding="utf-8"?>
+<file path=ppt/notesSlides/notesSlide19.xml><?xml version="1.0" encoding="utf-8"?>
 <p:notes xmlns:a="http://schemas.openxmlformats.org/drawingml/2006/main" xmlns:r="http://schemas.openxmlformats.org/officeDocument/2006/relationships" xmlns:p="http://schemas.openxmlformats.org/presentationml/2006/main">
   <p:cSld>
     <p:spTree>
@@ -4421,7 +4833,7 @@
                 <a:tabLst/>
                 <a:defRPr/>
               </a:pPr>
-              <a:t>15</a:t>
+              <a:t>19</a:t>
             </a:fld>
             <a:endParaRPr kumimoji="0" lang="en-US" sz="1800" b="0" i="0" u="none" strike="noStrike" kern="1200" cap="none" spc="0" normalizeH="0" baseline="0" noProof="0">
               <a:ln>
@@ -4626,7 +5038,13 @@
   <p:cSld>
     <p:spTree>
       <p:nvGrpSpPr>
-        <p:cNvPr id="1" name=""/>
+        <p:cNvPr id="1" name="">
+          <a:extLst>
+            <a:ext uri="{FF2B5EF4-FFF2-40B4-BE49-F238E27FC236}">
+              <a16:creationId xmlns:a16="http://schemas.microsoft.com/office/drawing/2014/main" id="{56C8BBE2-7578-9BEB-14BD-464DB3ACA1AC}"/>
+            </a:ext>
+          </a:extLst>
+        </p:cNvPr>
         <p:cNvGrpSpPr/>
         <p:nvPr/>
       </p:nvGrpSpPr>
@@ -4640,7 +5058,13 @@
       </p:grpSpPr>
       <p:sp>
         <p:nvSpPr>
-          <p:cNvPr id="2" name="Slide Image Placeholder 1"/>
+          <p:cNvPr id="2" name="Slide Image Placeholder 1">
+            <a:extLst>
+              <a:ext uri="{FF2B5EF4-FFF2-40B4-BE49-F238E27FC236}">
+                <a16:creationId xmlns:a16="http://schemas.microsoft.com/office/drawing/2014/main" id="{2CB27920-DE4C-B486-AD25-3E2134243777}"/>
+              </a:ext>
+            </a:extLst>
+          </p:cNvPr>
           <p:cNvSpPr>
             <a:spLocks noGrp="1" noRot="1" noChangeAspect="1"/>
           </p:cNvSpPr>
@@ -4652,7 +5076,13 @@
       </p:sp>
       <p:sp>
         <p:nvSpPr>
-          <p:cNvPr id="3" name="Notes Placeholder 2"/>
+          <p:cNvPr id="3" name="Notes Placeholder 2">
+            <a:extLst>
+              <a:ext uri="{FF2B5EF4-FFF2-40B4-BE49-F238E27FC236}">
+                <a16:creationId xmlns:a16="http://schemas.microsoft.com/office/drawing/2014/main" id="{E6031FEF-273E-9FF7-5447-19A6D6A871CD}"/>
+              </a:ext>
+            </a:extLst>
+          </p:cNvPr>
           <p:cNvSpPr>
             <a:spLocks noGrp="1"/>
           </p:cNvSpPr>
@@ -4671,7 +5101,13 @@
       </p:sp>
       <p:sp>
         <p:nvSpPr>
-          <p:cNvPr id="4" name="Slide Number Placeholder 3"/>
+          <p:cNvPr id="4" name="Slide Number Placeholder 3">
+            <a:extLst>
+              <a:ext uri="{FF2B5EF4-FFF2-40B4-BE49-F238E27FC236}">
+                <a16:creationId xmlns:a16="http://schemas.microsoft.com/office/drawing/2014/main" id="{0009025C-3118-B675-5E42-3686485C2256}"/>
+              </a:ext>
+            </a:extLst>
+          </p:cNvPr>
           <p:cNvSpPr>
             <a:spLocks noGrp="1"/>
           </p:cNvSpPr>
@@ -4695,7 +5131,7 @@
     </p:spTree>
     <p:extLst>
       <p:ext uri="{BB962C8B-B14F-4D97-AF65-F5344CB8AC3E}">
-        <p14:creationId xmlns:p14="http://schemas.microsoft.com/office/powerpoint/2010/main" val="1024086991"/>
+        <p14:creationId xmlns:p14="http://schemas.microsoft.com/office/powerpoint/2010/main" val="3630224614"/>
       </p:ext>
     </p:extLst>
   </p:cSld>
@@ -4794,6 +5230,90 @@
   <p:cSld>
     <p:spTree>
       <p:nvGrpSpPr>
+        <p:cNvPr id="1" name=""/>
+        <p:cNvGrpSpPr/>
+        <p:nvPr/>
+      </p:nvGrpSpPr>
+      <p:grpSpPr>
+        <a:xfrm>
+          <a:off x="0" y="0"/>
+          <a:ext cx="0" cy="0"/>
+          <a:chOff x="0" y="0"/>
+          <a:chExt cx="0" cy="0"/>
+        </a:xfrm>
+      </p:grpSpPr>
+      <p:sp>
+        <p:nvSpPr>
+          <p:cNvPr id="2" name="Slide Image Placeholder 1"/>
+          <p:cNvSpPr>
+            <a:spLocks noGrp="1" noRot="1" noChangeAspect="1"/>
+          </p:cNvSpPr>
+          <p:nvPr>
+            <p:ph type="sldImg"/>
+          </p:nvPr>
+        </p:nvSpPr>
+        <p:spPr/>
+      </p:sp>
+      <p:sp>
+        <p:nvSpPr>
+          <p:cNvPr id="3" name="Notes Placeholder 2"/>
+          <p:cNvSpPr>
+            <a:spLocks noGrp="1"/>
+          </p:cNvSpPr>
+          <p:nvPr>
+            <p:ph type="body" idx="1"/>
+          </p:nvPr>
+        </p:nvSpPr>
+        <p:spPr/>
+        <p:txBody>
+          <a:bodyPr/>
+          <a:lstStyle/>
+          <a:p>
+            <a:endParaRPr lang="en-US" dirty="0"/>
+          </a:p>
+        </p:txBody>
+      </p:sp>
+      <p:sp>
+        <p:nvSpPr>
+          <p:cNvPr id="4" name="Slide Number Placeholder 3"/>
+          <p:cNvSpPr>
+            <a:spLocks noGrp="1"/>
+          </p:cNvSpPr>
+          <p:nvPr>
+            <p:ph type="sldNum" sz="quarter" idx="10"/>
+          </p:nvPr>
+        </p:nvSpPr>
+        <p:spPr/>
+        <p:txBody>
+          <a:bodyPr/>
+          <a:lstStyle/>
+          <a:p>
+            <a:fld id="{F7021451-1387-4CA6-816F-3879F97B5CBC}" type="slidenum">
+              <a:rPr lang="en-US"/>
+              <a:t>6</a:t>
+            </a:fld>
+            <a:endParaRPr lang="en-US"/>
+          </a:p>
+        </p:txBody>
+      </p:sp>
+    </p:spTree>
+    <p:extLst>
+      <p:ext uri="{BB962C8B-B14F-4D97-AF65-F5344CB8AC3E}">
+        <p14:creationId xmlns:p14="http://schemas.microsoft.com/office/powerpoint/2010/main" val="1024086991"/>
+      </p:ext>
+    </p:extLst>
+  </p:cSld>
+  <p:clrMapOvr>
+    <a:masterClrMapping/>
+  </p:clrMapOvr>
+</p:notes>
+</file>
+
+<file path=ppt/notesSlides/notesSlide7.xml><?xml version="1.0" encoding="utf-8"?>
+<p:notes xmlns:a="http://schemas.openxmlformats.org/drawingml/2006/main" xmlns:r="http://schemas.openxmlformats.org/officeDocument/2006/relationships" xmlns:p="http://schemas.openxmlformats.org/presentationml/2006/main">
+  <p:cSld>
+    <p:spTree>
+      <p:nvGrpSpPr>
         <p:cNvPr id="1" name="">
           <a:extLst>
             <a:ext uri="{FF2B5EF4-FFF2-40B4-BE49-F238E27FC236}">
@@ -4878,7 +5398,7 @@
           <a:p>
             <a:fld id="{F7021451-1387-4CA6-816F-3879F97B5CBC}" type="slidenum">
               <a:rPr lang="en-US"/>
-              <a:t>6</a:t>
+              <a:t>7</a:t>
             </a:fld>
             <a:endParaRPr lang="en-US"/>
           </a:p>
@@ -4897,7 +5417,7 @@
 </p:notes>
 </file>
 
-<file path=ppt/notesSlides/notesSlide7.xml><?xml version="1.0" encoding="utf-8"?>
+<file path=ppt/notesSlides/notesSlide8.xml><?xml version="1.0" encoding="utf-8"?>
 <p:notes xmlns:a="http://schemas.openxmlformats.org/drawingml/2006/main" xmlns:r="http://schemas.openxmlformats.org/officeDocument/2006/relationships" xmlns:p="http://schemas.openxmlformats.org/presentationml/2006/main">
   <p:cSld>
     <p:spTree>
@@ -4986,7 +5506,7 @@
           <a:p>
             <a:fld id="{F7021451-1387-4CA6-816F-3879F97B5CBC}" type="slidenum">
               <a:rPr lang="en-US"/>
-              <a:t>7</a:t>
+              <a:t>8</a:t>
             </a:fld>
             <a:endParaRPr lang="en-US"/>
           </a:p>
@@ -4996,90 +5516,6 @@
     <p:extLst>
       <p:ext uri="{BB962C8B-B14F-4D97-AF65-F5344CB8AC3E}">
         <p14:creationId xmlns:p14="http://schemas.microsoft.com/office/powerpoint/2010/main" val="1066526935"/>
-      </p:ext>
-    </p:extLst>
-  </p:cSld>
-  <p:clrMapOvr>
-    <a:masterClrMapping/>
-  </p:clrMapOvr>
-</p:notes>
-</file>
-
-<file path=ppt/notesSlides/notesSlide8.xml><?xml version="1.0" encoding="utf-8"?>
-<p:notes xmlns:a="http://schemas.openxmlformats.org/drawingml/2006/main" xmlns:r="http://schemas.openxmlformats.org/officeDocument/2006/relationships" xmlns:p="http://schemas.openxmlformats.org/presentationml/2006/main">
-  <p:cSld>
-    <p:spTree>
-      <p:nvGrpSpPr>
-        <p:cNvPr id="1" name=""/>
-        <p:cNvGrpSpPr/>
-        <p:nvPr/>
-      </p:nvGrpSpPr>
-      <p:grpSpPr>
-        <a:xfrm>
-          <a:off x="0" y="0"/>
-          <a:ext cx="0" cy="0"/>
-          <a:chOff x="0" y="0"/>
-          <a:chExt cx="0" cy="0"/>
-        </a:xfrm>
-      </p:grpSpPr>
-      <p:sp>
-        <p:nvSpPr>
-          <p:cNvPr id="2" name="Slide Image Placeholder 1"/>
-          <p:cNvSpPr>
-            <a:spLocks noGrp="1" noRot="1" noChangeAspect="1"/>
-          </p:cNvSpPr>
-          <p:nvPr>
-            <p:ph type="sldImg"/>
-          </p:nvPr>
-        </p:nvSpPr>
-        <p:spPr/>
-      </p:sp>
-      <p:sp>
-        <p:nvSpPr>
-          <p:cNvPr id="3" name="Notes Placeholder 2"/>
-          <p:cNvSpPr>
-            <a:spLocks noGrp="1"/>
-          </p:cNvSpPr>
-          <p:nvPr>
-            <p:ph type="body" idx="1"/>
-          </p:nvPr>
-        </p:nvSpPr>
-        <p:spPr/>
-        <p:txBody>
-          <a:bodyPr/>
-          <a:lstStyle/>
-          <a:p>
-            <a:endParaRPr lang="en-US" dirty="0"/>
-          </a:p>
-        </p:txBody>
-      </p:sp>
-      <p:sp>
-        <p:nvSpPr>
-          <p:cNvPr id="4" name="Slide Number Placeholder 3"/>
-          <p:cNvSpPr>
-            <a:spLocks noGrp="1"/>
-          </p:cNvSpPr>
-          <p:nvPr>
-            <p:ph type="sldNum" sz="quarter" idx="10"/>
-          </p:nvPr>
-        </p:nvSpPr>
-        <p:spPr/>
-        <p:txBody>
-          <a:bodyPr/>
-          <a:lstStyle/>
-          <a:p>
-            <a:fld id="{F7021451-1387-4CA6-816F-3879F97B5CBC}" type="slidenum">
-              <a:rPr lang="en-US"/>
-              <a:t>8</a:t>
-            </a:fld>
-            <a:endParaRPr lang="en-US"/>
-          </a:p>
-        </p:txBody>
-      </p:sp>
-    </p:spTree>
-    <p:extLst>
-      <p:ext uri="{BB962C8B-B14F-4D97-AF65-F5344CB8AC3E}">
-        <p14:creationId xmlns:p14="http://schemas.microsoft.com/office/powerpoint/2010/main" val="1024086991"/>
       </p:ext>
     </p:extLst>
   </p:cSld>
@@ -5785,6 +6221,1653 @@
         <p:cNvPr id="1" name="">
           <a:extLst>
             <a:ext uri="{FF2B5EF4-FFF2-40B4-BE49-F238E27FC236}">
+              <a16:creationId xmlns:a16="http://schemas.microsoft.com/office/drawing/2014/main" id="{E3FA21E2-1046-7FA2-8246-CFB94840E6AB}"/>
+            </a:ext>
+          </a:extLst>
+        </p:cNvPr>
+        <p:cNvGrpSpPr/>
+        <p:nvPr/>
+      </p:nvGrpSpPr>
+      <p:grpSpPr>
+        <a:xfrm>
+          <a:off x="0" y="0"/>
+          <a:ext cx="0" cy="0"/>
+          <a:chOff x="0" y="0"/>
+          <a:chExt cx="0" cy="0"/>
+        </a:xfrm>
+      </p:grpSpPr>
+      <p:sp>
+        <p:nvSpPr>
+          <p:cNvPr id="2" name="Shape 0">
+            <a:extLst>
+              <a:ext uri="{FF2B5EF4-FFF2-40B4-BE49-F238E27FC236}">
+                <a16:creationId xmlns:a16="http://schemas.microsoft.com/office/drawing/2014/main" id="{ED749B1D-256A-76D7-03DF-8AE70DF45CC7}"/>
+              </a:ext>
+            </a:extLst>
+          </p:cNvPr>
+          <p:cNvSpPr/>
+          <p:nvPr/>
+        </p:nvSpPr>
+        <p:spPr>
+          <a:xfrm>
+            <a:off x="0" y="0"/>
+            <a:ext cx="9144000" cy="777240"/>
+          </a:xfrm>
+          <a:prstGeom prst="rect">
+            <a:avLst/>
+          </a:prstGeom>
+          <a:solidFill>
+            <a:srgbClr val="00A896"/>
+          </a:solidFill>
+          <a:ln w="12700">
+            <a:solidFill>
+              <a:srgbClr val="00A896"/>
+            </a:solidFill>
+            <a:prstDash val="solid"/>
+          </a:ln>
+        </p:spPr>
+        <p:txBody>
+          <a:bodyPr/>
+          <a:lstStyle/>
+          <a:p>
+            <a:endParaRPr lang="en-US"/>
+          </a:p>
+        </p:txBody>
+      </p:sp>
+      <p:sp>
+        <p:nvSpPr>
+          <p:cNvPr id="3" name="Text 1">
+            <a:extLst>
+              <a:ext uri="{FF2B5EF4-FFF2-40B4-BE49-F238E27FC236}">
+                <a16:creationId xmlns:a16="http://schemas.microsoft.com/office/drawing/2014/main" id="{919B8B39-3BA3-DDD2-4BD3-E46BD00C5C82}"/>
+              </a:ext>
+            </a:extLst>
+          </p:cNvPr>
+          <p:cNvSpPr/>
+          <p:nvPr/>
+        </p:nvSpPr>
+        <p:spPr>
+          <a:xfrm>
+            <a:off x="365760" y="0"/>
+            <a:ext cx="8412480" cy="777240"/>
+          </a:xfrm>
+          <a:prstGeom prst="rect">
+            <a:avLst/>
+          </a:prstGeom>
+          <a:noFill/>
+          <a:ln/>
+        </p:spPr>
+        <p:txBody>
+          <a:bodyPr wrap="square" lIns="0" tIns="0" rIns="0" bIns="0" rtlCol="0" anchor="ctr"/>
+          <a:lstStyle/>
+          <a:p>
+            <a:pPr marL="0" indent="0">
+              <a:buNone/>
+            </a:pPr>
+            <a:r>
+              <a:rPr lang="en-US" sz="2600" b="1" dirty="0">
+                <a:solidFill>
+                  <a:srgbClr val="FFFFFF"/>
+                </a:solidFill>
+                <a:latin typeface="Calibri" pitchFamily="34" charset="0"/>
+                <a:ea typeface="Calibri" pitchFamily="34" charset="-122"/>
+                <a:cs typeface="Calibri" pitchFamily="34" charset="-120"/>
+              </a:rPr>
+              <a:t>Implementation Notes</a:t>
+            </a:r>
+            <a:endParaRPr lang="en-US" sz="2600" dirty="0"/>
+          </a:p>
+        </p:txBody>
+      </p:sp>
+      <p:sp>
+        <p:nvSpPr>
+          <p:cNvPr id="4" name="Shape 2">
+            <a:extLst>
+              <a:ext uri="{FF2B5EF4-FFF2-40B4-BE49-F238E27FC236}">
+                <a16:creationId xmlns:a16="http://schemas.microsoft.com/office/drawing/2014/main" id="{4CCECDBB-F70B-0719-1ABF-CCDF10737BC3}"/>
+              </a:ext>
+            </a:extLst>
+          </p:cNvPr>
+          <p:cNvSpPr/>
+          <p:nvPr/>
+        </p:nvSpPr>
+        <p:spPr>
+          <a:xfrm>
+            <a:off x="320040" y="960120"/>
+            <a:ext cx="4114800" cy="1188720"/>
+          </a:xfrm>
+          <a:prstGeom prst="rect">
+            <a:avLst/>
+          </a:prstGeom>
+          <a:solidFill>
+            <a:srgbClr val="1C2E3E"/>
+          </a:solidFill>
+          <a:ln w="12700">
+            <a:solidFill>
+              <a:srgbClr val="3D5166"/>
+            </a:solidFill>
+            <a:prstDash val="solid"/>
+          </a:ln>
+          <a:effectLst>
+            <a:outerShdw blurRad="101600" dist="38100" dir="8100000" algn="bl" rotWithShape="0">
+              <a:srgbClr val="000000">
+                <a:alpha val="30000"/>
+              </a:srgbClr>
+            </a:outerShdw>
+          </a:effectLst>
+        </p:spPr>
+        <p:txBody>
+          <a:bodyPr/>
+          <a:lstStyle/>
+          <a:p>
+            <a:endParaRPr lang="en-US"/>
+          </a:p>
+        </p:txBody>
+      </p:sp>
+      <p:sp>
+        <p:nvSpPr>
+          <p:cNvPr id="5" name="Shape 3">
+            <a:extLst>
+              <a:ext uri="{FF2B5EF4-FFF2-40B4-BE49-F238E27FC236}">
+                <a16:creationId xmlns:a16="http://schemas.microsoft.com/office/drawing/2014/main" id="{B775E804-C5B3-6913-8EDC-D7F1BF3419FB}"/>
+              </a:ext>
+            </a:extLst>
+          </p:cNvPr>
+          <p:cNvSpPr/>
+          <p:nvPr/>
+        </p:nvSpPr>
+        <p:spPr>
+          <a:xfrm>
+            <a:off x="320040" y="960120"/>
+            <a:ext cx="91440" cy="1188720"/>
+          </a:xfrm>
+          <a:prstGeom prst="rect">
+            <a:avLst/>
+          </a:prstGeom>
+          <a:solidFill>
+            <a:srgbClr val="00C9A7"/>
+          </a:solidFill>
+          <a:ln w="12700">
+            <a:solidFill>
+              <a:srgbClr val="00C9A7"/>
+            </a:solidFill>
+            <a:prstDash val="solid"/>
+          </a:ln>
+        </p:spPr>
+        <p:txBody>
+          <a:bodyPr/>
+          <a:lstStyle/>
+          <a:p>
+            <a:endParaRPr lang="en-US"/>
+          </a:p>
+        </p:txBody>
+      </p:sp>
+      <p:sp>
+        <p:nvSpPr>
+          <p:cNvPr id="6" name="Text 4">
+            <a:extLst>
+              <a:ext uri="{FF2B5EF4-FFF2-40B4-BE49-F238E27FC236}">
+                <a16:creationId xmlns:a16="http://schemas.microsoft.com/office/drawing/2014/main" id="{E76A80D8-09EA-BAA2-074A-8E0D234D23DD}"/>
+              </a:ext>
+            </a:extLst>
+          </p:cNvPr>
+          <p:cNvSpPr/>
+          <p:nvPr/>
+        </p:nvSpPr>
+        <p:spPr>
+          <a:xfrm>
+            <a:off x="548640" y="1051560"/>
+            <a:ext cx="3749040" cy="320040"/>
+          </a:xfrm>
+          <a:prstGeom prst="rect">
+            <a:avLst/>
+          </a:prstGeom>
+          <a:noFill/>
+          <a:ln/>
+        </p:spPr>
+        <p:txBody>
+          <a:bodyPr wrap="square" lIns="0" tIns="0" rIns="0" bIns="0" rtlCol="0" anchor="ctr"/>
+          <a:lstStyle/>
+          <a:p>
+            <a:pPr marL="0" indent="0">
+              <a:buNone/>
+            </a:pPr>
+            <a:r>
+              <a:rPr lang="en-US" sz="1300" b="1" dirty="0">
+                <a:solidFill>
+                  <a:srgbClr val="00C9A7"/>
+                </a:solidFill>
+                <a:latin typeface="Calibri" pitchFamily="34" charset="0"/>
+                <a:ea typeface="Calibri" pitchFamily="34" charset="-122"/>
+                <a:cs typeface="Calibri" pitchFamily="34" charset="-120"/>
+              </a:rPr>
+              <a:t>2 pipes / child</a:t>
+            </a:r>
+            <a:endParaRPr lang="en-US" sz="1300" dirty="0"/>
+          </a:p>
+        </p:txBody>
+      </p:sp>
+      <p:sp>
+        <p:nvSpPr>
+          <p:cNvPr id="7" name="Text 5">
+            <a:extLst>
+              <a:ext uri="{FF2B5EF4-FFF2-40B4-BE49-F238E27FC236}">
+                <a16:creationId xmlns:a16="http://schemas.microsoft.com/office/drawing/2014/main" id="{B195BF35-3650-20D0-352D-90B7DA8DB593}"/>
+              </a:ext>
+            </a:extLst>
+          </p:cNvPr>
+          <p:cNvSpPr/>
+          <p:nvPr/>
+        </p:nvSpPr>
+        <p:spPr>
+          <a:xfrm>
+            <a:off x="548640" y="1371600"/>
+            <a:ext cx="3749040" cy="685800"/>
+          </a:xfrm>
+          <a:prstGeom prst="rect">
+            <a:avLst/>
+          </a:prstGeom>
+          <a:noFill/>
+          <a:ln/>
+        </p:spPr>
+        <p:txBody>
+          <a:bodyPr wrap="square" rtlCol="0" anchor="ctr"/>
+          <a:lstStyle/>
+          <a:p>
+            <a:pPr marL="0" indent="0" algn="l">
+              <a:buNone/>
+            </a:pPr>
+            <a:r>
+              <a:rPr lang="en-US" sz="1200" dirty="0">
+                <a:solidFill>
+                  <a:srgbClr val="D6E4F0"/>
+                </a:solidFill>
+                <a:latin typeface="Calibri" pitchFamily="34" charset="0"/>
+                <a:ea typeface="Calibri" pitchFamily="34" charset="-122"/>
+                <a:cs typeface="Calibri" pitchFamily="34" charset="-120"/>
+              </a:rPr>
+              <a:t>ctrl_pipe sends (start, end) from parent to child.  res_pipe returns the partial result from child to parent.</a:t>
+            </a:r>
+            <a:endParaRPr lang="en-US" sz="1200" dirty="0"/>
+          </a:p>
+        </p:txBody>
+      </p:sp>
+      <p:sp>
+        <p:nvSpPr>
+          <p:cNvPr id="8" name="Shape 6">
+            <a:extLst>
+              <a:ext uri="{FF2B5EF4-FFF2-40B4-BE49-F238E27FC236}">
+                <a16:creationId xmlns:a16="http://schemas.microsoft.com/office/drawing/2014/main" id="{8F6564E5-8804-9B54-173B-A1A4F3B2E014}"/>
+              </a:ext>
+            </a:extLst>
+          </p:cNvPr>
+          <p:cNvSpPr/>
+          <p:nvPr/>
+        </p:nvSpPr>
+        <p:spPr>
+          <a:xfrm>
+            <a:off x="320040" y="2304288"/>
+            <a:ext cx="4114800" cy="1188720"/>
+          </a:xfrm>
+          <a:prstGeom prst="rect">
+            <a:avLst/>
+          </a:prstGeom>
+          <a:solidFill>
+            <a:srgbClr val="1C2E3E"/>
+          </a:solidFill>
+          <a:ln w="12700">
+            <a:solidFill>
+              <a:srgbClr val="3D5166"/>
+            </a:solidFill>
+            <a:prstDash val="solid"/>
+          </a:ln>
+          <a:effectLst>
+            <a:outerShdw blurRad="101600" dist="38100" dir="8100000" algn="bl" rotWithShape="0">
+              <a:srgbClr val="000000">
+                <a:alpha val="30000"/>
+              </a:srgbClr>
+            </a:outerShdw>
+          </a:effectLst>
+        </p:spPr>
+        <p:txBody>
+          <a:bodyPr/>
+          <a:lstStyle/>
+          <a:p>
+            <a:endParaRPr lang="en-US"/>
+          </a:p>
+        </p:txBody>
+      </p:sp>
+      <p:sp>
+        <p:nvSpPr>
+          <p:cNvPr id="9" name="Shape 7">
+            <a:extLst>
+              <a:ext uri="{FF2B5EF4-FFF2-40B4-BE49-F238E27FC236}">
+                <a16:creationId xmlns:a16="http://schemas.microsoft.com/office/drawing/2014/main" id="{A3F91F43-85F9-F5A1-7181-A65D527BCFF4}"/>
+              </a:ext>
+            </a:extLst>
+          </p:cNvPr>
+          <p:cNvSpPr/>
+          <p:nvPr/>
+        </p:nvSpPr>
+        <p:spPr>
+          <a:xfrm>
+            <a:off x="320040" y="2304288"/>
+            <a:ext cx="91440" cy="1188720"/>
+          </a:xfrm>
+          <a:prstGeom prst="rect">
+            <a:avLst/>
+          </a:prstGeom>
+          <a:solidFill>
+            <a:srgbClr val="FFB347"/>
+          </a:solidFill>
+          <a:ln w="12700">
+            <a:solidFill>
+              <a:srgbClr val="FFB347"/>
+            </a:solidFill>
+            <a:prstDash val="solid"/>
+          </a:ln>
+        </p:spPr>
+        <p:txBody>
+          <a:bodyPr/>
+          <a:lstStyle/>
+          <a:p>
+            <a:endParaRPr lang="en-US"/>
+          </a:p>
+        </p:txBody>
+      </p:sp>
+      <p:sp>
+        <p:nvSpPr>
+          <p:cNvPr id="10" name="Text 8">
+            <a:extLst>
+              <a:ext uri="{FF2B5EF4-FFF2-40B4-BE49-F238E27FC236}">
+                <a16:creationId xmlns:a16="http://schemas.microsoft.com/office/drawing/2014/main" id="{06C9B319-AE18-D306-027A-E73F14565469}"/>
+              </a:ext>
+            </a:extLst>
+          </p:cNvPr>
+          <p:cNvSpPr/>
+          <p:nvPr/>
+        </p:nvSpPr>
+        <p:spPr>
+          <a:xfrm>
+            <a:off x="548640" y="2395728"/>
+            <a:ext cx="3749040" cy="320040"/>
+          </a:xfrm>
+          <a:prstGeom prst="rect">
+            <a:avLst/>
+          </a:prstGeom>
+          <a:noFill/>
+          <a:ln/>
+        </p:spPr>
+        <p:txBody>
+          <a:bodyPr wrap="square" lIns="0" tIns="0" rIns="0" bIns="0" rtlCol="0" anchor="ctr"/>
+          <a:lstStyle/>
+          <a:p>
+            <a:pPr marL="0" indent="0">
+              <a:buNone/>
+            </a:pPr>
+            <a:r>
+              <a:rPr lang="en-US" sz="1300" b="1" dirty="0">
+                <a:solidFill>
+                  <a:srgbClr val="FFB347"/>
+                </a:solidFill>
+                <a:latin typeface="Calibri" pitchFamily="34" charset="0"/>
+                <a:ea typeface="Calibri" pitchFamily="34" charset="-122"/>
+                <a:cs typeface="Calibri" pitchFamily="34" charset="-120"/>
+              </a:rPr>
+              <a:t>Remainder rule</a:t>
+            </a:r>
+            <a:endParaRPr lang="en-US" sz="1300" dirty="0"/>
+          </a:p>
+        </p:txBody>
+      </p:sp>
+      <p:sp>
+        <p:nvSpPr>
+          <p:cNvPr id="11" name="Text 9">
+            <a:extLst>
+              <a:ext uri="{FF2B5EF4-FFF2-40B4-BE49-F238E27FC236}">
+                <a16:creationId xmlns:a16="http://schemas.microsoft.com/office/drawing/2014/main" id="{4708B523-001B-5DB5-6261-88CFAF183344}"/>
+              </a:ext>
+            </a:extLst>
+          </p:cNvPr>
+          <p:cNvSpPr/>
+          <p:nvPr/>
+        </p:nvSpPr>
+        <p:spPr>
+          <a:xfrm>
+            <a:off x="548640" y="2715768"/>
+            <a:ext cx="3749040" cy="685800"/>
+          </a:xfrm>
+          <a:prstGeom prst="rect">
+            <a:avLst/>
+          </a:prstGeom>
+          <a:noFill/>
+          <a:ln/>
+        </p:spPr>
+        <p:txBody>
+          <a:bodyPr wrap="square" rtlCol="0" anchor="ctr"/>
+          <a:lstStyle/>
+          <a:p>
+            <a:pPr marL="0" indent="0" algn="l">
+              <a:buNone/>
+            </a:pPr>
+            <a:r>
+              <a:rPr lang="en-US" sz="1200" dirty="0">
+                <a:solidFill>
+                  <a:srgbClr val="D6E4F0"/>
+                </a:solidFill>
+                <a:latin typeface="Calibri" pitchFamily="34" charset="0"/>
+                <a:ea typeface="Calibri" pitchFamily="34" charset="-122"/>
+                <a:cs typeface="Calibri" pitchFamily="34" charset="-120"/>
+              </a:rPr>
+              <a:t>If N % n_proc ≠ 0, the extra numbers all go to the last child.  Example: 7 numbers, 3 processes → child 2 gets [5,6,7].</a:t>
+            </a:r>
+            <a:endParaRPr lang="en-US" sz="1200" dirty="0"/>
+          </a:p>
+        </p:txBody>
+      </p:sp>
+      <p:sp>
+        <p:nvSpPr>
+          <p:cNvPr id="12" name="Shape 10">
+            <a:extLst>
+              <a:ext uri="{FF2B5EF4-FFF2-40B4-BE49-F238E27FC236}">
+                <a16:creationId xmlns:a16="http://schemas.microsoft.com/office/drawing/2014/main" id="{FCFBCDCE-1A0A-CAD4-AF1F-C15BA78954F2}"/>
+              </a:ext>
+            </a:extLst>
+          </p:cNvPr>
+          <p:cNvSpPr/>
+          <p:nvPr/>
+        </p:nvSpPr>
+        <p:spPr>
+          <a:xfrm>
+            <a:off x="320040" y="3648456"/>
+            <a:ext cx="4114800" cy="1188720"/>
+          </a:xfrm>
+          <a:prstGeom prst="rect">
+            <a:avLst/>
+          </a:prstGeom>
+          <a:solidFill>
+            <a:srgbClr val="1C2E3E"/>
+          </a:solidFill>
+          <a:ln w="12700">
+            <a:solidFill>
+              <a:srgbClr val="3D5166"/>
+            </a:solidFill>
+            <a:prstDash val="solid"/>
+          </a:ln>
+          <a:effectLst>
+            <a:outerShdw blurRad="101600" dist="38100" dir="8100000" algn="bl" rotWithShape="0">
+              <a:srgbClr val="000000">
+                <a:alpha val="30000"/>
+              </a:srgbClr>
+            </a:outerShdw>
+          </a:effectLst>
+        </p:spPr>
+        <p:txBody>
+          <a:bodyPr/>
+          <a:lstStyle/>
+          <a:p>
+            <a:endParaRPr lang="en-US"/>
+          </a:p>
+        </p:txBody>
+      </p:sp>
+      <p:sp>
+        <p:nvSpPr>
+          <p:cNvPr id="13" name="Shape 11">
+            <a:extLst>
+              <a:ext uri="{FF2B5EF4-FFF2-40B4-BE49-F238E27FC236}">
+                <a16:creationId xmlns:a16="http://schemas.microsoft.com/office/drawing/2014/main" id="{4F076498-2024-6A73-764E-22EBCCE98CDC}"/>
+              </a:ext>
+            </a:extLst>
+          </p:cNvPr>
+          <p:cNvSpPr/>
+          <p:nvPr/>
+        </p:nvSpPr>
+        <p:spPr>
+          <a:xfrm>
+            <a:off x="320040" y="3648456"/>
+            <a:ext cx="91440" cy="1188720"/>
+          </a:xfrm>
+          <a:prstGeom prst="rect">
+            <a:avLst/>
+          </a:prstGeom>
+          <a:solidFill>
+            <a:srgbClr val="FF6B6B"/>
+          </a:solidFill>
+          <a:ln w="12700">
+            <a:solidFill>
+              <a:srgbClr val="FF6B6B"/>
+            </a:solidFill>
+            <a:prstDash val="solid"/>
+          </a:ln>
+        </p:spPr>
+        <p:txBody>
+          <a:bodyPr/>
+          <a:lstStyle/>
+          <a:p>
+            <a:endParaRPr lang="en-US"/>
+          </a:p>
+        </p:txBody>
+      </p:sp>
+      <p:sp>
+        <p:nvSpPr>
+          <p:cNvPr id="14" name="Text 12">
+            <a:extLst>
+              <a:ext uri="{FF2B5EF4-FFF2-40B4-BE49-F238E27FC236}">
+                <a16:creationId xmlns:a16="http://schemas.microsoft.com/office/drawing/2014/main" id="{335BD9B0-DEB6-BFF6-2E72-4C627AFCB2F7}"/>
+              </a:ext>
+            </a:extLst>
+          </p:cNvPr>
+          <p:cNvSpPr/>
+          <p:nvPr/>
+        </p:nvSpPr>
+        <p:spPr>
+          <a:xfrm>
+            <a:off x="548640" y="3739896"/>
+            <a:ext cx="3749040" cy="320040"/>
+          </a:xfrm>
+          <a:prstGeom prst="rect">
+            <a:avLst/>
+          </a:prstGeom>
+          <a:noFill/>
+          <a:ln/>
+        </p:spPr>
+        <p:txBody>
+          <a:bodyPr wrap="square" lIns="0" tIns="0" rIns="0" bIns="0" rtlCol="0" anchor="ctr"/>
+          <a:lstStyle/>
+          <a:p>
+            <a:pPr marL="0" indent="0">
+              <a:buNone/>
+            </a:pPr>
+            <a:r>
+              <a:rPr lang="en-US" sz="1300" b="1" dirty="0">
+                <a:solidFill>
+                  <a:srgbClr val="FF6B6B"/>
+                </a:solidFill>
+                <a:latin typeface="Calibri" pitchFamily="34" charset="0"/>
+                <a:ea typeface="Calibri" pitchFamily="34" charset="-122"/>
+                <a:cs typeface="Calibri" pitchFamily="34" charset="-120"/>
+              </a:rPr>
+              <a:t>Close unused ends</a:t>
+            </a:r>
+            <a:endParaRPr lang="en-US" sz="1300" dirty="0"/>
+          </a:p>
+        </p:txBody>
+      </p:sp>
+      <p:sp>
+        <p:nvSpPr>
+          <p:cNvPr id="15" name="Text 13">
+            <a:extLst>
+              <a:ext uri="{FF2B5EF4-FFF2-40B4-BE49-F238E27FC236}">
+                <a16:creationId xmlns:a16="http://schemas.microsoft.com/office/drawing/2014/main" id="{6AAE4287-19F7-BA19-F50B-37FC84763863}"/>
+              </a:ext>
+            </a:extLst>
+          </p:cNvPr>
+          <p:cNvSpPr/>
+          <p:nvPr/>
+        </p:nvSpPr>
+        <p:spPr>
+          <a:xfrm>
+            <a:off x="548640" y="4059936"/>
+            <a:ext cx="3749040" cy="685800"/>
+          </a:xfrm>
+          <a:prstGeom prst="rect">
+            <a:avLst/>
+          </a:prstGeom>
+          <a:noFill/>
+          <a:ln/>
+        </p:spPr>
+        <p:txBody>
+          <a:bodyPr wrap="square" rtlCol="0" anchor="ctr"/>
+          <a:lstStyle/>
+          <a:p>
+            <a:pPr marL="0" indent="0" algn="l">
+              <a:buNone/>
+            </a:pPr>
+            <a:r>
+              <a:rPr lang="en-US" sz="1200" dirty="0">
+                <a:solidFill>
+                  <a:srgbClr val="D6E4F0"/>
+                </a:solidFill>
+                <a:latin typeface="Calibri" pitchFamily="34" charset="0"/>
+                <a:ea typeface="Calibri" pitchFamily="34" charset="-122"/>
+                <a:cs typeface="Calibri" pitchFamily="34" charset="-120"/>
+              </a:rPr>
+              <a:t>Each process must close the pipe ends it does not use. </a:t>
+            </a:r>
+            <a:endParaRPr lang="en-US" sz="1200" dirty="0"/>
+          </a:p>
+        </p:txBody>
+      </p:sp>
+      <p:sp>
+        <p:nvSpPr>
+          <p:cNvPr id="16" name="Shape 14">
+            <a:extLst>
+              <a:ext uri="{FF2B5EF4-FFF2-40B4-BE49-F238E27FC236}">
+                <a16:creationId xmlns:a16="http://schemas.microsoft.com/office/drawing/2014/main" id="{E6125BAA-79F3-17A5-D5D4-15616C80FC26}"/>
+              </a:ext>
+            </a:extLst>
+          </p:cNvPr>
+          <p:cNvSpPr/>
+          <p:nvPr/>
+        </p:nvSpPr>
+        <p:spPr>
+          <a:xfrm>
+            <a:off x="4754880" y="960120"/>
+            <a:ext cx="4114800" cy="1188720"/>
+          </a:xfrm>
+          <a:prstGeom prst="rect">
+            <a:avLst/>
+          </a:prstGeom>
+          <a:solidFill>
+            <a:srgbClr val="1C2E3E"/>
+          </a:solidFill>
+          <a:ln w="12700">
+            <a:solidFill>
+              <a:srgbClr val="3D5166"/>
+            </a:solidFill>
+            <a:prstDash val="solid"/>
+          </a:ln>
+          <a:effectLst>
+            <a:outerShdw blurRad="101600" dist="38100" dir="8100000" algn="bl" rotWithShape="0">
+              <a:srgbClr val="000000">
+                <a:alpha val="30000"/>
+              </a:srgbClr>
+            </a:outerShdw>
+          </a:effectLst>
+        </p:spPr>
+        <p:txBody>
+          <a:bodyPr/>
+          <a:lstStyle/>
+          <a:p>
+            <a:endParaRPr lang="en-US"/>
+          </a:p>
+        </p:txBody>
+      </p:sp>
+      <p:sp>
+        <p:nvSpPr>
+          <p:cNvPr id="17" name="Shape 15">
+            <a:extLst>
+              <a:ext uri="{FF2B5EF4-FFF2-40B4-BE49-F238E27FC236}">
+                <a16:creationId xmlns:a16="http://schemas.microsoft.com/office/drawing/2014/main" id="{333AA571-3E4E-AA14-61EA-4C49FD9F8483}"/>
+              </a:ext>
+            </a:extLst>
+          </p:cNvPr>
+          <p:cNvSpPr/>
+          <p:nvPr/>
+        </p:nvSpPr>
+        <p:spPr>
+          <a:xfrm>
+            <a:off x="4754880" y="960120"/>
+            <a:ext cx="91440" cy="1188720"/>
+          </a:xfrm>
+          <a:prstGeom prst="rect">
+            <a:avLst/>
+          </a:prstGeom>
+          <a:solidFill>
+            <a:srgbClr val="4CAF86"/>
+          </a:solidFill>
+          <a:ln w="12700">
+            <a:solidFill>
+              <a:srgbClr val="4CAF86"/>
+            </a:solidFill>
+            <a:prstDash val="solid"/>
+          </a:ln>
+        </p:spPr>
+        <p:txBody>
+          <a:bodyPr/>
+          <a:lstStyle/>
+          <a:p>
+            <a:endParaRPr lang="en-US"/>
+          </a:p>
+        </p:txBody>
+      </p:sp>
+      <p:sp>
+        <p:nvSpPr>
+          <p:cNvPr id="18" name="Text 16">
+            <a:extLst>
+              <a:ext uri="{FF2B5EF4-FFF2-40B4-BE49-F238E27FC236}">
+                <a16:creationId xmlns:a16="http://schemas.microsoft.com/office/drawing/2014/main" id="{1DA09737-9C3C-04FE-E606-49317C631556}"/>
+              </a:ext>
+            </a:extLst>
+          </p:cNvPr>
+          <p:cNvSpPr/>
+          <p:nvPr/>
+        </p:nvSpPr>
+        <p:spPr>
+          <a:xfrm>
+            <a:off x="4983480" y="1051560"/>
+            <a:ext cx="3749040" cy="320040"/>
+          </a:xfrm>
+          <a:prstGeom prst="rect">
+            <a:avLst/>
+          </a:prstGeom>
+          <a:noFill/>
+          <a:ln/>
+        </p:spPr>
+        <p:txBody>
+          <a:bodyPr wrap="square" lIns="0" tIns="0" rIns="0" bIns="0" rtlCol="0" anchor="ctr"/>
+          <a:lstStyle/>
+          <a:p>
+            <a:pPr marL="0" indent="0">
+              <a:buNone/>
+            </a:pPr>
+            <a:r>
+              <a:rPr lang="en-US" sz="1300" b="1" dirty="0">
+                <a:solidFill>
+                  <a:srgbClr val="4CAF86"/>
+                </a:solidFill>
+                <a:latin typeface="Calibri" pitchFamily="34" charset="0"/>
+                <a:ea typeface="Calibri" pitchFamily="34" charset="-122"/>
+                <a:cs typeface="Calibri" pitchFamily="34" charset="-120"/>
+              </a:rPr>
+              <a:t>wait() first</a:t>
+            </a:r>
+            <a:endParaRPr lang="en-US" sz="1300" dirty="0"/>
+          </a:p>
+        </p:txBody>
+      </p:sp>
+      <p:sp>
+        <p:nvSpPr>
+          <p:cNvPr id="19" name="Text 17">
+            <a:extLst>
+              <a:ext uri="{FF2B5EF4-FFF2-40B4-BE49-F238E27FC236}">
+                <a16:creationId xmlns:a16="http://schemas.microsoft.com/office/drawing/2014/main" id="{54040AEB-5A59-59F8-4B27-D0EB5CD53344}"/>
+              </a:ext>
+            </a:extLst>
+          </p:cNvPr>
+          <p:cNvSpPr/>
+          <p:nvPr/>
+        </p:nvSpPr>
+        <p:spPr>
+          <a:xfrm>
+            <a:off x="4983480" y="1371600"/>
+            <a:ext cx="3749040" cy="685800"/>
+          </a:xfrm>
+          <a:prstGeom prst="rect">
+            <a:avLst/>
+          </a:prstGeom>
+          <a:noFill/>
+          <a:ln/>
+        </p:spPr>
+        <p:txBody>
+          <a:bodyPr wrap="square" rtlCol="0" anchor="ctr"/>
+          <a:lstStyle/>
+          <a:p>
+            <a:pPr marL="0" indent="0" algn="l">
+              <a:buNone/>
+            </a:pPr>
+            <a:r>
+              <a:rPr lang="en-US" sz="1200" dirty="0">
+                <a:solidFill>
+                  <a:srgbClr val="D6E4F0"/>
+                </a:solidFill>
+                <a:latin typeface="Calibri" pitchFamily="34" charset="0"/>
+                <a:ea typeface="Calibri" pitchFamily="34" charset="-122"/>
+                <a:cs typeface="Calibri" pitchFamily="34" charset="-120"/>
+              </a:rPr>
+              <a:t>Parent calls wait() for ALL children before reading any result pipe, ensuring partial results are fully written.</a:t>
+            </a:r>
+            <a:endParaRPr lang="en-US" sz="1200" dirty="0"/>
+          </a:p>
+        </p:txBody>
+      </p:sp>
+      <p:sp>
+        <p:nvSpPr>
+          <p:cNvPr id="20" name="Shape 18">
+            <a:extLst>
+              <a:ext uri="{FF2B5EF4-FFF2-40B4-BE49-F238E27FC236}">
+                <a16:creationId xmlns:a16="http://schemas.microsoft.com/office/drawing/2014/main" id="{C65AC162-A8B1-98B4-F6D8-B73490934430}"/>
+              </a:ext>
+            </a:extLst>
+          </p:cNvPr>
+          <p:cNvSpPr/>
+          <p:nvPr/>
+        </p:nvSpPr>
+        <p:spPr>
+          <a:xfrm>
+            <a:off x="4754880" y="2304288"/>
+            <a:ext cx="4114800" cy="1188720"/>
+          </a:xfrm>
+          <a:prstGeom prst="rect">
+            <a:avLst/>
+          </a:prstGeom>
+          <a:solidFill>
+            <a:srgbClr val="1C2E3E"/>
+          </a:solidFill>
+          <a:ln w="12700">
+            <a:solidFill>
+              <a:srgbClr val="3D5166"/>
+            </a:solidFill>
+            <a:prstDash val="solid"/>
+          </a:ln>
+          <a:effectLst>
+            <a:outerShdw blurRad="101600" dist="38100" dir="8100000" algn="bl" rotWithShape="0">
+              <a:srgbClr val="000000">
+                <a:alpha val="30000"/>
+              </a:srgbClr>
+            </a:outerShdw>
+          </a:effectLst>
+        </p:spPr>
+        <p:txBody>
+          <a:bodyPr/>
+          <a:lstStyle/>
+          <a:p>
+            <a:endParaRPr lang="en-US" dirty="0"/>
+          </a:p>
+        </p:txBody>
+      </p:sp>
+      <p:sp>
+        <p:nvSpPr>
+          <p:cNvPr id="21" name="Shape 19">
+            <a:extLst>
+              <a:ext uri="{FF2B5EF4-FFF2-40B4-BE49-F238E27FC236}">
+                <a16:creationId xmlns:a16="http://schemas.microsoft.com/office/drawing/2014/main" id="{6C69E062-F78C-368F-D16D-40A5D424A13B}"/>
+              </a:ext>
+            </a:extLst>
+          </p:cNvPr>
+          <p:cNvSpPr/>
+          <p:nvPr/>
+        </p:nvSpPr>
+        <p:spPr>
+          <a:xfrm>
+            <a:off x="4754880" y="2304288"/>
+            <a:ext cx="91440" cy="1188720"/>
+          </a:xfrm>
+          <a:prstGeom prst="rect">
+            <a:avLst/>
+          </a:prstGeom>
+          <a:solidFill>
+            <a:srgbClr val="D6E4F0"/>
+          </a:solidFill>
+          <a:ln w="12700">
+            <a:solidFill>
+              <a:srgbClr val="D6E4F0"/>
+            </a:solidFill>
+            <a:prstDash val="solid"/>
+          </a:ln>
+        </p:spPr>
+        <p:txBody>
+          <a:bodyPr/>
+          <a:lstStyle/>
+          <a:p>
+            <a:endParaRPr lang="en-US"/>
+          </a:p>
+        </p:txBody>
+      </p:sp>
+      <p:sp>
+        <p:nvSpPr>
+          <p:cNvPr id="22" name="Text 20">
+            <a:extLst>
+              <a:ext uri="{FF2B5EF4-FFF2-40B4-BE49-F238E27FC236}">
+                <a16:creationId xmlns:a16="http://schemas.microsoft.com/office/drawing/2014/main" id="{B4A5C60D-DD51-DCD7-812E-BBD11F3ADF1C}"/>
+              </a:ext>
+            </a:extLst>
+          </p:cNvPr>
+          <p:cNvSpPr/>
+          <p:nvPr/>
+        </p:nvSpPr>
+        <p:spPr>
+          <a:xfrm>
+            <a:off x="4983480" y="2395728"/>
+            <a:ext cx="3749040" cy="320040"/>
+          </a:xfrm>
+          <a:prstGeom prst="rect">
+            <a:avLst/>
+          </a:prstGeom>
+          <a:noFill/>
+          <a:ln/>
+        </p:spPr>
+        <p:txBody>
+          <a:bodyPr wrap="square" lIns="0" tIns="0" rIns="0" bIns="0" rtlCol="0" anchor="ctr"/>
+          <a:lstStyle/>
+          <a:p>
+            <a:pPr marL="0" indent="0">
+              <a:buNone/>
+            </a:pPr>
+            <a:r>
+              <a:rPr lang="en-US" sz="1300" b="1" dirty="0">
+                <a:solidFill>
+                  <a:srgbClr val="D6E4F0"/>
+                </a:solidFill>
+                <a:latin typeface="Calibri" pitchFamily="34" charset="0"/>
+                <a:ea typeface="Calibri" pitchFamily="34" charset="-122"/>
+                <a:cs typeface="Calibri" pitchFamily="34" charset="-120"/>
+              </a:rPr>
+              <a:t>f is generic</a:t>
+            </a:r>
+            <a:endParaRPr lang="en-US" sz="1300" dirty="0"/>
+          </a:p>
+        </p:txBody>
+      </p:sp>
+      <p:sp>
+        <p:nvSpPr>
+          <p:cNvPr id="23" name="Text 21">
+            <a:extLst>
+              <a:ext uri="{FF2B5EF4-FFF2-40B4-BE49-F238E27FC236}">
+                <a16:creationId xmlns:a16="http://schemas.microsoft.com/office/drawing/2014/main" id="{6186A01F-AF4E-019B-DEE7-2DCA20D58BF3}"/>
+              </a:ext>
+            </a:extLst>
+          </p:cNvPr>
+          <p:cNvSpPr/>
+          <p:nvPr/>
+        </p:nvSpPr>
+        <p:spPr>
+          <a:xfrm>
+            <a:off x="4983480" y="2715768"/>
+            <a:ext cx="3749040" cy="685800"/>
+          </a:xfrm>
+          <a:prstGeom prst="rect">
+            <a:avLst/>
+          </a:prstGeom>
+          <a:noFill/>
+          <a:ln/>
+        </p:spPr>
+        <p:txBody>
+          <a:bodyPr wrap="square" rtlCol="0" anchor="ctr"/>
+          <a:lstStyle/>
+          <a:p>
+            <a:pPr marL="0" indent="0" algn="l">
+              <a:buNone/>
+            </a:pPr>
+            <a:r>
+              <a:rPr lang="en-US" sz="1200" dirty="0">
+                <a:solidFill>
+                  <a:srgbClr val="D6E4F0"/>
+                </a:solidFill>
+                <a:latin typeface="Calibri" pitchFamily="34" charset="0"/>
+                <a:ea typeface="Calibri" pitchFamily="34" charset="-122"/>
+                <a:cs typeface="Calibri" pitchFamily="34" charset="-120"/>
+              </a:rPr>
+              <a:t>Parent aggregates partial results using f, not +.  Works correctly for add, multiply, max</a:t>
+            </a:r>
+            <a:endParaRPr lang="en-US" sz="1200" dirty="0"/>
+          </a:p>
+        </p:txBody>
+      </p:sp>
+      <p:sp>
+        <p:nvSpPr>
+          <p:cNvPr id="24" name="Shape 22">
+            <a:extLst>
+              <a:ext uri="{FF2B5EF4-FFF2-40B4-BE49-F238E27FC236}">
+                <a16:creationId xmlns:a16="http://schemas.microsoft.com/office/drawing/2014/main" id="{2C8755F9-BDA3-42EA-4E22-AEA3816A8CB4}"/>
+              </a:ext>
+            </a:extLst>
+          </p:cNvPr>
+          <p:cNvSpPr/>
+          <p:nvPr/>
+        </p:nvSpPr>
+        <p:spPr>
+          <a:xfrm>
+            <a:off x="4754880" y="3648456"/>
+            <a:ext cx="4114800" cy="1188720"/>
+          </a:xfrm>
+          <a:prstGeom prst="rect">
+            <a:avLst/>
+          </a:prstGeom>
+          <a:solidFill>
+            <a:srgbClr val="1C2E3E"/>
+          </a:solidFill>
+          <a:ln w="12700">
+            <a:solidFill>
+              <a:srgbClr val="3D5166"/>
+            </a:solidFill>
+            <a:prstDash val="solid"/>
+          </a:ln>
+          <a:effectLst>
+            <a:outerShdw blurRad="101600" dist="38100" dir="8100000" algn="bl" rotWithShape="0">
+              <a:srgbClr val="000000">
+                <a:alpha val="30000"/>
+              </a:srgbClr>
+            </a:outerShdw>
+          </a:effectLst>
+        </p:spPr>
+        <p:txBody>
+          <a:bodyPr/>
+          <a:lstStyle/>
+          <a:p>
+            <a:endParaRPr lang="en-US"/>
+          </a:p>
+        </p:txBody>
+      </p:sp>
+      <p:sp>
+        <p:nvSpPr>
+          <p:cNvPr id="25" name="Shape 23">
+            <a:extLst>
+              <a:ext uri="{FF2B5EF4-FFF2-40B4-BE49-F238E27FC236}">
+                <a16:creationId xmlns:a16="http://schemas.microsoft.com/office/drawing/2014/main" id="{A15FE3D2-75FB-EEE3-D516-C15D61F1771D}"/>
+              </a:ext>
+            </a:extLst>
+          </p:cNvPr>
+          <p:cNvSpPr/>
+          <p:nvPr/>
+        </p:nvSpPr>
+        <p:spPr>
+          <a:xfrm>
+            <a:off x="4754880" y="3648456"/>
+            <a:ext cx="91440" cy="1188720"/>
+          </a:xfrm>
+          <a:prstGeom prst="rect">
+            <a:avLst/>
+          </a:prstGeom>
+          <a:solidFill>
+            <a:srgbClr val="8BA3B8"/>
+          </a:solidFill>
+          <a:ln w="12700">
+            <a:solidFill>
+              <a:srgbClr val="8BA3B8"/>
+            </a:solidFill>
+            <a:prstDash val="solid"/>
+          </a:ln>
+        </p:spPr>
+        <p:txBody>
+          <a:bodyPr/>
+          <a:lstStyle/>
+          <a:p>
+            <a:endParaRPr lang="en-US"/>
+          </a:p>
+        </p:txBody>
+      </p:sp>
+      <p:sp>
+        <p:nvSpPr>
+          <p:cNvPr id="26" name="Text 24">
+            <a:extLst>
+              <a:ext uri="{FF2B5EF4-FFF2-40B4-BE49-F238E27FC236}">
+                <a16:creationId xmlns:a16="http://schemas.microsoft.com/office/drawing/2014/main" id="{6780ED96-12DA-C07A-6C89-B64CEF4C64C3}"/>
+              </a:ext>
+            </a:extLst>
+          </p:cNvPr>
+          <p:cNvSpPr/>
+          <p:nvPr/>
+        </p:nvSpPr>
+        <p:spPr>
+          <a:xfrm>
+            <a:off x="4983480" y="3739896"/>
+            <a:ext cx="3749040" cy="320040"/>
+          </a:xfrm>
+          <a:prstGeom prst="rect">
+            <a:avLst/>
+          </a:prstGeom>
+          <a:noFill/>
+          <a:ln/>
+        </p:spPr>
+        <p:txBody>
+          <a:bodyPr wrap="square" lIns="0" tIns="0" rIns="0" bIns="0" rtlCol="0" anchor="ctr"/>
+          <a:lstStyle/>
+          <a:p>
+            <a:pPr marL="0" indent="0">
+              <a:buNone/>
+            </a:pPr>
+            <a:r>
+              <a:rPr lang="en-US" sz="1300" b="1" dirty="0">
+                <a:solidFill>
+                  <a:srgbClr val="8BA3B8"/>
+                </a:solidFill>
+                <a:latin typeface="Calibri" pitchFamily="34" charset="0"/>
+                <a:ea typeface="Calibri" pitchFamily="34" charset="-122"/>
+                <a:cs typeface="Calibri" pitchFamily="34" charset="-120"/>
+              </a:rPr>
+              <a:t>File format</a:t>
+            </a:r>
+            <a:endParaRPr lang="en-US" sz="1300" dirty="0"/>
+          </a:p>
+        </p:txBody>
+      </p:sp>
+      <p:sp>
+        <p:nvSpPr>
+          <p:cNvPr id="27" name="Text 25">
+            <a:extLst>
+              <a:ext uri="{FF2B5EF4-FFF2-40B4-BE49-F238E27FC236}">
+                <a16:creationId xmlns:a16="http://schemas.microsoft.com/office/drawing/2014/main" id="{C312E6A5-4CFE-6F2C-D265-8DD7618BCA90}"/>
+              </a:ext>
+            </a:extLst>
+          </p:cNvPr>
+          <p:cNvSpPr/>
+          <p:nvPr/>
+        </p:nvSpPr>
+        <p:spPr>
+          <a:xfrm>
+            <a:off x="4983480" y="4059936"/>
+            <a:ext cx="3749040" cy="685800"/>
+          </a:xfrm>
+          <a:prstGeom prst="rect">
+            <a:avLst/>
+          </a:prstGeom>
+          <a:noFill/>
+          <a:ln/>
+        </p:spPr>
+        <p:txBody>
+          <a:bodyPr wrap="square" rtlCol="0" anchor="ctr"/>
+          <a:lstStyle/>
+          <a:p>
+            <a:pPr marL="0" indent="0" algn="l">
+              <a:buNone/>
+            </a:pPr>
+            <a:r>
+              <a:rPr lang="en-US" sz="1200" dirty="0">
+                <a:solidFill>
+                  <a:srgbClr val="D6E4F0"/>
+                </a:solidFill>
+                <a:latin typeface="Calibri" pitchFamily="34" charset="0"/>
+                <a:ea typeface="Calibri" pitchFamily="34" charset="-122"/>
+                <a:cs typeface="Calibri" pitchFamily="34" charset="-120"/>
+              </a:rPr>
+              <a:t>Parser handles both newline-separated and comma-separated numbers using strtok with delimiters ",\n\r ".</a:t>
+            </a:r>
+            <a:endParaRPr lang="en-US" sz="1200" dirty="0"/>
+          </a:p>
+        </p:txBody>
+      </p:sp>
+    </p:spTree>
+    <p:extLst>
+      <p:ext uri="{BB962C8B-B14F-4D97-AF65-F5344CB8AC3E}">
+        <p14:creationId xmlns:p14="http://schemas.microsoft.com/office/powerpoint/2010/main" val="1613392330"/>
+      </p:ext>
+    </p:extLst>
+  </p:cSld>
+  <p:clrMapOvr>
+    <a:masterClrMapping/>
+  </p:clrMapOvr>
+</p:sld>
+</file>
+
+<file path=ppt/slides/slide11.xml><?xml version="1.0" encoding="utf-8"?>
+<p:sld xmlns:a="http://schemas.openxmlformats.org/drawingml/2006/main" xmlns:r="http://schemas.openxmlformats.org/officeDocument/2006/relationships" xmlns:p="http://schemas.openxmlformats.org/presentationml/2006/main">
+  <p:cSld name="Slide 7">
+    <p:bg>
+      <p:bgPr>
+        <a:solidFill>
+          <a:srgbClr val="0F1923"/>
+        </a:solidFill>
+        <a:effectLst/>
+      </p:bgPr>
+    </p:bg>
+    <p:spTree>
+      <p:nvGrpSpPr>
+        <p:cNvPr id="1" name=""/>
+        <p:cNvGrpSpPr/>
+        <p:nvPr/>
+      </p:nvGrpSpPr>
+      <p:grpSpPr>
+        <a:xfrm>
+          <a:off x="0" y="0"/>
+          <a:ext cx="0" cy="0"/>
+          <a:chOff x="0" y="0"/>
+          <a:chExt cx="0" cy="0"/>
+        </a:xfrm>
+      </p:grpSpPr>
+      <p:sp>
+        <p:nvSpPr>
+          <p:cNvPr id="2" name="Shape 0"/>
+          <p:cNvSpPr/>
+          <p:nvPr/>
+        </p:nvSpPr>
+        <p:spPr>
+          <a:xfrm>
+            <a:off x="0" y="0"/>
+            <a:ext cx="9144000" cy="777240"/>
+          </a:xfrm>
+          <a:prstGeom prst="rect">
+            <a:avLst/>
+          </a:prstGeom>
+          <a:solidFill>
+            <a:srgbClr val="00A896"/>
+          </a:solidFill>
+          <a:ln w="12700">
+            <a:solidFill>
+              <a:srgbClr val="00A896"/>
+            </a:solidFill>
+            <a:prstDash val="solid"/>
+          </a:ln>
+        </p:spPr>
+        <p:txBody>
+          <a:bodyPr/>
+          <a:lstStyle/>
+          <a:p>
+            <a:endParaRPr lang="en-US"/>
+          </a:p>
+        </p:txBody>
+      </p:sp>
+      <p:sp>
+        <p:nvSpPr>
+          <p:cNvPr id="3" name="Text 1"/>
+          <p:cNvSpPr/>
+          <p:nvPr/>
+        </p:nvSpPr>
+        <p:spPr>
+          <a:xfrm>
+            <a:off x="365760" y="0"/>
+            <a:ext cx="8412480" cy="777240"/>
+          </a:xfrm>
+          <a:prstGeom prst="rect">
+            <a:avLst/>
+          </a:prstGeom>
+          <a:noFill/>
+          <a:ln/>
+        </p:spPr>
+        <p:txBody>
+          <a:bodyPr wrap="square" lIns="0" tIns="0" rIns="0" bIns="0" rtlCol="0" anchor="ctr"/>
+          <a:lstStyle/>
+          <a:p>
+            <a:r>
+              <a:rPr lang="en-US" sz="2800" b="1" dirty="0">
+                <a:solidFill>
+                  <a:schemeClr val="bg1"/>
+                </a:solidFill>
+              </a:rPr>
+              <a:t>Deploying Sequential &amp; Parallel Compute on xv6</a:t>
+            </a:r>
+            <a:endParaRPr lang="en-US" sz="2600" b="1" dirty="0">
+              <a:solidFill>
+                <a:schemeClr val="bg1"/>
+              </a:solidFill>
+            </a:endParaRPr>
+          </a:p>
+        </p:txBody>
+      </p:sp>
+      <p:pic>
+        <p:nvPicPr>
+          <p:cNvPr id="29" name="Picture 28">
+            <a:extLst>
+              <a:ext uri="{FF2B5EF4-FFF2-40B4-BE49-F238E27FC236}">
+                <a16:creationId xmlns:a16="http://schemas.microsoft.com/office/drawing/2014/main" id="{5DA032EC-68A5-FE7D-1924-9B661702C9E6}"/>
+              </a:ext>
+            </a:extLst>
+          </p:cNvPr>
+          <p:cNvPicPr>
+            <a:picLocks noChangeAspect="1"/>
+          </p:cNvPicPr>
+          <p:nvPr/>
+        </p:nvPicPr>
+        <p:blipFill>
+          <a:blip r:embed="rId3"/>
+          <a:stretch>
+            <a:fillRect/>
+          </a:stretch>
+        </p:blipFill>
+        <p:spPr>
+          <a:xfrm>
+            <a:off x="1599093" y="1099410"/>
+            <a:ext cx="5945813" cy="3620301"/>
+          </a:xfrm>
+          <a:prstGeom prst="rect">
+            <a:avLst/>
+          </a:prstGeom>
+        </p:spPr>
+      </p:pic>
+    </p:spTree>
+  </p:cSld>
+  <p:clrMapOvr>
+    <a:masterClrMapping/>
+  </p:clrMapOvr>
+</p:sld>
+</file>
+
+<file path=ppt/slides/slide12.xml><?xml version="1.0" encoding="utf-8"?>
+<p:sld xmlns:a="http://schemas.openxmlformats.org/drawingml/2006/main" xmlns:r="http://schemas.openxmlformats.org/officeDocument/2006/relationships" xmlns:p="http://schemas.openxmlformats.org/presentationml/2006/main">
+  <p:cSld>
+    <p:bg>
+      <p:bgPr>
+        <a:solidFill>
+          <a:srgbClr val="0F1923"/>
+        </a:solidFill>
+        <a:effectLst/>
+      </p:bgPr>
+    </p:bg>
+    <p:spTree>
+      <p:nvGrpSpPr>
+        <p:cNvPr id="1" name="">
+          <a:extLst>
+            <a:ext uri="{FF2B5EF4-FFF2-40B4-BE49-F238E27FC236}">
+              <a16:creationId xmlns:a16="http://schemas.microsoft.com/office/drawing/2014/main" id="{B969C803-E2F2-4305-8B3C-5D30DC9E0EA6}"/>
+            </a:ext>
+          </a:extLst>
+        </p:cNvPr>
+        <p:cNvGrpSpPr/>
+        <p:nvPr/>
+      </p:nvGrpSpPr>
+      <p:grpSpPr>
+        <a:xfrm>
+          <a:off x="0" y="0"/>
+          <a:ext cx="0" cy="0"/>
+          <a:chOff x="0" y="0"/>
+          <a:chExt cx="0" cy="0"/>
+        </a:xfrm>
+      </p:grpSpPr>
+      <p:sp>
+        <p:nvSpPr>
+          <p:cNvPr id="2" name="Shape 0">
+            <a:extLst>
+              <a:ext uri="{FF2B5EF4-FFF2-40B4-BE49-F238E27FC236}">
+                <a16:creationId xmlns:a16="http://schemas.microsoft.com/office/drawing/2014/main" id="{53AA13B1-8D50-83E4-7F6E-9244BCC17408}"/>
+              </a:ext>
+            </a:extLst>
+          </p:cNvPr>
+          <p:cNvSpPr/>
+          <p:nvPr/>
+        </p:nvSpPr>
+        <p:spPr>
+          <a:xfrm>
+            <a:off x="0" y="0"/>
+            <a:ext cx="9144000" cy="777240"/>
+          </a:xfrm>
+          <a:prstGeom prst="rect">
+            <a:avLst/>
+          </a:prstGeom>
+          <a:solidFill>
+            <a:srgbClr val="00A896"/>
+          </a:solidFill>
+          <a:ln w="12700">
+            <a:solidFill>
+              <a:srgbClr val="00A896"/>
+            </a:solidFill>
+            <a:prstDash val="solid"/>
+          </a:ln>
+        </p:spPr>
+        <p:txBody>
+          <a:bodyPr/>
+          <a:lstStyle/>
+          <a:p>
+            <a:endParaRPr lang="en-US"/>
+          </a:p>
+        </p:txBody>
+      </p:sp>
+      <p:sp>
+        <p:nvSpPr>
+          <p:cNvPr id="3" name="Text 1">
+            <a:extLst>
+              <a:ext uri="{FF2B5EF4-FFF2-40B4-BE49-F238E27FC236}">
+                <a16:creationId xmlns:a16="http://schemas.microsoft.com/office/drawing/2014/main" id="{EDFE2C97-2E76-F8BB-D977-02C9BBA6AA6C}"/>
+              </a:ext>
+            </a:extLst>
+          </p:cNvPr>
+          <p:cNvSpPr/>
+          <p:nvPr/>
+        </p:nvSpPr>
+        <p:spPr>
+          <a:xfrm>
+            <a:off x="365760" y="0"/>
+            <a:ext cx="8412480" cy="777240"/>
+          </a:xfrm>
+          <a:prstGeom prst="rect">
+            <a:avLst/>
+          </a:prstGeom>
+          <a:noFill/>
+          <a:ln/>
+        </p:spPr>
+        <p:txBody>
+          <a:bodyPr wrap="square" lIns="0" tIns="0" rIns="0" bIns="0" rtlCol="0" anchor="ctr"/>
+          <a:lstStyle/>
+          <a:p>
+            <a:r>
+              <a:rPr lang="en-US" sz="2800" b="1" dirty="0">
+                <a:solidFill>
+                  <a:schemeClr val="bg1"/>
+                </a:solidFill>
+              </a:rPr>
+              <a:t>Deploying Sequential &amp; Parallel Compute on xv6</a:t>
+            </a:r>
+            <a:endParaRPr lang="en-US" sz="2600" b="1" dirty="0">
+              <a:solidFill>
+                <a:schemeClr val="bg1"/>
+              </a:solidFill>
+            </a:endParaRPr>
+          </a:p>
+        </p:txBody>
+      </p:sp>
+      <p:pic>
+        <p:nvPicPr>
+          <p:cNvPr id="5" name="Picture 4">
+            <a:extLst>
+              <a:ext uri="{FF2B5EF4-FFF2-40B4-BE49-F238E27FC236}">
+                <a16:creationId xmlns:a16="http://schemas.microsoft.com/office/drawing/2014/main" id="{2DFC9F79-ECB5-ECAD-0AE8-0418192513E6}"/>
+              </a:ext>
+            </a:extLst>
+          </p:cNvPr>
+          <p:cNvPicPr>
+            <a:picLocks noChangeAspect="1"/>
+          </p:cNvPicPr>
+          <p:nvPr/>
+        </p:nvPicPr>
+        <p:blipFill>
+          <a:blip r:embed="rId3"/>
+          <a:srcRect b="20590"/>
+          <a:stretch>
+            <a:fillRect/>
+          </a:stretch>
+        </p:blipFill>
+        <p:spPr>
+          <a:xfrm>
+            <a:off x="1507658" y="1169884"/>
+            <a:ext cx="6128684" cy="3444318"/>
+          </a:xfrm>
+          <a:prstGeom prst="rect">
+            <a:avLst/>
+          </a:prstGeom>
+        </p:spPr>
+      </p:pic>
+    </p:spTree>
+    <p:extLst>
+      <p:ext uri="{BB962C8B-B14F-4D97-AF65-F5344CB8AC3E}">
+        <p14:creationId xmlns:p14="http://schemas.microsoft.com/office/powerpoint/2010/main" val="2857438996"/>
+      </p:ext>
+    </p:extLst>
+  </p:cSld>
+  <p:clrMapOvr>
+    <a:masterClrMapping/>
+  </p:clrMapOvr>
+</p:sld>
+</file>
+
+<file path=ppt/slides/slide13.xml><?xml version="1.0" encoding="utf-8"?>
+<p:sld xmlns:a="http://schemas.openxmlformats.org/drawingml/2006/main" xmlns:r="http://schemas.openxmlformats.org/officeDocument/2006/relationships" xmlns:p="http://schemas.openxmlformats.org/presentationml/2006/main">
+  <p:cSld>
+    <p:bg>
+      <p:bgPr>
+        <a:solidFill>
+          <a:srgbClr val="0F1923"/>
+        </a:solidFill>
+        <a:effectLst/>
+      </p:bgPr>
+    </p:bg>
+    <p:spTree>
+      <p:nvGrpSpPr>
+        <p:cNvPr id="1" name="">
+          <a:extLst>
+            <a:ext uri="{FF2B5EF4-FFF2-40B4-BE49-F238E27FC236}">
+              <a16:creationId xmlns:a16="http://schemas.microsoft.com/office/drawing/2014/main" id="{81D76311-9DB7-2FB1-8A44-4953FB858C66}"/>
+            </a:ext>
+          </a:extLst>
+        </p:cNvPr>
+        <p:cNvGrpSpPr/>
+        <p:nvPr/>
+      </p:nvGrpSpPr>
+      <p:grpSpPr>
+        <a:xfrm>
+          <a:off x="0" y="0"/>
+          <a:ext cx="0" cy="0"/>
+          <a:chOff x="0" y="0"/>
+          <a:chExt cx="0" cy="0"/>
+        </a:xfrm>
+      </p:grpSpPr>
+      <p:sp>
+        <p:nvSpPr>
+          <p:cNvPr id="2" name="Shape 0">
+            <a:extLst>
+              <a:ext uri="{FF2B5EF4-FFF2-40B4-BE49-F238E27FC236}">
+                <a16:creationId xmlns:a16="http://schemas.microsoft.com/office/drawing/2014/main" id="{4ACC57BE-9656-C485-58A0-EDB4416757C6}"/>
+              </a:ext>
+            </a:extLst>
+          </p:cNvPr>
+          <p:cNvSpPr/>
+          <p:nvPr/>
+        </p:nvSpPr>
+        <p:spPr>
+          <a:xfrm>
+            <a:off x="0" y="0"/>
+            <a:ext cx="9144000" cy="777240"/>
+          </a:xfrm>
+          <a:prstGeom prst="rect">
+            <a:avLst/>
+          </a:prstGeom>
+          <a:solidFill>
+            <a:srgbClr val="00A896"/>
+          </a:solidFill>
+          <a:ln w="12700">
+            <a:solidFill>
+              <a:srgbClr val="00A896"/>
+            </a:solidFill>
+            <a:prstDash val="solid"/>
+          </a:ln>
+        </p:spPr>
+        <p:txBody>
+          <a:bodyPr/>
+          <a:lstStyle/>
+          <a:p>
+            <a:endParaRPr lang="en-US"/>
+          </a:p>
+        </p:txBody>
+      </p:sp>
+      <p:sp>
+        <p:nvSpPr>
+          <p:cNvPr id="3" name="Text 1">
+            <a:extLst>
+              <a:ext uri="{FF2B5EF4-FFF2-40B4-BE49-F238E27FC236}">
+                <a16:creationId xmlns:a16="http://schemas.microsoft.com/office/drawing/2014/main" id="{F1835CAC-E53B-EC74-3EA6-D53A1DCDF48E}"/>
+              </a:ext>
+            </a:extLst>
+          </p:cNvPr>
+          <p:cNvSpPr/>
+          <p:nvPr/>
+        </p:nvSpPr>
+        <p:spPr>
+          <a:xfrm>
+            <a:off x="365760" y="0"/>
+            <a:ext cx="8412480" cy="777240"/>
+          </a:xfrm>
+          <a:prstGeom prst="rect">
+            <a:avLst/>
+          </a:prstGeom>
+          <a:noFill/>
+          <a:ln/>
+        </p:spPr>
+        <p:txBody>
+          <a:bodyPr wrap="square" lIns="0" tIns="0" rIns="0" bIns="0" rtlCol="0" anchor="ctr"/>
+          <a:lstStyle/>
+          <a:p>
+            <a:r>
+              <a:rPr lang="en-US" sz="2800" b="1" dirty="0">
+                <a:solidFill>
+                  <a:schemeClr val="bg1"/>
+                </a:solidFill>
+              </a:rPr>
+              <a:t>Deploying Sequential &amp; Parallel Compute on xv6</a:t>
+            </a:r>
+            <a:endParaRPr lang="en-US" sz="2600" b="1" dirty="0">
+              <a:solidFill>
+                <a:schemeClr val="bg1"/>
+              </a:solidFill>
+            </a:endParaRPr>
+          </a:p>
+        </p:txBody>
+      </p:sp>
+      <p:pic>
+        <p:nvPicPr>
+          <p:cNvPr id="6" name="Picture 5">
+            <a:extLst>
+              <a:ext uri="{FF2B5EF4-FFF2-40B4-BE49-F238E27FC236}">
+                <a16:creationId xmlns:a16="http://schemas.microsoft.com/office/drawing/2014/main" id="{C0905D84-10E3-BC12-8D98-E7700B465986}"/>
+              </a:ext>
+            </a:extLst>
+          </p:cNvPr>
+          <p:cNvPicPr>
+            <a:picLocks noChangeAspect="1"/>
+          </p:cNvPicPr>
+          <p:nvPr/>
+        </p:nvPicPr>
+        <p:blipFill>
+          <a:blip r:embed="rId3"/>
+          <a:stretch>
+            <a:fillRect/>
+          </a:stretch>
+        </p:blipFill>
+        <p:spPr>
+          <a:xfrm>
+            <a:off x="706406" y="2520607"/>
+            <a:ext cx="7731188" cy="1227700"/>
+          </a:xfrm>
+          <a:prstGeom prst="rect">
+            <a:avLst/>
+          </a:prstGeom>
+        </p:spPr>
+      </p:pic>
+      <p:sp>
+        <p:nvSpPr>
+          <p:cNvPr id="8" name="TextBox 7">
+            <a:extLst>
+              <a:ext uri="{FF2B5EF4-FFF2-40B4-BE49-F238E27FC236}">
+                <a16:creationId xmlns:a16="http://schemas.microsoft.com/office/drawing/2014/main" id="{799DA160-5AF7-CC00-FC36-940086BE0676}"/>
+              </a:ext>
+            </a:extLst>
+          </p:cNvPr>
+          <p:cNvSpPr txBox="1"/>
+          <p:nvPr/>
+        </p:nvSpPr>
+        <p:spPr>
+          <a:xfrm>
+            <a:off x="706406" y="1475291"/>
+            <a:ext cx="4579034" cy="584775"/>
+          </a:xfrm>
+          <a:prstGeom prst="rect">
+            <a:avLst/>
+          </a:prstGeom>
+          <a:noFill/>
+        </p:spPr>
+        <p:txBody>
+          <a:bodyPr wrap="square">
+            <a:spAutoFit/>
+          </a:bodyPr>
+          <a:lstStyle/>
+          <a:p>
+            <a:r>
+              <a:rPr lang="en-US" sz="3200" b="1" dirty="0">
+                <a:solidFill>
+                  <a:schemeClr val="bg1"/>
+                </a:solidFill>
+              </a:rPr>
+              <a:t>Result:</a:t>
+            </a:r>
+          </a:p>
+        </p:txBody>
+      </p:sp>
+    </p:spTree>
+    <p:extLst>
+      <p:ext uri="{BB962C8B-B14F-4D97-AF65-F5344CB8AC3E}">
+        <p14:creationId xmlns:p14="http://schemas.microsoft.com/office/powerpoint/2010/main" val="82514609"/>
+      </p:ext>
+    </p:extLst>
+  </p:cSld>
+  <p:clrMapOvr>
+    <a:masterClrMapping/>
+  </p:clrMapOvr>
+</p:sld>
+</file>
+
+<file path=ppt/slides/slide14.xml><?xml version="1.0" encoding="utf-8"?>
+<p:sld xmlns:a="http://schemas.openxmlformats.org/drawingml/2006/main" xmlns:r="http://schemas.openxmlformats.org/officeDocument/2006/relationships" xmlns:p="http://schemas.openxmlformats.org/presentationml/2006/main">
+  <p:cSld>
+    <p:bg>
+      <p:bgPr>
+        <a:solidFill>
+          <a:srgbClr val="0F1923"/>
+        </a:solidFill>
+        <a:effectLst/>
+      </p:bgPr>
+    </p:bg>
+    <p:spTree>
+      <p:nvGrpSpPr>
+        <p:cNvPr id="1" name="">
+          <a:extLst>
+            <a:ext uri="{FF2B5EF4-FFF2-40B4-BE49-F238E27FC236}">
               <a16:creationId xmlns:a16="http://schemas.microsoft.com/office/drawing/2014/main" id="{5A0334C7-78AC-D6A1-6B86-05C3641B460A}"/>
             </a:ext>
           </a:extLst>
@@ -5959,7 +8042,7 @@
 </p:sld>
 </file>
 
-<file path=ppt/slides/slide11.xml><?xml version="1.0" encoding="utf-8"?>
+<file path=ppt/slides/slide15.xml><?xml version="1.0" encoding="utf-8"?>
 <p:sld xmlns:a="http://schemas.openxmlformats.org/drawingml/2006/main" xmlns:r="http://schemas.openxmlformats.org/officeDocument/2006/relationships" xmlns:p="http://schemas.openxmlformats.org/presentationml/2006/main">
   <p:cSld>
     <p:spTree>
@@ -6371,7 +8454,7 @@
 </p:sld>
 </file>
 
-<file path=ppt/slides/slide12.xml><?xml version="1.0" encoding="utf-8"?>
+<file path=ppt/slides/slide16.xml><?xml version="1.0" encoding="utf-8"?>
 <p:sld xmlns:a="http://schemas.openxmlformats.org/drawingml/2006/main" xmlns:r="http://schemas.openxmlformats.org/officeDocument/2006/relationships" xmlns:p="http://schemas.openxmlformats.org/presentationml/2006/main">
   <p:cSld>
     <p:spTree>
@@ -6802,7 +8885,7 @@
 </p:sld>
 </file>
 
-<file path=ppt/slides/slide13.xml><?xml version="1.0" encoding="utf-8"?>
+<file path=ppt/slides/slide17.xml><?xml version="1.0" encoding="utf-8"?>
 <p:sld xmlns:a="http://schemas.openxmlformats.org/drawingml/2006/main" xmlns:r="http://schemas.openxmlformats.org/officeDocument/2006/relationships" xmlns:p="http://schemas.openxmlformats.org/presentationml/2006/main">
   <p:cSld>
     <p:spTree>
@@ -7216,7 +9299,7 @@
 </p:sld>
 </file>
 
-<file path=ppt/slides/slide14.xml><?xml version="1.0" encoding="utf-8"?>
+<file path=ppt/slides/slide18.xml><?xml version="1.0" encoding="utf-8"?>
 <p:sld xmlns:a="http://schemas.openxmlformats.org/drawingml/2006/main" xmlns:r="http://schemas.openxmlformats.org/officeDocument/2006/relationships" xmlns:p="http://schemas.openxmlformats.org/presentationml/2006/main">
   <p:cSld>
     <p:spTree>
@@ -7732,7 +9815,7 @@
 </p:sld>
 </file>
 
-<file path=ppt/slides/slide15.xml><?xml version="1.0" encoding="utf-8"?>
+<file path=ppt/slides/slide19.xml><?xml version="1.0" encoding="utf-8"?>
 <p:sld xmlns:a="http://schemas.openxmlformats.org/drawingml/2006/main" xmlns:r="http://schemas.openxmlformats.org/officeDocument/2006/relationships" xmlns:p="http://schemas.openxmlformats.org/presentationml/2006/main">
   <p:cSld>
     <p:bg>
@@ -8143,6 +10226,29 @@
           <a:bodyPr wrap="square" rtlCol="0" anchor="ctr"/>
           <a:lstStyle/>
           <a:p>
+            <a:r>
+              <a:rPr lang="en-US" sz="1100" dirty="0">
+                <a:solidFill>
+                  <a:srgbClr val="FFFFFF"/>
+                </a:solidFill>
+                <a:latin typeface="Calibri" pitchFamily="34" charset="0"/>
+                <a:ea typeface="Calibri" pitchFamily="34" charset="-122"/>
+                <a:cs typeface="Calibri" pitchFamily="34" charset="-120"/>
+              </a:rPr>
+              <a:t>Requirements: a, b, c, d + adding parallel and sequential compute to xv6 (Bonus part)</a:t>
+            </a:r>
+          </a:p>
+          <a:p>
+            <a:endParaRPr lang="en-US" sz="1100" dirty="0">
+              <a:solidFill>
+                <a:srgbClr val="FFFFFF"/>
+              </a:solidFill>
+              <a:latin typeface="Calibri" pitchFamily="34" charset="0"/>
+              <a:ea typeface="Calibri" pitchFamily="34" charset="-122"/>
+              <a:cs typeface="Calibri" pitchFamily="34" charset="-120"/>
+            </a:endParaRPr>
+          </a:p>
+          <a:p>
             <a:pPr marL="228600" indent="-228600">
               <a:buFont typeface="+mj-lt"/>
               <a:buAutoNum type="arabicPeriod"/>
@@ -8284,7 +10390,7 @@
                 <a:ea typeface="Calibri" pitchFamily="34" charset="-122"/>
                 <a:cs typeface="Calibri" pitchFamily="34" charset="-120"/>
               </a:rPr>
-              <a:t>Write the correctness test: run both functions on simple known inputs (like 1,2,3,4,5 with add) and verify they produce identical results, including the edge case where N is not divisible by </a:t>
+              <a:t>Write the correctness test: run both functions on simple known inputs (like case where N is not divisible by </a:t>
             </a:r>
             <a:r>
               <a:rPr lang="en-US" sz="1100" dirty="0" err="1">
@@ -8306,7 +10412,7 @@
                 <a:ea typeface="Calibri" pitchFamily="34" charset="-122"/>
                 <a:cs typeface="Calibri" pitchFamily="34" charset="-120"/>
               </a:rPr>
-              <a:t> </a:t>
+              <a:t> 1,2,3,4,5 with add) and verify they produce identical results, including the edge </a:t>
             </a:r>
           </a:p>
           <a:p>
@@ -8472,6 +10578,19 @@
         <p:txBody>
           <a:bodyPr wrap="square" rtlCol="0" anchor="ctr"/>
           <a:lstStyle/>
+          <a:p>
+            <a:r>
+              <a:rPr lang="en-US" sz="1100" dirty="0">
+                <a:solidFill>
+                  <a:srgbClr val="FFFFFF"/>
+                </a:solidFill>
+                <a:latin typeface="Calibri" pitchFamily="34" charset="0"/>
+                <a:ea typeface="Calibri" pitchFamily="34" charset="-122"/>
+                <a:cs typeface="Calibri" pitchFamily="34" charset="-120"/>
+              </a:rPr>
+              <a:t>Requirements: a, e, f, g </a:t>
+            </a:r>
+          </a:p>
           <a:p>
             <a:pPr marL="228600" indent="-228600">
               <a:buFont typeface="+mj-lt"/>
@@ -9217,6 +11336,386 @@
 
 <file path=ppt/slides/slide4.xml><?xml version="1.0" encoding="utf-8"?>
 <p:sld xmlns:a="http://schemas.openxmlformats.org/drawingml/2006/main" xmlns:r="http://schemas.openxmlformats.org/officeDocument/2006/relationships" xmlns:p="http://schemas.openxmlformats.org/presentationml/2006/main">
+  <p:cSld>
+    <p:bg>
+      <p:bgPr>
+        <a:solidFill>
+          <a:srgbClr val="0F1923"/>
+        </a:solidFill>
+        <a:effectLst/>
+      </p:bgPr>
+    </p:bg>
+    <p:spTree>
+      <p:nvGrpSpPr>
+        <p:cNvPr id="1" name="">
+          <a:extLst>
+            <a:ext uri="{FF2B5EF4-FFF2-40B4-BE49-F238E27FC236}">
+              <a16:creationId xmlns:a16="http://schemas.microsoft.com/office/drawing/2014/main" id="{725B3854-6ADE-1361-C926-BC58365BF789}"/>
+            </a:ext>
+          </a:extLst>
+        </p:cNvPr>
+        <p:cNvGrpSpPr/>
+        <p:nvPr/>
+      </p:nvGrpSpPr>
+      <p:grpSpPr>
+        <a:xfrm>
+          <a:off x="0" y="0"/>
+          <a:ext cx="0" cy="0"/>
+          <a:chOff x="0" y="0"/>
+          <a:chExt cx="0" cy="0"/>
+        </a:xfrm>
+      </p:grpSpPr>
+      <p:sp>
+        <p:nvSpPr>
+          <p:cNvPr id="2" name="Shape 0">
+            <a:extLst>
+              <a:ext uri="{FF2B5EF4-FFF2-40B4-BE49-F238E27FC236}">
+                <a16:creationId xmlns:a16="http://schemas.microsoft.com/office/drawing/2014/main" id="{6478A43A-06D6-0B79-0B1C-69F930775618}"/>
+              </a:ext>
+            </a:extLst>
+          </p:cNvPr>
+          <p:cNvSpPr/>
+          <p:nvPr/>
+        </p:nvSpPr>
+        <p:spPr>
+          <a:xfrm>
+            <a:off x="0" y="0"/>
+            <a:ext cx="9144000" cy="777240"/>
+          </a:xfrm>
+          <a:prstGeom prst="rect">
+            <a:avLst/>
+          </a:prstGeom>
+          <a:solidFill>
+            <a:srgbClr val="00A896"/>
+          </a:solidFill>
+          <a:ln w="12700">
+            <a:solidFill>
+              <a:srgbClr val="00A896"/>
+            </a:solidFill>
+            <a:prstDash val="solid"/>
+          </a:ln>
+        </p:spPr>
+        <p:txBody>
+          <a:bodyPr/>
+          <a:lstStyle/>
+          <a:p>
+            <a:endParaRPr lang="en-US"/>
+          </a:p>
+        </p:txBody>
+      </p:sp>
+      <p:sp>
+        <p:nvSpPr>
+          <p:cNvPr id="3" name="Text 1">
+            <a:extLst>
+              <a:ext uri="{FF2B5EF4-FFF2-40B4-BE49-F238E27FC236}">
+                <a16:creationId xmlns:a16="http://schemas.microsoft.com/office/drawing/2014/main" id="{320303AF-3C5C-D3B3-2594-B705F57EB492}"/>
+              </a:ext>
+            </a:extLst>
+          </p:cNvPr>
+          <p:cNvSpPr/>
+          <p:nvPr/>
+        </p:nvSpPr>
+        <p:spPr>
+          <a:xfrm>
+            <a:off x="365760" y="0"/>
+            <a:ext cx="8412480" cy="777240"/>
+          </a:xfrm>
+          <a:prstGeom prst="rect">
+            <a:avLst/>
+          </a:prstGeom>
+          <a:noFill/>
+          <a:ln/>
+        </p:spPr>
+        <p:txBody>
+          <a:bodyPr wrap="square" lIns="0" tIns="0" rIns="0" bIns="0" rtlCol="0" anchor="ctr"/>
+          <a:lstStyle/>
+          <a:p>
+            <a:pPr marL="0" indent="0">
+              <a:buNone/>
+            </a:pPr>
+            <a:r>
+              <a:rPr lang="en-US" sz="2400" b="1" dirty="0">
+                <a:solidFill>
+                  <a:srgbClr val="FFFFFF"/>
+                </a:solidFill>
+                <a:latin typeface="Calibri" pitchFamily="34" charset="0"/>
+                <a:ea typeface="Calibri" pitchFamily="34" charset="-122"/>
+                <a:cs typeface="Calibri" pitchFamily="34" charset="-120"/>
+              </a:rPr>
+              <a:t>02  Parallel Compute - Description</a:t>
+            </a:r>
+            <a:endParaRPr lang="en-US" sz="2400" dirty="0"/>
+          </a:p>
+        </p:txBody>
+      </p:sp>
+      <p:sp>
+        <p:nvSpPr>
+          <p:cNvPr id="4" name="Shape 2">
+            <a:extLst>
+              <a:ext uri="{FF2B5EF4-FFF2-40B4-BE49-F238E27FC236}">
+                <a16:creationId xmlns:a16="http://schemas.microsoft.com/office/drawing/2014/main" id="{AA68B348-F7F1-BA22-450B-F651397AFFD9}"/>
+              </a:ext>
+            </a:extLst>
+          </p:cNvPr>
+          <p:cNvSpPr/>
+          <p:nvPr/>
+        </p:nvSpPr>
+        <p:spPr>
+          <a:xfrm>
+            <a:off x="457200" y="1325880"/>
+            <a:ext cx="8015068" cy="3017521"/>
+          </a:xfrm>
+          <a:prstGeom prst="rect">
+            <a:avLst/>
+          </a:prstGeom>
+          <a:solidFill>
+            <a:srgbClr val="1C2E3E"/>
+          </a:solidFill>
+          <a:ln w="12700">
+            <a:solidFill>
+              <a:srgbClr val="3D5166"/>
+            </a:solidFill>
+            <a:prstDash val="solid"/>
+          </a:ln>
+        </p:spPr>
+        <p:txBody>
+          <a:bodyPr/>
+          <a:lstStyle/>
+          <a:p>
+            <a:endParaRPr lang="en-US"/>
+          </a:p>
+        </p:txBody>
+      </p:sp>
+      <p:sp>
+        <p:nvSpPr>
+          <p:cNvPr id="5" name="Text 3">
+            <a:extLst>
+              <a:ext uri="{FF2B5EF4-FFF2-40B4-BE49-F238E27FC236}">
+                <a16:creationId xmlns:a16="http://schemas.microsoft.com/office/drawing/2014/main" id="{B3B31F22-1334-30EB-0ED4-0FC625DB0246}"/>
+              </a:ext>
+            </a:extLst>
+          </p:cNvPr>
+          <p:cNvSpPr/>
+          <p:nvPr/>
+        </p:nvSpPr>
+        <p:spPr>
+          <a:xfrm>
+            <a:off x="594360" y="1456008"/>
+            <a:ext cx="3657600" cy="365760"/>
+          </a:xfrm>
+          <a:prstGeom prst="rect">
+            <a:avLst/>
+          </a:prstGeom>
+          <a:noFill/>
+          <a:ln/>
+        </p:spPr>
+        <p:txBody>
+          <a:bodyPr wrap="square" rtlCol="0" anchor="ctr"/>
+          <a:lstStyle/>
+          <a:p>
+            <a:pPr marL="0" indent="0">
+              <a:buNone/>
+            </a:pPr>
+            <a:r>
+              <a:rPr lang="en-US" sz="2000" b="1" dirty="0">
+                <a:solidFill>
+                  <a:srgbClr val="00C9A7"/>
+                </a:solidFill>
+                <a:latin typeface="Calibri" pitchFamily="34" charset="0"/>
+                <a:ea typeface="Calibri" pitchFamily="34" charset="-122"/>
+                <a:cs typeface="Calibri" pitchFamily="34" charset="-120"/>
+              </a:rPr>
+              <a:t>What it does</a:t>
+            </a:r>
+            <a:endParaRPr lang="en-US" sz="2000" dirty="0"/>
+          </a:p>
+        </p:txBody>
+      </p:sp>
+      <p:sp>
+        <p:nvSpPr>
+          <p:cNvPr id="6" name="Text 4">
+            <a:extLst>
+              <a:ext uri="{FF2B5EF4-FFF2-40B4-BE49-F238E27FC236}">
+                <a16:creationId xmlns:a16="http://schemas.microsoft.com/office/drawing/2014/main" id="{ADA7DDB5-7839-A085-F6AE-B26DCE933E60}"/>
+              </a:ext>
+            </a:extLst>
+          </p:cNvPr>
+          <p:cNvSpPr/>
+          <p:nvPr/>
+        </p:nvSpPr>
+        <p:spPr>
+          <a:xfrm>
+            <a:off x="1041009" y="2440745"/>
+            <a:ext cx="7336302" cy="1515794"/>
+          </a:xfrm>
+          <a:prstGeom prst="rect">
+            <a:avLst/>
+          </a:prstGeom>
+          <a:noFill/>
+          <a:ln/>
+        </p:spPr>
+        <p:txBody>
+          <a:bodyPr wrap="square" rtlCol="0" anchor="ctr"/>
+          <a:lstStyle/>
+          <a:p>
+            <a:r>
+              <a:rPr lang="en-US" dirty="0">
+                <a:solidFill>
+                  <a:schemeClr val="bg1"/>
+                </a:solidFill>
+              </a:rPr>
+              <a:t>Takes:</a:t>
+            </a:r>
+            <a:endParaRPr lang="en-US" sz="1400" dirty="0">
+              <a:solidFill>
+                <a:schemeClr val="bg1"/>
+              </a:solidFill>
+            </a:endParaRPr>
+          </a:p>
+          <a:p>
+            <a:pPr marL="285750" indent="-285750" fontAlgn="base">
+              <a:buFontTx/>
+              <a:buChar char="-"/>
+            </a:pPr>
+            <a:r>
+              <a:rPr lang="en-US" dirty="0">
+                <a:solidFill>
+                  <a:schemeClr val="bg1"/>
+                </a:solidFill>
+              </a:rPr>
+              <a:t>The path of a file containing N numbers separated by new lines (or commas)</a:t>
+            </a:r>
+          </a:p>
+          <a:p>
+            <a:pPr marL="285750" indent="-285750" fontAlgn="base">
+              <a:buFontTx/>
+              <a:buChar char="-"/>
+            </a:pPr>
+            <a:r>
+              <a:rPr lang="en-US" dirty="0">
+                <a:solidFill>
+                  <a:schemeClr val="bg1"/>
+                </a:solidFill>
+              </a:rPr>
+              <a:t>Number of processes </a:t>
+            </a:r>
+            <a:r>
+              <a:rPr lang="en-US" dirty="0" err="1">
+                <a:solidFill>
+                  <a:schemeClr val="bg1"/>
+                </a:solidFill>
+              </a:rPr>
+              <a:t>n_proc</a:t>
+            </a:r>
+            <a:r>
+              <a:rPr lang="en-US" dirty="0">
+                <a:solidFill>
+                  <a:schemeClr val="bg1"/>
+                </a:solidFill>
+              </a:rPr>
+              <a:t>.</a:t>
+            </a:r>
+          </a:p>
+          <a:p>
+            <a:pPr marL="285750" indent="-285750" fontAlgn="base">
+              <a:buFontTx/>
+              <a:buChar char="-"/>
+            </a:pPr>
+            <a:r>
+              <a:rPr lang="en-US" dirty="0">
+                <a:solidFill>
+                  <a:schemeClr val="bg1"/>
+                </a:solidFill>
+              </a:rPr>
+              <a:t>A pointer to a function f that takes 2 numbers and returns a number.</a:t>
+            </a:r>
+          </a:p>
+          <a:p>
+            <a:pPr fontAlgn="base"/>
+            <a:endParaRPr lang="en-US" dirty="0">
+              <a:solidFill>
+                <a:schemeClr val="bg1"/>
+              </a:solidFill>
+            </a:endParaRPr>
+          </a:p>
+          <a:p>
+            <a:r>
+              <a:rPr lang="en-US" dirty="0">
+                <a:solidFill>
+                  <a:schemeClr val="bg1"/>
+                </a:solidFill>
+              </a:rPr>
+              <a:t>then does the same as </a:t>
+            </a:r>
+            <a:r>
+              <a:rPr lang="en-US" dirty="0" err="1">
+                <a:solidFill>
+                  <a:schemeClr val="bg1"/>
+                </a:solidFill>
+              </a:rPr>
+              <a:t>sequential_compute</a:t>
+            </a:r>
+            <a:r>
+              <a:rPr lang="en-US" dirty="0">
+                <a:solidFill>
+                  <a:schemeClr val="bg1"/>
+                </a:solidFill>
+              </a:rPr>
+              <a:t> except that it splits the computation over </a:t>
+            </a:r>
+            <a:r>
+              <a:rPr lang="en-US" dirty="0" err="1">
+                <a:solidFill>
+                  <a:schemeClr val="bg1"/>
+                </a:solidFill>
+              </a:rPr>
+              <a:t>n_proc</a:t>
+            </a:r>
+            <a:r>
+              <a:rPr lang="en-US" dirty="0">
+                <a:solidFill>
+                  <a:schemeClr val="bg1"/>
+                </a:solidFill>
+              </a:rPr>
+              <a:t> processes as evenly as possible.</a:t>
+            </a:r>
+            <a:endParaRPr lang="en-US" sz="1400" dirty="0">
+              <a:solidFill>
+                <a:schemeClr val="bg1"/>
+              </a:solidFill>
+            </a:endParaRPr>
+          </a:p>
+          <a:p>
+            <a:br>
+              <a:rPr lang="en-US" sz="1400" dirty="0">
+                <a:solidFill>
+                  <a:schemeClr val="bg1"/>
+                </a:solidFill>
+              </a:rPr>
+            </a:br>
+            <a:endParaRPr lang="en-US" sz="1400" dirty="0">
+              <a:solidFill>
+                <a:schemeClr val="bg1"/>
+              </a:solidFill>
+            </a:endParaRPr>
+          </a:p>
+        </p:txBody>
+      </p:sp>
+    </p:spTree>
+    <p:extLst>
+      <p:ext uri="{BB962C8B-B14F-4D97-AF65-F5344CB8AC3E}">
+        <p14:creationId xmlns:p14="http://schemas.microsoft.com/office/powerpoint/2010/main" val="1917002051"/>
+      </p:ext>
+    </p:extLst>
+  </p:cSld>
+  <p:clrMapOvr>
+    <a:masterClrMapping/>
+  </p:clrMapOvr>
+</p:sld>
+</file>
+
+<file path=ppt/slides/slide5.xml><?xml version="1.0" encoding="utf-8"?>
+<p:sld xmlns:a="http://schemas.openxmlformats.org/drawingml/2006/main" xmlns:r="http://schemas.openxmlformats.org/officeDocument/2006/relationships" xmlns:p="http://schemas.openxmlformats.org/presentationml/2006/main">
   <p:cSld name="Slide 4">
     <p:bg>
       <p:bgPr>
@@ -9742,7 +12241,7 @@
 </p:sld>
 </file>
 
-<file path=ppt/slides/slide5.xml><?xml version="1.0" encoding="utf-8"?>
+<file path=ppt/slides/slide6.xml><?xml version="1.0" encoding="utf-8"?>
 <p:sld xmlns:a="http://schemas.openxmlformats.org/drawingml/2006/main" xmlns:r="http://schemas.openxmlformats.org/officeDocument/2006/relationships" xmlns:p="http://schemas.openxmlformats.org/presentationml/2006/main">
   <p:cSld name="Slide 5">
     <p:bg>
@@ -10527,7 +13026,7 @@
 </p:sld>
 </file>
 
-<file path=ppt/slides/slide6.xml><?xml version="1.0" encoding="utf-8"?>
+<file path=ppt/slides/slide7.xml><?xml version="1.0" encoding="utf-8"?>
 <p:sld xmlns:a="http://schemas.openxmlformats.org/drawingml/2006/main" xmlns:r="http://schemas.openxmlformats.org/officeDocument/2006/relationships" xmlns:p="http://schemas.openxmlformats.org/presentationml/2006/main">
   <p:cSld>
     <p:bg>
@@ -10684,7 +13183,7 @@
 </p:sld>
 </file>
 
-<file path=ppt/slides/slide7.xml><?xml version="1.0" encoding="utf-8"?>
+<file path=ppt/slides/slide8.xml><?xml version="1.0" encoding="utf-8"?>
 <p:sld xmlns:a="http://schemas.openxmlformats.org/drawingml/2006/main" xmlns:r="http://schemas.openxmlformats.org/officeDocument/2006/relationships" xmlns:p="http://schemas.openxmlformats.org/presentationml/2006/main">
   <p:cSld>
     <p:bg>
@@ -10842,7 +13341,7 @@
 </p:sld>
 </file>
 
-<file path=ppt/slides/slide8.xml><?xml version="1.0" encoding="utf-8"?>
+<file path=ppt/slides/slide9.xml><?xml version="1.0" encoding="utf-8"?>
 <p:sld xmlns:a="http://schemas.openxmlformats.org/drawingml/2006/main" xmlns:r="http://schemas.openxmlformats.org/officeDocument/2006/relationships" xmlns:p="http://schemas.openxmlformats.org/presentationml/2006/main">
   <p:cSld name="Slide 6">
     <p:bg>
@@ -10968,1004 +13467,6 @@
           </a:prstGeom>
         </p:spPr>
       </p:pic>
-    </p:spTree>
-  </p:cSld>
-  <p:clrMapOvr>
-    <a:masterClrMapping/>
-  </p:clrMapOvr>
-</p:sld>
-</file>
-
-<file path=ppt/slides/slide9.xml><?xml version="1.0" encoding="utf-8"?>
-<p:sld xmlns:a="http://schemas.openxmlformats.org/drawingml/2006/main" xmlns:r="http://schemas.openxmlformats.org/officeDocument/2006/relationships" xmlns:p="http://schemas.openxmlformats.org/presentationml/2006/main">
-  <p:cSld name="Slide 7">
-    <p:bg>
-      <p:bgPr>
-        <a:solidFill>
-          <a:srgbClr val="0F1923"/>
-        </a:solidFill>
-        <a:effectLst/>
-      </p:bgPr>
-    </p:bg>
-    <p:spTree>
-      <p:nvGrpSpPr>
-        <p:cNvPr id="1" name=""/>
-        <p:cNvGrpSpPr/>
-        <p:nvPr/>
-      </p:nvGrpSpPr>
-      <p:grpSpPr>
-        <a:xfrm>
-          <a:off x="0" y="0"/>
-          <a:ext cx="0" cy="0"/>
-          <a:chOff x="0" y="0"/>
-          <a:chExt cx="0" cy="0"/>
-        </a:xfrm>
-      </p:grpSpPr>
-      <p:sp>
-        <p:nvSpPr>
-          <p:cNvPr id="2" name="Shape 0"/>
-          <p:cNvSpPr/>
-          <p:nvPr/>
-        </p:nvSpPr>
-        <p:spPr>
-          <a:xfrm>
-            <a:off x="0" y="0"/>
-            <a:ext cx="9144000" cy="777240"/>
-          </a:xfrm>
-          <a:prstGeom prst="rect">
-            <a:avLst/>
-          </a:prstGeom>
-          <a:solidFill>
-            <a:srgbClr val="00A896"/>
-          </a:solidFill>
-          <a:ln w="12700">
-            <a:solidFill>
-              <a:srgbClr val="00A896"/>
-            </a:solidFill>
-            <a:prstDash val="solid"/>
-          </a:ln>
-        </p:spPr>
-        <p:txBody>
-          <a:bodyPr/>
-          <a:lstStyle/>
-          <a:p>
-            <a:endParaRPr lang="en-US"/>
-          </a:p>
-        </p:txBody>
-      </p:sp>
-      <p:sp>
-        <p:nvSpPr>
-          <p:cNvPr id="3" name="Text 1"/>
-          <p:cNvSpPr/>
-          <p:nvPr/>
-        </p:nvSpPr>
-        <p:spPr>
-          <a:xfrm>
-            <a:off x="365760" y="0"/>
-            <a:ext cx="8412480" cy="777240"/>
-          </a:xfrm>
-          <a:prstGeom prst="rect">
-            <a:avLst/>
-          </a:prstGeom>
-          <a:noFill/>
-          <a:ln/>
-        </p:spPr>
-        <p:txBody>
-          <a:bodyPr wrap="square" lIns="0" tIns="0" rIns="0" bIns="0" rtlCol="0" anchor="ctr"/>
-          <a:lstStyle/>
-          <a:p>
-            <a:pPr marL="0" indent="0">
-              <a:buNone/>
-            </a:pPr>
-            <a:r>
-              <a:rPr lang="en-US" sz="2600" b="1" dirty="0">
-                <a:solidFill>
-                  <a:srgbClr val="FFFFFF"/>
-                </a:solidFill>
-                <a:latin typeface="Calibri" pitchFamily="34" charset="0"/>
-                <a:ea typeface="Calibri" pitchFamily="34" charset="-122"/>
-                <a:cs typeface="Calibri" pitchFamily="34" charset="-120"/>
-              </a:rPr>
-              <a:t>Implementation Notes</a:t>
-            </a:r>
-            <a:endParaRPr lang="en-US" sz="2600" dirty="0"/>
-          </a:p>
-        </p:txBody>
-      </p:sp>
-      <p:sp>
-        <p:nvSpPr>
-          <p:cNvPr id="4" name="Shape 2"/>
-          <p:cNvSpPr/>
-          <p:nvPr/>
-        </p:nvSpPr>
-        <p:spPr>
-          <a:xfrm>
-            <a:off x="320040" y="960120"/>
-            <a:ext cx="4114800" cy="1188720"/>
-          </a:xfrm>
-          <a:prstGeom prst="rect">
-            <a:avLst/>
-          </a:prstGeom>
-          <a:solidFill>
-            <a:srgbClr val="1C2E3E"/>
-          </a:solidFill>
-          <a:ln w="12700">
-            <a:solidFill>
-              <a:srgbClr val="3D5166"/>
-            </a:solidFill>
-            <a:prstDash val="solid"/>
-          </a:ln>
-          <a:effectLst>
-            <a:outerShdw blurRad="101600" dist="38100" dir="8100000" algn="bl" rotWithShape="0">
-              <a:srgbClr val="000000">
-                <a:alpha val="30000"/>
-              </a:srgbClr>
-            </a:outerShdw>
-          </a:effectLst>
-        </p:spPr>
-        <p:txBody>
-          <a:bodyPr/>
-          <a:lstStyle/>
-          <a:p>
-            <a:endParaRPr lang="en-US"/>
-          </a:p>
-        </p:txBody>
-      </p:sp>
-      <p:sp>
-        <p:nvSpPr>
-          <p:cNvPr id="5" name="Shape 3"/>
-          <p:cNvSpPr/>
-          <p:nvPr/>
-        </p:nvSpPr>
-        <p:spPr>
-          <a:xfrm>
-            <a:off x="320040" y="960120"/>
-            <a:ext cx="91440" cy="1188720"/>
-          </a:xfrm>
-          <a:prstGeom prst="rect">
-            <a:avLst/>
-          </a:prstGeom>
-          <a:solidFill>
-            <a:srgbClr val="00C9A7"/>
-          </a:solidFill>
-          <a:ln w="12700">
-            <a:solidFill>
-              <a:srgbClr val="00C9A7"/>
-            </a:solidFill>
-            <a:prstDash val="solid"/>
-          </a:ln>
-        </p:spPr>
-        <p:txBody>
-          <a:bodyPr/>
-          <a:lstStyle/>
-          <a:p>
-            <a:endParaRPr lang="en-US"/>
-          </a:p>
-        </p:txBody>
-      </p:sp>
-      <p:sp>
-        <p:nvSpPr>
-          <p:cNvPr id="6" name="Text 4"/>
-          <p:cNvSpPr/>
-          <p:nvPr/>
-        </p:nvSpPr>
-        <p:spPr>
-          <a:xfrm>
-            <a:off x="548640" y="1051560"/>
-            <a:ext cx="3749040" cy="320040"/>
-          </a:xfrm>
-          <a:prstGeom prst="rect">
-            <a:avLst/>
-          </a:prstGeom>
-          <a:noFill/>
-          <a:ln/>
-        </p:spPr>
-        <p:txBody>
-          <a:bodyPr wrap="square" lIns="0" tIns="0" rIns="0" bIns="0" rtlCol="0" anchor="ctr"/>
-          <a:lstStyle/>
-          <a:p>
-            <a:pPr marL="0" indent="0">
-              <a:buNone/>
-            </a:pPr>
-            <a:r>
-              <a:rPr lang="en-US" sz="1300" b="1" dirty="0">
-                <a:solidFill>
-                  <a:srgbClr val="00C9A7"/>
-                </a:solidFill>
-                <a:latin typeface="Calibri" pitchFamily="34" charset="0"/>
-                <a:ea typeface="Calibri" pitchFamily="34" charset="-122"/>
-                <a:cs typeface="Calibri" pitchFamily="34" charset="-120"/>
-              </a:rPr>
-              <a:t>2 pipes / child</a:t>
-            </a:r>
-            <a:endParaRPr lang="en-US" sz="1300" dirty="0"/>
-          </a:p>
-        </p:txBody>
-      </p:sp>
-      <p:sp>
-        <p:nvSpPr>
-          <p:cNvPr id="7" name="Text 5"/>
-          <p:cNvSpPr/>
-          <p:nvPr/>
-        </p:nvSpPr>
-        <p:spPr>
-          <a:xfrm>
-            <a:off x="548640" y="1371600"/>
-            <a:ext cx="3749040" cy="685800"/>
-          </a:xfrm>
-          <a:prstGeom prst="rect">
-            <a:avLst/>
-          </a:prstGeom>
-          <a:noFill/>
-          <a:ln/>
-        </p:spPr>
-        <p:txBody>
-          <a:bodyPr wrap="square" rtlCol="0" anchor="ctr"/>
-          <a:lstStyle/>
-          <a:p>
-            <a:pPr marL="0" indent="0" algn="l">
-              <a:buNone/>
-            </a:pPr>
-            <a:r>
-              <a:rPr lang="en-US" sz="1200" dirty="0">
-                <a:solidFill>
-                  <a:srgbClr val="D6E4F0"/>
-                </a:solidFill>
-                <a:latin typeface="Calibri" pitchFamily="34" charset="0"/>
-                <a:ea typeface="Calibri" pitchFamily="34" charset="-122"/>
-                <a:cs typeface="Calibri" pitchFamily="34" charset="-120"/>
-              </a:rPr>
-              <a:t>ctrl_pipe sends (start, end) from parent to child.  res_pipe returns the partial result from child to parent.</a:t>
-            </a:r>
-            <a:endParaRPr lang="en-US" sz="1200" dirty="0"/>
-          </a:p>
-        </p:txBody>
-      </p:sp>
-      <p:sp>
-        <p:nvSpPr>
-          <p:cNvPr id="8" name="Shape 6"/>
-          <p:cNvSpPr/>
-          <p:nvPr/>
-        </p:nvSpPr>
-        <p:spPr>
-          <a:xfrm>
-            <a:off x="320040" y="2304288"/>
-            <a:ext cx="4114800" cy="1188720"/>
-          </a:xfrm>
-          <a:prstGeom prst="rect">
-            <a:avLst/>
-          </a:prstGeom>
-          <a:solidFill>
-            <a:srgbClr val="1C2E3E"/>
-          </a:solidFill>
-          <a:ln w="12700">
-            <a:solidFill>
-              <a:srgbClr val="3D5166"/>
-            </a:solidFill>
-            <a:prstDash val="solid"/>
-          </a:ln>
-          <a:effectLst>
-            <a:outerShdw blurRad="101600" dist="38100" dir="8100000" algn="bl" rotWithShape="0">
-              <a:srgbClr val="000000">
-                <a:alpha val="30000"/>
-              </a:srgbClr>
-            </a:outerShdw>
-          </a:effectLst>
-        </p:spPr>
-        <p:txBody>
-          <a:bodyPr/>
-          <a:lstStyle/>
-          <a:p>
-            <a:endParaRPr lang="en-US"/>
-          </a:p>
-        </p:txBody>
-      </p:sp>
-      <p:sp>
-        <p:nvSpPr>
-          <p:cNvPr id="9" name="Shape 7"/>
-          <p:cNvSpPr/>
-          <p:nvPr/>
-        </p:nvSpPr>
-        <p:spPr>
-          <a:xfrm>
-            <a:off x="320040" y="2304288"/>
-            <a:ext cx="91440" cy="1188720"/>
-          </a:xfrm>
-          <a:prstGeom prst="rect">
-            <a:avLst/>
-          </a:prstGeom>
-          <a:solidFill>
-            <a:srgbClr val="FFB347"/>
-          </a:solidFill>
-          <a:ln w="12700">
-            <a:solidFill>
-              <a:srgbClr val="FFB347"/>
-            </a:solidFill>
-            <a:prstDash val="solid"/>
-          </a:ln>
-        </p:spPr>
-        <p:txBody>
-          <a:bodyPr/>
-          <a:lstStyle/>
-          <a:p>
-            <a:endParaRPr lang="en-US"/>
-          </a:p>
-        </p:txBody>
-      </p:sp>
-      <p:sp>
-        <p:nvSpPr>
-          <p:cNvPr id="10" name="Text 8"/>
-          <p:cNvSpPr/>
-          <p:nvPr/>
-        </p:nvSpPr>
-        <p:spPr>
-          <a:xfrm>
-            <a:off x="548640" y="2395728"/>
-            <a:ext cx="3749040" cy="320040"/>
-          </a:xfrm>
-          <a:prstGeom prst="rect">
-            <a:avLst/>
-          </a:prstGeom>
-          <a:noFill/>
-          <a:ln/>
-        </p:spPr>
-        <p:txBody>
-          <a:bodyPr wrap="square" lIns="0" tIns="0" rIns="0" bIns="0" rtlCol="0" anchor="ctr"/>
-          <a:lstStyle/>
-          <a:p>
-            <a:pPr marL="0" indent="0">
-              <a:buNone/>
-            </a:pPr>
-            <a:r>
-              <a:rPr lang="en-US" sz="1300" b="1" dirty="0">
-                <a:solidFill>
-                  <a:srgbClr val="FFB347"/>
-                </a:solidFill>
-                <a:latin typeface="Calibri" pitchFamily="34" charset="0"/>
-                <a:ea typeface="Calibri" pitchFamily="34" charset="-122"/>
-                <a:cs typeface="Calibri" pitchFamily="34" charset="-120"/>
-              </a:rPr>
-              <a:t>Remainder rule</a:t>
-            </a:r>
-            <a:endParaRPr lang="en-US" sz="1300" dirty="0"/>
-          </a:p>
-        </p:txBody>
-      </p:sp>
-      <p:sp>
-        <p:nvSpPr>
-          <p:cNvPr id="11" name="Text 9"/>
-          <p:cNvSpPr/>
-          <p:nvPr/>
-        </p:nvSpPr>
-        <p:spPr>
-          <a:xfrm>
-            <a:off x="548640" y="2715768"/>
-            <a:ext cx="3749040" cy="685800"/>
-          </a:xfrm>
-          <a:prstGeom prst="rect">
-            <a:avLst/>
-          </a:prstGeom>
-          <a:noFill/>
-          <a:ln/>
-        </p:spPr>
-        <p:txBody>
-          <a:bodyPr wrap="square" rtlCol="0" anchor="ctr"/>
-          <a:lstStyle/>
-          <a:p>
-            <a:pPr marL="0" indent="0" algn="l">
-              <a:buNone/>
-            </a:pPr>
-            <a:r>
-              <a:rPr lang="en-US" sz="1200" dirty="0">
-                <a:solidFill>
-                  <a:srgbClr val="D6E4F0"/>
-                </a:solidFill>
-                <a:latin typeface="Calibri" pitchFamily="34" charset="0"/>
-                <a:ea typeface="Calibri" pitchFamily="34" charset="-122"/>
-                <a:cs typeface="Calibri" pitchFamily="34" charset="-120"/>
-              </a:rPr>
-              <a:t>If N % n_proc ≠ 0, the extra numbers all go to the last child.  Example: 7 numbers, 3 processes → child 2 gets [5,6,7].</a:t>
-            </a:r>
-            <a:endParaRPr lang="en-US" sz="1200" dirty="0"/>
-          </a:p>
-        </p:txBody>
-      </p:sp>
-      <p:sp>
-        <p:nvSpPr>
-          <p:cNvPr id="12" name="Shape 10"/>
-          <p:cNvSpPr/>
-          <p:nvPr/>
-        </p:nvSpPr>
-        <p:spPr>
-          <a:xfrm>
-            <a:off x="320040" y="3648456"/>
-            <a:ext cx="4114800" cy="1188720"/>
-          </a:xfrm>
-          <a:prstGeom prst="rect">
-            <a:avLst/>
-          </a:prstGeom>
-          <a:solidFill>
-            <a:srgbClr val="1C2E3E"/>
-          </a:solidFill>
-          <a:ln w="12700">
-            <a:solidFill>
-              <a:srgbClr val="3D5166"/>
-            </a:solidFill>
-            <a:prstDash val="solid"/>
-          </a:ln>
-          <a:effectLst>
-            <a:outerShdw blurRad="101600" dist="38100" dir="8100000" algn="bl" rotWithShape="0">
-              <a:srgbClr val="000000">
-                <a:alpha val="30000"/>
-              </a:srgbClr>
-            </a:outerShdw>
-          </a:effectLst>
-        </p:spPr>
-        <p:txBody>
-          <a:bodyPr/>
-          <a:lstStyle/>
-          <a:p>
-            <a:endParaRPr lang="en-US"/>
-          </a:p>
-        </p:txBody>
-      </p:sp>
-      <p:sp>
-        <p:nvSpPr>
-          <p:cNvPr id="13" name="Shape 11"/>
-          <p:cNvSpPr/>
-          <p:nvPr/>
-        </p:nvSpPr>
-        <p:spPr>
-          <a:xfrm>
-            <a:off x="320040" y="3648456"/>
-            <a:ext cx="91440" cy="1188720"/>
-          </a:xfrm>
-          <a:prstGeom prst="rect">
-            <a:avLst/>
-          </a:prstGeom>
-          <a:solidFill>
-            <a:srgbClr val="FF6B6B"/>
-          </a:solidFill>
-          <a:ln w="12700">
-            <a:solidFill>
-              <a:srgbClr val="FF6B6B"/>
-            </a:solidFill>
-            <a:prstDash val="solid"/>
-          </a:ln>
-        </p:spPr>
-        <p:txBody>
-          <a:bodyPr/>
-          <a:lstStyle/>
-          <a:p>
-            <a:endParaRPr lang="en-US"/>
-          </a:p>
-        </p:txBody>
-      </p:sp>
-      <p:sp>
-        <p:nvSpPr>
-          <p:cNvPr id="14" name="Text 12"/>
-          <p:cNvSpPr/>
-          <p:nvPr/>
-        </p:nvSpPr>
-        <p:spPr>
-          <a:xfrm>
-            <a:off x="548640" y="3739896"/>
-            <a:ext cx="3749040" cy="320040"/>
-          </a:xfrm>
-          <a:prstGeom prst="rect">
-            <a:avLst/>
-          </a:prstGeom>
-          <a:noFill/>
-          <a:ln/>
-        </p:spPr>
-        <p:txBody>
-          <a:bodyPr wrap="square" lIns="0" tIns="0" rIns="0" bIns="0" rtlCol="0" anchor="ctr"/>
-          <a:lstStyle/>
-          <a:p>
-            <a:pPr marL="0" indent="0">
-              <a:buNone/>
-            </a:pPr>
-            <a:r>
-              <a:rPr lang="en-US" sz="1300" b="1" dirty="0">
-                <a:solidFill>
-                  <a:srgbClr val="FF6B6B"/>
-                </a:solidFill>
-                <a:latin typeface="Calibri" pitchFamily="34" charset="0"/>
-                <a:ea typeface="Calibri" pitchFamily="34" charset="-122"/>
-                <a:cs typeface="Calibri" pitchFamily="34" charset="-120"/>
-              </a:rPr>
-              <a:t>Close unused ends</a:t>
-            </a:r>
-            <a:endParaRPr lang="en-US" sz="1300" dirty="0"/>
-          </a:p>
-        </p:txBody>
-      </p:sp>
-      <p:sp>
-        <p:nvSpPr>
-          <p:cNvPr id="15" name="Text 13"/>
-          <p:cNvSpPr/>
-          <p:nvPr/>
-        </p:nvSpPr>
-        <p:spPr>
-          <a:xfrm>
-            <a:off x="548640" y="4059936"/>
-            <a:ext cx="3749040" cy="685800"/>
-          </a:xfrm>
-          <a:prstGeom prst="rect">
-            <a:avLst/>
-          </a:prstGeom>
-          <a:noFill/>
-          <a:ln/>
-        </p:spPr>
-        <p:txBody>
-          <a:bodyPr wrap="square" rtlCol="0" anchor="ctr"/>
-          <a:lstStyle/>
-          <a:p>
-            <a:pPr marL="0" indent="0" algn="l">
-              <a:buNone/>
-            </a:pPr>
-            <a:r>
-              <a:rPr lang="en-US" sz="1200" dirty="0">
-                <a:solidFill>
-                  <a:srgbClr val="D6E4F0"/>
-                </a:solidFill>
-                <a:latin typeface="Calibri" pitchFamily="34" charset="0"/>
-                <a:ea typeface="Calibri" pitchFamily="34" charset="-122"/>
-                <a:cs typeface="Calibri" pitchFamily="34" charset="-120"/>
-              </a:rPr>
-              <a:t>Each process must close the pipe ends it does not use. </a:t>
-            </a:r>
-            <a:endParaRPr lang="en-US" sz="1200" dirty="0"/>
-          </a:p>
-        </p:txBody>
-      </p:sp>
-      <p:sp>
-        <p:nvSpPr>
-          <p:cNvPr id="16" name="Shape 14"/>
-          <p:cNvSpPr/>
-          <p:nvPr/>
-        </p:nvSpPr>
-        <p:spPr>
-          <a:xfrm>
-            <a:off x="4754880" y="960120"/>
-            <a:ext cx="4114800" cy="1188720"/>
-          </a:xfrm>
-          <a:prstGeom prst="rect">
-            <a:avLst/>
-          </a:prstGeom>
-          <a:solidFill>
-            <a:srgbClr val="1C2E3E"/>
-          </a:solidFill>
-          <a:ln w="12700">
-            <a:solidFill>
-              <a:srgbClr val="3D5166"/>
-            </a:solidFill>
-            <a:prstDash val="solid"/>
-          </a:ln>
-          <a:effectLst>
-            <a:outerShdw blurRad="101600" dist="38100" dir="8100000" algn="bl" rotWithShape="0">
-              <a:srgbClr val="000000">
-                <a:alpha val="30000"/>
-              </a:srgbClr>
-            </a:outerShdw>
-          </a:effectLst>
-        </p:spPr>
-        <p:txBody>
-          <a:bodyPr/>
-          <a:lstStyle/>
-          <a:p>
-            <a:endParaRPr lang="en-US"/>
-          </a:p>
-        </p:txBody>
-      </p:sp>
-      <p:sp>
-        <p:nvSpPr>
-          <p:cNvPr id="17" name="Shape 15"/>
-          <p:cNvSpPr/>
-          <p:nvPr/>
-        </p:nvSpPr>
-        <p:spPr>
-          <a:xfrm>
-            <a:off x="4754880" y="960120"/>
-            <a:ext cx="91440" cy="1188720"/>
-          </a:xfrm>
-          <a:prstGeom prst="rect">
-            <a:avLst/>
-          </a:prstGeom>
-          <a:solidFill>
-            <a:srgbClr val="4CAF86"/>
-          </a:solidFill>
-          <a:ln w="12700">
-            <a:solidFill>
-              <a:srgbClr val="4CAF86"/>
-            </a:solidFill>
-            <a:prstDash val="solid"/>
-          </a:ln>
-        </p:spPr>
-        <p:txBody>
-          <a:bodyPr/>
-          <a:lstStyle/>
-          <a:p>
-            <a:endParaRPr lang="en-US"/>
-          </a:p>
-        </p:txBody>
-      </p:sp>
-      <p:sp>
-        <p:nvSpPr>
-          <p:cNvPr id="18" name="Text 16"/>
-          <p:cNvSpPr/>
-          <p:nvPr/>
-        </p:nvSpPr>
-        <p:spPr>
-          <a:xfrm>
-            <a:off x="4983480" y="1051560"/>
-            <a:ext cx="3749040" cy="320040"/>
-          </a:xfrm>
-          <a:prstGeom prst="rect">
-            <a:avLst/>
-          </a:prstGeom>
-          <a:noFill/>
-          <a:ln/>
-        </p:spPr>
-        <p:txBody>
-          <a:bodyPr wrap="square" lIns="0" tIns="0" rIns="0" bIns="0" rtlCol="0" anchor="ctr"/>
-          <a:lstStyle/>
-          <a:p>
-            <a:pPr marL="0" indent="0">
-              <a:buNone/>
-            </a:pPr>
-            <a:r>
-              <a:rPr lang="en-US" sz="1300" b="1" dirty="0">
-                <a:solidFill>
-                  <a:srgbClr val="4CAF86"/>
-                </a:solidFill>
-                <a:latin typeface="Calibri" pitchFamily="34" charset="0"/>
-                <a:ea typeface="Calibri" pitchFamily="34" charset="-122"/>
-                <a:cs typeface="Calibri" pitchFamily="34" charset="-120"/>
-              </a:rPr>
-              <a:t>wait() first</a:t>
-            </a:r>
-            <a:endParaRPr lang="en-US" sz="1300" dirty="0"/>
-          </a:p>
-        </p:txBody>
-      </p:sp>
-      <p:sp>
-        <p:nvSpPr>
-          <p:cNvPr id="19" name="Text 17"/>
-          <p:cNvSpPr/>
-          <p:nvPr/>
-        </p:nvSpPr>
-        <p:spPr>
-          <a:xfrm>
-            <a:off x="4983480" y="1371600"/>
-            <a:ext cx="3749040" cy="685800"/>
-          </a:xfrm>
-          <a:prstGeom prst="rect">
-            <a:avLst/>
-          </a:prstGeom>
-          <a:noFill/>
-          <a:ln/>
-        </p:spPr>
-        <p:txBody>
-          <a:bodyPr wrap="square" rtlCol="0" anchor="ctr"/>
-          <a:lstStyle/>
-          <a:p>
-            <a:pPr marL="0" indent="0" algn="l">
-              <a:buNone/>
-            </a:pPr>
-            <a:r>
-              <a:rPr lang="en-US" sz="1200" dirty="0">
-                <a:solidFill>
-                  <a:srgbClr val="D6E4F0"/>
-                </a:solidFill>
-                <a:latin typeface="Calibri" pitchFamily="34" charset="0"/>
-                <a:ea typeface="Calibri" pitchFamily="34" charset="-122"/>
-                <a:cs typeface="Calibri" pitchFamily="34" charset="-120"/>
-              </a:rPr>
-              <a:t>Parent calls wait() for ALL children before reading any result pipe, ensuring partial results are fully written.</a:t>
-            </a:r>
-            <a:endParaRPr lang="en-US" sz="1200" dirty="0"/>
-          </a:p>
-        </p:txBody>
-      </p:sp>
-      <p:sp>
-        <p:nvSpPr>
-          <p:cNvPr id="20" name="Shape 18"/>
-          <p:cNvSpPr/>
-          <p:nvPr/>
-        </p:nvSpPr>
-        <p:spPr>
-          <a:xfrm>
-            <a:off x="4754880" y="2304288"/>
-            <a:ext cx="4114800" cy="1188720"/>
-          </a:xfrm>
-          <a:prstGeom prst="rect">
-            <a:avLst/>
-          </a:prstGeom>
-          <a:solidFill>
-            <a:srgbClr val="1C2E3E"/>
-          </a:solidFill>
-          <a:ln w="12700">
-            <a:solidFill>
-              <a:srgbClr val="3D5166"/>
-            </a:solidFill>
-            <a:prstDash val="solid"/>
-          </a:ln>
-          <a:effectLst>
-            <a:outerShdw blurRad="101600" dist="38100" dir="8100000" algn="bl" rotWithShape="0">
-              <a:srgbClr val="000000">
-                <a:alpha val="30000"/>
-              </a:srgbClr>
-            </a:outerShdw>
-          </a:effectLst>
-        </p:spPr>
-        <p:txBody>
-          <a:bodyPr/>
-          <a:lstStyle/>
-          <a:p>
-            <a:endParaRPr lang="en-US"/>
-          </a:p>
-        </p:txBody>
-      </p:sp>
-      <p:sp>
-        <p:nvSpPr>
-          <p:cNvPr id="21" name="Shape 19"/>
-          <p:cNvSpPr/>
-          <p:nvPr/>
-        </p:nvSpPr>
-        <p:spPr>
-          <a:xfrm>
-            <a:off x="4754880" y="2304288"/>
-            <a:ext cx="91440" cy="1188720"/>
-          </a:xfrm>
-          <a:prstGeom prst="rect">
-            <a:avLst/>
-          </a:prstGeom>
-          <a:solidFill>
-            <a:srgbClr val="D6E4F0"/>
-          </a:solidFill>
-          <a:ln w="12700">
-            <a:solidFill>
-              <a:srgbClr val="D6E4F0"/>
-            </a:solidFill>
-            <a:prstDash val="solid"/>
-          </a:ln>
-        </p:spPr>
-        <p:txBody>
-          <a:bodyPr/>
-          <a:lstStyle/>
-          <a:p>
-            <a:endParaRPr lang="en-US"/>
-          </a:p>
-        </p:txBody>
-      </p:sp>
-      <p:sp>
-        <p:nvSpPr>
-          <p:cNvPr id="22" name="Text 20"/>
-          <p:cNvSpPr/>
-          <p:nvPr/>
-        </p:nvSpPr>
-        <p:spPr>
-          <a:xfrm>
-            <a:off x="4983480" y="2395728"/>
-            <a:ext cx="3749040" cy="320040"/>
-          </a:xfrm>
-          <a:prstGeom prst="rect">
-            <a:avLst/>
-          </a:prstGeom>
-          <a:noFill/>
-          <a:ln/>
-        </p:spPr>
-        <p:txBody>
-          <a:bodyPr wrap="square" lIns="0" tIns="0" rIns="0" bIns="0" rtlCol="0" anchor="ctr"/>
-          <a:lstStyle/>
-          <a:p>
-            <a:pPr marL="0" indent="0">
-              <a:buNone/>
-            </a:pPr>
-            <a:r>
-              <a:rPr lang="en-US" sz="1300" b="1" dirty="0">
-                <a:solidFill>
-                  <a:srgbClr val="D6E4F0"/>
-                </a:solidFill>
-                <a:latin typeface="Calibri" pitchFamily="34" charset="0"/>
-                <a:ea typeface="Calibri" pitchFamily="34" charset="-122"/>
-                <a:cs typeface="Calibri" pitchFamily="34" charset="-120"/>
-              </a:rPr>
-              <a:t>f is generic</a:t>
-            </a:r>
-            <a:endParaRPr lang="en-US" sz="1300" dirty="0"/>
-          </a:p>
-        </p:txBody>
-      </p:sp>
-      <p:sp>
-        <p:nvSpPr>
-          <p:cNvPr id="23" name="Text 21"/>
-          <p:cNvSpPr/>
-          <p:nvPr/>
-        </p:nvSpPr>
-        <p:spPr>
-          <a:xfrm>
-            <a:off x="4983480" y="2715768"/>
-            <a:ext cx="3749040" cy="685800"/>
-          </a:xfrm>
-          <a:prstGeom prst="rect">
-            <a:avLst/>
-          </a:prstGeom>
-          <a:noFill/>
-          <a:ln/>
-        </p:spPr>
-        <p:txBody>
-          <a:bodyPr wrap="square" rtlCol="0" anchor="ctr"/>
-          <a:lstStyle/>
-          <a:p>
-            <a:pPr marL="0" indent="0" algn="l">
-              <a:buNone/>
-            </a:pPr>
-            <a:r>
-              <a:rPr lang="en-US" sz="1200" dirty="0">
-                <a:solidFill>
-                  <a:srgbClr val="D6E4F0"/>
-                </a:solidFill>
-                <a:latin typeface="Calibri" pitchFamily="34" charset="0"/>
-                <a:ea typeface="Calibri" pitchFamily="34" charset="-122"/>
-                <a:cs typeface="Calibri" pitchFamily="34" charset="-120"/>
-              </a:rPr>
-              <a:t>Parent aggregates partial results using f, not +.  Works correctly for add, multiply, max, or any custom function.</a:t>
-            </a:r>
-            <a:endParaRPr lang="en-US" sz="1200" dirty="0"/>
-          </a:p>
-        </p:txBody>
-      </p:sp>
-      <p:sp>
-        <p:nvSpPr>
-          <p:cNvPr id="24" name="Shape 22"/>
-          <p:cNvSpPr/>
-          <p:nvPr/>
-        </p:nvSpPr>
-        <p:spPr>
-          <a:xfrm>
-            <a:off x="4754880" y="3648456"/>
-            <a:ext cx="4114800" cy="1188720"/>
-          </a:xfrm>
-          <a:prstGeom prst="rect">
-            <a:avLst/>
-          </a:prstGeom>
-          <a:solidFill>
-            <a:srgbClr val="1C2E3E"/>
-          </a:solidFill>
-          <a:ln w="12700">
-            <a:solidFill>
-              <a:srgbClr val="3D5166"/>
-            </a:solidFill>
-            <a:prstDash val="solid"/>
-          </a:ln>
-          <a:effectLst>
-            <a:outerShdw blurRad="101600" dist="38100" dir="8100000" algn="bl" rotWithShape="0">
-              <a:srgbClr val="000000">
-                <a:alpha val="30000"/>
-              </a:srgbClr>
-            </a:outerShdw>
-          </a:effectLst>
-        </p:spPr>
-        <p:txBody>
-          <a:bodyPr/>
-          <a:lstStyle/>
-          <a:p>
-            <a:endParaRPr lang="en-US"/>
-          </a:p>
-        </p:txBody>
-      </p:sp>
-      <p:sp>
-        <p:nvSpPr>
-          <p:cNvPr id="25" name="Shape 23"/>
-          <p:cNvSpPr/>
-          <p:nvPr/>
-        </p:nvSpPr>
-        <p:spPr>
-          <a:xfrm>
-            <a:off x="4754880" y="3648456"/>
-            <a:ext cx="91440" cy="1188720"/>
-          </a:xfrm>
-          <a:prstGeom prst="rect">
-            <a:avLst/>
-          </a:prstGeom>
-          <a:solidFill>
-            <a:srgbClr val="8BA3B8"/>
-          </a:solidFill>
-          <a:ln w="12700">
-            <a:solidFill>
-              <a:srgbClr val="8BA3B8"/>
-            </a:solidFill>
-            <a:prstDash val="solid"/>
-          </a:ln>
-        </p:spPr>
-        <p:txBody>
-          <a:bodyPr/>
-          <a:lstStyle/>
-          <a:p>
-            <a:endParaRPr lang="en-US"/>
-          </a:p>
-        </p:txBody>
-      </p:sp>
-      <p:sp>
-        <p:nvSpPr>
-          <p:cNvPr id="26" name="Text 24"/>
-          <p:cNvSpPr/>
-          <p:nvPr/>
-        </p:nvSpPr>
-        <p:spPr>
-          <a:xfrm>
-            <a:off x="4983480" y="3739896"/>
-            <a:ext cx="3749040" cy="320040"/>
-          </a:xfrm>
-          <a:prstGeom prst="rect">
-            <a:avLst/>
-          </a:prstGeom>
-          <a:noFill/>
-          <a:ln/>
-        </p:spPr>
-        <p:txBody>
-          <a:bodyPr wrap="square" lIns="0" tIns="0" rIns="0" bIns="0" rtlCol="0" anchor="ctr"/>
-          <a:lstStyle/>
-          <a:p>
-            <a:pPr marL="0" indent="0">
-              <a:buNone/>
-            </a:pPr>
-            <a:r>
-              <a:rPr lang="en-US" sz="1300" b="1" dirty="0">
-                <a:solidFill>
-                  <a:srgbClr val="8BA3B8"/>
-                </a:solidFill>
-                <a:latin typeface="Calibri" pitchFamily="34" charset="0"/>
-                <a:ea typeface="Calibri" pitchFamily="34" charset="-122"/>
-                <a:cs typeface="Calibri" pitchFamily="34" charset="-120"/>
-              </a:rPr>
-              <a:t>File format</a:t>
-            </a:r>
-            <a:endParaRPr lang="en-US" sz="1300" dirty="0"/>
-          </a:p>
-        </p:txBody>
-      </p:sp>
-      <p:sp>
-        <p:nvSpPr>
-          <p:cNvPr id="27" name="Text 25"/>
-          <p:cNvSpPr/>
-          <p:nvPr/>
-        </p:nvSpPr>
-        <p:spPr>
-          <a:xfrm>
-            <a:off x="4983480" y="4059936"/>
-            <a:ext cx="3749040" cy="685800"/>
-          </a:xfrm>
-          <a:prstGeom prst="rect">
-            <a:avLst/>
-          </a:prstGeom>
-          <a:noFill/>
-          <a:ln/>
-        </p:spPr>
-        <p:txBody>
-          <a:bodyPr wrap="square" rtlCol="0" anchor="ctr"/>
-          <a:lstStyle/>
-          <a:p>
-            <a:pPr marL="0" indent="0" algn="l">
-              <a:buNone/>
-            </a:pPr>
-            <a:r>
-              <a:rPr lang="en-US" sz="1200" dirty="0">
-                <a:solidFill>
-                  <a:srgbClr val="D6E4F0"/>
-                </a:solidFill>
-                <a:latin typeface="Calibri" pitchFamily="34" charset="0"/>
-                <a:ea typeface="Calibri" pitchFamily="34" charset="-122"/>
-                <a:cs typeface="Calibri" pitchFamily="34" charset="-120"/>
-              </a:rPr>
-              <a:t>Parser handles both newline-separated and comma-separated numbers using strtok with delimiters ",\n\r ".</a:t>
-            </a:r>
-            <a:endParaRPr lang="en-US" sz="1200" dirty="0"/>
-          </a:p>
-        </p:txBody>
-      </p:sp>
     </p:spTree>
   </p:cSld>
   <p:clrMapOvr>

--- a/OS_Lab_Project_Slides.pptx
+++ b/OS_Lab_Project_Slides.pptx
@@ -5,7 +5,7 @@
     <p:sldMasterId id="2147483648" r:id="rId1"/>
   </p:sldMasterIdLst>
   <p:notesMasterIdLst>
-    <p:notesMasterId r:id="rId21"/>
+    <p:notesMasterId r:id="rId25"/>
   </p:notesMasterIdLst>
   <p:sldIdLst>
     <p:sldId id="256" r:id="rId2"/>
@@ -26,7 +26,11 @@
     <p:sldId id="267" r:id="rId17"/>
     <p:sldId id="268" r:id="rId18"/>
     <p:sldId id="269" r:id="rId19"/>
-    <p:sldId id="272" r:id="rId20"/>
+    <p:sldId id="279" r:id="rId20"/>
+    <p:sldId id="277" r:id="rId21"/>
+    <p:sldId id="278" r:id="rId22"/>
+    <p:sldId id="280" r:id="rId23"/>
+    <p:sldId id="272" r:id="rId24"/>
   </p:sldIdLst>
   <p:sldSz cx="9144000" cy="5143500" type="screen16x9"/>
   <p:notesSz cx="5143500" cy="9144000"/>
@@ -693,7 +697,7 @@
                   <c:v>4.8396000000000002E-2</c:v>
                 </c:pt>
                 <c:pt idx="50">
-                  <c:v>6.0504000000000002E-2</c:v>
+                  <c:v>5.0504E-2</c:v>
                 </c:pt>
                 <c:pt idx="51">
                   <c:v>5.6531999999999999E-2</c:v>
@@ -780,7 +784,7 @@
                   <c:v>7.9283999999999993E-2</c:v>
                 </c:pt>
                 <c:pt idx="79">
-                  <c:v>7.7947000000000002E-2</c:v>
+                  <c:v>8.0947000000000005E-2</c:v>
                 </c:pt>
                 <c:pt idx="80">
                   <c:v>8.2548999999999997E-2</c:v>
@@ -792,22 +796,22 @@
                   <c:v>0.09</c:v>
                 </c:pt>
                 <c:pt idx="83">
-                  <c:v>8.3126000000000005E-2</c:v>
+                  <c:v>8.5125999999999993E-2</c:v>
                 </c:pt>
                 <c:pt idx="84">
                   <c:v>8.7447999999999998E-2</c:v>
                 </c:pt>
                 <c:pt idx="85">
-                  <c:v>8.2996E-2</c:v>
+                  <c:v>9.2995999999999995E-2</c:v>
                 </c:pt>
                 <c:pt idx="86">
-                  <c:v>8.5616999999999999E-2</c:v>
+                  <c:v>9.5616999999999994E-2</c:v>
                 </c:pt>
                 <c:pt idx="87">
-                  <c:v>0.100872</c:v>
+                  <c:v>9.0871999999999994E-2</c:v>
                 </c:pt>
                 <c:pt idx="88">
-                  <c:v>8.7937000000000001E-2</c:v>
+                  <c:v>9.1937000000000005E-2</c:v>
                 </c:pt>
                 <c:pt idx="89">
                   <c:v>9.4080999999999998E-2</c:v>
@@ -828,16 +832,16 @@
                   <c:v>0.101484</c:v>
                 </c:pt>
                 <c:pt idx="95">
-                  <c:v>9.4228000000000006E-2</c:v>
+                  <c:v>0.104228</c:v>
                 </c:pt>
                 <c:pt idx="96">
-                  <c:v>9.4684000000000004E-2</c:v>
+                  <c:v>9.9683999999999995E-2</c:v>
                 </c:pt>
                 <c:pt idx="97">
                   <c:v>0.10220600000000001</c:v>
                 </c:pt>
                 <c:pt idx="98">
-                  <c:v>9.7470000000000001E-2</c:v>
+                  <c:v>0.10247000000000001</c:v>
                 </c:pt>
                 <c:pt idx="99">
                   <c:v>0.11444600000000001</c:v>
@@ -848,7 +852,7 @@
           <c:smooth val="0"/>
           <c:extLst>
             <c:ext xmlns:c16="http://schemas.microsoft.com/office/drawing/2014/chart" uri="{C3380CC4-5D6E-409C-BE32-E72D297353CC}">
-              <c16:uniqueId val="{00000000-8C07-42DD-ABE1-7D04D39D3F8B}"/>
+              <c16:uniqueId val="{00000000-B68B-4978-8B15-DE8512BE4F12}"/>
             </c:ext>
           </c:extLst>
         </c:ser>
@@ -1445,7 +1449,7 @@
                   <c:v>8.0397999999999997E-2</c:v>
                 </c:pt>
                 <c:pt idx="83">
-                  <c:v>8.5082000000000005E-2</c:v>
+                  <c:v>8.3082000000000003E-2</c:v>
                 </c:pt>
                 <c:pt idx="84">
                   <c:v>8.4374000000000005E-2</c:v>
@@ -1454,13 +1458,13 @@
                   <c:v>8.2192000000000001E-2</c:v>
                 </c:pt>
                 <c:pt idx="86">
-                  <c:v>8.5831000000000005E-2</c:v>
+                  <c:v>8.4831000000000004E-2</c:v>
                 </c:pt>
                 <c:pt idx="87">
                   <c:v>8.5775000000000004E-2</c:v>
                 </c:pt>
                 <c:pt idx="88">
-                  <c:v>9.2269000000000004E-2</c:v>
+                  <c:v>8.6268999999999998E-2</c:v>
                 </c:pt>
                 <c:pt idx="89">
                   <c:v>8.7543999999999997E-2</c:v>
@@ -1501,7 +1505,7 @@
           <c:smooth val="0"/>
           <c:extLst>
             <c:ext xmlns:c16="http://schemas.microsoft.com/office/drawing/2014/chart" uri="{C3380CC4-5D6E-409C-BE32-E72D297353CC}">
-              <c16:uniqueId val="{00000001-8C07-42DD-ABE1-7D04D39D3F8B}"/>
+              <c16:uniqueId val="{00000001-B68B-4978-8B15-DE8512BE4F12}"/>
             </c:ext>
           </c:extLst>
         </c:ser>
@@ -4705,7 +4709,7 @@
         <p:cNvPr id="1" name="">
           <a:extLst>
             <a:ext uri="{FF2B5EF4-FFF2-40B4-BE49-F238E27FC236}">
-              <a16:creationId xmlns:a16="http://schemas.microsoft.com/office/drawing/2014/main" id="{04E1FA76-752F-4A41-66FD-D25656CA11A0}"/>
+              <a16:creationId xmlns:a16="http://schemas.microsoft.com/office/drawing/2014/main" id="{8C66D5DC-4401-1DEB-DC05-B6976DB84243}"/>
             </a:ext>
           </a:extLst>
         </p:cNvPr>
@@ -4725,7 +4729,7 @@
           <p:cNvPr id="2" name="Slide Image Placeholder 1">
             <a:extLst>
               <a:ext uri="{FF2B5EF4-FFF2-40B4-BE49-F238E27FC236}">
-                <a16:creationId xmlns:a16="http://schemas.microsoft.com/office/drawing/2014/main" id="{907AC53A-15B1-0A99-20CC-4B955B778351}"/>
+                <a16:creationId xmlns:a16="http://schemas.microsoft.com/office/drawing/2014/main" id="{902DE67F-D9F6-2379-A6F1-D4A2DFF828CA}"/>
               </a:ext>
             </a:extLst>
           </p:cNvPr>
@@ -4743,7 +4747,7 @@
           <p:cNvPr id="3" name="Notes Placeholder 2">
             <a:extLst>
               <a:ext uri="{FF2B5EF4-FFF2-40B4-BE49-F238E27FC236}">
-                <a16:creationId xmlns:a16="http://schemas.microsoft.com/office/drawing/2014/main" id="{30AD4A34-A08A-579A-AF30-D6E449BCD4BA}"/>
+                <a16:creationId xmlns:a16="http://schemas.microsoft.com/office/drawing/2014/main" id="{93DBA32B-141F-BF77-2B9B-CF21AA5F7FE4}"/>
               </a:ext>
             </a:extLst>
           </p:cNvPr>
@@ -4768,7 +4772,7 @@
           <p:cNvPr id="4" name="Slide Number Placeholder 3">
             <a:extLst>
               <a:ext uri="{FF2B5EF4-FFF2-40B4-BE49-F238E27FC236}">
-                <a16:creationId xmlns:a16="http://schemas.microsoft.com/office/drawing/2014/main" id="{357097B2-9D10-57E4-A7F1-86C60A0C3262}"/>
+                <a16:creationId xmlns:a16="http://schemas.microsoft.com/office/drawing/2014/main" id="{C5D63450-BFF4-1653-E89B-67A5FD64B4C2}"/>
               </a:ext>
             </a:extLst>
           </p:cNvPr>
@@ -4855,7 +4859,7 @@
     </p:spTree>
     <p:extLst>
       <p:ext uri="{BB962C8B-B14F-4D97-AF65-F5344CB8AC3E}">
-        <p14:creationId xmlns:p14="http://schemas.microsoft.com/office/powerpoint/2010/main" val="143042342"/>
+        <p14:creationId xmlns:p14="http://schemas.microsoft.com/office/powerpoint/2010/main" val="2773825047"/>
       </p:ext>
     </p:extLst>
   </p:cSld>
@@ -4940,6 +4944,498 @@
     <p:extLst>
       <p:ext uri="{BB962C8B-B14F-4D97-AF65-F5344CB8AC3E}">
         <p14:creationId xmlns:p14="http://schemas.microsoft.com/office/powerpoint/2010/main" val="1024086991"/>
+      </p:ext>
+    </p:extLst>
+  </p:cSld>
+  <p:clrMapOvr>
+    <a:masterClrMapping/>
+  </p:clrMapOvr>
+</p:notes>
+</file>
+
+<file path=ppt/notesSlides/notesSlide20.xml><?xml version="1.0" encoding="utf-8"?>
+<p:notes xmlns:a="http://schemas.openxmlformats.org/drawingml/2006/main" xmlns:r="http://schemas.openxmlformats.org/officeDocument/2006/relationships" xmlns:p="http://schemas.openxmlformats.org/presentationml/2006/main">
+  <p:cSld>
+    <p:spTree>
+      <p:nvGrpSpPr>
+        <p:cNvPr id="1" name="">
+          <a:extLst>
+            <a:ext uri="{FF2B5EF4-FFF2-40B4-BE49-F238E27FC236}">
+              <a16:creationId xmlns:a16="http://schemas.microsoft.com/office/drawing/2014/main" id="{C90ACD1A-63B5-44DE-4453-28073EBA4978}"/>
+            </a:ext>
+          </a:extLst>
+        </p:cNvPr>
+        <p:cNvGrpSpPr/>
+        <p:nvPr/>
+      </p:nvGrpSpPr>
+      <p:grpSpPr>
+        <a:xfrm>
+          <a:off x="0" y="0"/>
+          <a:ext cx="0" cy="0"/>
+          <a:chOff x="0" y="0"/>
+          <a:chExt cx="0" cy="0"/>
+        </a:xfrm>
+      </p:grpSpPr>
+      <p:sp>
+        <p:nvSpPr>
+          <p:cNvPr id="2" name="Slide Image Placeholder 1">
+            <a:extLst>
+              <a:ext uri="{FF2B5EF4-FFF2-40B4-BE49-F238E27FC236}">
+                <a16:creationId xmlns:a16="http://schemas.microsoft.com/office/drawing/2014/main" id="{97FF8BFC-4646-E0C6-FAF2-A7C246D0D95F}"/>
+              </a:ext>
+            </a:extLst>
+          </p:cNvPr>
+          <p:cNvSpPr>
+            <a:spLocks noGrp="1" noRot="1" noChangeAspect="1"/>
+          </p:cNvSpPr>
+          <p:nvPr>
+            <p:ph type="sldImg"/>
+          </p:nvPr>
+        </p:nvSpPr>
+        <p:spPr/>
+      </p:sp>
+      <p:sp>
+        <p:nvSpPr>
+          <p:cNvPr id="3" name="Notes Placeholder 2">
+            <a:extLst>
+              <a:ext uri="{FF2B5EF4-FFF2-40B4-BE49-F238E27FC236}">
+                <a16:creationId xmlns:a16="http://schemas.microsoft.com/office/drawing/2014/main" id="{FF14E02C-191F-C4AD-D25B-242F81314655}"/>
+              </a:ext>
+            </a:extLst>
+          </p:cNvPr>
+          <p:cNvSpPr>
+            <a:spLocks noGrp="1"/>
+          </p:cNvSpPr>
+          <p:nvPr>
+            <p:ph type="body" idx="1"/>
+          </p:nvPr>
+        </p:nvSpPr>
+        <p:spPr/>
+        <p:txBody>
+          <a:bodyPr/>
+          <a:lstStyle/>
+          <a:p>
+            <a:endParaRPr lang="en-US" dirty="0"/>
+          </a:p>
+        </p:txBody>
+      </p:sp>
+      <p:sp>
+        <p:nvSpPr>
+          <p:cNvPr id="4" name="Slide Number Placeholder 3">
+            <a:extLst>
+              <a:ext uri="{FF2B5EF4-FFF2-40B4-BE49-F238E27FC236}">
+                <a16:creationId xmlns:a16="http://schemas.microsoft.com/office/drawing/2014/main" id="{F279346D-8A26-C903-623B-C75107144BF9}"/>
+              </a:ext>
+            </a:extLst>
+          </p:cNvPr>
+          <p:cNvSpPr>
+            <a:spLocks noGrp="1"/>
+          </p:cNvSpPr>
+          <p:nvPr>
+            <p:ph type="sldNum" sz="quarter" idx="10"/>
+          </p:nvPr>
+        </p:nvSpPr>
+        <p:spPr/>
+        <p:txBody>
+          <a:bodyPr/>
+          <a:lstStyle/>
+          <a:p>
+            <a:fld id="{F7021451-1387-4CA6-816F-3879F97B5CBC}" type="slidenum">
+              <a:rPr lang="en-US"/>
+              <a:t>20</a:t>
+            </a:fld>
+            <a:endParaRPr lang="en-US"/>
+          </a:p>
+        </p:txBody>
+      </p:sp>
+    </p:spTree>
+    <p:extLst>
+      <p:ext uri="{BB962C8B-B14F-4D97-AF65-F5344CB8AC3E}">
+        <p14:creationId xmlns:p14="http://schemas.microsoft.com/office/powerpoint/2010/main" val="199041418"/>
+      </p:ext>
+    </p:extLst>
+  </p:cSld>
+  <p:clrMapOvr>
+    <a:masterClrMapping/>
+  </p:clrMapOvr>
+</p:notes>
+</file>
+
+<file path=ppt/notesSlides/notesSlide21.xml><?xml version="1.0" encoding="utf-8"?>
+<p:notes xmlns:a="http://schemas.openxmlformats.org/drawingml/2006/main" xmlns:r="http://schemas.openxmlformats.org/officeDocument/2006/relationships" xmlns:p="http://schemas.openxmlformats.org/presentationml/2006/main">
+  <p:cSld>
+    <p:spTree>
+      <p:nvGrpSpPr>
+        <p:cNvPr id="1" name="">
+          <a:extLst>
+            <a:ext uri="{FF2B5EF4-FFF2-40B4-BE49-F238E27FC236}">
+              <a16:creationId xmlns:a16="http://schemas.microsoft.com/office/drawing/2014/main" id="{83C79D3A-5323-148E-4A93-DDF4A91E07A9}"/>
+            </a:ext>
+          </a:extLst>
+        </p:cNvPr>
+        <p:cNvGrpSpPr/>
+        <p:nvPr/>
+      </p:nvGrpSpPr>
+      <p:grpSpPr>
+        <a:xfrm>
+          <a:off x="0" y="0"/>
+          <a:ext cx="0" cy="0"/>
+          <a:chOff x="0" y="0"/>
+          <a:chExt cx="0" cy="0"/>
+        </a:xfrm>
+      </p:grpSpPr>
+      <p:sp>
+        <p:nvSpPr>
+          <p:cNvPr id="2" name="Slide Image Placeholder 1">
+            <a:extLst>
+              <a:ext uri="{FF2B5EF4-FFF2-40B4-BE49-F238E27FC236}">
+                <a16:creationId xmlns:a16="http://schemas.microsoft.com/office/drawing/2014/main" id="{BA72A481-6C23-443C-F791-A9F98002846A}"/>
+              </a:ext>
+            </a:extLst>
+          </p:cNvPr>
+          <p:cNvSpPr>
+            <a:spLocks noGrp="1" noRot="1" noChangeAspect="1"/>
+          </p:cNvSpPr>
+          <p:nvPr>
+            <p:ph type="sldImg"/>
+          </p:nvPr>
+        </p:nvSpPr>
+        <p:spPr/>
+      </p:sp>
+      <p:sp>
+        <p:nvSpPr>
+          <p:cNvPr id="3" name="Notes Placeholder 2">
+            <a:extLst>
+              <a:ext uri="{FF2B5EF4-FFF2-40B4-BE49-F238E27FC236}">
+                <a16:creationId xmlns:a16="http://schemas.microsoft.com/office/drawing/2014/main" id="{78E795F1-E94F-E77C-461E-E22E2D975CCF}"/>
+              </a:ext>
+            </a:extLst>
+          </p:cNvPr>
+          <p:cNvSpPr>
+            <a:spLocks noGrp="1"/>
+          </p:cNvSpPr>
+          <p:nvPr>
+            <p:ph type="body" idx="1"/>
+          </p:nvPr>
+        </p:nvSpPr>
+        <p:spPr/>
+        <p:txBody>
+          <a:bodyPr/>
+          <a:lstStyle/>
+          <a:p>
+            <a:endParaRPr lang="en-US" dirty="0"/>
+          </a:p>
+        </p:txBody>
+      </p:sp>
+      <p:sp>
+        <p:nvSpPr>
+          <p:cNvPr id="4" name="Slide Number Placeholder 3">
+            <a:extLst>
+              <a:ext uri="{FF2B5EF4-FFF2-40B4-BE49-F238E27FC236}">
+                <a16:creationId xmlns:a16="http://schemas.microsoft.com/office/drawing/2014/main" id="{D0727CDA-968D-B539-11E6-324195486247}"/>
+              </a:ext>
+            </a:extLst>
+          </p:cNvPr>
+          <p:cNvSpPr>
+            <a:spLocks noGrp="1"/>
+          </p:cNvSpPr>
+          <p:nvPr>
+            <p:ph type="sldNum" sz="quarter" idx="10"/>
+          </p:nvPr>
+        </p:nvSpPr>
+        <p:spPr/>
+        <p:txBody>
+          <a:bodyPr/>
+          <a:lstStyle/>
+          <a:p>
+            <a:fld id="{F7021451-1387-4CA6-816F-3879F97B5CBC}" type="slidenum">
+              <a:rPr lang="en-US"/>
+              <a:t>21</a:t>
+            </a:fld>
+            <a:endParaRPr lang="en-US"/>
+          </a:p>
+        </p:txBody>
+      </p:sp>
+    </p:spTree>
+    <p:extLst>
+      <p:ext uri="{BB962C8B-B14F-4D97-AF65-F5344CB8AC3E}">
+        <p14:creationId xmlns:p14="http://schemas.microsoft.com/office/powerpoint/2010/main" val="3010490047"/>
+      </p:ext>
+    </p:extLst>
+  </p:cSld>
+  <p:clrMapOvr>
+    <a:masterClrMapping/>
+  </p:clrMapOvr>
+</p:notes>
+</file>
+
+<file path=ppt/notesSlides/notesSlide22.xml><?xml version="1.0" encoding="utf-8"?>
+<p:notes xmlns:a="http://schemas.openxmlformats.org/drawingml/2006/main" xmlns:r="http://schemas.openxmlformats.org/officeDocument/2006/relationships" xmlns:p="http://schemas.openxmlformats.org/presentationml/2006/main">
+  <p:cSld>
+    <p:spTree>
+      <p:nvGrpSpPr>
+        <p:cNvPr id="1" name="">
+          <a:extLst>
+            <a:ext uri="{FF2B5EF4-FFF2-40B4-BE49-F238E27FC236}">
+              <a16:creationId xmlns:a16="http://schemas.microsoft.com/office/drawing/2014/main" id="{64AF9570-3D80-BA39-1086-A18FA4D4ADB1}"/>
+            </a:ext>
+          </a:extLst>
+        </p:cNvPr>
+        <p:cNvGrpSpPr/>
+        <p:nvPr/>
+      </p:nvGrpSpPr>
+      <p:grpSpPr>
+        <a:xfrm>
+          <a:off x="0" y="0"/>
+          <a:ext cx="0" cy="0"/>
+          <a:chOff x="0" y="0"/>
+          <a:chExt cx="0" cy="0"/>
+        </a:xfrm>
+      </p:grpSpPr>
+      <p:sp>
+        <p:nvSpPr>
+          <p:cNvPr id="2" name="Slide Image Placeholder 1">
+            <a:extLst>
+              <a:ext uri="{FF2B5EF4-FFF2-40B4-BE49-F238E27FC236}">
+                <a16:creationId xmlns:a16="http://schemas.microsoft.com/office/drawing/2014/main" id="{F090EAE6-9CD3-6CB9-7FC7-48531DFB7150}"/>
+              </a:ext>
+            </a:extLst>
+          </p:cNvPr>
+          <p:cNvSpPr>
+            <a:spLocks noGrp="1" noRot="1" noChangeAspect="1"/>
+          </p:cNvSpPr>
+          <p:nvPr>
+            <p:ph type="sldImg"/>
+          </p:nvPr>
+        </p:nvSpPr>
+        <p:spPr/>
+      </p:sp>
+      <p:sp>
+        <p:nvSpPr>
+          <p:cNvPr id="3" name="Notes Placeholder 2">
+            <a:extLst>
+              <a:ext uri="{FF2B5EF4-FFF2-40B4-BE49-F238E27FC236}">
+                <a16:creationId xmlns:a16="http://schemas.microsoft.com/office/drawing/2014/main" id="{0F20CF30-F192-8B1A-0C6F-83756EF0C711}"/>
+              </a:ext>
+            </a:extLst>
+          </p:cNvPr>
+          <p:cNvSpPr>
+            <a:spLocks noGrp="1"/>
+          </p:cNvSpPr>
+          <p:nvPr>
+            <p:ph type="body" idx="1"/>
+          </p:nvPr>
+        </p:nvSpPr>
+        <p:spPr/>
+        <p:txBody>
+          <a:bodyPr/>
+          <a:lstStyle/>
+          <a:p>
+            <a:endParaRPr lang="en-US" dirty="0"/>
+          </a:p>
+        </p:txBody>
+      </p:sp>
+      <p:sp>
+        <p:nvSpPr>
+          <p:cNvPr id="4" name="Slide Number Placeholder 3">
+            <a:extLst>
+              <a:ext uri="{FF2B5EF4-FFF2-40B4-BE49-F238E27FC236}">
+                <a16:creationId xmlns:a16="http://schemas.microsoft.com/office/drawing/2014/main" id="{0CD0B85E-849F-9BD9-DA0C-CB62540010D6}"/>
+              </a:ext>
+            </a:extLst>
+          </p:cNvPr>
+          <p:cNvSpPr>
+            <a:spLocks noGrp="1"/>
+          </p:cNvSpPr>
+          <p:nvPr>
+            <p:ph type="sldNum" sz="quarter" idx="10"/>
+          </p:nvPr>
+        </p:nvSpPr>
+        <p:spPr/>
+        <p:txBody>
+          <a:bodyPr/>
+          <a:lstStyle/>
+          <a:p>
+            <a:fld id="{F7021451-1387-4CA6-816F-3879F97B5CBC}" type="slidenum">
+              <a:rPr lang="en-US"/>
+              <a:t>22</a:t>
+            </a:fld>
+            <a:endParaRPr lang="en-US"/>
+          </a:p>
+        </p:txBody>
+      </p:sp>
+    </p:spTree>
+    <p:extLst>
+      <p:ext uri="{BB962C8B-B14F-4D97-AF65-F5344CB8AC3E}">
+        <p14:creationId xmlns:p14="http://schemas.microsoft.com/office/powerpoint/2010/main" val="3334583902"/>
+      </p:ext>
+    </p:extLst>
+  </p:cSld>
+  <p:clrMapOvr>
+    <a:masterClrMapping/>
+  </p:clrMapOvr>
+</p:notes>
+</file>
+
+<file path=ppt/notesSlides/notesSlide23.xml><?xml version="1.0" encoding="utf-8"?>
+<p:notes xmlns:a="http://schemas.openxmlformats.org/drawingml/2006/main" xmlns:r="http://schemas.openxmlformats.org/officeDocument/2006/relationships" xmlns:p="http://schemas.openxmlformats.org/presentationml/2006/main">
+  <p:cSld>
+    <p:spTree>
+      <p:nvGrpSpPr>
+        <p:cNvPr id="1" name="">
+          <a:extLst>
+            <a:ext uri="{FF2B5EF4-FFF2-40B4-BE49-F238E27FC236}">
+              <a16:creationId xmlns:a16="http://schemas.microsoft.com/office/drawing/2014/main" id="{04E1FA76-752F-4A41-66FD-D25656CA11A0}"/>
+            </a:ext>
+          </a:extLst>
+        </p:cNvPr>
+        <p:cNvGrpSpPr/>
+        <p:nvPr/>
+      </p:nvGrpSpPr>
+      <p:grpSpPr>
+        <a:xfrm>
+          <a:off x="0" y="0"/>
+          <a:ext cx="0" cy="0"/>
+          <a:chOff x="0" y="0"/>
+          <a:chExt cx="0" cy="0"/>
+        </a:xfrm>
+      </p:grpSpPr>
+      <p:sp>
+        <p:nvSpPr>
+          <p:cNvPr id="2" name="Slide Image Placeholder 1">
+            <a:extLst>
+              <a:ext uri="{FF2B5EF4-FFF2-40B4-BE49-F238E27FC236}">
+                <a16:creationId xmlns:a16="http://schemas.microsoft.com/office/drawing/2014/main" id="{907AC53A-15B1-0A99-20CC-4B955B778351}"/>
+              </a:ext>
+            </a:extLst>
+          </p:cNvPr>
+          <p:cNvSpPr>
+            <a:spLocks noGrp="1" noRot="1" noChangeAspect="1"/>
+          </p:cNvSpPr>
+          <p:nvPr>
+            <p:ph type="sldImg"/>
+          </p:nvPr>
+        </p:nvSpPr>
+        <p:spPr/>
+      </p:sp>
+      <p:sp>
+        <p:nvSpPr>
+          <p:cNvPr id="3" name="Notes Placeholder 2">
+            <a:extLst>
+              <a:ext uri="{FF2B5EF4-FFF2-40B4-BE49-F238E27FC236}">
+                <a16:creationId xmlns:a16="http://schemas.microsoft.com/office/drawing/2014/main" id="{30AD4A34-A08A-579A-AF30-D6E449BCD4BA}"/>
+              </a:ext>
+            </a:extLst>
+          </p:cNvPr>
+          <p:cNvSpPr>
+            <a:spLocks noGrp="1"/>
+          </p:cNvSpPr>
+          <p:nvPr>
+            <p:ph type="body" idx="1"/>
+          </p:nvPr>
+        </p:nvSpPr>
+        <p:spPr/>
+        <p:txBody>
+          <a:bodyPr/>
+          <a:lstStyle/>
+          <a:p>
+            <a:endParaRPr lang="en-US" dirty="0"/>
+          </a:p>
+        </p:txBody>
+      </p:sp>
+      <p:sp>
+        <p:nvSpPr>
+          <p:cNvPr id="4" name="Slide Number Placeholder 3">
+            <a:extLst>
+              <a:ext uri="{FF2B5EF4-FFF2-40B4-BE49-F238E27FC236}">
+                <a16:creationId xmlns:a16="http://schemas.microsoft.com/office/drawing/2014/main" id="{357097B2-9D10-57E4-A7F1-86C60A0C3262}"/>
+              </a:ext>
+            </a:extLst>
+          </p:cNvPr>
+          <p:cNvSpPr>
+            <a:spLocks noGrp="1"/>
+          </p:cNvSpPr>
+          <p:nvPr>
+            <p:ph type="sldNum" sz="quarter" idx="10"/>
+          </p:nvPr>
+        </p:nvSpPr>
+        <p:spPr/>
+        <p:txBody>
+          <a:bodyPr/>
+          <a:lstStyle/>
+          <a:p>
+            <a:pPr marL="0" marR="0" lvl="0" indent="0" algn="l" defTabSz="914400" rtl="0" eaLnBrk="1" fontAlgn="auto" latinLnBrk="0" hangingPunct="1">
+              <a:lnSpc>
+                <a:spcPct val="100000"/>
+              </a:lnSpc>
+              <a:spcBef>
+                <a:spcPts val="0"/>
+              </a:spcBef>
+              <a:spcAft>
+                <a:spcPts val="0"/>
+              </a:spcAft>
+              <a:buClrTx/>
+              <a:buSzTx/>
+              <a:buFontTx/>
+              <a:buNone/>
+              <a:tabLst/>
+              <a:defRPr/>
+            </a:pPr>
+            <a:fld id="{F7021451-1387-4CA6-816F-3879F97B5CBC}" type="slidenum">
+              <a:rPr kumimoji="0" lang="en-US" sz="1800" b="0" i="0" u="none" strike="noStrike" kern="1200" cap="none" spc="0" normalizeH="0" baseline="0" noProof="0">
+                <a:ln>
+                  <a:noFill/>
+                </a:ln>
+                <a:solidFill>
+                  <a:prstClr val="black"/>
+                </a:solidFill>
+                <a:effectLst/>
+                <a:uLnTx/>
+                <a:uFillTx/>
+                <a:latin typeface="Aptos" panose="02110004020202020204"/>
+                <a:ea typeface="+mn-ea"/>
+                <a:cs typeface="+mn-cs"/>
+              </a:rPr>
+              <a:pPr marL="0" marR="0" lvl="0" indent="0" algn="l" defTabSz="914400" rtl="0" eaLnBrk="1" fontAlgn="auto" latinLnBrk="0" hangingPunct="1">
+                <a:lnSpc>
+                  <a:spcPct val="100000"/>
+                </a:lnSpc>
+                <a:spcBef>
+                  <a:spcPts val="0"/>
+                </a:spcBef>
+                <a:spcAft>
+                  <a:spcPts val="0"/>
+                </a:spcAft>
+                <a:buClrTx/>
+                <a:buSzTx/>
+                <a:buFontTx/>
+                <a:buNone/>
+                <a:tabLst/>
+                <a:defRPr/>
+              </a:pPr>
+              <a:t>23</a:t>
+            </a:fld>
+            <a:endParaRPr kumimoji="0" lang="en-US" sz="1800" b="0" i="0" u="none" strike="noStrike" kern="1200" cap="none" spc="0" normalizeH="0" baseline="0" noProof="0">
+              <a:ln>
+                <a:noFill/>
+              </a:ln>
+              <a:solidFill>
+                <a:prstClr val="black"/>
+              </a:solidFill>
+              <a:effectLst/>
+              <a:uLnTx/>
+              <a:uFillTx/>
+              <a:latin typeface="Aptos" panose="02110004020202020204"/>
+              <a:ea typeface="+mn-ea"/>
+              <a:cs typeface="+mn-cs"/>
+            </a:endParaRPr>
+          </a:p>
+        </p:txBody>
+      </p:sp>
+    </p:spTree>
+    <p:extLst>
+      <p:ext uri="{BB962C8B-B14F-4D97-AF65-F5344CB8AC3E}">
+        <p14:creationId xmlns:p14="http://schemas.microsoft.com/office/powerpoint/2010/main" val="143042342"/>
       </p:ext>
     </p:extLst>
   </p:cSld>
@@ -8333,6 +8829,30 @@
             </a:r>
             <a:r>
               <a:rPr lang="en-US" dirty="0"/>
+              <a:t>. Here, </a:t>
+            </a:r>
+            <a:r>
+              <a:rPr lang="en-US" dirty="0">
+                <a:solidFill>
+                  <a:srgbClr val="00B050"/>
+                </a:solidFill>
+              </a:rPr>
+              <a:t>N</a:t>
+            </a:r>
+            <a:r>
+              <a:rPr lang="en-US" dirty="0"/>
+              <a:t> is fixed to </a:t>
+            </a:r>
+            <a:r>
+              <a:rPr lang="en-US" dirty="0">
+                <a:solidFill>
+                  <a:srgbClr val="00B050"/>
+                </a:solidFill>
+              </a:rPr>
+              <a:t>2,000,000</a:t>
+            </a:r>
+            <a:r>
+              <a:rPr lang="en-US" dirty="0"/>
               <a:t>.</a:t>
             </a:r>
           </a:p>
@@ -8433,7 +8953,7 @@
         </p:blipFill>
         <p:spPr>
           <a:xfrm>
-            <a:off x="5777670" y="4199391"/>
+            <a:off x="5777671" y="4258460"/>
             <a:ext cx="3082955" cy="515906"/>
           </a:xfrm>
           <a:prstGeom prst="rect">
@@ -8991,9 +9511,274 @@
           </a:p>
         </p:txBody>
       </p:sp>
+      <p:sp>
+        <p:nvSpPr>
+          <p:cNvPr id="6" name="TextBox 5">
+            <a:extLst>
+              <a:ext uri="{FF2B5EF4-FFF2-40B4-BE49-F238E27FC236}">
+                <a16:creationId xmlns:a16="http://schemas.microsoft.com/office/drawing/2014/main" id="{B28F6A4A-6586-484F-3404-82620BA489AE}"/>
+              </a:ext>
+            </a:extLst>
+          </p:cNvPr>
+          <p:cNvSpPr txBox="1"/>
+          <p:nvPr/>
+        </p:nvSpPr>
+        <p:spPr>
+          <a:xfrm>
+            <a:off x="178690" y="1160360"/>
+            <a:ext cx="4578290" cy="2377574"/>
+          </a:xfrm>
+          <a:prstGeom prst="rect">
+            <a:avLst/>
+          </a:prstGeom>
+          <a:noFill/>
+        </p:spPr>
+        <p:txBody>
+          <a:bodyPr wrap="square">
+            <a:spAutoFit/>
+          </a:bodyPr>
+          <a:lstStyle/>
+          <a:p>
+            <a:pPr algn="l">
+              <a:spcBef>
+                <a:spcPts val="900"/>
+              </a:spcBef>
+              <a:spcAft>
+                <a:spcPts val="900"/>
+              </a:spcAft>
+              <a:buNone/>
+            </a:pPr>
+            <a:r>
+              <a:rPr lang="en-US" b="1" i="0" dirty="0">
+                <a:solidFill>
+                  <a:srgbClr val="273540"/>
+                </a:solidFill>
+                <a:effectLst/>
+                <a:latin typeface="Lato Extended"/>
+              </a:rPr>
+              <a:t>Question:</a:t>
+            </a:r>
+            <a:r>
+              <a:rPr lang="en-US" b="0" i="0" dirty="0">
+                <a:solidFill>
+                  <a:srgbClr val="273540"/>
+                </a:solidFill>
+                <a:effectLst/>
+                <a:latin typeface="Lato Extended"/>
+              </a:rPr>
+              <a:t> If we fix </a:t>
+            </a:r>
+            <a:r>
+              <a:rPr lang="en-US" b="0" i="0" dirty="0" err="1">
+                <a:solidFill>
+                  <a:srgbClr val="273540"/>
+                </a:solidFill>
+                <a:effectLst/>
+                <a:latin typeface="Lato Extended"/>
+              </a:rPr>
+              <a:t>n_proc</a:t>
+            </a:r>
+            <a:r>
+              <a:rPr lang="en-US" b="0" i="0" dirty="0">
+                <a:solidFill>
+                  <a:srgbClr val="273540"/>
+                </a:solidFill>
+                <a:effectLst/>
+                <a:latin typeface="Lato Extended"/>
+              </a:rPr>
+              <a:t>, then at which value of N does </a:t>
+            </a:r>
+            <a:r>
+              <a:rPr lang="en-US" b="0" i="0" dirty="0" err="1">
+                <a:solidFill>
+                  <a:srgbClr val="273540"/>
+                </a:solidFill>
+                <a:effectLst/>
+                <a:latin typeface="Lato Extended"/>
+              </a:rPr>
+              <a:t>parallel_compute</a:t>
+            </a:r>
+            <a:r>
+              <a:rPr lang="en-US" b="0" i="0" dirty="0">
+                <a:solidFill>
+                  <a:srgbClr val="273540"/>
+                </a:solidFill>
+                <a:effectLst/>
+                <a:latin typeface="Lato Extended"/>
+              </a:rPr>
+              <a:t> outperform </a:t>
+            </a:r>
+            <a:r>
+              <a:rPr lang="en-US" b="0" i="0" dirty="0" err="1">
+                <a:solidFill>
+                  <a:srgbClr val="273540"/>
+                </a:solidFill>
+                <a:effectLst/>
+                <a:latin typeface="Lato Extended"/>
+              </a:rPr>
+              <a:t>sequential_compute</a:t>
+            </a:r>
+            <a:r>
+              <a:rPr lang="en-US" b="0" i="0" dirty="0">
+                <a:solidFill>
+                  <a:srgbClr val="273540"/>
+                </a:solidFill>
+                <a:effectLst/>
+                <a:latin typeface="Lato Extended"/>
+              </a:rPr>
+              <a:t>?</a:t>
+            </a:r>
+          </a:p>
+          <a:p>
+            <a:pPr algn="l">
+              <a:spcBef>
+                <a:spcPts val="900"/>
+              </a:spcBef>
+              <a:spcAft>
+                <a:spcPts val="900"/>
+              </a:spcAft>
+              <a:buNone/>
+            </a:pPr>
+            <a:r>
+              <a:rPr lang="en-US" b="1" dirty="0">
+                <a:solidFill>
+                  <a:srgbClr val="273540"/>
+                </a:solidFill>
+                <a:latin typeface="Lato Extended"/>
+              </a:rPr>
+              <a:t>Answer:</a:t>
+            </a:r>
+            <a:r>
+              <a:rPr lang="en-US" dirty="0">
+                <a:solidFill>
+                  <a:srgbClr val="273540"/>
+                </a:solidFill>
+                <a:latin typeface="Lato Extended"/>
+              </a:rPr>
+              <a:t> It starts </a:t>
+            </a:r>
+            <a:r>
+              <a:rPr lang="en-US" i="1" dirty="0">
+                <a:solidFill>
+                  <a:srgbClr val="273540"/>
+                </a:solidFill>
+                <a:latin typeface="Lato Extended"/>
+              </a:rPr>
+              <a:t>consistently </a:t>
+            </a:r>
+            <a:r>
+              <a:rPr lang="en-US" dirty="0">
+                <a:solidFill>
+                  <a:srgbClr val="273540"/>
+                </a:solidFill>
+                <a:latin typeface="Lato Extended"/>
+              </a:rPr>
+              <a:t>outperforming at N = </a:t>
+            </a:r>
+            <a:r>
+              <a:rPr lang="en-US" dirty="0">
+                <a:solidFill>
+                  <a:srgbClr val="00B050"/>
+                </a:solidFill>
+                <a:latin typeface="Lato Extended"/>
+              </a:rPr>
+              <a:t>1,280,000</a:t>
+            </a:r>
+            <a:r>
+              <a:rPr lang="en-US" dirty="0">
+                <a:solidFill>
+                  <a:srgbClr val="273540"/>
+                </a:solidFill>
+                <a:latin typeface="Lato Extended"/>
+              </a:rPr>
+              <a:t>.</a:t>
+            </a:r>
+            <a:endParaRPr lang="en-US" b="0" i="0" dirty="0">
+              <a:solidFill>
+                <a:srgbClr val="273540"/>
+              </a:solidFill>
+              <a:effectLst/>
+              <a:latin typeface="Lato Extended"/>
+            </a:endParaRPr>
+          </a:p>
+          <a:p>
+            <a:pPr>
+              <a:buNone/>
+            </a:pPr>
+            <a:br>
+              <a:rPr lang="en-US" dirty="0"/>
+            </a:br>
+            <a:endParaRPr lang="en-US" dirty="0"/>
+          </a:p>
+        </p:txBody>
+      </p:sp>
+      <p:sp>
+        <p:nvSpPr>
+          <p:cNvPr id="7" name="TextBox 6">
+            <a:extLst>
+              <a:ext uri="{FF2B5EF4-FFF2-40B4-BE49-F238E27FC236}">
+                <a16:creationId xmlns:a16="http://schemas.microsoft.com/office/drawing/2014/main" id="{B6720FC1-56C3-64AE-BB91-9D708BED2264}"/>
+              </a:ext>
+            </a:extLst>
+          </p:cNvPr>
+          <p:cNvSpPr txBox="1"/>
+          <p:nvPr/>
+        </p:nvSpPr>
+        <p:spPr>
+          <a:xfrm>
+            <a:off x="365760" y="3102671"/>
+            <a:ext cx="3082954" cy="523220"/>
+          </a:xfrm>
+          <a:prstGeom prst="rect">
+            <a:avLst/>
+          </a:prstGeom>
+          <a:noFill/>
+        </p:spPr>
+        <p:txBody>
+          <a:bodyPr wrap="square" rtlCol="0">
+            <a:spAutoFit/>
+          </a:bodyPr>
+          <a:lstStyle/>
+          <a:p>
+            <a:r>
+              <a:rPr lang="en-US" sz="1400" dirty="0">
+                <a:solidFill>
+                  <a:schemeClr val="tx1">
+                    <a:lumMod val="75000"/>
+                    <a:lumOff val="25000"/>
+                  </a:schemeClr>
+                </a:solidFill>
+              </a:rPr>
+              <a:t>Note: </a:t>
+            </a:r>
+            <a:r>
+              <a:rPr lang="en-US" sz="1400" dirty="0" err="1">
+                <a:solidFill>
+                  <a:schemeClr val="tx1">
+                    <a:lumMod val="75000"/>
+                    <a:lumOff val="25000"/>
+                  </a:schemeClr>
+                </a:solidFill>
+              </a:rPr>
+              <a:t>parallel_compute</a:t>
+            </a:r>
+            <a:r>
+              <a:rPr lang="en-US" sz="1400" dirty="0">
+                <a:solidFill>
+                  <a:schemeClr val="tx1">
+                    <a:lumMod val="75000"/>
+                    <a:lumOff val="25000"/>
+                  </a:schemeClr>
+                </a:solidFill>
+              </a:rPr>
+              <a:t> starts outperforming at large values of N</a:t>
+            </a:r>
+          </a:p>
+        </p:txBody>
+      </p:sp>
       <p:graphicFrame>
         <p:nvGraphicFramePr>
-          <p:cNvPr id="4" name="Chart 3">
+          <p:cNvPr id="5" name="Chart 4">
             <a:extLst>
               <a:ext uri="{FF2B5EF4-FFF2-40B4-BE49-F238E27FC236}">
                 <a16:creationId xmlns:a16="http://schemas.microsoft.com/office/drawing/2014/main" id="{81A4C7CA-A120-30D7-79ED-B8879F9E6884}"/>
@@ -9006,14 +9791,14 @@
           <p:nvPr>
             <p:extLst>
               <p:ext uri="{D42A27DB-BD31-4B8C-83A1-F6EECF244321}">
-                <p14:modId xmlns:p14="http://schemas.microsoft.com/office/powerpoint/2010/main" val="3646090802"/>
+                <p14:modId xmlns:p14="http://schemas.microsoft.com/office/powerpoint/2010/main" val="3724793857"/>
               </p:ext>
             </p:extLst>
           </p:nvPr>
         </p:nvGraphicFramePr>
         <p:xfrm>
-          <a:off x="4756980" y="979328"/>
-          <a:ext cx="4021260" cy="2795718"/>
+          <a:off x="4381501" y="927908"/>
+          <a:ext cx="4628713" cy="3227714"/>
         </p:xfrm>
         <a:graphic>
           <a:graphicData uri="http://schemas.openxmlformats.org/drawingml/2006/chart">
@@ -9021,271 +9806,6 @@
           </a:graphicData>
         </a:graphic>
       </p:graphicFrame>
-      <p:sp>
-        <p:nvSpPr>
-          <p:cNvPr id="6" name="TextBox 5">
-            <a:extLst>
-              <a:ext uri="{FF2B5EF4-FFF2-40B4-BE49-F238E27FC236}">
-                <a16:creationId xmlns:a16="http://schemas.microsoft.com/office/drawing/2014/main" id="{B28F6A4A-6586-484F-3404-82620BA489AE}"/>
-              </a:ext>
-            </a:extLst>
-          </p:cNvPr>
-          <p:cNvSpPr txBox="1"/>
-          <p:nvPr/>
-        </p:nvSpPr>
-        <p:spPr>
-          <a:xfrm>
-            <a:off x="178690" y="1160360"/>
-            <a:ext cx="4578290" cy="2377574"/>
-          </a:xfrm>
-          <a:prstGeom prst="rect">
-            <a:avLst/>
-          </a:prstGeom>
-          <a:noFill/>
-        </p:spPr>
-        <p:txBody>
-          <a:bodyPr wrap="square">
-            <a:spAutoFit/>
-          </a:bodyPr>
-          <a:lstStyle/>
-          <a:p>
-            <a:pPr algn="l">
-              <a:spcBef>
-                <a:spcPts val="900"/>
-              </a:spcBef>
-              <a:spcAft>
-                <a:spcPts val="900"/>
-              </a:spcAft>
-              <a:buNone/>
-            </a:pPr>
-            <a:r>
-              <a:rPr lang="en-US" b="1" i="0" dirty="0">
-                <a:solidFill>
-                  <a:srgbClr val="273540"/>
-                </a:solidFill>
-                <a:effectLst/>
-                <a:latin typeface="Lato Extended"/>
-              </a:rPr>
-              <a:t>Question:</a:t>
-            </a:r>
-            <a:r>
-              <a:rPr lang="en-US" b="0" i="0" dirty="0">
-                <a:solidFill>
-                  <a:srgbClr val="273540"/>
-                </a:solidFill>
-                <a:effectLst/>
-                <a:latin typeface="Lato Extended"/>
-              </a:rPr>
-              <a:t> If we fix </a:t>
-            </a:r>
-            <a:r>
-              <a:rPr lang="en-US" b="0" i="0" dirty="0" err="1">
-                <a:solidFill>
-                  <a:srgbClr val="273540"/>
-                </a:solidFill>
-                <a:effectLst/>
-                <a:latin typeface="Lato Extended"/>
-              </a:rPr>
-              <a:t>n_proc</a:t>
-            </a:r>
-            <a:r>
-              <a:rPr lang="en-US" b="0" i="0" dirty="0">
-                <a:solidFill>
-                  <a:srgbClr val="273540"/>
-                </a:solidFill>
-                <a:effectLst/>
-                <a:latin typeface="Lato Extended"/>
-              </a:rPr>
-              <a:t>, then at which value of N does </a:t>
-            </a:r>
-            <a:r>
-              <a:rPr lang="en-US" b="0" i="0" dirty="0" err="1">
-                <a:solidFill>
-                  <a:srgbClr val="273540"/>
-                </a:solidFill>
-                <a:effectLst/>
-                <a:latin typeface="Lato Extended"/>
-              </a:rPr>
-              <a:t>parallel_compute</a:t>
-            </a:r>
-            <a:r>
-              <a:rPr lang="en-US" b="0" i="0" dirty="0">
-                <a:solidFill>
-                  <a:srgbClr val="273540"/>
-                </a:solidFill>
-                <a:effectLst/>
-                <a:latin typeface="Lato Extended"/>
-              </a:rPr>
-              <a:t> outperform </a:t>
-            </a:r>
-            <a:r>
-              <a:rPr lang="en-US" b="0" i="0" dirty="0" err="1">
-                <a:solidFill>
-                  <a:srgbClr val="273540"/>
-                </a:solidFill>
-                <a:effectLst/>
-                <a:latin typeface="Lato Extended"/>
-              </a:rPr>
-              <a:t>sequential_compute</a:t>
-            </a:r>
-            <a:r>
-              <a:rPr lang="en-US" b="0" i="0" dirty="0">
-                <a:solidFill>
-                  <a:srgbClr val="273540"/>
-                </a:solidFill>
-                <a:effectLst/>
-                <a:latin typeface="Lato Extended"/>
-              </a:rPr>
-              <a:t>?</a:t>
-            </a:r>
-          </a:p>
-          <a:p>
-            <a:pPr algn="l">
-              <a:spcBef>
-                <a:spcPts val="900"/>
-              </a:spcBef>
-              <a:spcAft>
-                <a:spcPts val="900"/>
-              </a:spcAft>
-              <a:buNone/>
-            </a:pPr>
-            <a:r>
-              <a:rPr lang="en-US" b="1" dirty="0">
-                <a:solidFill>
-                  <a:srgbClr val="273540"/>
-                </a:solidFill>
-                <a:latin typeface="Lato Extended"/>
-              </a:rPr>
-              <a:t>Answer:</a:t>
-            </a:r>
-            <a:r>
-              <a:rPr lang="en-US" dirty="0">
-                <a:solidFill>
-                  <a:srgbClr val="273540"/>
-                </a:solidFill>
-                <a:latin typeface="Lato Extended"/>
-              </a:rPr>
-              <a:t> It starts </a:t>
-            </a:r>
-            <a:r>
-              <a:rPr lang="en-US" i="1" dirty="0">
-                <a:solidFill>
-                  <a:srgbClr val="273540"/>
-                </a:solidFill>
-                <a:latin typeface="Lato Extended"/>
-              </a:rPr>
-              <a:t>consistently </a:t>
-            </a:r>
-            <a:r>
-              <a:rPr lang="en-US" dirty="0">
-                <a:solidFill>
-                  <a:srgbClr val="273540"/>
-                </a:solidFill>
-                <a:latin typeface="Lato Extended"/>
-              </a:rPr>
-              <a:t>outperforming at N = </a:t>
-            </a:r>
-            <a:r>
-              <a:rPr lang="en-US" dirty="0">
-                <a:solidFill>
-                  <a:srgbClr val="00B050"/>
-                </a:solidFill>
-                <a:latin typeface="Lato Extended"/>
-              </a:rPr>
-              <a:t>680,000</a:t>
-            </a:r>
-            <a:r>
-              <a:rPr lang="en-US" dirty="0">
-                <a:solidFill>
-                  <a:srgbClr val="273540"/>
-                </a:solidFill>
-                <a:latin typeface="Lato Extended"/>
-              </a:rPr>
-              <a:t>.</a:t>
-            </a:r>
-            <a:endParaRPr lang="en-US" b="0" i="0" dirty="0">
-              <a:solidFill>
-                <a:srgbClr val="273540"/>
-              </a:solidFill>
-              <a:effectLst/>
-              <a:latin typeface="Lato Extended"/>
-            </a:endParaRPr>
-          </a:p>
-          <a:p>
-            <a:pPr>
-              <a:buNone/>
-            </a:pPr>
-            <a:br>
-              <a:rPr lang="en-US" dirty="0"/>
-            </a:br>
-            <a:endParaRPr lang="en-US" dirty="0"/>
-          </a:p>
-        </p:txBody>
-      </p:sp>
-      <p:sp>
-        <p:nvSpPr>
-          <p:cNvPr id="7" name="TextBox 6">
-            <a:extLst>
-              <a:ext uri="{FF2B5EF4-FFF2-40B4-BE49-F238E27FC236}">
-                <a16:creationId xmlns:a16="http://schemas.microsoft.com/office/drawing/2014/main" id="{B6720FC1-56C3-64AE-BB91-9D708BED2264}"/>
-              </a:ext>
-            </a:extLst>
-          </p:cNvPr>
-          <p:cNvSpPr txBox="1"/>
-          <p:nvPr/>
-        </p:nvSpPr>
-        <p:spPr>
-          <a:xfrm>
-            <a:off x="365760" y="3102671"/>
-            <a:ext cx="3082954" cy="523220"/>
-          </a:xfrm>
-          <a:prstGeom prst="rect">
-            <a:avLst/>
-          </a:prstGeom>
-          <a:noFill/>
-        </p:spPr>
-        <p:txBody>
-          <a:bodyPr wrap="square" rtlCol="0">
-            <a:spAutoFit/>
-          </a:bodyPr>
-          <a:lstStyle/>
-          <a:p>
-            <a:r>
-              <a:rPr lang="en-US" sz="1400" dirty="0">
-                <a:solidFill>
-                  <a:schemeClr val="tx1">
-                    <a:lumMod val="75000"/>
-                    <a:lumOff val="25000"/>
-                  </a:schemeClr>
-                </a:solidFill>
-              </a:rPr>
-              <a:t>Note: </a:t>
-            </a:r>
-            <a:r>
-              <a:rPr lang="en-US" sz="1400" dirty="0" err="1">
-                <a:solidFill>
-                  <a:schemeClr val="tx1">
-                    <a:lumMod val="75000"/>
-                    <a:lumOff val="25000"/>
-                  </a:schemeClr>
-                </a:solidFill>
-              </a:rPr>
-              <a:t>parallel_compute</a:t>
-            </a:r>
-            <a:r>
-              <a:rPr lang="en-US" sz="1400" dirty="0">
-                <a:solidFill>
-                  <a:schemeClr val="tx1">
-                    <a:lumMod val="75000"/>
-                    <a:lumOff val="25000"/>
-                  </a:schemeClr>
-                </a:solidFill>
-              </a:rPr>
-              <a:t> starts outperforming at large values of N</a:t>
-            </a:r>
-          </a:p>
-        </p:txBody>
-      </p:sp>
     </p:spTree>
     <p:extLst>
       <p:ext uri="{BB962C8B-B14F-4D97-AF65-F5344CB8AC3E}">
@@ -9831,7 +10351,7 @@
         <p:cNvPr id="1" name="">
           <a:extLst>
             <a:ext uri="{FF2B5EF4-FFF2-40B4-BE49-F238E27FC236}">
-              <a16:creationId xmlns:a16="http://schemas.microsoft.com/office/drawing/2014/main" id="{56B5E801-8FC1-B9B0-4BFD-703B4B0BAD9D}"/>
+              <a16:creationId xmlns:a16="http://schemas.microsoft.com/office/drawing/2014/main" id="{5E73491F-CD15-B4EE-DB4D-CF6CD1AEB27A}"/>
             </a:ext>
           </a:extLst>
         </p:cNvPr>
@@ -9851,7 +10371,7 @@
           <p:cNvPr id="2" name="Shape 0">
             <a:extLst>
               <a:ext uri="{FF2B5EF4-FFF2-40B4-BE49-F238E27FC236}">
-                <a16:creationId xmlns:a16="http://schemas.microsoft.com/office/drawing/2014/main" id="{10103D2B-2620-6CF7-5D47-413B0E41B312}"/>
+                <a16:creationId xmlns:a16="http://schemas.microsoft.com/office/drawing/2014/main" id="{D5AE707F-7E8B-F62B-FC3F-7ADFA06FF173}"/>
               </a:ext>
             </a:extLst>
           </p:cNvPr>
@@ -9919,7 +10439,7 @@
           <p:cNvPr id="3" name="Text 1">
             <a:extLst>
               <a:ext uri="{FF2B5EF4-FFF2-40B4-BE49-F238E27FC236}">
-                <a16:creationId xmlns:a16="http://schemas.microsoft.com/office/drawing/2014/main" id="{C16A0F1E-24E5-ACDB-A429-10155964A61B}"/>
+                <a16:creationId xmlns:a16="http://schemas.microsoft.com/office/drawing/2014/main" id="{FF5879FC-6A57-4981-01DF-F0EDF5371CFB}"/>
               </a:ext>
             </a:extLst>
           </p:cNvPr>
@@ -9959,15 +10479,21 @@
               <a:defRPr/>
             </a:pPr>
             <a:r>
-              <a:rPr lang="en-US" sz="2400" b="1" dirty="0">
+              <a:rPr kumimoji="0" lang="en-US" sz="2400" b="1" i="0" u="none" strike="noStrike" kern="1200" cap="none" spc="0" normalizeH="0" baseline="0" noProof="0" dirty="0">
+                <a:ln>
+                  <a:noFill/>
+                </a:ln>
                 <a:solidFill>
                   <a:srgbClr val="FFFFFF"/>
                 </a:solidFill>
+                <a:effectLst/>
+                <a:uLnTx/>
+                <a:uFillTx/>
                 <a:latin typeface="Calibri" pitchFamily="34" charset="0"/>
                 <a:ea typeface="Calibri" pitchFamily="34" charset="-122"/>
                 <a:cs typeface="Calibri" pitchFamily="34" charset="-120"/>
               </a:rPr>
-              <a:t>THANK YOU</a:t>
+              <a:t>Bonus</a:t>
             </a:r>
             <a:endParaRPr kumimoji="0" lang="en-US" sz="2400" b="0" i="0" u="none" strike="noStrike" kern="1200" cap="none" spc="0" normalizeH="0" baseline="0" noProof="0" dirty="0">
               <a:ln>
@@ -9989,7 +10515,7 @@
     </p:spTree>
     <p:extLst>
       <p:ext uri="{BB962C8B-B14F-4D97-AF65-F5344CB8AC3E}">
-        <p14:creationId xmlns:p14="http://schemas.microsoft.com/office/powerpoint/2010/main" val="660919028"/>
+        <p14:creationId xmlns:p14="http://schemas.microsoft.com/office/powerpoint/2010/main" val="2684980394"/>
       </p:ext>
     </p:extLst>
   </p:cSld>
@@ -10745,9 +11271,1572 @@
               <a:t>Prepare slides for: how the tests are designed and ranges chosen, the smoothing method, and the comparison results with answers to both questions</a:t>
             </a:r>
           </a:p>
+          <a:p>
+            <a:pPr marL="228600" indent="-228600">
+              <a:buFont typeface="+mj-lt"/>
+              <a:buAutoNum type="arabicPeriod"/>
+            </a:pPr>
+            <a:r>
+              <a:rPr lang="en-US" sz="1100" dirty="0">
+                <a:solidFill>
+                  <a:srgbClr val="FFFFFF"/>
+                </a:solidFill>
+                <a:latin typeface="Calibri" pitchFamily="34" charset="0"/>
+                <a:ea typeface="Calibri" pitchFamily="34" charset="-122"/>
+                <a:cs typeface="Calibri" pitchFamily="34" charset="-120"/>
+              </a:rPr>
+              <a:t>Bonus: Editing the experiment codes to add them to xv6</a:t>
+            </a:r>
+          </a:p>
         </p:txBody>
       </p:sp>
     </p:spTree>
+  </p:cSld>
+  <p:clrMapOvr>
+    <a:masterClrMapping/>
+  </p:clrMapOvr>
+</p:sld>
+</file>
+
+<file path=ppt/slides/slide20.xml><?xml version="1.0" encoding="utf-8"?>
+<p:sld xmlns:a="http://schemas.openxmlformats.org/drawingml/2006/main" xmlns:r="http://schemas.openxmlformats.org/officeDocument/2006/relationships" xmlns:p="http://schemas.openxmlformats.org/presentationml/2006/main">
+  <p:cSld>
+    <p:spTree>
+      <p:nvGrpSpPr>
+        <p:cNvPr id="1" name="">
+          <a:extLst>
+            <a:ext uri="{FF2B5EF4-FFF2-40B4-BE49-F238E27FC236}">
+              <a16:creationId xmlns:a16="http://schemas.microsoft.com/office/drawing/2014/main" id="{576D46AA-90A5-52C3-AAB5-4ECE401DA6DD}"/>
+            </a:ext>
+          </a:extLst>
+        </p:cNvPr>
+        <p:cNvGrpSpPr/>
+        <p:nvPr/>
+      </p:nvGrpSpPr>
+      <p:grpSpPr>
+        <a:xfrm>
+          <a:off x="0" y="0"/>
+          <a:ext cx="0" cy="0"/>
+          <a:chOff x="0" y="0"/>
+          <a:chExt cx="0" cy="0"/>
+        </a:xfrm>
+      </p:grpSpPr>
+      <p:sp>
+        <p:nvSpPr>
+          <p:cNvPr id="2" name="Shape 0">
+            <a:extLst>
+              <a:ext uri="{FF2B5EF4-FFF2-40B4-BE49-F238E27FC236}">
+                <a16:creationId xmlns:a16="http://schemas.microsoft.com/office/drawing/2014/main" id="{99819C93-A00C-B0C8-9858-A5832E8634F0}"/>
+              </a:ext>
+            </a:extLst>
+          </p:cNvPr>
+          <p:cNvSpPr/>
+          <p:nvPr/>
+        </p:nvSpPr>
+        <p:spPr>
+          <a:xfrm>
+            <a:off x="0" y="0"/>
+            <a:ext cx="9144000" cy="777240"/>
+          </a:xfrm>
+          <a:prstGeom prst="rect">
+            <a:avLst/>
+          </a:prstGeom>
+          <a:solidFill>
+            <a:srgbClr val="00A896"/>
+          </a:solidFill>
+          <a:ln w="12700">
+            <a:solidFill>
+              <a:srgbClr val="00A896"/>
+            </a:solidFill>
+            <a:prstDash val="solid"/>
+          </a:ln>
+        </p:spPr>
+        <p:txBody>
+          <a:bodyPr/>
+          <a:lstStyle/>
+          <a:p>
+            <a:endParaRPr lang="en-US"/>
+          </a:p>
+        </p:txBody>
+      </p:sp>
+      <p:sp>
+        <p:nvSpPr>
+          <p:cNvPr id="3" name="Text 1">
+            <a:extLst>
+              <a:ext uri="{FF2B5EF4-FFF2-40B4-BE49-F238E27FC236}">
+                <a16:creationId xmlns:a16="http://schemas.microsoft.com/office/drawing/2014/main" id="{938C9ED3-1196-84CB-46AC-10465F93409A}"/>
+              </a:ext>
+            </a:extLst>
+          </p:cNvPr>
+          <p:cNvSpPr/>
+          <p:nvPr/>
+        </p:nvSpPr>
+        <p:spPr>
+          <a:xfrm>
+            <a:off x="365760" y="0"/>
+            <a:ext cx="8412480" cy="777240"/>
+          </a:xfrm>
+          <a:prstGeom prst="rect">
+            <a:avLst/>
+          </a:prstGeom>
+          <a:noFill/>
+          <a:ln/>
+        </p:spPr>
+        <p:txBody>
+          <a:bodyPr wrap="square" lIns="0" tIns="0" rIns="0" bIns="0" rtlCol="0" anchor="ctr"/>
+          <a:lstStyle/>
+          <a:p>
+            <a:r>
+              <a:rPr lang="en-US" sz="2400" b="1" dirty="0">
+                <a:solidFill>
+                  <a:srgbClr val="FFFFFF"/>
+                </a:solidFill>
+                <a:latin typeface="Calibri" pitchFamily="34" charset="0"/>
+                <a:ea typeface="Calibri" pitchFamily="34" charset="-122"/>
+                <a:cs typeface="Calibri" pitchFamily="34" charset="-120"/>
+              </a:rPr>
+              <a:t>Results and Answers (Test 2)</a:t>
+            </a:r>
+            <a:endParaRPr lang="en-US" sz="2400" dirty="0"/>
+          </a:p>
+        </p:txBody>
+      </p:sp>
+      <p:sp>
+        <p:nvSpPr>
+          <p:cNvPr id="4" name="Shape 0">
+            <a:extLst>
+              <a:ext uri="{FF2B5EF4-FFF2-40B4-BE49-F238E27FC236}">
+                <a16:creationId xmlns:a16="http://schemas.microsoft.com/office/drawing/2014/main" id="{7CC4C1F6-D2DB-9407-C5F4-BA776DE61BD2}"/>
+              </a:ext>
+            </a:extLst>
+          </p:cNvPr>
+          <p:cNvSpPr/>
+          <p:nvPr/>
+        </p:nvSpPr>
+        <p:spPr>
+          <a:xfrm>
+            <a:off x="0" y="0"/>
+            <a:ext cx="9144000" cy="777240"/>
+          </a:xfrm>
+          <a:prstGeom prst="rect">
+            <a:avLst/>
+          </a:prstGeom>
+          <a:solidFill>
+            <a:srgbClr val="00A896"/>
+          </a:solidFill>
+          <a:ln w="12700">
+            <a:solidFill>
+              <a:srgbClr val="00A896"/>
+            </a:solidFill>
+            <a:prstDash val="solid"/>
+          </a:ln>
+        </p:spPr>
+        <p:txBody>
+          <a:bodyPr/>
+          <a:lstStyle/>
+          <a:p>
+            <a:endParaRPr lang="en-US" dirty="0"/>
+          </a:p>
+        </p:txBody>
+      </p:sp>
+      <p:sp>
+        <p:nvSpPr>
+          <p:cNvPr id="5" name="Text 1">
+            <a:extLst>
+              <a:ext uri="{FF2B5EF4-FFF2-40B4-BE49-F238E27FC236}">
+                <a16:creationId xmlns:a16="http://schemas.microsoft.com/office/drawing/2014/main" id="{D3640860-E5C3-C1AA-4467-A7FE02C595D4}"/>
+              </a:ext>
+            </a:extLst>
+          </p:cNvPr>
+          <p:cNvSpPr/>
+          <p:nvPr/>
+        </p:nvSpPr>
+        <p:spPr>
+          <a:xfrm>
+            <a:off x="365760" y="0"/>
+            <a:ext cx="8412480" cy="777240"/>
+          </a:xfrm>
+          <a:prstGeom prst="rect">
+            <a:avLst/>
+          </a:prstGeom>
+          <a:noFill/>
+          <a:ln/>
+        </p:spPr>
+        <p:txBody>
+          <a:bodyPr wrap="square" lIns="0" tIns="0" rIns="0" bIns="0" rtlCol="0" anchor="ctr"/>
+          <a:lstStyle/>
+          <a:p>
+            <a:pPr marL="0" indent="0">
+              <a:buNone/>
+            </a:pPr>
+            <a:r>
+              <a:rPr lang="en-US" sz="2400" b="1" dirty="0">
+                <a:solidFill>
+                  <a:srgbClr val="FFFFFF"/>
+                </a:solidFill>
+                <a:latin typeface="Calibri" pitchFamily="34" charset="0"/>
+                <a:ea typeface="Calibri" pitchFamily="34" charset="-122"/>
+                <a:cs typeface="Calibri" pitchFamily="34" charset="-120"/>
+              </a:rPr>
+              <a:t>Adding experiment_1 and experiment_2 to xv6</a:t>
+            </a:r>
+            <a:endParaRPr lang="en-US" sz="2400" dirty="0"/>
+          </a:p>
+        </p:txBody>
+      </p:sp>
+      <p:sp>
+        <p:nvSpPr>
+          <p:cNvPr id="10" name="TextBox 9">
+            <a:extLst>
+              <a:ext uri="{FF2B5EF4-FFF2-40B4-BE49-F238E27FC236}">
+                <a16:creationId xmlns:a16="http://schemas.microsoft.com/office/drawing/2014/main" id="{1ED7B18E-A1D1-4E8C-964B-B82BD1841264}"/>
+              </a:ext>
+            </a:extLst>
+          </p:cNvPr>
+          <p:cNvSpPr txBox="1"/>
+          <p:nvPr/>
+        </p:nvSpPr>
+        <p:spPr>
+          <a:xfrm>
+            <a:off x="220437" y="977585"/>
+            <a:ext cx="4578122" cy="3724096"/>
+          </a:xfrm>
+          <a:prstGeom prst="rect">
+            <a:avLst/>
+          </a:prstGeom>
+          <a:noFill/>
+        </p:spPr>
+        <p:txBody>
+          <a:bodyPr wrap="square">
+            <a:spAutoFit/>
+          </a:bodyPr>
+          <a:lstStyle/>
+          <a:p>
+            <a:pPr algn="l">
+              <a:spcBef>
+                <a:spcPts val="600"/>
+              </a:spcBef>
+              <a:spcAft>
+                <a:spcPts val="600"/>
+              </a:spcAft>
+              <a:buNone/>
+            </a:pPr>
+            <a:r>
+              <a:rPr lang="en-US" sz="1600" b="1" i="0" dirty="0">
+                <a:solidFill>
+                  <a:srgbClr val="273540"/>
+                </a:solidFill>
+                <a:effectLst/>
+                <a:latin typeface="Lato Extended"/>
+              </a:rPr>
+              <a:t>Edits made:</a:t>
+            </a:r>
+            <a:r>
+              <a:rPr lang="en-US" sz="1600" b="0" i="0" dirty="0">
+                <a:solidFill>
+                  <a:srgbClr val="273540"/>
+                </a:solidFill>
+                <a:effectLst/>
+                <a:latin typeface="Lato Extended"/>
+              </a:rPr>
+              <a:t> </a:t>
+            </a:r>
+          </a:p>
+          <a:p>
+            <a:pPr marL="285750" indent="-285750" algn="l">
+              <a:spcBef>
+                <a:spcPts val="600"/>
+              </a:spcBef>
+              <a:spcAft>
+                <a:spcPts val="600"/>
+              </a:spcAft>
+              <a:buFont typeface="Arial" panose="020B0604020202020204" pitchFamily="34" charset="0"/>
+              <a:buChar char="•"/>
+            </a:pPr>
+            <a:r>
+              <a:rPr lang="en-US" sz="1600" dirty="0">
+                <a:solidFill>
+                  <a:srgbClr val="273540"/>
+                </a:solidFill>
+                <a:latin typeface="Lato Extended"/>
+              </a:rPr>
+              <a:t>Implementing manual sort for finding median</a:t>
+            </a:r>
+          </a:p>
+          <a:p>
+            <a:pPr marL="285750" indent="-285750" algn="l">
+              <a:spcBef>
+                <a:spcPts val="600"/>
+              </a:spcBef>
+              <a:spcAft>
+                <a:spcPts val="600"/>
+              </a:spcAft>
+              <a:buFont typeface="Arial" panose="020B0604020202020204" pitchFamily="34" charset="0"/>
+              <a:buChar char="•"/>
+            </a:pPr>
+            <a:r>
+              <a:rPr lang="en-US" sz="1600" dirty="0">
+                <a:solidFill>
+                  <a:srgbClr val="273540"/>
+                </a:solidFill>
+                <a:latin typeface="Lato Extended"/>
+              </a:rPr>
+              <a:t>Writing integers as strings of characters to the file</a:t>
+            </a:r>
+          </a:p>
+          <a:p>
+            <a:pPr marL="285750" indent="-285750" algn="l">
+              <a:spcBef>
+                <a:spcPts val="600"/>
+              </a:spcBef>
+              <a:spcAft>
+                <a:spcPts val="600"/>
+              </a:spcAft>
+              <a:buFont typeface="Arial" panose="020B0604020202020204" pitchFamily="34" charset="0"/>
+              <a:buChar char="•"/>
+            </a:pPr>
+            <a:r>
+              <a:rPr lang="en-US" sz="1600" b="0" i="0" dirty="0">
+                <a:solidFill>
+                  <a:srgbClr val="273540"/>
+                </a:solidFill>
+                <a:effectLst/>
+                <a:latin typeface="Lato Extended"/>
+              </a:rPr>
+              <a:t>Decrease </a:t>
+            </a:r>
+            <a:r>
+              <a:rPr lang="en-US" sz="1600" b="0" i="0" dirty="0" err="1">
+                <a:solidFill>
+                  <a:srgbClr val="273540"/>
+                </a:solidFill>
+                <a:effectLst/>
+                <a:latin typeface="Lato Extended"/>
+              </a:rPr>
+              <a:t>n_proc</a:t>
+            </a:r>
+            <a:r>
+              <a:rPr lang="en-US" sz="1600" b="0" i="0" dirty="0">
+                <a:solidFill>
+                  <a:srgbClr val="273540"/>
+                </a:solidFill>
+                <a:effectLst/>
+                <a:latin typeface="Lato Extended"/>
+              </a:rPr>
+              <a:t> in test 1 to </a:t>
+            </a:r>
+            <a:r>
+              <a:rPr lang="en-US" sz="1600" b="0" i="0" dirty="0">
+                <a:solidFill>
+                  <a:srgbClr val="00B050"/>
+                </a:solidFill>
+                <a:effectLst/>
+                <a:latin typeface="Lato Extended"/>
+              </a:rPr>
+              <a:t>6</a:t>
+            </a:r>
+            <a:r>
+              <a:rPr lang="en-US" sz="1600" b="0" i="0" dirty="0">
+                <a:solidFill>
+                  <a:srgbClr val="273540"/>
+                </a:solidFill>
+                <a:effectLst/>
+                <a:latin typeface="Lato Extended"/>
+              </a:rPr>
+              <a:t> as maximum CPUs is 8 (we shouldn’t use them all as there are still </a:t>
+            </a:r>
+            <a:r>
+              <a:rPr lang="en-US" sz="1600" b="0" i="0" dirty="0" err="1">
+                <a:solidFill>
+                  <a:srgbClr val="273540"/>
+                </a:solidFill>
+                <a:effectLst/>
+                <a:latin typeface="Lato Extended"/>
+              </a:rPr>
+              <a:t>init</a:t>
+            </a:r>
+            <a:r>
+              <a:rPr lang="en-US" sz="1600" b="0" i="0" dirty="0">
+                <a:solidFill>
+                  <a:srgbClr val="273540"/>
+                </a:solidFill>
+                <a:effectLst/>
+                <a:latin typeface="Lato Extended"/>
+              </a:rPr>
+              <a:t> and shell)</a:t>
+            </a:r>
+          </a:p>
+          <a:p>
+            <a:pPr marL="285750" indent="-285750" algn="l">
+              <a:spcBef>
+                <a:spcPts val="600"/>
+              </a:spcBef>
+              <a:spcAft>
+                <a:spcPts val="600"/>
+              </a:spcAft>
+              <a:buFont typeface="Arial" panose="020B0604020202020204" pitchFamily="34" charset="0"/>
+              <a:buChar char="•"/>
+            </a:pPr>
+            <a:r>
+              <a:rPr lang="en-US" sz="1600" dirty="0">
+                <a:solidFill>
+                  <a:srgbClr val="273540"/>
+                </a:solidFill>
+                <a:latin typeface="Lato Extended"/>
+              </a:rPr>
+              <a:t>Decrease the maximum </a:t>
+            </a:r>
+            <a:r>
+              <a:rPr lang="en-US" sz="1600" dirty="0" err="1">
+                <a:solidFill>
+                  <a:srgbClr val="273540"/>
+                </a:solidFill>
+                <a:latin typeface="Lato Extended"/>
+              </a:rPr>
+              <a:t>n_proc</a:t>
+            </a:r>
+            <a:r>
+              <a:rPr lang="en-US" sz="1600" dirty="0">
+                <a:solidFill>
+                  <a:srgbClr val="273540"/>
+                </a:solidFill>
+                <a:latin typeface="Lato Extended"/>
+              </a:rPr>
+              <a:t> in test 2</a:t>
+            </a:r>
+            <a:endParaRPr lang="en-US" sz="1600" b="0" i="0" dirty="0">
+              <a:solidFill>
+                <a:srgbClr val="273540"/>
+              </a:solidFill>
+              <a:effectLst/>
+              <a:latin typeface="Lato Extended"/>
+            </a:endParaRPr>
+          </a:p>
+          <a:p>
+            <a:pPr marL="285750" indent="-285750" algn="l">
+              <a:spcBef>
+                <a:spcPts val="600"/>
+              </a:spcBef>
+              <a:spcAft>
+                <a:spcPts val="600"/>
+              </a:spcAft>
+              <a:buFont typeface="Arial" panose="020B0604020202020204" pitchFamily="34" charset="0"/>
+              <a:buChar char="•"/>
+            </a:pPr>
+            <a:r>
+              <a:rPr lang="en-US" sz="1600" dirty="0">
+                <a:solidFill>
+                  <a:srgbClr val="273540"/>
+                </a:solidFill>
+                <a:latin typeface="Lato Extended"/>
+              </a:rPr>
+              <a:t>Edit </a:t>
+            </a:r>
+            <a:r>
+              <a:rPr lang="en-US" sz="1600" dirty="0" err="1">
+                <a:solidFill>
+                  <a:srgbClr val="273540"/>
+                </a:solidFill>
+                <a:latin typeface="Lato Extended"/>
+              </a:rPr>
+              <a:t>Makefile</a:t>
+            </a:r>
+            <a:r>
+              <a:rPr lang="en-US" sz="1600" dirty="0">
+                <a:solidFill>
+                  <a:srgbClr val="273540"/>
+                </a:solidFill>
+                <a:latin typeface="Lato Extended"/>
+              </a:rPr>
+              <a:t> to relate </a:t>
+            </a:r>
+            <a:r>
+              <a:rPr lang="en-US" sz="1600" dirty="0" err="1">
+                <a:solidFill>
+                  <a:srgbClr val="273540"/>
+                </a:solidFill>
+                <a:latin typeface="Lato Extended"/>
+              </a:rPr>
+              <a:t>compute.c</a:t>
+            </a:r>
+            <a:r>
+              <a:rPr lang="en-US" sz="1600" dirty="0">
+                <a:solidFill>
+                  <a:srgbClr val="273540"/>
+                </a:solidFill>
+                <a:latin typeface="Lato Extended"/>
+              </a:rPr>
+              <a:t> to the experiments and add them as user programs</a:t>
+            </a:r>
+            <a:endParaRPr lang="en-US" sz="1600" b="0" i="0" dirty="0">
+              <a:solidFill>
+                <a:srgbClr val="273540"/>
+              </a:solidFill>
+              <a:effectLst/>
+              <a:latin typeface="Lato Extended"/>
+            </a:endParaRPr>
+          </a:p>
+          <a:p>
+            <a:pPr marL="285750" indent="-285750" algn="l">
+              <a:spcBef>
+                <a:spcPts val="600"/>
+              </a:spcBef>
+              <a:spcAft>
+                <a:spcPts val="600"/>
+              </a:spcAft>
+              <a:buFont typeface="Arial" panose="020B0604020202020204" pitchFamily="34" charset="0"/>
+              <a:buChar char="•"/>
+            </a:pPr>
+            <a:r>
+              <a:rPr lang="en-US" sz="1600" dirty="0">
+                <a:solidFill>
+                  <a:srgbClr val="273540"/>
+                </a:solidFill>
+                <a:latin typeface="Lato Extended"/>
+              </a:rPr>
+              <a:t>Edit syntax and includes</a:t>
+            </a:r>
+            <a:endParaRPr lang="en-US" sz="1600" b="0" i="0" dirty="0">
+              <a:solidFill>
+                <a:srgbClr val="273540"/>
+              </a:solidFill>
+              <a:effectLst/>
+              <a:latin typeface="Lato Extended"/>
+            </a:endParaRPr>
+          </a:p>
+        </p:txBody>
+      </p:sp>
+      <p:pic>
+        <p:nvPicPr>
+          <p:cNvPr id="12" name="Picture 11">
+            <a:extLst>
+              <a:ext uri="{FF2B5EF4-FFF2-40B4-BE49-F238E27FC236}">
+                <a16:creationId xmlns:a16="http://schemas.microsoft.com/office/drawing/2014/main" id="{4FE7791B-3657-19F7-FEED-5E904C2E88AC}"/>
+              </a:ext>
+            </a:extLst>
+          </p:cNvPr>
+          <p:cNvPicPr>
+            <a:picLocks noChangeAspect="1"/>
+          </p:cNvPicPr>
+          <p:nvPr/>
+        </p:nvPicPr>
+        <p:blipFill>
+          <a:blip r:embed="rId3"/>
+          <a:stretch>
+            <a:fillRect/>
+          </a:stretch>
+        </p:blipFill>
+        <p:spPr>
+          <a:xfrm>
+            <a:off x="4351560" y="4237720"/>
+            <a:ext cx="4572003" cy="825713"/>
+          </a:xfrm>
+          <a:prstGeom prst="rect">
+            <a:avLst/>
+          </a:prstGeom>
+        </p:spPr>
+      </p:pic>
+      <p:pic>
+        <p:nvPicPr>
+          <p:cNvPr id="14" name="Picture 13">
+            <a:extLst>
+              <a:ext uri="{FF2B5EF4-FFF2-40B4-BE49-F238E27FC236}">
+                <a16:creationId xmlns:a16="http://schemas.microsoft.com/office/drawing/2014/main" id="{36F03698-B1F6-7837-8C77-4400625F9809}"/>
+              </a:ext>
+            </a:extLst>
+          </p:cNvPr>
+          <p:cNvPicPr>
+            <a:picLocks noChangeAspect="1"/>
+          </p:cNvPicPr>
+          <p:nvPr/>
+        </p:nvPicPr>
+        <p:blipFill>
+          <a:blip r:embed="rId4"/>
+          <a:stretch>
+            <a:fillRect/>
+          </a:stretch>
+        </p:blipFill>
+        <p:spPr>
+          <a:xfrm>
+            <a:off x="6413047" y="878484"/>
+            <a:ext cx="2196778" cy="3158891"/>
+          </a:xfrm>
+          <a:prstGeom prst="rect">
+            <a:avLst/>
+          </a:prstGeom>
+        </p:spPr>
+      </p:pic>
+    </p:spTree>
+    <p:extLst>
+      <p:ext uri="{BB962C8B-B14F-4D97-AF65-F5344CB8AC3E}">
+        <p14:creationId xmlns:p14="http://schemas.microsoft.com/office/powerpoint/2010/main" val="866917930"/>
+      </p:ext>
+    </p:extLst>
+  </p:cSld>
+  <p:clrMapOvr>
+    <a:masterClrMapping/>
+  </p:clrMapOvr>
+</p:sld>
+</file>
+
+<file path=ppt/slides/slide21.xml><?xml version="1.0" encoding="utf-8"?>
+<p:sld xmlns:a="http://schemas.openxmlformats.org/drawingml/2006/main" xmlns:r="http://schemas.openxmlformats.org/officeDocument/2006/relationships" xmlns:p="http://schemas.openxmlformats.org/presentationml/2006/main">
+  <p:cSld>
+    <p:spTree>
+      <p:nvGrpSpPr>
+        <p:cNvPr id="1" name="">
+          <a:extLst>
+            <a:ext uri="{FF2B5EF4-FFF2-40B4-BE49-F238E27FC236}">
+              <a16:creationId xmlns:a16="http://schemas.microsoft.com/office/drawing/2014/main" id="{6EDD6215-7117-4681-7FA1-A0A3073C65C7}"/>
+            </a:ext>
+          </a:extLst>
+        </p:cNvPr>
+        <p:cNvGrpSpPr/>
+        <p:nvPr/>
+      </p:nvGrpSpPr>
+      <p:grpSpPr>
+        <a:xfrm>
+          <a:off x="0" y="0"/>
+          <a:ext cx="0" cy="0"/>
+          <a:chOff x="0" y="0"/>
+          <a:chExt cx="0" cy="0"/>
+        </a:xfrm>
+      </p:grpSpPr>
+      <p:sp>
+        <p:nvSpPr>
+          <p:cNvPr id="2" name="Shape 0">
+            <a:extLst>
+              <a:ext uri="{FF2B5EF4-FFF2-40B4-BE49-F238E27FC236}">
+                <a16:creationId xmlns:a16="http://schemas.microsoft.com/office/drawing/2014/main" id="{2745900D-4131-DBC1-F28C-0FA36D3F9F07}"/>
+              </a:ext>
+            </a:extLst>
+          </p:cNvPr>
+          <p:cNvSpPr/>
+          <p:nvPr/>
+        </p:nvSpPr>
+        <p:spPr>
+          <a:xfrm>
+            <a:off x="0" y="0"/>
+            <a:ext cx="9144000" cy="777240"/>
+          </a:xfrm>
+          <a:prstGeom prst="rect">
+            <a:avLst/>
+          </a:prstGeom>
+          <a:solidFill>
+            <a:srgbClr val="00A896"/>
+          </a:solidFill>
+          <a:ln w="12700">
+            <a:solidFill>
+              <a:srgbClr val="00A896"/>
+            </a:solidFill>
+            <a:prstDash val="solid"/>
+          </a:ln>
+        </p:spPr>
+        <p:txBody>
+          <a:bodyPr/>
+          <a:lstStyle/>
+          <a:p>
+            <a:endParaRPr lang="en-US"/>
+          </a:p>
+        </p:txBody>
+      </p:sp>
+      <p:sp>
+        <p:nvSpPr>
+          <p:cNvPr id="3" name="Text 1">
+            <a:extLst>
+              <a:ext uri="{FF2B5EF4-FFF2-40B4-BE49-F238E27FC236}">
+                <a16:creationId xmlns:a16="http://schemas.microsoft.com/office/drawing/2014/main" id="{C1ED3ADA-2BE6-B6DB-8ABD-DE6D87B3DDAC}"/>
+              </a:ext>
+            </a:extLst>
+          </p:cNvPr>
+          <p:cNvSpPr/>
+          <p:nvPr/>
+        </p:nvSpPr>
+        <p:spPr>
+          <a:xfrm>
+            <a:off x="365760" y="0"/>
+            <a:ext cx="8412480" cy="777240"/>
+          </a:xfrm>
+          <a:prstGeom prst="rect">
+            <a:avLst/>
+          </a:prstGeom>
+          <a:noFill/>
+          <a:ln/>
+        </p:spPr>
+        <p:txBody>
+          <a:bodyPr wrap="square" lIns="0" tIns="0" rIns="0" bIns="0" rtlCol="0" anchor="ctr"/>
+          <a:lstStyle/>
+          <a:p>
+            <a:r>
+              <a:rPr lang="en-US" sz="2400" b="1" dirty="0">
+                <a:solidFill>
+                  <a:srgbClr val="FFFFFF"/>
+                </a:solidFill>
+                <a:latin typeface="Calibri" pitchFamily="34" charset="0"/>
+                <a:ea typeface="Calibri" pitchFamily="34" charset="-122"/>
+                <a:cs typeface="Calibri" pitchFamily="34" charset="-120"/>
+              </a:rPr>
+              <a:t>Results and Answers (Test 2)</a:t>
+            </a:r>
+            <a:endParaRPr lang="en-US" sz="2400" dirty="0"/>
+          </a:p>
+        </p:txBody>
+      </p:sp>
+      <p:sp>
+        <p:nvSpPr>
+          <p:cNvPr id="4" name="Shape 0">
+            <a:extLst>
+              <a:ext uri="{FF2B5EF4-FFF2-40B4-BE49-F238E27FC236}">
+                <a16:creationId xmlns:a16="http://schemas.microsoft.com/office/drawing/2014/main" id="{3C05ADBA-83B5-8F4E-3FBF-A51BA4FBF985}"/>
+              </a:ext>
+            </a:extLst>
+          </p:cNvPr>
+          <p:cNvSpPr/>
+          <p:nvPr/>
+        </p:nvSpPr>
+        <p:spPr>
+          <a:xfrm>
+            <a:off x="0" y="0"/>
+            <a:ext cx="9144000" cy="777240"/>
+          </a:xfrm>
+          <a:prstGeom prst="rect">
+            <a:avLst/>
+          </a:prstGeom>
+          <a:solidFill>
+            <a:srgbClr val="00A896"/>
+          </a:solidFill>
+          <a:ln w="12700">
+            <a:solidFill>
+              <a:srgbClr val="00A896"/>
+            </a:solidFill>
+            <a:prstDash val="solid"/>
+          </a:ln>
+        </p:spPr>
+        <p:txBody>
+          <a:bodyPr/>
+          <a:lstStyle/>
+          <a:p>
+            <a:endParaRPr lang="en-US" dirty="0"/>
+          </a:p>
+        </p:txBody>
+      </p:sp>
+      <p:sp>
+        <p:nvSpPr>
+          <p:cNvPr id="5" name="Text 1">
+            <a:extLst>
+              <a:ext uri="{FF2B5EF4-FFF2-40B4-BE49-F238E27FC236}">
+                <a16:creationId xmlns:a16="http://schemas.microsoft.com/office/drawing/2014/main" id="{C4AD9290-8A82-FB0B-7BC0-DE8201596B56}"/>
+              </a:ext>
+            </a:extLst>
+          </p:cNvPr>
+          <p:cNvSpPr/>
+          <p:nvPr/>
+        </p:nvSpPr>
+        <p:spPr>
+          <a:xfrm>
+            <a:off x="365760" y="0"/>
+            <a:ext cx="8412480" cy="777240"/>
+          </a:xfrm>
+          <a:prstGeom prst="rect">
+            <a:avLst/>
+          </a:prstGeom>
+          <a:noFill/>
+          <a:ln/>
+        </p:spPr>
+        <p:txBody>
+          <a:bodyPr wrap="square" lIns="0" tIns="0" rIns="0" bIns="0" rtlCol="0" anchor="ctr"/>
+          <a:lstStyle/>
+          <a:p>
+            <a:pPr marL="0" indent="0">
+              <a:buNone/>
+            </a:pPr>
+            <a:r>
+              <a:rPr lang="en-US" sz="2400" b="1" dirty="0">
+                <a:solidFill>
+                  <a:srgbClr val="FFFFFF"/>
+                </a:solidFill>
+                <a:latin typeface="Calibri" pitchFamily="34" charset="0"/>
+                <a:ea typeface="Calibri" pitchFamily="34" charset="-122"/>
+                <a:cs typeface="Calibri" pitchFamily="34" charset="-120"/>
+              </a:rPr>
+              <a:t>Results in xv6</a:t>
+            </a:r>
+            <a:endParaRPr lang="en-US" sz="2400" dirty="0"/>
+          </a:p>
+        </p:txBody>
+      </p:sp>
+      <p:sp>
+        <p:nvSpPr>
+          <p:cNvPr id="7" name="TextBox 6">
+            <a:extLst>
+              <a:ext uri="{FF2B5EF4-FFF2-40B4-BE49-F238E27FC236}">
+                <a16:creationId xmlns:a16="http://schemas.microsoft.com/office/drawing/2014/main" id="{F0BAA149-C053-20A1-EC54-F76782F3A1DB}"/>
+              </a:ext>
+            </a:extLst>
+          </p:cNvPr>
+          <p:cNvSpPr txBox="1"/>
+          <p:nvPr/>
+        </p:nvSpPr>
+        <p:spPr>
+          <a:xfrm>
+            <a:off x="178690" y="1160360"/>
+            <a:ext cx="6287424" cy="1038746"/>
+          </a:xfrm>
+          <a:prstGeom prst="rect">
+            <a:avLst/>
+          </a:prstGeom>
+          <a:noFill/>
+        </p:spPr>
+        <p:txBody>
+          <a:bodyPr wrap="square">
+            <a:spAutoFit/>
+          </a:bodyPr>
+          <a:lstStyle/>
+          <a:p>
+            <a:pPr algn="l">
+              <a:spcBef>
+                <a:spcPts val="900"/>
+              </a:spcBef>
+              <a:spcAft>
+                <a:spcPts val="900"/>
+              </a:spcAft>
+              <a:buNone/>
+            </a:pPr>
+            <a:r>
+              <a:rPr lang="en-US" dirty="0">
+                <a:solidFill>
+                  <a:srgbClr val="273540"/>
+                </a:solidFill>
+                <a:latin typeface="Lato Extended"/>
+              </a:rPr>
+              <a:t>When we try to run any of the 2 tests, we get this error:</a:t>
+            </a:r>
+            <a:endParaRPr lang="en-US" i="0" dirty="0">
+              <a:solidFill>
+                <a:srgbClr val="273540"/>
+              </a:solidFill>
+              <a:effectLst/>
+              <a:latin typeface="Lato Extended"/>
+            </a:endParaRPr>
+          </a:p>
+          <a:p>
+            <a:pPr>
+              <a:buNone/>
+            </a:pPr>
+            <a:br>
+              <a:rPr lang="en-US" dirty="0"/>
+            </a:br>
+            <a:endParaRPr lang="en-US" dirty="0"/>
+          </a:p>
+        </p:txBody>
+      </p:sp>
+      <p:pic>
+        <p:nvPicPr>
+          <p:cNvPr id="10" name="Picture 9">
+            <a:extLst>
+              <a:ext uri="{FF2B5EF4-FFF2-40B4-BE49-F238E27FC236}">
+                <a16:creationId xmlns:a16="http://schemas.microsoft.com/office/drawing/2014/main" id="{81291CFE-0A6A-F29E-E156-EB8E49F14E78}"/>
+              </a:ext>
+            </a:extLst>
+          </p:cNvPr>
+          <p:cNvPicPr>
+            <a:picLocks noChangeAspect="1"/>
+          </p:cNvPicPr>
+          <p:nvPr/>
+        </p:nvPicPr>
+        <p:blipFill>
+          <a:blip r:embed="rId3"/>
+          <a:srcRect t="5498"/>
+          <a:stretch>
+            <a:fillRect/>
+          </a:stretch>
+        </p:blipFill>
+        <p:spPr>
+          <a:xfrm>
+            <a:off x="365760" y="1800224"/>
+            <a:ext cx="6164035" cy="648635"/>
+          </a:xfrm>
+          <a:prstGeom prst="rect">
+            <a:avLst/>
+          </a:prstGeom>
+        </p:spPr>
+      </p:pic>
+      <p:sp>
+        <p:nvSpPr>
+          <p:cNvPr id="11" name="TextBox 10">
+            <a:extLst>
+              <a:ext uri="{FF2B5EF4-FFF2-40B4-BE49-F238E27FC236}">
+                <a16:creationId xmlns:a16="http://schemas.microsoft.com/office/drawing/2014/main" id="{10FB067A-FA80-DFEB-D832-269846E98F78}"/>
+              </a:ext>
+            </a:extLst>
+          </p:cNvPr>
+          <p:cNvSpPr txBox="1"/>
+          <p:nvPr/>
+        </p:nvSpPr>
+        <p:spPr>
+          <a:xfrm>
+            <a:off x="178690" y="2777796"/>
+            <a:ext cx="5891934" cy="1200329"/>
+          </a:xfrm>
+          <a:prstGeom prst="rect">
+            <a:avLst/>
+          </a:prstGeom>
+          <a:noFill/>
+        </p:spPr>
+        <p:txBody>
+          <a:bodyPr wrap="none" rtlCol="0">
+            <a:spAutoFit/>
+          </a:bodyPr>
+          <a:lstStyle/>
+          <a:p>
+            <a:r>
+              <a:rPr lang="en-US" b="1" dirty="0"/>
+              <a:t>Why </a:t>
+            </a:r>
+            <a:r>
+              <a:rPr lang="en-US" dirty="0"/>
+              <a:t>does this happen?</a:t>
+            </a:r>
+          </a:p>
+          <a:p>
+            <a:r>
+              <a:rPr lang="en-US" b="1" dirty="0"/>
+              <a:t>Answer:</a:t>
+            </a:r>
+            <a:r>
+              <a:rPr lang="en-US" dirty="0"/>
+              <a:t> This is because xv6 has a limited disk spaces for files</a:t>
+            </a:r>
+          </a:p>
+          <a:p>
+            <a:r>
+              <a:rPr lang="en-US" dirty="0"/>
+              <a:t>This size is so small, so it’s impossible to save N</a:t>
+            </a:r>
+          </a:p>
+          <a:p>
+            <a:r>
+              <a:rPr lang="en-US" dirty="0"/>
+              <a:t> numbers in the file where N is from 20k to 2M</a:t>
+            </a:r>
+          </a:p>
+        </p:txBody>
+      </p:sp>
+      <p:pic>
+        <p:nvPicPr>
+          <p:cNvPr id="13" name="Picture 12">
+            <a:extLst>
+              <a:ext uri="{FF2B5EF4-FFF2-40B4-BE49-F238E27FC236}">
+                <a16:creationId xmlns:a16="http://schemas.microsoft.com/office/drawing/2014/main" id="{6FDA3EEB-7718-0497-4A0D-E12394F0F5DA}"/>
+              </a:ext>
+            </a:extLst>
+          </p:cNvPr>
+          <p:cNvPicPr>
+            <a:picLocks noChangeAspect="1"/>
+          </p:cNvPicPr>
+          <p:nvPr/>
+        </p:nvPicPr>
+        <p:blipFill>
+          <a:blip r:embed="rId4"/>
+          <a:srcRect t="10148" b="17798"/>
+          <a:stretch>
+            <a:fillRect/>
+          </a:stretch>
+        </p:blipFill>
+        <p:spPr>
+          <a:xfrm>
+            <a:off x="5004583" y="3424127"/>
+            <a:ext cx="4025070" cy="246503"/>
+          </a:xfrm>
+          <a:prstGeom prst="rect">
+            <a:avLst/>
+          </a:prstGeom>
+        </p:spPr>
+      </p:pic>
+    </p:spTree>
+    <p:extLst>
+      <p:ext uri="{BB962C8B-B14F-4D97-AF65-F5344CB8AC3E}">
+        <p14:creationId xmlns:p14="http://schemas.microsoft.com/office/powerpoint/2010/main" val="2102122499"/>
+      </p:ext>
+    </p:extLst>
+  </p:cSld>
+  <p:clrMapOvr>
+    <a:masterClrMapping/>
+  </p:clrMapOvr>
+</p:sld>
+</file>
+
+<file path=ppt/slides/slide22.xml><?xml version="1.0" encoding="utf-8"?>
+<p:sld xmlns:a="http://schemas.openxmlformats.org/drawingml/2006/main" xmlns:r="http://schemas.openxmlformats.org/officeDocument/2006/relationships" xmlns:p="http://schemas.openxmlformats.org/presentationml/2006/main">
+  <p:cSld>
+    <p:spTree>
+      <p:nvGrpSpPr>
+        <p:cNvPr id="1" name="">
+          <a:extLst>
+            <a:ext uri="{FF2B5EF4-FFF2-40B4-BE49-F238E27FC236}">
+              <a16:creationId xmlns:a16="http://schemas.microsoft.com/office/drawing/2014/main" id="{8D8939B9-E05D-855F-3B2B-FA61D6B6707E}"/>
+            </a:ext>
+          </a:extLst>
+        </p:cNvPr>
+        <p:cNvGrpSpPr/>
+        <p:nvPr/>
+      </p:nvGrpSpPr>
+      <p:grpSpPr>
+        <a:xfrm>
+          <a:off x="0" y="0"/>
+          <a:ext cx="0" cy="0"/>
+          <a:chOff x="0" y="0"/>
+          <a:chExt cx="0" cy="0"/>
+        </a:xfrm>
+      </p:grpSpPr>
+      <p:sp>
+        <p:nvSpPr>
+          <p:cNvPr id="2" name="Shape 0">
+            <a:extLst>
+              <a:ext uri="{FF2B5EF4-FFF2-40B4-BE49-F238E27FC236}">
+                <a16:creationId xmlns:a16="http://schemas.microsoft.com/office/drawing/2014/main" id="{71A4CE4F-53DD-D3B3-D52F-24ED3CB25D14}"/>
+              </a:ext>
+            </a:extLst>
+          </p:cNvPr>
+          <p:cNvSpPr/>
+          <p:nvPr/>
+        </p:nvSpPr>
+        <p:spPr>
+          <a:xfrm>
+            <a:off x="0" y="0"/>
+            <a:ext cx="9144000" cy="777240"/>
+          </a:xfrm>
+          <a:prstGeom prst="rect">
+            <a:avLst/>
+          </a:prstGeom>
+          <a:solidFill>
+            <a:srgbClr val="00A896"/>
+          </a:solidFill>
+          <a:ln w="12700">
+            <a:solidFill>
+              <a:srgbClr val="00A896"/>
+            </a:solidFill>
+            <a:prstDash val="solid"/>
+          </a:ln>
+        </p:spPr>
+        <p:txBody>
+          <a:bodyPr/>
+          <a:lstStyle/>
+          <a:p>
+            <a:endParaRPr lang="en-US"/>
+          </a:p>
+        </p:txBody>
+      </p:sp>
+      <p:sp>
+        <p:nvSpPr>
+          <p:cNvPr id="3" name="Text 1">
+            <a:extLst>
+              <a:ext uri="{FF2B5EF4-FFF2-40B4-BE49-F238E27FC236}">
+                <a16:creationId xmlns:a16="http://schemas.microsoft.com/office/drawing/2014/main" id="{6AFCDC73-BA18-28E4-A1B3-88F50408237B}"/>
+              </a:ext>
+            </a:extLst>
+          </p:cNvPr>
+          <p:cNvSpPr/>
+          <p:nvPr/>
+        </p:nvSpPr>
+        <p:spPr>
+          <a:xfrm>
+            <a:off x="365760" y="0"/>
+            <a:ext cx="8412480" cy="777240"/>
+          </a:xfrm>
+          <a:prstGeom prst="rect">
+            <a:avLst/>
+          </a:prstGeom>
+          <a:noFill/>
+          <a:ln/>
+        </p:spPr>
+        <p:txBody>
+          <a:bodyPr wrap="square" lIns="0" tIns="0" rIns="0" bIns="0" rtlCol="0" anchor="ctr"/>
+          <a:lstStyle/>
+          <a:p>
+            <a:r>
+              <a:rPr lang="en-US" sz="2400" b="1" dirty="0">
+                <a:solidFill>
+                  <a:srgbClr val="FFFFFF"/>
+                </a:solidFill>
+                <a:latin typeface="Calibri" pitchFamily="34" charset="0"/>
+                <a:ea typeface="Calibri" pitchFamily="34" charset="-122"/>
+                <a:cs typeface="Calibri" pitchFamily="34" charset="-120"/>
+              </a:rPr>
+              <a:t>Results and Answers (Test 2)</a:t>
+            </a:r>
+            <a:endParaRPr lang="en-US" sz="2400" dirty="0"/>
+          </a:p>
+        </p:txBody>
+      </p:sp>
+      <p:sp>
+        <p:nvSpPr>
+          <p:cNvPr id="4" name="Shape 0">
+            <a:extLst>
+              <a:ext uri="{FF2B5EF4-FFF2-40B4-BE49-F238E27FC236}">
+                <a16:creationId xmlns:a16="http://schemas.microsoft.com/office/drawing/2014/main" id="{BF92E93B-859C-727E-ADA4-9582FF066C5E}"/>
+              </a:ext>
+            </a:extLst>
+          </p:cNvPr>
+          <p:cNvSpPr/>
+          <p:nvPr/>
+        </p:nvSpPr>
+        <p:spPr>
+          <a:xfrm>
+            <a:off x="0" y="0"/>
+            <a:ext cx="9144000" cy="777240"/>
+          </a:xfrm>
+          <a:prstGeom prst="rect">
+            <a:avLst/>
+          </a:prstGeom>
+          <a:solidFill>
+            <a:srgbClr val="00A896"/>
+          </a:solidFill>
+          <a:ln w="12700">
+            <a:solidFill>
+              <a:srgbClr val="00A896"/>
+            </a:solidFill>
+            <a:prstDash val="solid"/>
+          </a:ln>
+        </p:spPr>
+        <p:txBody>
+          <a:bodyPr/>
+          <a:lstStyle/>
+          <a:p>
+            <a:endParaRPr lang="en-US" dirty="0"/>
+          </a:p>
+        </p:txBody>
+      </p:sp>
+      <p:sp>
+        <p:nvSpPr>
+          <p:cNvPr id="5" name="Text 1">
+            <a:extLst>
+              <a:ext uri="{FF2B5EF4-FFF2-40B4-BE49-F238E27FC236}">
+                <a16:creationId xmlns:a16="http://schemas.microsoft.com/office/drawing/2014/main" id="{DEC7EF1D-6ABF-6C2C-561D-B509B3E4B013}"/>
+              </a:ext>
+            </a:extLst>
+          </p:cNvPr>
+          <p:cNvSpPr/>
+          <p:nvPr/>
+        </p:nvSpPr>
+        <p:spPr>
+          <a:xfrm>
+            <a:off x="365760" y="0"/>
+            <a:ext cx="8412480" cy="777240"/>
+          </a:xfrm>
+          <a:prstGeom prst="rect">
+            <a:avLst/>
+          </a:prstGeom>
+          <a:noFill/>
+          <a:ln/>
+        </p:spPr>
+        <p:txBody>
+          <a:bodyPr wrap="square" lIns="0" tIns="0" rIns="0" bIns="0" rtlCol="0" anchor="ctr"/>
+          <a:lstStyle/>
+          <a:p>
+            <a:pPr marL="0" indent="0">
+              <a:buNone/>
+            </a:pPr>
+            <a:r>
+              <a:rPr lang="en-US" sz="2400" b="1" dirty="0">
+                <a:solidFill>
+                  <a:srgbClr val="FFFFFF"/>
+                </a:solidFill>
+                <a:latin typeface="Calibri" pitchFamily="34" charset="0"/>
+                <a:ea typeface="Calibri" pitchFamily="34" charset="-122"/>
+                <a:cs typeface="Calibri" pitchFamily="34" charset="-120"/>
+              </a:rPr>
+              <a:t>Alternative Solution for xv6</a:t>
+            </a:r>
+            <a:endParaRPr lang="en-US" sz="2400" dirty="0"/>
+          </a:p>
+        </p:txBody>
+      </p:sp>
+      <p:sp>
+        <p:nvSpPr>
+          <p:cNvPr id="7" name="TextBox 6">
+            <a:extLst>
+              <a:ext uri="{FF2B5EF4-FFF2-40B4-BE49-F238E27FC236}">
+                <a16:creationId xmlns:a16="http://schemas.microsoft.com/office/drawing/2014/main" id="{276C8A3C-CB46-B8FF-F76B-592277B8E1F7}"/>
+              </a:ext>
+            </a:extLst>
+          </p:cNvPr>
+          <p:cNvSpPr txBox="1"/>
+          <p:nvPr/>
+        </p:nvSpPr>
+        <p:spPr>
+          <a:xfrm>
+            <a:off x="178690" y="1160360"/>
+            <a:ext cx="5409764" cy="2608406"/>
+          </a:xfrm>
+          <a:prstGeom prst="rect">
+            <a:avLst/>
+          </a:prstGeom>
+          <a:noFill/>
+        </p:spPr>
+        <p:txBody>
+          <a:bodyPr wrap="square">
+            <a:spAutoFit/>
+          </a:bodyPr>
+          <a:lstStyle/>
+          <a:p>
+            <a:pPr algn="l">
+              <a:spcBef>
+                <a:spcPts val="900"/>
+              </a:spcBef>
+              <a:spcAft>
+                <a:spcPts val="900"/>
+              </a:spcAft>
+              <a:buNone/>
+            </a:pPr>
+            <a:r>
+              <a:rPr lang="en-US" dirty="0">
+                <a:solidFill>
+                  <a:srgbClr val="273540"/>
+                </a:solidFill>
+                <a:latin typeface="Lato Extended"/>
+              </a:rPr>
+              <a:t>Don’t use xv6’s disk space, use RAM</a:t>
+            </a:r>
+          </a:p>
+          <a:p>
+            <a:pPr marL="285750" indent="-285750" algn="l">
+              <a:spcBef>
+                <a:spcPts val="900"/>
+              </a:spcBef>
+              <a:spcAft>
+                <a:spcPts val="900"/>
+              </a:spcAft>
+              <a:buFont typeface="Wingdings" panose="05000000000000000000" pitchFamily="2" charset="2"/>
+              <a:buChar char="è"/>
+            </a:pPr>
+            <a:r>
+              <a:rPr lang="en-US" dirty="0">
+                <a:solidFill>
+                  <a:srgbClr val="273540"/>
+                </a:solidFill>
+                <a:latin typeface="Lato Extended"/>
+              </a:rPr>
+              <a:t>Don’t use </a:t>
+            </a:r>
+            <a:r>
+              <a:rPr lang="en-US" dirty="0">
+                <a:solidFill>
+                  <a:srgbClr val="00B050"/>
+                </a:solidFill>
+                <a:latin typeface="Lato Extended"/>
+              </a:rPr>
+              <a:t>files</a:t>
+            </a:r>
+            <a:r>
+              <a:rPr lang="en-US" dirty="0">
+                <a:solidFill>
+                  <a:srgbClr val="273540"/>
+                </a:solidFill>
+                <a:latin typeface="Lato Extended"/>
+              </a:rPr>
+              <a:t>, use allocated memory (</a:t>
+            </a:r>
+            <a:r>
+              <a:rPr lang="en-US" dirty="0">
+                <a:solidFill>
+                  <a:srgbClr val="00B050"/>
+                </a:solidFill>
+                <a:latin typeface="Lato Extended"/>
+              </a:rPr>
+              <a:t>arrays</a:t>
+            </a:r>
+            <a:r>
+              <a:rPr lang="en-US" dirty="0">
+                <a:solidFill>
+                  <a:srgbClr val="273540"/>
+                </a:solidFill>
+                <a:latin typeface="Lato Extended"/>
+              </a:rPr>
+              <a:t>)</a:t>
+            </a:r>
+          </a:p>
+          <a:p>
+            <a:pPr algn="l">
+              <a:spcBef>
+                <a:spcPts val="900"/>
+              </a:spcBef>
+              <a:spcAft>
+                <a:spcPts val="900"/>
+              </a:spcAft>
+            </a:pPr>
+            <a:r>
+              <a:rPr lang="en-US" i="0" dirty="0">
+                <a:solidFill>
+                  <a:srgbClr val="273540"/>
+                </a:solidFill>
+                <a:effectLst/>
+                <a:latin typeface="Lato Extended"/>
+              </a:rPr>
+              <a:t>This would require sequential and parallel compute functions to operate on arrays and not files and for the tests to generate these arrays</a:t>
+            </a:r>
+          </a:p>
+          <a:p>
+            <a:pPr>
+              <a:buNone/>
+            </a:pPr>
+            <a:br>
+              <a:rPr lang="en-US" dirty="0"/>
+            </a:br>
+            <a:endParaRPr lang="en-US" dirty="0"/>
+          </a:p>
+        </p:txBody>
+      </p:sp>
+      <p:pic>
+        <p:nvPicPr>
+          <p:cNvPr id="8" name="Picture 7">
+            <a:extLst>
+              <a:ext uri="{FF2B5EF4-FFF2-40B4-BE49-F238E27FC236}">
+                <a16:creationId xmlns:a16="http://schemas.microsoft.com/office/drawing/2014/main" id="{FED161AD-B595-5530-B67B-4F218E864144}"/>
+              </a:ext>
+            </a:extLst>
+          </p:cNvPr>
+          <p:cNvPicPr>
+            <a:picLocks noChangeAspect="1"/>
+          </p:cNvPicPr>
+          <p:nvPr/>
+        </p:nvPicPr>
+        <p:blipFill>
+          <a:blip r:embed="rId3"/>
+          <a:stretch>
+            <a:fillRect/>
+          </a:stretch>
+        </p:blipFill>
+        <p:spPr>
+          <a:xfrm>
+            <a:off x="5588454" y="1269305"/>
+            <a:ext cx="3304415" cy="1749396"/>
+          </a:xfrm>
+          <a:prstGeom prst="rect">
+            <a:avLst/>
+          </a:prstGeom>
+        </p:spPr>
+      </p:pic>
+      <p:pic>
+        <p:nvPicPr>
+          <p:cNvPr id="12" name="Picture 11">
+            <a:extLst>
+              <a:ext uri="{FF2B5EF4-FFF2-40B4-BE49-F238E27FC236}">
+                <a16:creationId xmlns:a16="http://schemas.microsoft.com/office/drawing/2014/main" id="{020AB05A-93D1-F045-9841-908F771CAABD}"/>
+              </a:ext>
+            </a:extLst>
+          </p:cNvPr>
+          <p:cNvPicPr>
+            <a:picLocks noChangeAspect="1"/>
+          </p:cNvPicPr>
+          <p:nvPr/>
+        </p:nvPicPr>
+        <p:blipFill>
+          <a:blip r:embed="rId4"/>
+          <a:stretch>
+            <a:fillRect/>
+          </a:stretch>
+        </p:blipFill>
+        <p:spPr>
+          <a:xfrm>
+            <a:off x="6221187" y="3510767"/>
+            <a:ext cx="2305981" cy="836985"/>
+          </a:xfrm>
+          <a:prstGeom prst="rect">
+            <a:avLst/>
+          </a:prstGeom>
+        </p:spPr>
+      </p:pic>
+    </p:spTree>
+    <p:extLst>
+      <p:ext uri="{BB962C8B-B14F-4D97-AF65-F5344CB8AC3E}">
+        <p14:creationId xmlns:p14="http://schemas.microsoft.com/office/powerpoint/2010/main" val="1858722819"/>
+      </p:ext>
+    </p:extLst>
+  </p:cSld>
+  <p:clrMapOvr>
+    <a:masterClrMapping/>
+  </p:clrMapOvr>
+</p:sld>
+</file>
+
+<file path=ppt/slides/slide23.xml><?xml version="1.0" encoding="utf-8"?>
+<p:sld xmlns:a="http://schemas.openxmlformats.org/drawingml/2006/main" xmlns:r="http://schemas.openxmlformats.org/officeDocument/2006/relationships" xmlns:p="http://schemas.openxmlformats.org/presentationml/2006/main">
+  <p:cSld>
+    <p:bg>
+      <p:bgPr>
+        <a:solidFill>
+          <a:srgbClr val="0F1923"/>
+        </a:solidFill>
+        <a:effectLst/>
+      </p:bgPr>
+    </p:bg>
+    <p:spTree>
+      <p:nvGrpSpPr>
+        <p:cNvPr id="1" name="">
+          <a:extLst>
+            <a:ext uri="{FF2B5EF4-FFF2-40B4-BE49-F238E27FC236}">
+              <a16:creationId xmlns:a16="http://schemas.microsoft.com/office/drawing/2014/main" id="{56B5E801-8FC1-B9B0-4BFD-703B4B0BAD9D}"/>
+            </a:ext>
+          </a:extLst>
+        </p:cNvPr>
+        <p:cNvGrpSpPr/>
+        <p:nvPr/>
+      </p:nvGrpSpPr>
+      <p:grpSpPr>
+        <a:xfrm>
+          <a:off x="0" y="0"/>
+          <a:ext cx="0" cy="0"/>
+          <a:chOff x="0" y="0"/>
+          <a:chExt cx="0" cy="0"/>
+        </a:xfrm>
+      </p:grpSpPr>
+      <p:sp>
+        <p:nvSpPr>
+          <p:cNvPr id="2" name="Shape 0">
+            <a:extLst>
+              <a:ext uri="{FF2B5EF4-FFF2-40B4-BE49-F238E27FC236}">
+                <a16:creationId xmlns:a16="http://schemas.microsoft.com/office/drawing/2014/main" id="{10103D2B-2620-6CF7-5D47-413B0E41B312}"/>
+              </a:ext>
+            </a:extLst>
+          </p:cNvPr>
+          <p:cNvSpPr/>
+          <p:nvPr/>
+        </p:nvSpPr>
+        <p:spPr>
+          <a:xfrm>
+            <a:off x="0" y="2163536"/>
+            <a:ext cx="9144000" cy="777240"/>
+          </a:xfrm>
+          <a:prstGeom prst="rect">
+            <a:avLst/>
+          </a:prstGeom>
+          <a:solidFill>
+            <a:srgbClr val="00A896"/>
+          </a:solidFill>
+          <a:ln w="12700">
+            <a:solidFill>
+              <a:srgbClr val="00A896"/>
+            </a:solidFill>
+            <a:prstDash val="solid"/>
+          </a:ln>
+        </p:spPr>
+        <p:txBody>
+          <a:bodyPr/>
+          <a:lstStyle/>
+          <a:p>
+            <a:pPr marL="0" marR="0" lvl="0" indent="0" algn="l" defTabSz="914400" rtl="0" eaLnBrk="1" fontAlgn="auto" latinLnBrk="0" hangingPunct="1">
+              <a:lnSpc>
+                <a:spcPct val="100000"/>
+              </a:lnSpc>
+              <a:spcBef>
+                <a:spcPts val="0"/>
+              </a:spcBef>
+              <a:spcAft>
+                <a:spcPts val="0"/>
+              </a:spcAft>
+              <a:buClrTx/>
+              <a:buSzTx/>
+              <a:buFontTx/>
+              <a:buNone/>
+              <a:tabLst/>
+              <a:defRPr/>
+            </a:pPr>
+            <a:endParaRPr kumimoji="0" lang="en-US" sz="1800" b="0" i="0" u="none" strike="noStrike" kern="1200" cap="none" spc="0" normalizeH="0" baseline="0" noProof="0">
+              <a:ln>
+                <a:noFill/>
+              </a:ln>
+              <a:solidFill>
+                <a:prstClr val="black"/>
+              </a:solidFill>
+              <a:effectLst/>
+              <a:uLnTx/>
+              <a:uFillTx/>
+              <a:latin typeface="Calibri" panose="020F0502020204030204"/>
+              <a:ea typeface="+mn-ea"/>
+              <a:cs typeface="+mn-cs"/>
+            </a:endParaRPr>
+          </a:p>
+        </p:txBody>
+      </p:sp>
+      <p:sp>
+        <p:nvSpPr>
+          <p:cNvPr id="3" name="Text 1">
+            <a:extLst>
+              <a:ext uri="{FF2B5EF4-FFF2-40B4-BE49-F238E27FC236}">
+                <a16:creationId xmlns:a16="http://schemas.microsoft.com/office/drawing/2014/main" id="{C16A0F1E-24E5-ACDB-A429-10155964A61B}"/>
+              </a:ext>
+            </a:extLst>
+          </p:cNvPr>
+          <p:cNvSpPr/>
+          <p:nvPr/>
+        </p:nvSpPr>
+        <p:spPr>
+          <a:xfrm>
+            <a:off x="316775" y="2197009"/>
+            <a:ext cx="8412480" cy="777240"/>
+          </a:xfrm>
+          <a:prstGeom prst="rect">
+            <a:avLst/>
+          </a:prstGeom>
+          <a:noFill/>
+          <a:ln/>
+        </p:spPr>
+        <p:txBody>
+          <a:bodyPr wrap="square" lIns="0" tIns="0" rIns="0" bIns="0" rtlCol="0" anchor="ctr"/>
+          <a:lstStyle/>
+          <a:p>
+            <a:pPr marL="0" marR="0" lvl="0" indent="0" algn="ctr" defTabSz="914400" rtl="0" eaLnBrk="1" fontAlgn="auto" latinLnBrk="0" hangingPunct="1">
+              <a:lnSpc>
+                <a:spcPct val="100000"/>
+              </a:lnSpc>
+              <a:spcBef>
+                <a:spcPts val="0"/>
+              </a:spcBef>
+              <a:spcAft>
+                <a:spcPts val="0"/>
+              </a:spcAft>
+              <a:buClrTx/>
+              <a:buSzTx/>
+              <a:buFontTx/>
+              <a:buNone/>
+              <a:tabLst/>
+              <a:defRPr/>
+            </a:pPr>
+            <a:r>
+              <a:rPr lang="en-US" sz="2400" b="1" dirty="0">
+                <a:solidFill>
+                  <a:srgbClr val="FFFFFF"/>
+                </a:solidFill>
+                <a:latin typeface="Calibri" pitchFamily="34" charset="0"/>
+                <a:ea typeface="Calibri" pitchFamily="34" charset="-122"/>
+                <a:cs typeface="Calibri" pitchFamily="34" charset="-120"/>
+              </a:rPr>
+              <a:t>THANK YOU</a:t>
+            </a:r>
+            <a:endParaRPr kumimoji="0" lang="en-US" sz="2400" b="0" i="0" u="none" strike="noStrike" kern="1200" cap="none" spc="0" normalizeH="0" baseline="0" noProof="0" dirty="0">
+              <a:ln>
+                <a:noFill/>
+              </a:ln>
+              <a:solidFill>
+                <a:prstClr val="black"/>
+              </a:solidFill>
+              <a:effectLst/>
+              <a:uLnTx/>
+              <a:uFillTx/>
+              <a:latin typeface="Calibri" panose="020F0502020204030204"/>
+              <a:ea typeface="+mn-ea"/>
+              <a:cs typeface="+mn-cs"/>
+            </a:endParaRPr>
+          </a:p>
+        </p:txBody>
+      </p:sp>
+    </p:spTree>
+    <p:extLst>
+      <p:ext uri="{BB962C8B-B14F-4D97-AF65-F5344CB8AC3E}">
+        <p14:creationId xmlns:p14="http://schemas.microsoft.com/office/powerpoint/2010/main" val="660919028"/>
+      </p:ext>
+    </p:extLst>
   </p:cSld>
   <p:clrMapOvr>
     <a:masterClrMapping/>
